--- a/slides.pptx
+++ b/slides.pptx
@@ -3130,8 +3130,8 @@
         </p:nvSpPr>
         <p:spPr>
           <a:xfrm>
-            <a:off x="6410325" y="2302192"/>
-            <a:ext cx="895350" cy="1102042"/>
+            <a:off x="6356032" y="2114550"/>
+            <a:ext cx="1002982" cy="1234440"/>
           </a:xfrm>
           <a:prstGeom prst="roundRect">
             <a:avLst>
@@ -3174,8 +3174,8 @@
         </p:nvSpPr>
         <p:spPr>
           <a:xfrm>
-            <a:off x="6513195" y="2405062"/>
-            <a:ext cx="688658" cy="895350"/>
+            <a:off x="6472238" y="2230755"/>
+            <a:ext cx="771525" cy="1002982"/>
           </a:xfrm>
           <a:prstGeom prst="roundRect">
             <a:avLst>
@@ -3218,8 +3218,8 @@
         </p:nvSpPr>
         <p:spPr>
           <a:xfrm>
-            <a:off x="4530090" y="4959668"/>
-            <a:ext cx="1536382" cy="383858"/>
+            <a:off x="4249102" y="5093018"/>
+            <a:ext cx="1721168" cy="430530"/>
           </a:xfrm>
           <a:prstGeom prst="roundRect">
             <a:avLst>
@@ -3262,8 +3262,8 @@
         </p:nvSpPr>
         <p:spPr>
           <a:xfrm>
-            <a:off x="6162675" y="4959668"/>
-            <a:ext cx="1644015" cy="383858"/>
+            <a:off x="6078855" y="5093018"/>
+            <a:ext cx="1842135" cy="430530"/>
           </a:xfrm>
           <a:prstGeom prst="roundRect">
             <a:avLst>
@@ -3306,8 +3306,8 @@
         </p:nvSpPr>
         <p:spPr>
           <a:xfrm>
-            <a:off x="7902892" y="4959668"/>
-            <a:ext cx="1283018" cy="383858"/>
+            <a:off x="8028622" y="5093018"/>
+            <a:ext cx="1438275" cy="430530"/>
           </a:xfrm>
           <a:prstGeom prst="roundRect">
             <a:avLst>
@@ -3350,8 +3350,8 @@
         </p:nvSpPr>
         <p:spPr>
           <a:xfrm>
-            <a:off x="4530090" y="3555682"/>
-            <a:ext cx="4655820" cy="789622"/>
+            <a:off x="4263390" y="3518535"/>
+            <a:ext cx="5189220" cy="878205"/>
           </a:xfrm>
           <a:prstGeom prst="rect">
             <a:avLst/>
@@ -3366,11 +3366,11 @@
           <a:p>
             <a:pPr algn="ctr">
               <a:lnSpc>
-                <a:spcPts val="5769"/>
+                <a:spcPts val="6463"/>
               </a:lnSpc>
             </a:pPr>
             <a:r>
-              <a:rPr sz="4121" b="1">
+              <a:rPr sz="4617" b="1">
                 <a:solidFill>
                   <a:srgbClr val="3F5266"/>
                 </a:solidFill>
@@ -3381,7 +3381,7 @@
               <a:t>トビラ </a:t>
             </a:r>
             <a:r>
-              <a:rPr sz="2060" b="1">
+              <a:rPr sz="2308" b="1">
                 <a:solidFill>
                   <a:srgbClr val="8A97A5"/>
                 </a:solidFill>
@@ -3402,8 +3402,8 @@
         </p:nvSpPr>
         <p:spPr>
           <a:xfrm>
-            <a:off x="3208020" y="4439602"/>
-            <a:ext cx="7299008" cy="426720"/>
+            <a:off x="2781300" y="4509135"/>
+            <a:ext cx="8152448" cy="470535"/>
           </a:xfrm>
           <a:prstGeom prst="rect">
             <a:avLst/>
@@ -3418,11 +3418,11 @@
           <a:p>
             <a:pPr algn="ctr">
               <a:lnSpc>
-                <a:spcPts val="2909"/>
+                <a:spcPts val="3259"/>
               </a:lnSpc>
             </a:pPr>
             <a:r>
-              <a:rPr sz="1572" b="1">
+              <a:rPr sz="1761" b="1">
                 <a:solidFill>
                   <a:srgbClr val="3F5266"/>
                 </a:solidFill>
@@ -3443,8 +3443,8 @@
         </p:nvSpPr>
         <p:spPr>
           <a:xfrm>
-            <a:off x="4415790" y="4959668"/>
-            <a:ext cx="1764982" cy="441008"/>
+            <a:off x="4574858" y="5093018"/>
+            <a:ext cx="1509712" cy="487680"/>
           </a:xfrm>
           <a:prstGeom prst="rect">
             <a:avLst/>
@@ -3459,11 +3459,11 @@
           <a:p>
             <a:pPr algn="ctr">
               <a:lnSpc>
-                <a:spcPts val="2049"/>
+                <a:spcPts val="2296"/>
               </a:lnSpc>
             </a:pPr>
             <a:r>
-              <a:rPr sz="1138" b="1">
+              <a:rPr sz="1275" b="1">
                 <a:solidFill>
                   <a:srgbClr val="3F5266"/>
                 </a:solidFill>
@@ -3484,8 +3484,8 @@
         </p:nvSpPr>
         <p:spPr>
           <a:xfrm>
-            <a:off x="6048375" y="4959668"/>
-            <a:ext cx="1872615" cy="441008"/>
+            <a:off x="6404610" y="5093018"/>
+            <a:ext cx="1630680" cy="487680"/>
           </a:xfrm>
           <a:prstGeom prst="rect">
             <a:avLst/>
@@ -3500,11 +3500,11 @@
           <a:p>
             <a:pPr algn="ctr">
               <a:lnSpc>
-                <a:spcPts val="2049"/>
+                <a:spcPts val="2296"/>
               </a:lnSpc>
             </a:pPr>
             <a:r>
-              <a:rPr sz="1138" b="1">
+              <a:rPr sz="1275" b="1">
                 <a:solidFill>
                   <a:srgbClr val="3F5266"/>
                 </a:solidFill>
@@ -3525,8 +3525,8 @@
         </p:nvSpPr>
         <p:spPr>
           <a:xfrm>
-            <a:off x="7788592" y="4959668"/>
-            <a:ext cx="1511618" cy="441008"/>
+            <a:off x="8354378" y="5093018"/>
+            <a:ext cx="1226820" cy="487680"/>
           </a:xfrm>
           <a:prstGeom prst="rect">
             <a:avLst/>
@@ -3541,11 +3541,11 @@
           <a:p>
             <a:pPr algn="ctr">
               <a:lnSpc>
-                <a:spcPts val="2049"/>
+                <a:spcPts val="2296"/>
               </a:lnSpc>
             </a:pPr>
             <a:r>
-              <a:rPr sz="1138" b="1">
+              <a:rPr sz="1275" b="1">
                 <a:solidFill>
                   <a:srgbClr val="3F5266"/>
                 </a:solidFill>
@@ -3574,8 +3574,8 @@
         </p:blipFill>
         <p:spPr>
           <a:xfrm>
-            <a:off x="4709160" y="5075872"/>
-            <a:ext cx="151448" cy="151448"/>
+            <a:off x="4450080" y="5222558"/>
+            <a:ext cx="170498" cy="170498"/>
           </a:xfrm>
           <a:prstGeom prst="rect">
             <a:avLst/>
@@ -3598,8 +3598,8 @@
         </p:blipFill>
         <p:spPr>
           <a:xfrm>
-            <a:off x="6341745" y="5075872"/>
-            <a:ext cx="151448" cy="151448"/>
+            <a:off x="6278880" y="5222558"/>
+            <a:ext cx="170498" cy="170498"/>
           </a:xfrm>
           <a:prstGeom prst="rect">
             <a:avLst/>
@@ -3622,8 +3622,8 @@
         </p:blipFill>
         <p:spPr>
           <a:xfrm>
-            <a:off x="8081962" y="5075872"/>
-            <a:ext cx="151448" cy="151448"/>
+            <a:off x="8229600" y="5222558"/>
+            <a:ext cx="170498" cy="170498"/>
           </a:xfrm>
           <a:prstGeom prst="rect">
             <a:avLst/>
@@ -3664,8 +3664,8 @@
         </p:nvSpPr>
         <p:spPr>
           <a:xfrm>
-            <a:off x="5831205" y="2543175"/>
-            <a:ext cx="2052638" cy="421005"/>
+            <a:off x="5708332" y="2403158"/>
+            <a:ext cx="2300288" cy="471488"/>
           </a:xfrm>
           <a:prstGeom prst="roundRect">
             <a:avLst>
@@ -3708,12 +3708,12 @@
         </p:nvSpPr>
         <p:spPr>
           <a:xfrm>
-            <a:off x="822960" y="3115628"/>
-            <a:ext cx="3950018" cy="722948"/>
+            <a:off x="822960" y="3044190"/>
+            <a:ext cx="3941445" cy="809625"/>
           </a:xfrm>
           <a:prstGeom prst="roundRect">
             <a:avLst>
-              <a:gd name="adj" fmla="val 17146"/>
+              <a:gd name="adj" fmla="val 17152"/>
             </a:avLst>
           </a:prstGeom>
           <a:solidFill>
@@ -3752,12 +3752,12 @@
         </p:nvSpPr>
         <p:spPr>
           <a:xfrm>
-            <a:off x="974408" y="3219450"/>
-            <a:ext cx="516255" cy="516255"/>
+            <a:off x="992505" y="3160395"/>
+            <a:ext cx="579120" cy="579120"/>
           </a:xfrm>
           <a:prstGeom prst="roundRect">
             <a:avLst>
-              <a:gd name="adj" fmla="val 18675"/>
+              <a:gd name="adj" fmla="val 18651"/>
             </a:avLst>
           </a:prstGeom>
           <a:solidFill>
@@ -3796,12 +3796,12 @@
         </p:nvSpPr>
         <p:spPr>
           <a:xfrm>
-            <a:off x="4883468" y="3115628"/>
-            <a:ext cx="3950018" cy="722948"/>
+            <a:off x="4887278" y="3044190"/>
+            <a:ext cx="3941445" cy="809625"/>
           </a:xfrm>
           <a:prstGeom prst="roundRect">
             <a:avLst>
-              <a:gd name="adj" fmla="val 17146"/>
+              <a:gd name="adj" fmla="val 17152"/>
             </a:avLst>
           </a:prstGeom>
           <a:solidFill>
@@ -3840,12 +3840,12 @@
         </p:nvSpPr>
         <p:spPr>
           <a:xfrm>
-            <a:off x="5033962" y="3219450"/>
-            <a:ext cx="516255" cy="516255"/>
+            <a:off x="5056822" y="3160395"/>
+            <a:ext cx="579120" cy="579120"/>
           </a:xfrm>
           <a:prstGeom prst="roundRect">
             <a:avLst>
-              <a:gd name="adj" fmla="val 18675"/>
+              <a:gd name="adj" fmla="val 18651"/>
             </a:avLst>
           </a:prstGeom>
           <a:solidFill>
@@ -3884,12 +3884,12 @@
         </p:nvSpPr>
         <p:spPr>
           <a:xfrm>
-            <a:off x="8943022" y="3115628"/>
-            <a:ext cx="3950018" cy="722948"/>
+            <a:off x="8951595" y="3044190"/>
+            <a:ext cx="3941445" cy="809625"/>
           </a:xfrm>
           <a:prstGeom prst="roundRect">
             <a:avLst>
-              <a:gd name="adj" fmla="val 17146"/>
+              <a:gd name="adj" fmla="val 17152"/>
             </a:avLst>
           </a:prstGeom>
           <a:solidFill>
@@ -3928,12 +3928,12 @@
         </p:nvSpPr>
         <p:spPr>
           <a:xfrm>
-            <a:off x="9094470" y="3219450"/>
-            <a:ext cx="516255" cy="516255"/>
+            <a:off x="9121140" y="3160395"/>
+            <a:ext cx="579120" cy="579120"/>
           </a:xfrm>
           <a:prstGeom prst="roundRect">
             <a:avLst>
-              <a:gd name="adj" fmla="val 18675"/>
+              <a:gd name="adj" fmla="val 18651"/>
             </a:avLst>
           </a:prstGeom>
           <a:solidFill>
@@ -3972,12 +3972,12 @@
         </p:nvSpPr>
         <p:spPr>
           <a:xfrm>
-            <a:off x="822960" y="3949065"/>
-            <a:ext cx="3950018" cy="755332"/>
+            <a:off x="822960" y="3977640"/>
+            <a:ext cx="3941445" cy="809625"/>
           </a:xfrm>
           <a:prstGeom prst="roundRect">
             <a:avLst>
-              <a:gd name="adj" fmla="val 16411"/>
+              <a:gd name="adj" fmla="val 17152"/>
             </a:avLst>
           </a:prstGeom>
           <a:solidFill>
@@ -4016,12 +4016,12 @@
         </p:nvSpPr>
         <p:spPr>
           <a:xfrm>
-            <a:off x="974408" y="4068128"/>
-            <a:ext cx="516255" cy="516255"/>
+            <a:off x="992505" y="4093845"/>
+            <a:ext cx="579120" cy="579120"/>
           </a:xfrm>
           <a:prstGeom prst="roundRect">
             <a:avLst>
-              <a:gd name="adj" fmla="val 18675"/>
+              <a:gd name="adj" fmla="val 18651"/>
             </a:avLst>
           </a:prstGeom>
           <a:solidFill>
@@ -4060,12 +4060,12 @@
         </p:nvSpPr>
         <p:spPr>
           <a:xfrm>
-            <a:off x="4883468" y="3949065"/>
-            <a:ext cx="3950018" cy="755332"/>
+            <a:off x="4887278" y="3977640"/>
+            <a:ext cx="3941445" cy="809625"/>
           </a:xfrm>
           <a:prstGeom prst="roundRect">
             <a:avLst>
-              <a:gd name="adj" fmla="val 16411"/>
+              <a:gd name="adj" fmla="val 17152"/>
             </a:avLst>
           </a:prstGeom>
           <a:solidFill>
@@ -4104,12 +4104,12 @@
         </p:nvSpPr>
         <p:spPr>
           <a:xfrm>
-            <a:off x="5033962" y="4068128"/>
-            <a:ext cx="516255" cy="516255"/>
+            <a:off x="5056822" y="4093845"/>
+            <a:ext cx="579120" cy="579120"/>
           </a:xfrm>
           <a:prstGeom prst="roundRect">
             <a:avLst>
-              <a:gd name="adj" fmla="val 18675"/>
+              <a:gd name="adj" fmla="val 18651"/>
             </a:avLst>
           </a:prstGeom>
           <a:solidFill>
@@ -4148,12 +4148,12 @@
         </p:nvSpPr>
         <p:spPr>
           <a:xfrm>
-            <a:off x="8943022" y="3949065"/>
-            <a:ext cx="3950018" cy="755332"/>
+            <a:off x="8951595" y="3977640"/>
+            <a:ext cx="3941445" cy="809625"/>
           </a:xfrm>
           <a:prstGeom prst="roundRect">
             <a:avLst>
-              <a:gd name="adj" fmla="val 16411"/>
+              <a:gd name="adj" fmla="val 17152"/>
             </a:avLst>
           </a:prstGeom>
           <a:solidFill>
@@ -4192,12 +4192,12 @@
         </p:nvSpPr>
         <p:spPr>
           <a:xfrm>
-            <a:off x="9094470" y="4068128"/>
-            <a:ext cx="516255" cy="516255"/>
+            <a:off x="9121140" y="4093845"/>
+            <a:ext cx="579120" cy="579120"/>
           </a:xfrm>
           <a:prstGeom prst="roundRect">
             <a:avLst>
-              <a:gd name="adj" fmla="val 18675"/>
+              <a:gd name="adj" fmla="val 18651"/>
             </a:avLst>
           </a:prstGeom>
           <a:solidFill>
@@ -4236,8 +4236,8 @@
         </p:nvSpPr>
         <p:spPr>
           <a:xfrm>
-            <a:off x="5716905" y="2543175"/>
-            <a:ext cx="2281238" cy="478155"/>
+            <a:off x="6096000" y="2403158"/>
+            <a:ext cx="2025968" cy="528638"/>
           </a:xfrm>
           <a:prstGeom prst="rect">
             <a:avLst/>
@@ -4252,11 +4252,11 @@
           <a:p>
             <a:pPr algn="ctr">
               <a:lnSpc>
-                <a:spcPts val="2342"/>
+                <a:spcPts val="2624"/>
               </a:lnSpc>
             </a:pPr>
             <a:r>
-              <a:rPr sz="1301" b="1">
+              <a:rPr sz="1458" b="1">
                 <a:solidFill>
                   <a:srgbClr val="FFFFFF"/>
                 </a:solidFill>
@@ -4277,8 +4277,8 @@
         </p:nvSpPr>
         <p:spPr>
           <a:xfrm>
-            <a:off x="1601152" y="3340418"/>
-            <a:ext cx="2880360" cy="331470"/>
+            <a:off x="1694498" y="3175635"/>
+            <a:ext cx="3128010" cy="605790"/>
           </a:xfrm>
           <a:prstGeom prst="rect">
             <a:avLst/>
@@ -4297,7 +4297,7 @@
               </a:lnSpc>
             </a:pPr>
             <a:r>
-              <a:rPr sz="1247" b="1">
+              <a:rPr sz="1397" b="1">
                 <a:solidFill>
                   <a:srgbClr val="3F5266"/>
                 </a:solidFill>
@@ -4308,7 +4308,7 @@
               <a:t>おしごと</a:t>
             </a:r>
             <a:r>
-              <a:rPr sz="1003" b="1">
+              <a:rPr sz="1123" b="1">
                 <a:solidFill>
                   <a:srgbClr val="8A97A5"/>
                 </a:solidFill>
@@ -4329,8 +4329,8 @@
         </p:nvSpPr>
         <p:spPr>
           <a:xfrm>
-            <a:off x="5660708" y="3340418"/>
-            <a:ext cx="3027045" cy="331470"/>
+            <a:off x="5758815" y="3175635"/>
+            <a:ext cx="3128010" cy="605790"/>
           </a:xfrm>
           <a:prstGeom prst="rect">
             <a:avLst/>
@@ -4349,7 +4349,7 @@
               </a:lnSpc>
             </a:pPr>
             <a:r>
-              <a:rPr sz="1247" b="1">
+              <a:rPr sz="1397" b="1">
                 <a:solidFill>
                   <a:srgbClr val="3F5266"/>
                 </a:solidFill>
@@ -4360,7 +4360,7 @@
               <a:t>しゅっぴ</a:t>
             </a:r>
             <a:r>
-              <a:rPr sz="1003" b="1">
+              <a:rPr sz="1123" b="1">
                 <a:solidFill>
                   <a:srgbClr val="8A97A5"/>
                 </a:solidFill>
@@ -4381,8 +4381,8 @@
         </p:nvSpPr>
         <p:spPr>
           <a:xfrm>
-            <a:off x="9721215" y="3340418"/>
-            <a:ext cx="2824162" cy="331470"/>
+            <a:off x="9823132" y="3175635"/>
+            <a:ext cx="3128010" cy="605790"/>
           </a:xfrm>
           <a:prstGeom prst="rect">
             <a:avLst/>
@@ -4401,7 +4401,7 @@
               </a:lnSpc>
             </a:pPr>
             <a:r>
-              <a:rPr sz="1247" b="1">
+              <a:rPr sz="1397" b="1">
                 <a:solidFill>
                   <a:srgbClr val="3F5266"/>
                 </a:solidFill>
@@ -4412,7 +4412,7 @@
               <a:t>できごと</a:t>
             </a:r>
             <a:r>
-              <a:rPr sz="1003" b="1">
+              <a:rPr sz="1123" b="1">
                 <a:solidFill>
                   <a:srgbClr val="8A97A5"/>
                 </a:solidFill>
@@ -4433,8 +4433,8 @@
         </p:nvSpPr>
         <p:spPr>
           <a:xfrm>
-            <a:off x="1601152" y="4189095"/>
-            <a:ext cx="2550795" cy="331470"/>
+            <a:off x="1694498" y="4245292"/>
+            <a:ext cx="2829878" cy="331470"/>
           </a:xfrm>
           <a:prstGeom prst="rect">
             <a:avLst/>
@@ -4453,7 +4453,7 @@
               </a:lnSpc>
             </a:pPr>
             <a:r>
-              <a:rPr sz="1247" b="1">
+              <a:rPr sz="1397" b="1">
                 <a:solidFill>
                   <a:srgbClr val="3F5266"/>
                 </a:solidFill>
@@ -4464,7 +4464,7 @@
               <a:t>まなび</a:t>
             </a:r>
             <a:r>
-              <a:rPr sz="1003" b="1">
+              <a:rPr sz="1123" b="1">
                 <a:solidFill>
                   <a:srgbClr val="8A97A5"/>
                 </a:solidFill>
@@ -4485,8 +4485,8 @@
         </p:nvSpPr>
         <p:spPr>
           <a:xfrm>
-            <a:off x="5660708" y="4189095"/>
-            <a:ext cx="2789872" cy="331470"/>
+            <a:off x="5758815" y="4245292"/>
+            <a:ext cx="3098482" cy="331470"/>
           </a:xfrm>
           <a:prstGeom prst="rect">
             <a:avLst/>
@@ -4505,7 +4505,7 @@
               </a:lnSpc>
             </a:pPr>
             <a:r>
-              <a:rPr sz="1247" b="1">
+              <a:rPr sz="1397" b="1">
                 <a:solidFill>
                   <a:srgbClr val="3F5266"/>
                 </a:solidFill>
@@ -4516,7 +4516,7 @@
               <a:t>トビラ</a:t>
             </a:r>
             <a:r>
-              <a:rPr sz="1003" b="1">
+              <a:rPr sz="1123" b="1">
                 <a:solidFill>
                   <a:srgbClr val="8A97A5"/>
                 </a:solidFill>
@@ -4537,8 +4537,8 @@
         </p:nvSpPr>
         <p:spPr>
           <a:xfrm>
-            <a:off x="9721215" y="4051935"/>
-            <a:ext cx="3248978" cy="605790"/>
+            <a:off x="9823132" y="4108132"/>
+            <a:ext cx="3128010" cy="605790"/>
           </a:xfrm>
           <a:prstGeom prst="rect">
             <a:avLst/>
@@ -4557,7 +4557,7 @@
               </a:lnSpc>
             </a:pPr>
             <a:r>
-              <a:rPr sz="1247" b="1">
+              <a:rPr sz="1397" b="1">
                 <a:solidFill>
                   <a:srgbClr val="3F5266"/>
                 </a:solidFill>
@@ -4568,7 +4568,7 @@
               <a:t>はなしあい</a:t>
             </a:r>
             <a:r>
-              <a:rPr sz="1003" b="1">
+              <a:rPr sz="1123" b="1">
                 <a:solidFill>
                   <a:srgbClr val="8A97A5"/>
                 </a:solidFill>
@@ -4589,8 +4589,8 @@
         </p:nvSpPr>
         <p:spPr>
           <a:xfrm>
-            <a:off x="4792028" y="4855845"/>
-            <a:ext cx="4131945" cy="304800"/>
+            <a:off x="4557712" y="4957762"/>
+            <a:ext cx="4601528" cy="335280"/>
           </a:xfrm>
           <a:prstGeom prst="rect">
             <a:avLst/>
@@ -4605,11 +4605,11 @@
           <a:p>
             <a:pPr algn="ctr">
               <a:lnSpc>
-                <a:spcPts val="1952"/>
+                <a:spcPts val="2187"/>
               </a:lnSpc>
             </a:pPr>
             <a:r>
-              <a:rPr sz="1084" b="1">
+              <a:rPr sz="1214" b="1">
                 <a:solidFill>
                   <a:srgbClr val="8A97A5"/>
                 </a:solidFill>
@@ -4638,8 +4638,8 @@
         </p:blipFill>
         <p:spPr>
           <a:xfrm>
-            <a:off x="6037898" y="2667000"/>
-            <a:ext cx="173355" cy="173355"/>
+            <a:off x="5938838" y="2541270"/>
+            <a:ext cx="194310" cy="194310"/>
           </a:xfrm>
           <a:prstGeom prst="rect">
             <a:avLst/>
@@ -4662,8 +4662,8 @@
         </p:blipFill>
         <p:spPr>
           <a:xfrm>
-            <a:off x="1115378" y="3360420"/>
-            <a:ext cx="234315" cy="234315"/>
+            <a:off x="1150620" y="3318510"/>
+            <a:ext cx="261938" cy="261938"/>
           </a:xfrm>
           <a:prstGeom prst="rect">
             <a:avLst/>
@@ -4686,8 +4686,8 @@
         </p:blipFill>
         <p:spPr>
           <a:xfrm>
-            <a:off x="5175885" y="3360420"/>
-            <a:ext cx="234315" cy="234315"/>
+            <a:off x="5214938" y="3318510"/>
+            <a:ext cx="261938" cy="261938"/>
           </a:xfrm>
           <a:prstGeom prst="rect">
             <a:avLst/>
@@ -4710,8 +4710,8 @@
         </p:blipFill>
         <p:spPr>
           <a:xfrm>
-            <a:off x="9235440" y="3360420"/>
-            <a:ext cx="234315" cy="234315"/>
+            <a:off x="9280208" y="3318510"/>
+            <a:ext cx="261938" cy="261938"/>
           </a:xfrm>
           <a:prstGeom prst="rect">
             <a:avLst/>
@@ -4734,8 +4734,8 @@
         </p:blipFill>
         <p:spPr>
           <a:xfrm>
-            <a:off x="1115378" y="4209098"/>
-            <a:ext cx="234315" cy="234315"/>
+            <a:off x="1150620" y="4251960"/>
+            <a:ext cx="261938" cy="261938"/>
           </a:xfrm>
           <a:prstGeom prst="rect">
             <a:avLst/>
@@ -4758,8 +4758,8 @@
         </p:blipFill>
         <p:spPr>
           <a:xfrm>
-            <a:off x="5175885" y="4209098"/>
-            <a:ext cx="234315" cy="234315"/>
+            <a:off x="5214938" y="4251960"/>
+            <a:ext cx="261938" cy="261938"/>
           </a:xfrm>
           <a:prstGeom prst="rect">
             <a:avLst/>
@@ -4782,8 +4782,8 @@
         </p:blipFill>
         <p:spPr>
           <a:xfrm>
-            <a:off x="9235440" y="4209098"/>
-            <a:ext cx="234315" cy="234315"/>
+            <a:off x="9280208" y="4251960"/>
+            <a:ext cx="261938" cy="261938"/>
           </a:xfrm>
           <a:prstGeom prst="rect">
             <a:avLst/>
@@ -4824,8 +4824,8 @@
         </p:nvSpPr>
         <p:spPr>
           <a:xfrm>
-            <a:off x="4798695" y="343852"/>
-            <a:ext cx="4119562" cy="421005"/>
+            <a:off x="4550092" y="385762"/>
+            <a:ext cx="4615815" cy="471488"/>
           </a:xfrm>
           <a:prstGeom prst="roundRect">
             <a:avLst>
@@ -4868,12 +4868,12 @@
         </p:nvSpPr>
         <p:spPr>
           <a:xfrm>
-            <a:off x="548640" y="6371272"/>
-            <a:ext cx="4142422" cy="930592"/>
+            <a:off x="548640" y="6277928"/>
+            <a:ext cx="4133850" cy="974408"/>
           </a:xfrm>
           <a:prstGeom prst="roundRect">
             <a:avLst>
-              <a:gd name="adj" fmla="val 11840"/>
+              <a:gd name="adj" fmla="val 12668"/>
             </a:avLst>
           </a:prstGeom>
           <a:solidFill>
@@ -4914,12 +4914,12 @@
         </p:nvSpPr>
         <p:spPr>
           <a:xfrm>
-            <a:off x="4787265" y="6371272"/>
-            <a:ext cx="4142422" cy="930592"/>
+            <a:off x="4791075" y="6277928"/>
+            <a:ext cx="4133850" cy="974408"/>
           </a:xfrm>
           <a:prstGeom prst="roundRect">
             <a:avLst>
-              <a:gd name="adj" fmla="val 11840"/>
+              <a:gd name="adj" fmla="val 12668"/>
             </a:avLst>
           </a:prstGeom>
           <a:solidFill>
@@ -4960,12 +4960,12 @@
         </p:nvSpPr>
         <p:spPr>
           <a:xfrm>
-            <a:off x="9024938" y="6371272"/>
-            <a:ext cx="4142422" cy="930592"/>
+            <a:off x="9032558" y="6277928"/>
+            <a:ext cx="4133850" cy="974408"/>
           </a:xfrm>
           <a:prstGeom prst="roundRect">
             <a:avLst>
-              <a:gd name="adj" fmla="val 11840"/>
+              <a:gd name="adj" fmla="val 12668"/>
             </a:avLst>
           </a:prstGeom>
           <a:solidFill>
@@ -5014,8 +5014,8 @@
         </p:blipFill>
         <p:spPr>
           <a:xfrm>
-            <a:off x="343852" y="917258"/>
-            <a:ext cx="6265545" cy="5053965"/>
+            <a:off x="385762" y="1027748"/>
+            <a:ext cx="6194108" cy="4801552"/>
           </a:xfrm>
           <a:prstGeom prst="rect">
             <a:avLst/>
@@ -5038,8 +5038,8 @@
         </p:blipFill>
         <p:spPr>
           <a:xfrm>
-            <a:off x="7105650" y="917258"/>
-            <a:ext cx="6265545" cy="5053965"/>
+            <a:off x="7136130" y="1027748"/>
+            <a:ext cx="6194108" cy="4801552"/>
           </a:xfrm>
           <a:prstGeom prst="rect">
             <a:avLst/>
@@ -5054,8 +5054,8 @@
         </p:nvSpPr>
         <p:spPr>
           <a:xfrm>
-            <a:off x="4684395" y="343852"/>
-            <a:ext cx="4348162" cy="478155"/>
+            <a:off x="4938712" y="385762"/>
+            <a:ext cx="4341495" cy="528638"/>
           </a:xfrm>
           <a:prstGeom prst="rect">
             <a:avLst/>
@@ -5070,11 +5070,11 @@
           <a:p>
             <a:pPr algn="ctr">
               <a:lnSpc>
-                <a:spcPts val="2342"/>
+                <a:spcPts val="2624"/>
               </a:lnSpc>
             </a:pPr>
             <a:r>
-              <a:rPr sz="1301" b="1">
+              <a:rPr sz="1458" b="1">
                 <a:solidFill>
                   <a:srgbClr val="FFFFFF"/>
                 </a:solidFill>
@@ -5095,8 +5095,8 @@
         </p:nvSpPr>
         <p:spPr>
           <a:xfrm>
-            <a:off x="2842260" y="6025515"/>
-            <a:ext cx="1269682" cy="292418"/>
+            <a:off x="2785110" y="5890260"/>
+            <a:ext cx="1395412" cy="320992"/>
           </a:xfrm>
           <a:prstGeom prst="rect">
             <a:avLst/>
@@ -5111,11 +5111,11 @@
           <a:p>
             <a:pPr algn="ctr">
               <a:lnSpc>
-                <a:spcPts val="1854"/>
+                <a:spcPts val="2077"/>
               </a:lnSpc>
             </a:pPr>
             <a:r>
-              <a:rPr sz="1030" b="1">
+              <a:rPr sz="1154" b="1">
                 <a:solidFill>
                   <a:srgbClr val="5B7FA8"/>
                 </a:solidFill>
@@ -5136,8 +5136,8 @@
         </p:nvSpPr>
         <p:spPr>
           <a:xfrm>
-            <a:off x="6605588" y="3341370"/>
-            <a:ext cx="503872" cy="552450"/>
+            <a:off x="6589395" y="3312795"/>
+            <a:ext cx="537210" cy="612458"/>
           </a:xfrm>
           <a:prstGeom prst="rect">
             <a:avLst/>
@@ -5152,11 +5152,11 @@
           <a:p>
             <a:pPr algn="ctr">
               <a:lnSpc>
-                <a:spcPts val="3904"/>
+                <a:spcPts val="4374"/>
               </a:lnSpc>
             </a:pPr>
             <a:r>
-              <a:rPr sz="2169" b="1">
+              <a:rPr sz="2429" b="1">
                 <a:solidFill>
                   <a:srgbClr val="F4879F"/>
                 </a:solidFill>
@@ -5177,8 +5177,8 @@
         </p:nvSpPr>
         <p:spPr>
           <a:xfrm>
-            <a:off x="9013508" y="6025515"/>
-            <a:ext cx="2450782" cy="292418"/>
+            <a:off x="8873490" y="5890260"/>
+            <a:ext cx="2719388" cy="320992"/>
           </a:xfrm>
           <a:prstGeom prst="rect">
             <a:avLst/>
@@ -5193,11 +5193,11 @@
           <a:p>
             <a:pPr algn="ctr">
               <a:lnSpc>
-                <a:spcPts val="1854"/>
+                <a:spcPts val="2077"/>
               </a:lnSpc>
             </a:pPr>
             <a:r>
-              <a:rPr sz="1030" b="1">
+              <a:rPr sz="1154" b="1">
                 <a:solidFill>
                   <a:srgbClr val="5B7FA8"/>
                 </a:solidFill>
@@ -5218,8 +5218,8 @@
         </p:nvSpPr>
         <p:spPr>
           <a:xfrm>
-            <a:off x="695325" y="6456045"/>
-            <a:ext cx="4076700" cy="269558"/>
+            <a:off x="960120" y="6372225"/>
+            <a:ext cx="3788092" cy="294322"/>
           </a:xfrm>
           <a:prstGeom prst="rect">
             <a:avLst/>
@@ -5234,11 +5234,11 @@
           <a:p>
             <a:pPr algn="l">
               <a:lnSpc>
-                <a:spcPts val="1670"/>
+                <a:spcPts val="1871"/>
               </a:lnSpc>
             </a:pPr>
             <a:r>
-              <a:rPr sz="1192" b="1">
+              <a:rPr sz="1336" b="1">
                 <a:solidFill>
                   <a:srgbClr val="3F5266"/>
                 </a:solidFill>
@@ -5259,8 +5259,8 @@
         </p:nvSpPr>
         <p:spPr>
           <a:xfrm>
-            <a:off x="4933950" y="6456045"/>
-            <a:ext cx="4076700" cy="269558"/>
+            <a:off x="5201602" y="6372225"/>
+            <a:ext cx="3788092" cy="294322"/>
           </a:xfrm>
           <a:prstGeom prst="rect">
             <a:avLst/>
@@ -5275,11 +5275,11 @@
           <a:p>
             <a:pPr algn="l">
               <a:lnSpc>
-                <a:spcPts val="1670"/>
+                <a:spcPts val="1871"/>
               </a:lnSpc>
             </a:pPr>
             <a:r>
-              <a:rPr sz="1192" b="1">
+              <a:rPr sz="1336" b="1">
                 <a:solidFill>
                   <a:srgbClr val="C98A3C"/>
                 </a:solidFill>
@@ -5300,8 +5300,8 @@
         </p:nvSpPr>
         <p:spPr>
           <a:xfrm>
-            <a:off x="9172575" y="6456045"/>
-            <a:ext cx="4076700" cy="269558"/>
+            <a:off x="9444038" y="6372225"/>
+            <a:ext cx="3788092" cy="294322"/>
           </a:xfrm>
           <a:prstGeom prst="rect">
             <a:avLst/>
@@ -5316,11 +5316,11 @@
           <a:p>
             <a:pPr algn="l">
               <a:lnSpc>
-                <a:spcPts val="1670"/>
+                <a:spcPts val="1871"/>
               </a:lnSpc>
             </a:pPr>
             <a:r>
-              <a:rPr sz="1192" b="1">
+              <a:rPr sz="1336" b="1">
                 <a:solidFill>
                   <a:srgbClr val="7E6BC4"/>
                 </a:solidFill>
@@ -5349,8 +5349,8 @@
         </p:blipFill>
         <p:spPr>
           <a:xfrm>
-            <a:off x="5004435" y="467678"/>
-            <a:ext cx="173355" cy="173355"/>
+            <a:off x="4781550" y="524828"/>
+            <a:ext cx="194310" cy="194310"/>
           </a:xfrm>
           <a:prstGeom prst="rect">
             <a:avLst/>
@@ -5373,8 +5373,8 @@
         </p:blipFill>
         <p:spPr>
           <a:xfrm>
-            <a:off x="695325" y="6482715"/>
-            <a:ext cx="159068" cy="159068"/>
+            <a:off x="712470" y="6401752"/>
+            <a:ext cx="178118" cy="178118"/>
           </a:xfrm>
           <a:prstGeom prst="rect">
             <a:avLst/>
@@ -5397,8 +5397,8 @@
         </p:blipFill>
         <p:spPr>
           <a:xfrm>
-            <a:off x="4933950" y="6482715"/>
-            <a:ext cx="159068" cy="159068"/>
+            <a:off x="4954905" y="6401752"/>
+            <a:ext cx="178118" cy="178118"/>
           </a:xfrm>
           <a:prstGeom prst="rect">
             <a:avLst/>
@@ -5421,8 +5421,8 @@
         </p:blipFill>
         <p:spPr>
           <a:xfrm>
-            <a:off x="9172575" y="6482715"/>
-            <a:ext cx="159068" cy="159068"/>
+            <a:off x="9196388" y="6401752"/>
+            <a:ext cx="178118" cy="178118"/>
           </a:xfrm>
           <a:prstGeom prst="rect">
             <a:avLst/>
@@ -5463,8 +5463,8 @@
         </p:nvSpPr>
         <p:spPr>
           <a:xfrm>
-            <a:off x="5234940" y="343852"/>
-            <a:ext cx="3247072" cy="421005"/>
+            <a:off x="5038725" y="385762"/>
+            <a:ext cx="3637598" cy="471488"/>
           </a:xfrm>
           <a:prstGeom prst="roundRect">
             <a:avLst>
@@ -5507,12 +5507,12 @@
         </p:nvSpPr>
         <p:spPr>
           <a:xfrm>
-            <a:off x="3400425" y="5866448"/>
-            <a:ext cx="6915150" cy="1436370"/>
+            <a:off x="2985135" y="5645468"/>
+            <a:ext cx="7745730" cy="1606868"/>
           </a:xfrm>
           <a:prstGeom prst="roundRect">
             <a:avLst>
-              <a:gd name="adj" fmla="val 12465"/>
+              <a:gd name="adj" fmla="val 12483"/>
             </a:avLst>
           </a:prstGeom>
           <a:solidFill>
@@ -5561,8 +5561,8 @@
         </p:blipFill>
         <p:spPr>
           <a:xfrm>
-            <a:off x="2984182" y="917258"/>
-            <a:ext cx="7746682" cy="4838700"/>
+            <a:off x="3260408" y="1027748"/>
+            <a:ext cx="7195185" cy="4494848"/>
           </a:xfrm>
           <a:prstGeom prst="rect">
             <a:avLst/>
@@ -5577,8 +5577,8 @@
         </p:nvSpPr>
         <p:spPr>
           <a:xfrm>
-            <a:off x="5120640" y="343852"/>
-            <a:ext cx="3475672" cy="478155"/>
+            <a:off x="5427345" y="385762"/>
+            <a:ext cx="3363278" cy="528638"/>
           </a:xfrm>
           <a:prstGeom prst="rect">
             <a:avLst/>
@@ -5593,11 +5593,11 @@
           <a:p>
             <a:pPr algn="ctr">
               <a:lnSpc>
-                <a:spcPts val="2342"/>
+                <a:spcPts val="2624"/>
               </a:lnSpc>
             </a:pPr>
             <a:r>
-              <a:rPr sz="1301" b="1">
+              <a:rPr sz="1458" b="1">
                 <a:solidFill>
                   <a:srgbClr val="7A6320"/>
                 </a:solidFill>
@@ -5618,8 +5618,8 @@
         </p:nvSpPr>
         <p:spPr>
           <a:xfrm>
-            <a:off x="3286125" y="5866448"/>
-            <a:ext cx="7143750" cy="1493520"/>
+            <a:off x="3227070" y="5645468"/>
+            <a:ext cx="7617142" cy="1664018"/>
           </a:xfrm>
           <a:prstGeom prst="rect">
             <a:avLst/>
@@ -5634,11 +5634,11 @@
           <a:p>
             <a:pPr algn="ctr">
               <a:lnSpc>
-                <a:spcPts val="2635"/>
+                <a:spcPts val="2952"/>
               </a:lnSpc>
             </a:pPr>
             <a:r>
-              <a:rPr sz="1464" b="1">
+              <a:rPr sz="1640" b="1">
                 <a:solidFill>
                   <a:srgbClr val="3F5266"/>
                 </a:solidFill>
@@ -5650,7 +5650,7 @@
       日本・欧米で育つと、</a:t>
             </a:r>
             <a:r>
-              <a:rPr sz="1464" b="1">
+              <a:rPr sz="1640" b="1">
                 <a:solidFill>
                   <a:srgbClr val="5B7FA8"/>
                 </a:solidFill>
@@ -5661,7 +5661,7 @@
               <a:t>★1つが10万</a:t>
             </a:r>
             <a:r>
-              <a:rPr sz="1464" b="1">
+              <a:rPr sz="1640" b="1">
                 <a:solidFill>
                   <a:srgbClr val="3F5266"/>
                 </a:solidFill>
@@ -5672,7 +5672,7 @@
               <a:t>。</a:t>
             </a:r>
             <a:r>
-              <a:rPr sz="1464" b="1">
+              <a:rPr sz="1640" b="1">
                 <a:solidFill>
                   <a:srgbClr val="3F5266"/>
                 </a:solidFill>
@@ -5684,7 +5684,7 @@
       ウガンダで育つと、</a:t>
             </a:r>
             <a:r>
-              <a:rPr sz="1464" b="1">
+              <a:rPr sz="1640" b="1">
                 <a:solidFill>
                   <a:srgbClr val="F4879F"/>
                 </a:solidFill>
@@ -5695,7 +5695,7 @@
               <a:t>★1つは5万</a:t>
             </a:r>
             <a:r>
-              <a:rPr sz="1464" b="1">
+              <a:rPr sz="1640" b="1">
                 <a:solidFill>
                   <a:srgbClr val="3F5266"/>
                 </a:solidFill>
@@ -5706,7 +5706,7 @@
               <a:t>。はたらきはじめの基本給も、20万と10万。</a:t>
             </a:r>
             <a:r>
-              <a:rPr sz="1192" b="1">
+              <a:rPr sz="1336" b="1">
                 <a:solidFill>
                   <a:srgbClr val="3F5266"/>
                 </a:solidFill>
@@ -5717,7 +5717,7 @@
               <a:t>この2つは</a:t>
             </a:r>
             <a:r>
-              <a:rPr sz="1192" b="1">
+              <a:rPr sz="1336" b="1">
                 <a:solidFill>
                   <a:srgbClr val="F4879F"/>
                 </a:solidFill>
@@ -5728,7 +5728,7 @@
               <a:t>生まれた場所で決まっていて</a:t>
             </a:r>
             <a:r>
-              <a:rPr sz="1192" b="1">
+              <a:rPr sz="1336" b="1">
                 <a:solidFill>
                   <a:srgbClr val="3F5266"/>
                 </a:solidFill>
@@ -5739,7 +5739,7 @@
               <a:t>、</a:t>
             </a:r>
             <a:r>
-              <a:rPr sz="1192" b="1">
+              <a:rPr sz="1336" b="1">
                 <a:solidFill>
                   <a:srgbClr val="3F5266"/>
                 </a:solidFill>
@@ -5768,8 +5768,8 @@
         </p:blipFill>
         <p:spPr>
           <a:xfrm>
-            <a:off x="5441632" y="467678"/>
-            <a:ext cx="173355" cy="173355"/>
+            <a:off x="5270182" y="524828"/>
+            <a:ext cx="194310" cy="194310"/>
           </a:xfrm>
           <a:prstGeom prst="rect">
             <a:avLst/>
@@ -5810,8 +5810,8 @@
         </p:nvSpPr>
         <p:spPr>
           <a:xfrm>
-            <a:off x="5419725" y="2650808"/>
-            <a:ext cx="2876550" cy="421005"/>
+            <a:off x="5246370" y="2389822"/>
+            <a:ext cx="3223260" cy="471488"/>
           </a:xfrm>
           <a:prstGeom prst="roundRect">
             <a:avLst>
@@ -5854,12 +5854,12 @@
         </p:nvSpPr>
         <p:spPr>
           <a:xfrm>
-            <a:off x="1234440" y="3223260"/>
-            <a:ext cx="11247120" cy="624840"/>
+            <a:off x="1234440" y="3030855"/>
+            <a:ext cx="11247120" cy="933450"/>
           </a:xfrm>
           <a:prstGeom prst="roundRect">
             <a:avLst>
-              <a:gd name="adj" fmla="val 22042"/>
+              <a:gd name="adj" fmla="val 16530"/>
             </a:avLst>
           </a:prstGeom>
           <a:solidFill>
@@ -5900,8 +5900,8 @@
         </p:nvSpPr>
         <p:spPr>
           <a:xfrm>
-            <a:off x="1436370" y="3369945"/>
-            <a:ext cx="343852" cy="343852"/>
+            <a:off x="1460182" y="3194685"/>
+            <a:ext cx="385762" cy="385762"/>
           </a:xfrm>
           <a:prstGeom prst="ellipse">
             <a:avLst/>
@@ -5942,12 +5942,12 @@
         </p:nvSpPr>
         <p:spPr>
           <a:xfrm>
-            <a:off x="1234440" y="3971925"/>
-            <a:ext cx="11247120" cy="624840"/>
+            <a:off x="1234440" y="4103370"/>
+            <a:ext cx="11247120" cy="698182"/>
           </a:xfrm>
           <a:prstGeom prst="roundRect">
             <a:avLst>
-              <a:gd name="adj" fmla="val 22042"/>
+              <a:gd name="adj" fmla="val 22100"/>
             </a:avLst>
           </a:prstGeom>
           <a:solidFill>
@@ -5988,8 +5988,8 @@
         </p:nvSpPr>
         <p:spPr>
           <a:xfrm>
-            <a:off x="1436370" y="4118610"/>
-            <a:ext cx="343852" cy="343852"/>
+            <a:off x="1460182" y="4267200"/>
+            <a:ext cx="385762" cy="385762"/>
           </a:xfrm>
           <a:prstGeom prst="ellipse">
             <a:avLst/>
@@ -6030,8 +6030,8 @@
         </p:nvSpPr>
         <p:spPr>
           <a:xfrm>
-            <a:off x="5305425" y="2650808"/>
-            <a:ext cx="3105150" cy="478155"/>
+            <a:off x="5634990" y="2389822"/>
+            <a:ext cx="2948940" cy="528638"/>
           </a:xfrm>
           <a:prstGeom prst="rect">
             <a:avLst/>
@@ -6046,11 +6046,11 @@
           <a:p>
             <a:pPr algn="ctr">
               <a:lnSpc>
-                <a:spcPts val="2342"/>
+                <a:spcPts val="2624"/>
               </a:lnSpc>
             </a:pPr>
             <a:r>
-              <a:rPr sz="1301" b="1">
+              <a:rPr sz="1458" b="1">
                 <a:solidFill>
                   <a:srgbClr val="FFFFFF"/>
                 </a:solidFill>
@@ -6071,8 +6071,8 @@
         </p:nvSpPr>
         <p:spPr>
           <a:xfrm>
-            <a:off x="1436370" y="3369945"/>
-            <a:ext cx="572452" cy="401002"/>
+            <a:off x="1614488" y="3194685"/>
+            <a:ext cx="460058" cy="442912"/>
           </a:xfrm>
           <a:prstGeom prst="rect">
             <a:avLst/>
@@ -6087,11 +6087,11 @@
           <a:p>
             <a:pPr algn="l">
               <a:lnSpc>
-                <a:spcPts val="2342"/>
+                <a:spcPts val="2624"/>
               </a:lnSpc>
             </a:pPr>
             <a:r>
-              <a:rPr sz="1301" b="1">
+              <a:rPr sz="1458" b="1">
                 <a:solidFill>
                   <a:srgbClr val="FFFFFF"/>
                 </a:solidFill>
@@ -6112,8 +6112,8 @@
         </p:nvSpPr>
         <p:spPr>
           <a:xfrm>
-            <a:off x="1932622" y="3356610"/>
-            <a:ext cx="10575608" cy="340995"/>
+            <a:off x="2015490" y="3179445"/>
+            <a:ext cx="10468928" cy="693420"/>
           </a:xfrm>
           <a:prstGeom prst="rect">
             <a:avLst/>
@@ -6128,11 +6128,11 @@
           <a:p>
             <a:pPr algn="l">
               <a:lnSpc>
-                <a:spcPts val="2236"/>
+                <a:spcPts val="2505"/>
               </a:lnSpc>
             </a:pPr>
             <a:r>
-              <a:rPr sz="1355" b="1">
+              <a:rPr sz="1518" b="1">
                 <a:solidFill>
                   <a:srgbClr val="3F5266"/>
                 </a:solidFill>
@@ -6143,7 +6143,7 @@
               <a:t>「奨学金・支援団体の力で進学」は</a:t>
             </a:r>
             <a:r>
-              <a:rPr sz="1355" b="1">
+              <a:rPr sz="1518" b="1">
                 <a:solidFill>
                   <a:srgbClr val="5B7FA8"/>
                 </a:solidFill>
@@ -6154,7 +6154,7 @@
               <a:t>貸与型（総額48万）</a:t>
             </a:r>
             <a:r>
-              <a:rPr sz="1355" b="1">
+              <a:rPr sz="1518" b="1">
                 <a:solidFill>
                   <a:srgbClr val="3F5266"/>
                 </a:solidFill>
@@ -6165,7 +6165,7 @@
               <a:t>。働くたびに−6万ずつ返し続けます。</a:t>
             </a:r>
             <a:r>
-              <a:rPr sz="1355" b="1">
+              <a:rPr sz="1518" b="1">
                 <a:solidFill>
                   <a:srgbClr val="5B7FA8"/>
                 </a:solidFill>
@@ -6186,8 +6186,8 @@
         </p:nvSpPr>
         <p:spPr>
           <a:xfrm>
-            <a:off x="1436370" y="4118610"/>
-            <a:ext cx="572452" cy="401002"/>
+            <a:off x="1610678" y="4267200"/>
+            <a:ext cx="462915" cy="442912"/>
           </a:xfrm>
           <a:prstGeom prst="rect">
             <a:avLst/>
@@ -6202,11 +6202,11 @@
           <a:p>
             <a:pPr algn="l">
               <a:lnSpc>
-                <a:spcPts val="2342"/>
+                <a:spcPts val="2624"/>
               </a:lnSpc>
             </a:pPr>
             <a:r>
-              <a:rPr sz="1301" b="1">
+              <a:rPr sz="1458" b="1">
                 <a:solidFill>
                   <a:srgbClr val="FFFFFF"/>
                 </a:solidFill>
@@ -6227,8 +6227,8 @@
         </p:nvSpPr>
         <p:spPr>
           <a:xfrm>
-            <a:off x="1932622" y="4105275"/>
-            <a:ext cx="10575608" cy="340995"/>
+            <a:off x="2015490" y="4251960"/>
+            <a:ext cx="10468928" cy="375285"/>
           </a:xfrm>
           <a:prstGeom prst="rect">
             <a:avLst/>
@@ -6243,11 +6243,11 @@
           <a:p>
             <a:pPr algn="l">
               <a:lnSpc>
-                <a:spcPts val="2236"/>
+                <a:spcPts val="2505"/>
               </a:lnSpc>
             </a:pPr>
             <a:r>
-              <a:rPr sz="1355" b="1">
+              <a:rPr sz="1518" b="1">
                 <a:solidFill>
                   <a:srgbClr val="3F5266"/>
                 </a:solidFill>
@@ -6258,7 +6258,7 @@
               <a:t>順位を決めるのは、お金ではなく</a:t>
             </a:r>
             <a:r>
-              <a:rPr sz="1355" b="1">
+              <a:rPr sz="1518" b="1">
                 <a:solidFill>
                   <a:srgbClr val="5B7FA8"/>
                 </a:solidFill>
@@ -6269,7 +6269,7 @@
               <a:t>♥ハッピーの数</a:t>
             </a:r>
             <a:r>
-              <a:rPr sz="1355" b="1">
+              <a:rPr sz="1518" b="1">
                 <a:solidFill>
                   <a:srgbClr val="3F5266"/>
                 </a:solidFill>
@@ -6280,7 +6280,7 @@
               <a:t>＝人生の選択肢を多く持ち、</a:t>
             </a:r>
             <a:r>
-              <a:rPr sz="1355" b="1">
+              <a:rPr sz="1518" b="1">
                 <a:solidFill>
                   <a:srgbClr val="5B7FA8"/>
                 </a:solidFill>
@@ -6301,8 +6301,8 @@
         </p:nvSpPr>
         <p:spPr>
           <a:xfrm>
-            <a:off x="4539615" y="4748212"/>
-            <a:ext cx="4635818" cy="304800"/>
+            <a:off x="4274820" y="4971098"/>
+            <a:ext cx="5166360" cy="335280"/>
           </a:xfrm>
           <a:prstGeom prst="rect">
             <a:avLst/>
@@ -6317,11 +6317,11 @@
           <a:p>
             <a:pPr algn="ctr">
               <a:lnSpc>
-                <a:spcPts val="1952"/>
+                <a:spcPts val="2187"/>
               </a:lnSpc>
             </a:pPr>
             <a:r>
-              <a:rPr sz="1084" b="1">
+              <a:rPr sz="1214" b="1">
                 <a:solidFill>
                   <a:srgbClr val="8A97A5"/>
                 </a:solidFill>
@@ -6350,8 +6350,8 @@
         </p:blipFill>
         <p:spPr>
           <a:xfrm>
-            <a:off x="5626418" y="2774632"/>
-            <a:ext cx="173355" cy="173355"/>
+            <a:off x="5477828" y="2527935"/>
+            <a:ext cx="194310" cy="194310"/>
           </a:xfrm>
           <a:prstGeom prst="rect">
             <a:avLst/>
@@ -6392,8 +6392,8 @@
         </p:nvSpPr>
         <p:spPr>
           <a:xfrm>
-            <a:off x="5975032" y="2202180"/>
-            <a:ext cx="1765935" cy="421005"/>
+            <a:off x="5868352" y="2001202"/>
+            <a:ext cx="1978342" cy="471488"/>
           </a:xfrm>
           <a:prstGeom prst="roundRect">
             <a:avLst>
@@ -6436,8 +6436,8 @@
         </p:nvSpPr>
         <p:spPr>
           <a:xfrm>
-            <a:off x="4370070" y="4096702"/>
-            <a:ext cx="1019175" cy="370522"/>
+            <a:off x="4070985" y="4124325"/>
+            <a:ext cx="1142048" cy="417195"/>
           </a:xfrm>
           <a:prstGeom prst="roundRect">
             <a:avLst>
@@ -6480,8 +6480,8 @@
         </p:nvSpPr>
         <p:spPr>
           <a:xfrm>
-            <a:off x="5485448" y="4096702"/>
-            <a:ext cx="1019175" cy="370522"/>
+            <a:off x="5320665" y="4124325"/>
+            <a:ext cx="1142048" cy="417195"/>
           </a:xfrm>
           <a:prstGeom prst="roundRect">
             <a:avLst>
@@ -6524,8 +6524,8 @@
         </p:nvSpPr>
         <p:spPr>
           <a:xfrm>
-            <a:off x="6600825" y="4096702"/>
-            <a:ext cx="753428" cy="370522"/>
+            <a:off x="6570345" y="4124325"/>
+            <a:ext cx="844868" cy="417195"/>
           </a:xfrm>
           <a:prstGeom prst="roundRect">
             <a:avLst>
@@ -6568,8 +6568,8 @@
         </p:nvSpPr>
         <p:spPr>
           <a:xfrm>
-            <a:off x="7451408" y="4096702"/>
-            <a:ext cx="779145" cy="370522"/>
+            <a:off x="7522845" y="4124325"/>
+            <a:ext cx="873442" cy="417195"/>
           </a:xfrm>
           <a:prstGeom prst="roundRect">
             <a:avLst>
@@ -6612,8 +6612,8 @@
         </p:nvSpPr>
         <p:spPr>
           <a:xfrm>
-            <a:off x="8326755" y="4096702"/>
-            <a:ext cx="1019175" cy="370522"/>
+            <a:off x="8503920" y="4124325"/>
+            <a:ext cx="1142048" cy="417195"/>
           </a:xfrm>
           <a:prstGeom prst="roundRect">
             <a:avLst>
@@ -6656,8 +6656,8 @@
         </p:nvSpPr>
         <p:spPr>
           <a:xfrm>
-            <a:off x="3524250" y="4618672"/>
-            <a:ext cx="2596515" cy="383858"/>
+            <a:off x="3122295" y="4711065"/>
+            <a:ext cx="2908935" cy="430530"/>
           </a:xfrm>
           <a:prstGeom prst="roundRect">
             <a:avLst>
@@ -6700,8 +6700,8 @@
         </p:nvSpPr>
         <p:spPr>
           <a:xfrm>
-            <a:off x="6216015" y="4618672"/>
-            <a:ext cx="1873568" cy="383858"/>
+            <a:off x="6138862" y="4711065"/>
+            <a:ext cx="2098358" cy="430530"/>
           </a:xfrm>
           <a:prstGeom prst="roundRect">
             <a:avLst>
@@ -6744,8 +6744,8 @@
         </p:nvSpPr>
         <p:spPr>
           <a:xfrm>
-            <a:off x="8185785" y="4618672"/>
-            <a:ext cx="2005965" cy="383858"/>
+            <a:off x="8345805" y="4711065"/>
+            <a:ext cx="2247900" cy="430530"/>
           </a:xfrm>
           <a:prstGeom prst="roundRect">
             <a:avLst>
@@ -6788,8 +6788,8 @@
         </p:nvSpPr>
         <p:spPr>
           <a:xfrm>
-            <a:off x="5860732" y="2202180"/>
-            <a:ext cx="1994535" cy="478155"/>
+            <a:off x="6256972" y="2001202"/>
+            <a:ext cx="1704022" cy="528638"/>
           </a:xfrm>
           <a:prstGeom prst="rect">
             <a:avLst/>
@@ -6804,11 +6804,11 @@
           <a:p>
             <a:pPr algn="ctr">
               <a:lnSpc>
-                <a:spcPts val="2342"/>
+                <a:spcPts val="2624"/>
               </a:lnSpc>
             </a:pPr>
             <a:r>
-              <a:rPr sz="1301" b="1">
+              <a:rPr sz="1458" b="1">
                 <a:solidFill>
                   <a:srgbClr val="FFFFFF"/>
                 </a:solidFill>
@@ -6829,8 +6829,8 @@
         </p:nvSpPr>
         <p:spPr>
           <a:xfrm>
-            <a:off x="5404485" y="2774632"/>
-            <a:ext cx="2906078" cy="1227772"/>
+            <a:off x="5243512" y="2643188"/>
+            <a:ext cx="3228022" cy="1368742"/>
           </a:xfrm>
           <a:prstGeom prst="rect">
             <a:avLst/>
@@ -6845,11 +6845,11 @@
           <a:p>
             <a:pPr algn="ctr">
               <a:lnSpc>
-                <a:spcPts val="9218"/>
+                <a:spcPts val="10327"/>
               </a:lnSpc>
             </a:pPr>
             <a:r>
-              <a:rPr sz="9218" b="1">
+              <a:rPr sz="10327" b="1">
                 <a:solidFill>
                   <a:srgbClr val="5B7FA8"/>
                 </a:solidFill>
@@ -6870,8 +6870,8 @@
         </p:nvSpPr>
         <p:spPr>
           <a:xfrm>
-            <a:off x="4255770" y="4096702"/>
-            <a:ext cx="1247775" cy="427672"/>
+            <a:off x="4188142" y="4124325"/>
+            <a:ext cx="1139190" cy="474345"/>
           </a:xfrm>
           <a:prstGeom prst="rect">
             <a:avLst/>
@@ -6886,7 +6886,7 @@
           <a:p>
             <a:pPr algn="ctr"/>
             <a:r>
-              <a:rPr sz="1192" b="1">
+              <a:rPr sz="1336" b="1">
                 <a:solidFill>
                   <a:srgbClr val="FFFFFF"/>
                 </a:solidFill>
@@ -6907,8 +6907,8 @@
         </p:nvSpPr>
         <p:spPr>
           <a:xfrm>
-            <a:off x="5371148" y="4096702"/>
-            <a:ext cx="1247775" cy="427672"/>
+            <a:off x="5437822" y="4124325"/>
+            <a:ext cx="1139190" cy="474345"/>
           </a:xfrm>
           <a:prstGeom prst="rect">
             <a:avLst/>
@@ -6923,7 +6923,7 @@
           <a:p>
             <a:pPr algn="ctr"/>
             <a:r>
-              <a:rPr sz="1192" b="1">
+              <a:rPr sz="1336" b="1">
                 <a:solidFill>
                   <a:srgbClr val="5B7FA8"/>
                 </a:solidFill>
@@ -6944,8 +6944,8 @@
         </p:nvSpPr>
         <p:spPr>
           <a:xfrm>
-            <a:off x="6486525" y="4096702"/>
-            <a:ext cx="982028" cy="427672"/>
+            <a:off x="6687502" y="4124325"/>
+            <a:ext cx="842010" cy="474345"/>
           </a:xfrm>
           <a:prstGeom prst="rect">
             <a:avLst/>
@@ -6960,7 +6960,7 @@
           <a:p>
             <a:pPr algn="ctr"/>
             <a:r>
-              <a:rPr sz="1192" b="1">
+              <a:rPr sz="1336" b="1">
                 <a:solidFill>
                   <a:srgbClr val="5B7FA8"/>
                 </a:solidFill>
@@ -6981,8 +6981,8 @@
         </p:nvSpPr>
         <p:spPr>
           <a:xfrm>
-            <a:off x="7337108" y="4096702"/>
-            <a:ext cx="1007745" cy="427672"/>
+            <a:off x="7640002" y="4124325"/>
+            <a:ext cx="870585" cy="474345"/>
           </a:xfrm>
           <a:prstGeom prst="rect">
             <a:avLst/>
@@ -6997,7 +6997,7 @@
           <a:p>
             <a:pPr algn="ctr"/>
             <a:r>
-              <a:rPr sz="1192" b="1">
+              <a:rPr sz="1336" b="1">
                 <a:solidFill>
                   <a:srgbClr val="5B7FA8"/>
                 </a:solidFill>
@@ -7018,8 +7018,8 @@
         </p:nvSpPr>
         <p:spPr>
           <a:xfrm>
-            <a:off x="8212455" y="4096702"/>
-            <a:ext cx="1247775" cy="427672"/>
+            <a:off x="8620125" y="4124325"/>
+            <a:ext cx="1139190" cy="474345"/>
           </a:xfrm>
           <a:prstGeom prst="rect">
             <a:avLst/>
@@ -7034,7 +7034,7 @@
           <a:p>
             <a:pPr algn="ctr"/>
             <a:r>
-              <a:rPr sz="1192" b="1">
+              <a:rPr sz="1336" b="1">
                 <a:solidFill>
                   <a:srgbClr val="5B7FA8"/>
                 </a:solidFill>
@@ -7055,8 +7055,8 @@
         </p:nvSpPr>
         <p:spPr>
           <a:xfrm>
-            <a:off x="3409950" y="4618672"/>
-            <a:ext cx="2825115" cy="441008"/>
+            <a:off x="3448050" y="4711065"/>
+            <a:ext cx="2697480" cy="487680"/>
           </a:xfrm>
           <a:prstGeom prst="rect">
             <a:avLst/>
@@ -7071,11 +7071,11 @@
           <a:p>
             <a:pPr algn="ctr">
               <a:lnSpc>
-                <a:spcPts val="2049"/>
+                <a:spcPts val="2296"/>
               </a:lnSpc>
             </a:pPr>
             <a:r>
-              <a:rPr sz="1138" b="1">
+              <a:rPr sz="1275" b="1">
                 <a:solidFill>
                   <a:srgbClr val="3F5266"/>
                 </a:solidFill>
@@ -7096,8 +7096,8 @@
         </p:nvSpPr>
         <p:spPr>
           <a:xfrm>
-            <a:off x="6101715" y="4618672"/>
-            <a:ext cx="2102168" cy="441008"/>
+            <a:off x="6464618" y="4711065"/>
+            <a:ext cx="1886902" cy="487680"/>
           </a:xfrm>
           <a:prstGeom prst="rect">
             <a:avLst/>
@@ -7112,11 +7112,11 @@
           <a:p>
             <a:pPr algn="ctr">
               <a:lnSpc>
-                <a:spcPts val="2049"/>
+                <a:spcPts val="2296"/>
               </a:lnSpc>
             </a:pPr>
             <a:r>
-              <a:rPr sz="1138" b="1">
+              <a:rPr sz="1275" b="1">
                 <a:solidFill>
                   <a:srgbClr val="3F5266"/>
                 </a:solidFill>
@@ -7137,8 +7137,8 @@
         </p:nvSpPr>
         <p:spPr>
           <a:xfrm>
-            <a:off x="8071485" y="4618672"/>
-            <a:ext cx="2234565" cy="441008"/>
+            <a:off x="8671560" y="4711065"/>
+            <a:ext cx="2036445" cy="487680"/>
           </a:xfrm>
           <a:prstGeom prst="rect">
             <a:avLst/>
@@ -7153,11 +7153,11 @@
           <a:p>
             <a:pPr algn="ctr">
               <a:lnSpc>
-                <a:spcPts val="2049"/>
+                <a:spcPts val="2296"/>
               </a:lnSpc>
             </a:pPr>
             <a:r>
-              <a:rPr sz="1138" b="1">
+              <a:rPr sz="1275" b="1">
                 <a:solidFill>
                   <a:srgbClr val="3F5266"/>
                 </a:solidFill>
@@ -7178,8 +7178,8 @@
         </p:nvSpPr>
         <p:spPr>
           <a:xfrm>
-            <a:off x="6445568" y="5209222"/>
-            <a:ext cx="824865" cy="292418"/>
+            <a:off x="6409372" y="5373052"/>
+            <a:ext cx="897255" cy="320992"/>
           </a:xfrm>
           <a:prstGeom prst="rect">
             <a:avLst/>
@@ -7194,11 +7194,11 @@
           <a:p>
             <a:pPr algn="ctr">
               <a:lnSpc>
-                <a:spcPts val="1854"/>
+                <a:spcPts val="2077"/>
               </a:lnSpc>
             </a:pPr>
             <a:r>
-              <a:rPr sz="1030" b="1">
+              <a:rPr sz="1154" b="1">
                 <a:solidFill>
                   <a:srgbClr val="8A97A5"/>
                 </a:solidFill>
@@ -7227,8 +7227,8 @@
         </p:blipFill>
         <p:spPr>
           <a:xfrm>
-            <a:off x="6181725" y="2326005"/>
-            <a:ext cx="173355" cy="173355"/>
+            <a:off x="6099810" y="2140268"/>
+            <a:ext cx="194310" cy="194310"/>
           </a:xfrm>
           <a:prstGeom prst="rect">
             <a:avLst/>
@@ -7251,8 +7251,8 @@
         </p:blipFill>
         <p:spPr>
           <a:xfrm>
-            <a:off x="3703320" y="4733925"/>
-            <a:ext cx="151448" cy="151448"/>
+            <a:off x="3323272" y="4841558"/>
+            <a:ext cx="170498" cy="170498"/>
           </a:xfrm>
           <a:prstGeom prst="rect">
             <a:avLst/>
@@ -7275,8 +7275,8 @@
         </p:blipFill>
         <p:spPr>
           <a:xfrm>
-            <a:off x="6395085" y="4733925"/>
-            <a:ext cx="151448" cy="151448"/>
+            <a:off x="6339840" y="4841558"/>
+            <a:ext cx="170498" cy="170498"/>
           </a:xfrm>
           <a:prstGeom prst="rect">
             <a:avLst/>
@@ -7299,8 +7299,8 @@
         </p:blipFill>
         <p:spPr>
           <a:xfrm>
-            <a:off x="8364855" y="4733925"/>
-            <a:ext cx="151448" cy="151448"/>
+            <a:off x="8545830" y="4841558"/>
+            <a:ext cx="170498" cy="170498"/>
           </a:xfrm>
           <a:prstGeom prst="rect">
             <a:avLst/>
@@ -7341,8 +7341,8 @@
         </p:nvSpPr>
         <p:spPr>
           <a:xfrm>
-            <a:off x="5419725" y="343852"/>
-            <a:ext cx="2876550" cy="421005"/>
+            <a:off x="5246370" y="385762"/>
+            <a:ext cx="3223260" cy="471488"/>
           </a:xfrm>
           <a:prstGeom prst="roundRect">
             <a:avLst>
@@ -7385,12 +7385,12 @@
         </p:nvSpPr>
         <p:spPr>
           <a:xfrm>
-            <a:off x="548640" y="6371272"/>
-            <a:ext cx="4142422" cy="930592"/>
+            <a:off x="548640" y="6277928"/>
+            <a:ext cx="4133850" cy="974408"/>
           </a:xfrm>
           <a:prstGeom prst="roundRect">
             <a:avLst>
-              <a:gd name="adj" fmla="val 11840"/>
+              <a:gd name="adj" fmla="val 12668"/>
             </a:avLst>
           </a:prstGeom>
           <a:solidFill>
@@ -7431,12 +7431,12 @@
         </p:nvSpPr>
         <p:spPr>
           <a:xfrm>
-            <a:off x="4787265" y="6371272"/>
-            <a:ext cx="4142422" cy="930592"/>
+            <a:off x="4791075" y="6277928"/>
+            <a:ext cx="4133850" cy="974408"/>
           </a:xfrm>
           <a:prstGeom prst="roundRect">
             <a:avLst>
-              <a:gd name="adj" fmla="val 11840"/>
+              <a:gd name="adj" fmla="val 12668"/>
             </a:avLst>
           </a:prstGeom>
           <a:solidFill>
@@ -7477,12 +7477,12 @@
         </p:nvSpPr>
         <p:spPr>
           <a:xfrm>
-            <a:off x="9024938" y="6371272"/>
-            <a:ext cx="4142422" cy="930592"/>
+            <a:off x="9032558" y="6277928"/>
+            <a:ext cx="4133850" cy="974408"/>
           </a:xfrm>
           <a:prstGeom prst="roundRect">
             <a:avLst>
-              <a:gd name="adj" fmla="val 11840"/>
+              <a:gd name="adj" fmla="val 12668"/>
             </a:avLst>
           </a:prstGeom>
           <a:solidFill>
@@ -7531,8 +7531,8 @@
         </p:blipFill>
         <p:spPr>
           <a:xfrm>
-            <a:off x="2580322" y="917258"/>
-            <a:ext cx="8555355" cy="5343525"/>
+            <a:off x="2754630" y="1027748"/>
+            <a:ext cx="8207692" cy="5126355"/>
           </a:xfrm>
           <a:prstGeom prst="rect">
             <a:avLst/>
@@ -7547,8 +7547,8 @@
         </p:nvSpPr>
         <p:spPr>
           <a:xfrm>
-            <a:off x="5305425" y="343852"/>
-            <a:ext cx="3105150" cy="478155"/>
+            <a:off x="5634990" y="385762"/>
+            <a:ext cx="2948940" cy="528638"/>
           </a:xfrm>
           <a:prstGeom prst="rect">
             <a:avLst/>
@@ -7563,11 +7563,11 @@
           <a:p>
             <a:pPr algn="ctr">
               <a:lnSpc>
-                <a:spcPts val="2342"/>
+                <a:spcPts val="2624"/>
               </a:lnSpc>
             </a:pPr>
             <a:r>
-              <a:rPr sz="1301" b="1">
+              <a:rPr sz="1458" b="1">
                 <a:solidFill>
                   <a:srgbClr val="FFFFFF"/>
                 </a:solidFill>
@@ -7588,8 +7588,8 @@
         </p:nvSpPr>
         <p:spPr>
           <a:xfrm>
-            <a:off x="695325" y="6456045"/>
-            <a:ext cx="4076700" cy="269558"/>
+            <a:off x="960120" y="6372225"/>
+            <a:ext cx="3788092" cy="294322"/>
           </a:xfrm>
           <a:prstGeom prst="rect">
             <a:avLst/>
@@ -7604,11 +7604,11 @@
           <a:p>
             <a:pPr algn="l">
               <a:lnSpc>
-                <a:spcPts val="1670"/>
+                <a:spcPts val="1871"/>
               </a:lnSpc>
             </a:pPr>
             <a:r>
-              <a:rPr sz="1192" b="1">
+              <a:rPr sz="1336" b="1">
                 <a:solidFill>
                   <a:srgbClr val="3F5266"/>
                 </a:solidFill>
@@ -7629,8 +7629,8 @@
         </p:nvSpPr>
         <p:spPr>
           <a:xfrm>
-            <a:off x="4933950" y="6456045"/>
-            <a:ext cx="4076700" cy="269558"/>
+            <a:off x="5201602" y="6372225"/>
+            <a:ext cx="3788092" cy="294322"/>
           </a:xfrm>
           <a:prstGeom prst="rect">
             <a:avLst/>
@@ -7645,11 +7645,11 @@
           <a:p>
             <a:pPr algn="l">
               <a:lnSpc>
-                <a:spcPts val="1670"/>
+                <a:spcPts val="1871"/>
               </a:lnSpc>
             </a:pPr>
             <a:r>
-              <a:rPr sz="1192" b="1">
+              <a:rPr sz="1336" b="1">
                 <a:solidFill>
                   <a:srgbClr val="3F5266"/>
                 </a:solidFill>
@@ -7670,8 +7670,8 @@
         </p:nvSpPr>
         <p:spPr>
           <a:xfrm>
-            <a:off x="9172575" y="6456045"/>
-            <a:ext cx="4076700" cy="269558"/>
+            <a:off x="9444038" y="6372225"/>
+            <a:ext cx="3788092" cy="294322"/>
           </a:xfrm>
           <a:prstGeom prst="rect">
             <a:avLst/>
@@ -7686,11 +7686,11 @@
           <a:p>
             <a:pPr algn="l">
               <a:lnSpc>
-                <a:spcPts val="1670"/>
+                <a:spcPts val="1871"/>
               </a:lnSpc>
             </a:pPr>
             <a:r>
-              <a:rPr sz="1192" b="1">
+              <a:rPr sz="1336" b="1">
                 <a:solidFill>
                   <a:srgbClr val="3F5266"/>
                 </a:solidFill>
@@ -7719,8 +7719,8 @@
         </p:blipFill>
         <p:spPr>
           <a:xfrm>
-            <a:off x="5626418" y="467678"/>
-            <a:ext cx="173355" cy="173355"/>
+            <a:off x="5477828" y="524828"/>
+            <a:ext cx="194310" cy="194310"/>
           </a:xfrm>
           <a:prstGeom prst="rect">
             <a:avLst/>
@@ -7743,8 +7743,8 @@
         </p:blipFill>
         <p:spPr>
           <a:xfrm>
-            <a:off x="695325" y="6482715"/>
-            <a:ext cx="159068" cy="159068"/>
+            <a:off x="712470" y="6401752"/>
+            <a:ext cx="178118" cy="178118"/>
           </a:xfrm>
           <a:prstGeom prst="rect">
             <a:avLst/>
@@ -7767,8 +7767,8 @@
         </p:blipFill>
         <p:spPr>
           <a:xfrm>
-            <a:off x="4933950" y="6482715"/>
-            <a:ext cx="159068" cy="159068"/>
+            <a:off x="4954905" y="6401752"/>
+            <a:ext cx="178118" cy="178118"/>
           </a:xfrm>
           <a:prstGeom prst="rect">
             <a:avLst/>
@@ -7791,8 +7791,8 @@
         </p:blipFill>
         <p:spPr>
           <a:xfrm>
-            <a:off x="9172575" y="6482715"/>
-            <a:ext cx="159068" cy="159068"/>
+            <a:off x="9196388" y="6401752"/>
+            <a:ext cx="178118" cy="178118"/>
           </a:xfrm>
           <a:prstGeom prst="rect">
             <a:avLst/>
@@ -7833,8 +7833,8 @@
         </p:nvSpPr>
         <p:spPr>
           <a:xfrm>
-            <a:off x="5419725" y="343852"/>
-            <a:ext cx="2876550" cy="421005"/>
+            <a:off x="5246370" y="385762"/>
+            <a:ext cx="3223260" cy="471488"/>
           </a:xfrm>
           <a:prstGeom prst="roundRect">
             <a:avLst>
@@ -7877,8 +7877,8 @@
         </p:nvSpPr>
         <p:spPr>
           <a:xfrm>
-            <a:off x="3275648" y="6094095"/>
-            <a:ext cx="4391978" cy="54292"/>
+            <a:off x="2843212" y="5905500"/>
+            <a:ext cx="4922520" cy="54292"/>
           </a:xfrm>
           <a:prstGeom prst="rect">
             <a:avLst/>
@@ -7921,8 +7921,8 @@
         </p:nvSpPr>
         <p:spPr>
           <a:xfrm>
-            <a:off x="6557962" y="6833235"/>
-            <a:ext cx="1796415" cy="54292"/>
+            <a:off x="6522720" y="6732270"/>
+            <a:ext cx="2013585" cy="54292"/>
           </a:xfrm>
           <a:prstGeom prst="rect">
             <a:avLst/>
@@ -7965,8 +7965,8 @@
         </p:nvSpPr>
         <p:spPr>
           <a:xfrm>
-            <a:off x="4433888" y="7201852"/>
-            <a:ext cx="2451735" cy="54292"/>
+            <a:off x="4141470" y="7146608"/>
+            <a:ext cx="2747962" cy="54292"/>
           </a:xfrm>
           <a:prstGeom prst="rect">
             <a:avLst/>
@@ -8017,8 +8017,8 @@
         </p:blipFill>
         <p:spPr>
           <a:xfrm>
-            <a:off x="3017520" y="917258"/>
-            <a:ext cx="7680008" cy="4797742"/>
+            <a:off x="3298508" y="1027748"/>
+            <a:ext cx="7118032" cy="4446270"/>
           </a:xfrm>
           <a:prstGeom prst="rect">
             <a:avLst/>
@@ -8033,8 +8033,8 @@
         </p:nvSpPr>
         <p:spPr>
           <a:xfrm>
-            <a:off x="5305425" y="343852"/>
-            <a:ext cx="3105150" cy="478155"/>
+            <a:off x="5634990" y="385762"/>
+            <a:ext cx="2948940" cy="528638"/>
           </a:xfrm>
           <a:prstGeom prst="rect">
             <a:avLst/>
@@ -8049,11 +8049,11 @@
           <a:p>
             <a:pPr algn="ctr">
               <a:lnSpc>
-                <a:spcPts val="2342"/>
+                <a:spcPts val="2624"/>
               </a:lnSpc>
             </a:pPr>
             <a:r>
-              <a:rPr sz="1301" b="1">
+              <a:rPr sz="1458" b="1">
                 <a:solidFill>
                   <a:srgbClr val="FFFFFF"/>
                 </a:solidFill>
@@ -8074,8 +8074,8 @@
         </p:nvSpPr>
         <p:spPr>
           <a:xfrm>
-            <a:off x="2450782" y="5824538"/>
-            <a:ext cx="8813482" cy="1534478"/>
+            <a:off x="1932622" y="5597842"/>
+            <a:ext cx="9849802" cy="1712595"/>
           </a:xfrm>
           <a:prstGeom prst="rect">
             <a:avLst/>
@@ -8090,11 +8090,11 @@
           <a:p>
             <a:pPr algn="ctr">
               <a:lnSpc>
-                <a:spcPts val="2909"/>
+                <a:spcPts val="3259"/>
               </a:lnSpc>
             </a:pPr>
             <a:r>
-              <a:rPr sz="1572" b="1">
+              <a:rPr sz="1761" b="1">
                 <a:solidFill>
                   <a:srgbClr val="3F5266"/>
                 </a:solidFill>
@@ -8105,7 +8105,7 @@
               <a:t>誰のネタバラシでも、自分の画面から開けます。</a:t>
             </a:r>
             <a:r>
-              <a:rPr sz="1572" b="1">
+              <a:rPr sz="1761" b="1">
                 <a:solidFill>
                   <a:srgbClr val="3F5266"/>
                 </a:solidFill>
@@ -8116,7 +8116,7 @@
               <a:t>19年間の扉が全部ならびます。</a:t>
             </a:r>
             <a:r>
-              <a:rPr sz="1572" b="1">
+              <a:rPr sz="1761" b="1">
                 <a:solidFill>
                   <a:srgbClr val="4CA872"/>
                 </a:solidFill>
@@ -8127,7 +8127,7 @@
               <a:t>えらんだ</a:t>
             </a:r>
             <a:r>
-              <a:rPr sz="1572" b="1">
+              <a:rPr sz="1761" b="1">
                 <a:solidFill>
                   <a:srgbClr val="4CA872"/>
                 </a:solidFill>
@@ -8138,7 +8138,7 @@
               <a:t>開けられた</a:t>
             </a:r>
             <a:r>
-              <a:rPr sz="1572" b="1">
+              <a:rPr sz="1761" b="1">
                 <a:solidFill>
                   <a:srgbClr val="C98A3C"/>
                 </a:solidFill>
@@ -8149,7 +8149,7 @@
               <a:t>カギ不足</a:t>
             </a:r>
             <a:r>
-              <a:rPr sz="1572" b="1">
+              <a:rPr sz="1761" b="1">
                 <a:solidFill>
                   <a:srgbClr val="7E6BC4"/>
                 </a:solidFill>
@@ -8160,7 +8160,7 @@
               <a:t>見えてなかった</a:t>
             </a:r>
             <a:r>
-              <a:rPr sz="1572" b="1">
+              <a:rPr sz="1761" b="1">
                 <a:solidFill>
                   <a:srgbClr val="3F5266"/>
                 </a:solidFill>
@@ -8172,7 +8172,7 @@
       紫の行が、ゲーム中「？？？」だったもの。</a:t>
             </a:r>
             <a:r>
-              <a:rPr sz="1572" b="1">
+              <a:rPr sz="1761" b="1">
                 <a:solidFill>
                   <a:srgbClr val="3F5266"/>
                 </a:solidFill>
@@ -8183,7 +8183,7 @@
               <a:t>本当は何だったのか</a:t>
             </a:r>
             <a:r>
-              <a:rPr sz="1572" b="1">
+              <a:rPr sz="1761" b="1">
                 <a:solidFill>
                   <a:srgbClr val="3F5266"/>
                 </a:solidFill>
@@ -8194,7 +8194,7 @@
               <a:t>が、ここで初めて分かります。</a:t>
             </a:r>
             <a:r>
-              <a:rPr sz="1572" b="1">
+              <a:rPr sz="1761" b="1">
                 <a:solidFill>
                   <a:srgbClr val="3F5266"/>
                 </a:solidFill>
@@ -8205,7 +8205,7 @@
               <a:t>まず、自分の</a:t>
             </a:r>
             <a:r>
-              <a:rPr sz="1572" b="1">
+              <a:rPr sz="1761" b="1">
                 <a:solidFill>
                   <a:srgbClr val="3F5266"/>
                 </a:solidFill>
@@ -8216,7 +8216,7 @@
               <a:t>「見えていなかった ◯枚」</a:t>
             </a:r>
             <a:r>
-              <a:rPr sz="1572" b="1">
+              <a:rPr sz="1761" b="1">
                 <a:solidFill>
                   <a:srgbClr val="3F5266"/>
                 </a:solidFill>
@@ -8245,8 +8245,8 @@
         </p:blipFill>
         <p:spPr>
           <a:xfrm>
-            <a:off x="5626418" y="467678"/>
-            <a:ext cx="173355" cy="173355"/>
+            <a:off x="5477828" y="524828"/>
+            <a:ext cx="194310" cy="194310"/>
           </a:xfrm>
           <a:prstGeom prst="rect">
             <a:avLst/>
@@ -8269,8 +8269,8 @@
         </p:blipFill>
         <p:spPr>
           <a:xfrm>
-            <a:off x="4058602" y="6282690"/>
-            <a:ext cx="209550" cy="209550"/>
+            <a:off x="3720465" y="6107430"/>
+            <a:ext cx="235268" cy="235268"/>
           </a:xfrm>
           <a:prstGeom prst="rect">
             <a:avLst/>
@@ -8293,8 +8293,8 @@
         </p:blipFill>
         <p:spPr>
           <a:xfrm>
-            <a:off x="5322570" y="6282690"/>
-            <a:ext cx="209550" cy="209550"/>
+            <a:off x="5136832" y="6107430"/>
+            <a:ext cx="235268" cy="235268"/>
           </a:xfrm>
           <a:prstGeom prst="rect">
             <a:avLst/>
@@ -8317,8 +8317,8 @@
         </p:blipFill>
         <p:spPr>
           <a:xfrm>
-            <a:off x="6786562" y="6282690"/>
-            <a:ext cx="209550" cy="209550"/>
+            <a:off x="6777038" y="6107430"/>
+            <a:ext cx="235268" cy="235268"/>
           </a:xfrm>
           <a:prstGeom prst="rect">
             <a:avLst/>
@@ -8341,8 +8341,8 @@
         </p:blipFill>
         <p:spPr>
           <a:xfrm>
-            <a:off x="8049578" y="6282690"/>
-            <a:ext cx="209550" cy="209550"/>
+            <a:off x="8193405" y="6107430"/>
+            <a:ext cx="235268" cy="235268"/>
           </a:xfrm>
           <a:prstGeom prst="rect">
             <a:avLst/>
@@ -8383,8 +8383,8 @@
         </p:nvSpPr>
         <p:spPr>
           <a:xfrm>
-            <a:off x="6355080" y="2617470"/>
-            <a:ext cx="1006792" cy="407670"/>
+            <a:off x="6294120" y="2467928"/>
+            <a:ext cx="1127760" cy="456248"/>
           </a:xfrm>
           <a:prstGeom prst="roundRect">
             <a:avLst>
@@ -8427,8 +8427,8 @@
         </p:nvSpPr>
         <p:spPr>
           <a:xfrm>
-            <a:off x="6240780" y="2617470"/>
-            <a:ext cx="1235392" cy="464820"/>
+            <a:off x="6441758" y="2467928"/>
+            <a:ext cx="1093470" cy="513398"/>
           </a:xfrm>
           <a:prstGeom prst="rect">
             <a:avLst/>
@@ -8443,11 +8443,11 @@
           <a:p>
             <a:pPr algn="ctr">
               <a:lnSpc>
-                <a:spcPts val="2342"/>
+                <a:spcPts val="2624"/>
               </a:lnSpc>
             </a:pPr>
             <a:r>
-              <a:rPr sz="1301" b="1">
+              <a:rPr sz="1458" b="1">
                 <a:solidFill>
                   <a:srgbClr val="FFFFFF"/>
                 </a:solidFill>
@@ -8468,8 +8468,8 @@
         </p:nvSpPr>
         <p:spPr>
           <a:xfrm>
-            <a:off x="3039428" y="3175635"/>
-            <a:ext cx="7637145" cy="1511618"/>
+            <a:off x="2593658" y="3093720"/>
+            <a:ext cx="8528685" cy="1685925"/>
           </a:xfrm>
           <a:prstGeom prst="rect">
             <a:avLst/>
@@ -8484,11 +8484,11 @@
           <a:p>
             <a:pPr algn="ctr">
               <a:lnSpc>
-                <a:spcPts val="3817"/>
+                <a:spcPts val="4276"/>
               </a:lnSpc>
             </a:pPr>
             <a:r>
-              <a:rPr sz="2385" b="1">
+              <a:rPr sz="2673" b="1">
                 <a:solidFill>
                   <a:srgbClr val="3F5266"/>
                 </a:solidFill>
@@ -8499,7 +8499,7 @@
               <a:t>結果画面で、</a:t>
             </a:r>
             <a:r>
-              <a:rPr sz="2385" b="1">
+              <a:rPr sz="2673" b="1">
                 <a:solidFill>
                   <a:srgbClr val="5B7FA8"/>
                 </a:solidFill>
@@ -8510,7 +8510,7 @@
               <a:t>★の数が近い人</a:t>
             </a:r>
             <a:r>
-              <a:rPr sz="2385" b="1">
+              <a:rPr sz="2673" b="1">
                 <a:solidFill>
                   <a:srgbClr val="3F5266"/>
                 </a:solidFill>
@@ -8521,7 +8521,7 @@
               <a:t>を2人さがしてください。</a:t>
             </a:r>
             <a:r>
-              <a:rPr sz="2385" b="1">
+              <a:rPr sz="2673" b="1">
                 <a:solidFill>
                   <a:srgbClr val="3F5266"/>
                 </a:solidFill>
@@ -8532,7 +8532,7 @@
               <a:t>おかねの増え方は、同じでしたか？</a:t>
             </a:r>
             <a:r>
-              <a:rPr sz="2385" b="1">
+              <a:rPr sz="2673" b="1">
                 <a:solidFill>
                   <a:srgbClr val="3F5266"/>
                 </a:solidFill>
@@ -8543,7 +8543,7 @@
               <a:t>それは本人の</a:t>
             </a:r>
             <a:r>
-              <a:rPr sz="2385" b="1">
+              <a:rPr sz="2673" b="1">
                 <a:solidFill>
                   <a:srgbClr val="5B7FA8"/>
                 </a:solidFill>
@@ -8554,7 +8554,7 @@
               <a:t>努力のちがい</a:t>
             </a:r>
             <a:r>
-              <a:rPr sz="2385" b="1">
+              <a:rPr sz="2673" b="1">
                 <a:solidFill>
                   <a:srgbClr val="3F5266"/>
                 </a:solidFill>
@@ -8575,8 +8575,8 @@
         </p:nvSpPr>
         <p:spPr>
           <a:xfrm>
-            <a:off x="4180522" y="4781550"/>
-            <a:ext cx="5355908" cy="304800"/>
+            <a:off x="4110990" y="4892992"/>
+            <a:ext cx="5733098" cy="335280"/>
           </a:xfrm>
           <a:prstGeom prst="rect">
             <a:avLst/>
@@ -8591,11 +8591,11 @@
           <a:p>
             <a:pPr algn="ctr">
               <a:lnSpc>
-                <a:spcPts val="1952"/>
+                <a:spcPts val="2187"/>
               </a:lnSpc>
             </a:pPr>
             <a:r>
-              <a:rPr sz="1084" b="1">
+              <a:rPr sz="1214" b="1">
                 <a:solidFill>
                   <a:srgbClr val="8A97A5"/>
                 </a:solidFill>
@@ -8624,8 +8624,8 @@
         </p:blipFill>
         <p:spPr>
           <a:xfrm>
-            <a:off x="4294822" y="4832985"/>
-            <a:ext cx="144780" cy="144780"/>
+            <a:off x="3986212" y="4951095"/>
+            <a:ext cx="161925" cy="161925"/>
           </a:xfrm>
           <a:prstGeom prst="rect">
             <a:avLst/>
@@ -8666,8 +8666,8 @@
         </p:nvSpPr>
         <p:spPr>
           <a:xfrm>
-            <a:off x="6352222" y="2617470"/>
-            <a:ext cx="1012508" cy="407670"/>
+            <a:off x="6291262" y="2467928"/>
+            <a:ext cx="1133475" cy="456248"/>
           </a:xfrm>
           <a:prstGeom prst="roundRect">
             <a:avLst>
@@ -8710,8 +8710,8 @@
         </p:nvSpPr>
         <p:spPr>
           <a:xfrm>
-            <a:off x="6237922" y="2617470"/>
-            <a:ext cx="1241108" cy="464820"/>
+            <a:off x="6438900" y="2467928"/>
+            <a:ext cx="1100138" cy="513398"/>
           </a:xfrm>
           <a:prstGeom prst="rect">
             <a:avLst/>
@@ -8726,11 +8726,11 @@
           <a:p>
             <a:pPr algn="ctr">
               <a:lnSpc>
-                <a:spcPts val="2342"/>
+                <a:spcPts val="2624"/>
               </a:lnSpc>
             </a:pPr>
             <a:r>
-              <a:rPr sz="1301" b="1">
+              <a:rPr sz="1458" b="1">
                 <a:solidFill>
                   <a:srgbClr val="FFFFFF"/>
                 </a:solidFill>
@@ -8751,8 +8751,8 @@
         </p:nvSpPr>
         <p:spPr>
           <a:xfrm>
-            <a:off x="3108008" y="3175635"/>
-            <a:ext cx="7500938" cy="1511618"/>
+            <a:off x="2669858" y="3093720"/>
+            <a:ext cx="8376285" cy="1685925"/>
           </a:xfrm>
           <a:prstGeom prst="rect">
             <a:avLst/>
@@ -8767,11 +8767,11 @@
           <a:p>
             <a:pPr algn="ctr">
               <a:lnSpc>
-                <a:spcPts val="3817"/>
+                <a:spcPts val="4276"/>
               </a:lnSpc>
             </a:pPr>
             <a:r>
-              <a:rPr sz="2385" b="1">
+              <a:rPr sz="2673" b="1">
                 <a:solidFill>
                   <a:srgbClr val="3F5266"/>
                 </a:solidFill>
@@ -8782,7 +8782,7 @@
               <a:t>自分のカードの</a:t>
             </a:r>
             <a:r>
-              <a:rPr sz="2385" b="1">
+              <a:rPr sz="2673" b="1">
                 <a:solidFill>
                   <a:srgbClr val="5B7FA8"/>
                 </a:solidFill>
@@ -8793,7 +8793,7 @@
               <a:t>「見えていなかった ◯」</a:t>
             </a:r>
             <a:r>
-              <a:rPr sz="2385" b="1">
+              <a:rPr sz="2673" b="1">
                 <a:solidFill>
                   <a:srgbClr val="3F5266"/>
                 </a:solidFill>
@@ -8804,7 +8804,7 @@
               <a:t>を</a:t>
             </a:r>
             <a:r>
-              <a:rPr sz="2385" b="1">
+              <a:rPr sz="2673" b="1">
                 <a:solidFill>
                   <a:srgbClr val="3F5266"/>
                 </a:solidFill>
@@ -8815,7 +8815,7 @@
               <a:t>読み上げてください。</a:t>
             </a:r>
             <a:r>
-              <a:rPr sz="2385" b="1">
+              <a:rPr sz="2673" b="1">
                 <a:solidFill>
                   <a:srgbClr val="3F5266"/>
                 </a:solidFill>
@@ -8826,7 +8826,7 @@
               <a:t>チームで数字がちがいます。</a:t>
             </a:r>
             <a:r>
-              <a:rPr sz="2385" b="1">
+              <a:rPr sz="2673" b="1">
                 <a:solidFill>
                   <a:srgbClr val="5B7FA8"/>
                 </a:solidFill>
@@ -8837,7 +8837,7 @@
               <a:t>何が</a:t>
             </a:r>
             <a:r>
-              <a:rPr sz="2385" b="1">
+              <a:rPr sz="2673" b="1">
                 <a:solidFill>
                   <a:srgbClr val="3F5266"/>
                 </a:solidFill>
@@ -8858,8 +8858,8 @@
         </p:nvSpPr>
         <p:spPr>
           <a:xfrm>
-            <a:off x="5328285" y="4781550"/>
-            <a:ext cx="3058478" cy="304800"/>
+            <a:off x="5396865" y="4892992"/>
+            <a:ext cx="3160395" cy="335280"/>
           </a:xfrm>
           <a:prstGeom prst="rect">
             <a:avLst/>
@@ -8874,11 +8874,11 @@
           <a:p>
             <a:pPr algn="ctr">
               <a:lnSpc>
-                <a:spcPts val="1952"/>
+                <a:spcPts val="2187"/>
               </a:lnSpc>
             </a:pPr>
             <a:r>
-              <a:rPr sz="1084" b="1">
+              <a:rPr sz="1214" b="1">
                 <a:solidFill>
                   <a:srgbClr val="8A97A5"/>
                 </a:solidFill>
@@ -8907,8 +8907,8 @@
         </p:blipFill>
         <p:spPr>
           <a:xfrm>
-            <a:off x="5442585" y="4832985"/>
-            <a:ext cx="144780" cy="144780"/>
+            <a:off x="5272088" y="4951095"/>
+            <a:ext cx="161925" cy="161925"/>
           </a:xfrm>
           <a:prstGeom prst="rect">
             <a:avLst/>
@@ -8949,8 +8949,8 @@
         </p:nvSpPr>
         <p:spPr>
           <a:xfrm>
-            <a:off x="6349365" y="2617470"/>
-            <a:ext cx="1017270" cy="407670"/>
+            <a:off x="6288405" y="2467928"/>
+            <a:ext cx="1139190" cy="456248"/>
           </a:xfrm>
           <a:prstGeom prst="roundRect">
             <a:avLst>
@@ -8993,8 +8993,8 @@
         </p:nvSpPr>
         <p:spPr>
           <a:xfrm>
-            <a:off x="6235065" y="2617470"/>
-            <a:ext cx="1245870" cy="464820"/>
+            <a:off x="6436042" y="2467928"/>
+            <a:ext cx="1105852" cy="513398"/>
           </a:xfrm>
           <a:prstGeom prst="rect">
             <a:avLst/>
@@ -9009,11 +9009,11 @@
           <a:p>
             <a:pPr algn="ctr">
               <a:lnSpc>
-                <a:spcPts val="2342"/>
+                <a:spcPts val="2624"/>
               </a:lnSpc>
             </a:pPr>
             <a:r>
-              <a:rPr sz="1301" b="1">
+              <a:rPr sz="1458" b="1">
                 <a:solidFill>
                   <a:srgbClr val="FFFFFF"/>
                 </a:solidFill>
@@ -9034,8 +9034,8 @@
         </p:nvSpPr>
         <p:spPr>
           <a:xfrm>
-            <a:off x="3410902" y="3175635"/>
-            <a:ext cx="6894195" cy="1511618"/>
+            <a:off x="3009900" y="3093720"/>
+            <a:ext cx="7697152" cy="1685925"/>
           </a:xfrm>
           <a:prstGeom prst="rect">
             <a:avLst/>
@@ -9050,11 +9050,11 @@
           <a:p>
             <a:pPr algn="ctr">
               <a:lnSpc>
-                <a:spcPts val="3817"/>
+                <a:spcPts val="4276"/>
               </a:lnSpc>
             </a:pPr>
             <a:r>
-              <a:rPr sz="2385" b="1">
+              <a:rPr sz="2673" b="1">
                 <a:solidFill>
                   <a:srgbClr val="3F5266"/>
                 </a:solidFill>
@@ -9065,7 +9065,7 @@
               <a:t>ウガンダの遺児の家庭だった人のネタバラシを、</a:t>
             </a:r>
             <a:r>
-              <a:rPr sz="2385" b="1">
+              <a:rPr sz="2673" b="1">
                 <a:solidFill>
                   <a:srgbClr val="5B7FA8"/>
                 </a:solidFill>
@@ -9076,7 +9076,7 @@
               <a:t>全員が自分の画面で</a:t>
             </a:r>
             <a:r>
-              <a:rPr sz="2385" b="1">
+              <a:rPr sz="2673" b="1">
                 <a:solidFill>
                   <a:srgbClr val="3F5266"/>
                 </a:solidFill>
@@ -9087,7 +9087,7 @@
               <a:t>開いてください。</a:t>
             </a:r>
             <a:r>
-              <a:rPr sz="2385" b="1">
+              <a:rPr sz="2673" b="1">
                 <a:solidFill>
                   <a:srgbClr val="3F5266"/>
                 </a:solidFill>
@@ -9098,7 +9098,7 @@
               <a:t>その人には、何が</a:t>
             </a:r>
             <a:r>
-              <a:rPr sz="2385" b="1">
+              <a:rPr sz="2673" b="1">
                 <a:solidFill>
                   <a:srgbClr val="5B7FA8"/>
                 </a:solidFill>
@@ -9109,7 +9109,7 @@
               <a:t>「見えて」</a:t>
             </a:r>
             <a:r>
-              <a:rPr sz="2385" b="1">
+              <a:rPr sz="2673" b="1">
                 <a:solidFill>
                   <a:srgbClr val="3F5266"/>
                 </a:solidFill>
@@ -9130,8 +9130,8 @@
         </p:nvSpPr>
         <p:spPr>
           <a:xfrm>
-            <a:off x="4709160" y="4781550"/>
-            <a:ext cx="4298632" cy="304800"/>
+            <a:off x="4702492" y="4892992"/>
+            <a:ext cx="4549140" cy="335280"/>
           </a:xfrm>
           <a:prstGeom prst="rect">
             <a:avLst/>
@@ -9146,11 +9146,11 @@
           <a:p>
             <a:pPr algn="ctr">
               <a:lnSpc>
-                <a:spcPts val="1952"/>
+                <a:spcPts val="2187"/>
               </a:lnSpc>
             </a:pPr>
             <a:r>
-              <a:rPr sz="1084" b="1">
+              <a:rPr sz="1214" b="1">
                 <a:solidFill>
                   <a:srgbClr val="8A97A5"/>
                 </a:solidFill>
@@ -9179,8 +9179,8 @@
         </p:blipFill>
         <p:spPr>
           <a:xfrm>
-            <a:off x="4823460" y="4832985"/>
-            <a:ext cx="144780" cy="144780"/>
+            <a:off x="4577715" y="4951095"/>
+            <a:ext cx="161925" cy="161925"/>
           </a:xfrm>
           <a:prstGeom prst="rect">
             <a:avLst/>
@@ -9221,8 +9221,8 @@
         </p:nvSpPr>
         <p:spPr>
           <a:xfrm>
-            <a:off x="5689282" y="1844040"/>
-            <a:ext cx="2338388" cy="421005"/>
+            <a:off x="5548312" y="1602105"/>
+            <a:ext cx="2619375" cy="471488"/>
           </a:xfrm>
           <a:prstGeom prst="roundRect">
             <a:avLst>
@@ -9265,12 +9265,12 @@
         </p:nvSpPr>
         <p:spPr>
           <a:xfrm>
-            <a:off x="2057400" y="2417445"/>
-            <a:ext cx="9601200" cy="501015"/>
+            <a:off x="2057400" y="2243138"/>
+            <a:ext cx="9601200" cy="561022"/>
           </a:xfrm>
           <a:prstGeom prst="roundRect">
             <a:avLst>
-              <a:gd name="adj" fmla="val 21992"/>
+              <a:gd name="adj" fmla="val 22003"/>
             </a:avLst>
           </a:prstGeom>
           <a:solidFill>
@@ -9309,12 +9309,12 @@
         </p:nvSpPr>
         <p:spPr>
           <a:xfrm>
-            <a:off x="2057400" y="2993708"/>
-            <a:ext cx="9601200" cy="501015"/>
+            <a:off x="2057400" y="2889885"/>
+            <a:ext cx="9601200" cy="561022"/>
           </a:xfrm>
           <a:prstGeom prst="roundRect">
             <a:avLst>
-              <a:gd name="adj" fmla="val 21992"/>
+              <a:gd name="adj" fmla="val 22003"/>
             </a:avLst>
           </a:prstGeom>
           <a:solidFill>
@@ -9353,12 +9353,12 @@
         </p:nvSpPr>
         <p:spPr>
           <a:xfrm>
-            <a:off x="2057400" y="3570922"/>
-            <a:ext cx="9601200" cy="501015"/>
+            <a:off x="2057400" y="3535680"/>
+            <a:ext cx="9601200" cy="561022"/>
           </a:xfrm>
           <a:prstGeom prst="roundRect">
             <a:avLst>
-              <a:gd name="adj" fmla="val 21992"/>
+              <a:gd name="adj" fmla="val 22003"/>
             </a:avLst>
           </a:prstGeom>
           <a:solidFill>
@@ -9397,12 +9397,12 @@
         </p:nvSpPr>
         <p:spPr>
           <a:xfrm>
-            <a:off x="2057400" y="4147185"/>
-            <a:ext cx="9601200" cy="501015"/>
+            <a:off x="2057400" y="4182428"/>
+            <a:ext cx="9601200" cy="561022"/>
           </a:xfrm>
           <a:prstGeom prst="roundRect">
             <a:avLst>
-              <a:gd name="adj" fmla="val 21992"/>
+              <a:gd name="adj" fmla="val 22003"/>
             </a:avLst>
           </a:prstGeom>
           <a:solidFill>
@@ -9441,12 +9441,12 @@
         </p:nvSpPr>
         <p:spPr>
           <a:xfrm>
-            <a:off x="2057400" y="4724400"/>
-            <a:ext cx="9601200" cy="501015"/>
+            <a:off x="2057400" y="4828222"/>
+            <a:ext cx="9601200" cy="561022"/>
           </a:xfrm>
           <a:prstGeom prst="roundRect">
             <a:avLst>
-              <a:gd name="adj" fmla="val 21992"/>
+              <a:gd name="adj" fmla="val 22003"/>
             </a:avLst>
           </a:prstGeom>
           <a:solidFill>
@@ -9485,12 +9485,12 @@
         </p:nvSpPr>
         <p:spPr>
           <a:xfrm>
-            <a:off x="2057400" y="5300662"/>
-            <a:ext cx="9601200" cy="501015"/>
+            <a:off x="2057400" y="5474970"/>
+            <a:ext cx="9601200" cy="561022"/>
           </a:xfrm>
           <a:prstGeom prst="roundRect">
             <a:avLst>
-              <a:gd name="adj" fmla="val 21992"/>
+              <a:gd name="adj" fmla="val 22003"/>
             </a:avLst>
           </a:prstGeom>
           <a:solidFill>
@@ -9529,8 +9529,8 @@
         </p:nvSpPr>
         <p:spPr>
           <a:xfrm>
-            <a:off x="5574982" y="1844040"/>
-            <a:ext cx="2566988" cy="478155"/>
+            <a:off x="5936932" y="1602105"/>
+            <a:ext cx="2346008" cy="528638"/>
           </a:xfrm>
           <a:prstGeom prst="rect">
             <a:avLst/>
@@ -9545,11 +9545,11 @@
           <a:p>
             <a:pPr algn="ctr">
               <a:lnSpc>
-                <a:spcPts val="2342"/>
+                <a:spcPts val="2624"/>
               </a:lnSpc>
             </a:pPr>
             <a:r>
-              <a:rPr sz="1301" b="1">
+              <a:rPr sz="1458" b="1">
                 <a:solidFill>
                   <a:srgbClr val="FFFFFF"/>
                 </a:solidFill>
@@ -9570,8 +9570,8 @@
         </p:nvSpPr>
         <p:spPr>
           <a:xfrm>
-            <a:off x="2021205" y="2506980"/>
-            <a:ext cx="848678" cy="379095"/>
+            <a:off x="2365058" y="2344102"/>
+            <a:ext cx="602932" cy="418148"/>
           </a:xfrm>
           <a:prstGeom prst="rect">
             <a:avLst/>
@@ -9586,11 +9586,11 @@
           <a:p>
             <a:pPr algn="r">
               <a:lnSpc>
-                <a:spcPts val="2537"/>
+                <a:spcPts val="2843"/>
               </a:lnSpc>
             </a:pPr>
             <a:r>
-              <a:rPr sz="1409" b="1">
+              <a:rPr sz="1579" b="1">
                 <a:solidFill>
                   <a:srgbClr val="5B7FA8"/>
                 </a:solidFill>
@@ -9611,8 +9611,8 @@
         </p:nvSpPr>
         <p:spPr>
           <a:xfrm>
-            <a:off x="3021330" y="2519362"/>
-            <a:ext cx="8673465" cy="354330"/>
+            <a:off x="3424238" y="2357438"/>
+            <a:ext cx="8246745" cy="390525"/>
           </a:xfrm>
           <a:prstGeom prst="rect">
             <a:avLst/>
@@ -9627,11 +9627,11 @@
           <a:p>
             <a:pPr algn="l">
               <a:lnSpc>
-                <a:spcPts val="2342"/>
+                <a:spcPts val="2624"/>
               </a:lnSpc>
             </a:pPr>
             <a:r>
-              <a:rPr sz="1301" b="1">
+              <a:rPr sz="1458" b="1">
                 <a:solidFill>
                   <a:srgbClr val="3F5266"/>
                 </a:solidFill>
@@ -9652,8 +9652,8 @@
         </p:nvSpPr>
         <p:spPr>
           <a:xfrm>
-            <a:off x="2021205" y="3083242"/>
-            <a:ext cx="848678" cy="379095"/>
+            <a:off x="2371725" y="2989898"/>
+            <a:ext cx="596265" cy="418148"/>
           </a:xfrm>
           <a:prstGeom prst="rect">
             <a:avLst/>
@@ -9668,11 +9668,11 @@
           <a:p>
             <a:pPr algn="r">
               <a:lnSpc>
-                <a:spcPts val="2537"/>
+                <a:spcPts val="2843"/>
               </a:lnSpc>
             </a:pPr>
             <a:r>
-              <a:rPr sz="1409" b="1">
+              <a:rPr sz="1579" b="1">
                 <a:solidFill>
                   <a:srgbClr val="5B7FA8"/>
                 </a:solidFill>
@@ -9693,8 +9693,8 @@
         </p:nvSpPr>
         <p:spPr>
           <a:xfrm>
-            <a:off x="3021330" y="3095625"/>
-            <a:ext cx="8673465" cy="354330"/>
+            <a:off x="3424238" y="3004185"/>
+            <a:ext cx="8246745" cy="390525"/>
           </a:xfrm>
           <a:prstGeom prst="rect">
             <a:avLst/>
@@ -9709,11 +9709,11 @@
           <a:p>
             <a:pPr algn="l">
               <a:lnSpc>
-                <a:spcPts val="2342"/>
+                <a:spcPts val="2624"/>
               </a:lnSpc>
             </a:pPr>
             <a:r>
-              <a:rPr sz="1301" b="1">
+              <a:rPr sz="1458" b="1">
                 <a:solidFill>
                   <a:srgbClr val="3F5266"/>
                 </a:solidFill>
@@ -9734,8 +9734,8 @@
         </p:nvSpPr>
         <p:spPr>
           <a:xfrm>
-            <a:off x="2021205" y="3660458"/>
-            <a:ext cx="848678" cy="379095"/>
+            <a:off x="2353628" y="3636645"/>
+            <a:ext cx="614362" cy="418148"/>
           </a:xfrm>
           <a:prstGeom prst="rect">
             <a:avLst/>
@@ -9750,11 +9750,11 @@
           <a:p>
             <a:pPr algn="r">
               <a:lnSpc>
-                <a:spcPts val="2537"/>
+                <a:spcPts val="2843"/>
               </a:lnSpc>
             </a:pPr>
             <a:r>
-              <a:rPr sz="1409" b="1">
+              <a:rPr sz="1579" b="1">
                 <a:solidFill>
                   <a:srgbClr val="FFFFFF"/>
                 </a:solidFill>
@@ -9775,8 +9775,8 @@
         </p:nvSpPr>
         <p:spPr>
           <a:xfrm>
-            <a:off x="3021330" y="3671888"/>
-            <a:ext cx="8673465" cy="354330"/>
+            <a:off x="3424238" y="3649980"/>
+            <a:ext cx="8246745" cy="390525"/>
           </a:xfrm>
           <a:prstGeom prst="rect">
             <a:avLst/>
@@ -9791,11 +9791,11 @@
           <a:p>
             <a:pPr algn="l">
               <a:lnSpc>
-                <a:spcPts val="2342"/>
+                <a:spcPts val="2624"/>
               </a:lnSpc>
             </a:pPr>
             <a:r>
-              <a:rPr sz="1301" b="1">
+              <a:rPr sz="1458" b="1">
                 <a:solidFill>
                   <a:srgbClr val="FFFFFF"/>
                 </a:solidFill>
@@ -9816,8 +9816,8 @@
         </p:nvSpPr>
         <p:spPr>
           <a:xfrm>
-            <a:off x="2021205" y="4236720"/>
-            <a:ext cx="848678" cy="379095"/>
+            <a:off x="2364105" y="4282440"/>
+            <a:ext cx="602932" cy="418148"/>
           </a:xfrm>
           <a:prstGeom prst="rect">
             <a:avLst/>
@@ -9832,11 +9832,11 @@
           <a:p>
             <a:pPr algn="r">
               <a:lnSpc>
-                <a:spcPts val="2537"/>
+                <a:spcPts val="2843"/>
               </a:lnSpc>
             </a:pPr>
             <a:r>
-              <a:rPr sz="1409" b="1">
+              <a:rPr sz="1579" b="1">
                 <a:solidFill>
                   <a:srgbClr val="5B7FA8"/>
                 </a:solidFill>
@@ -9857,8 +9857,8 @@
         </p:nvSpPr>
         <p:spPr>
           <a:xfrm>
-            <a:off x="3021330" y="4249102"/>
-            <a:ext cx="8673465" cy="354330"/>
+            <a:off x="3424238" y="4295775"/>
+            <a:ext cx="8246745" cy="390525"/>
           </a:xfrm>
           <a:prstGeom prst="rect">
             <a:avLst/>
@@ -9873,11 +9873,11 @@
           <a:p>
             <a:pPr algn="l">
               <a:lnSpc>
-                <a:spcPts val="2342"/>
+                <a:spcPts val="2624"/>
               </a:lnSpc>
             </a:pPr>
             <a:r>
-              <a:rPr sz="1301" b="1">
+              <a:rPr sz="1458" b="1">
                 <a:solidFill>
                   <a:srgbClr val="3F5266"/>
                 </a:solidFill>
@@ -9898,8 +9898,8 @@
         </p:nvSpPr>
         <p:spPr>
           <a:xfrm>
-            <a:off x="2021205" y="4812982"/>
-            <a:ext cx="848678" cy="379095"/>
+            <a:off x="2354580" y="4928235"/>
+            <a:ext cx="613410" cy="418148"/>
           </a:xfrm>
           <a:prstGeom prst="rect">
             <a:avLst/>
@@ -9914,11 +9914,11 @@
           <a:p>
             <a:pPr algn="r">
               <a:lnSpc>
-                <a:spcPts val="2537"/>
+                <a:spcPts val="2843"/>
               </a:lnSpc>
             </a:pPr>
             <a:r>
-              <a:rPr sz="1409" b="1">
+              <a:rPr sz="1579" b="1">
                 <a:solidFill>
                   <a:srgbClr val="5B7FA8"/>
                 </a:solidFill>
@@ -9939,8 +9939,8 @@
         </p:nvSpPr>
         <p:spPr>
           <a:xfrm>
-            <a:off x="3021330" y="4825365"/>
-            <a:ext cx="8673465" cy="354330"/>
+            <a:off x="3424238" y="4942522"/>
+            <a:ext cx="8246745" cy="390525"/>
           </a:xfrm>
           <a:prstGeom prst="rect">
             <a:avLst/>
@@ -9955,11 +9955,11 @@
           <a:p>
             <a:pPr algn="l">
               <a:lnSpc>
-                <a:spcPts val="2342"/>
+                <a:spcPts val="2624"/>
               </a:lnSpc>
             </a:pPr>
             <a:r>
-              <a:rPr sz="1301" b="1">
+              <a:rPr sz="1458" b="1">
                 <a:solidFill>
                   <a:srgbClr val="3F5266"/>
                 </a:solidFill>
@@ -9980,8 +9980,8 @@
         </p:nvSpPr>
         <p:spPr>
           <a:xfrm>
-            <a:off x="2021205" y="5390198"/>
-            <a:ext cx="848678" cy="379095"/>
+            <a:off x="2444115" y="5574982"/>
+            <a:ext cx="523875" cy="418148"/>
           </a:xfrm>
           <a:prstGeom prst="rect">
             <a:avLst/>
@@ -9996,11 +9996,11 @@
           <a:p>
             <a:pPr algn="r">
               <a:lnSpc>
-                <a:spcPts val="2537"/>
+                <a:spcPts val="2843"/>
               </a:lnSpc>
             </a:pPr>
             <a:r>
-              <a:rPr sz="1409" b="1">
+              <a:rPr sz="1579" b="1">
                 <a:solidFill>
                   <a:srgbClr val="5B7FA8"/>
                 </a:solidFill>
@@ -10021,8 +10021,8 @@
         </p:nvSpPr>
         <p:spPr>
           <a:xfrm>
-            <a:off x="3021330" y="5402580"/>
-            <a:ext cx="8673465" cy="354330"/>
+            <a:off x="3424238" y="5588318"/>
+            <a:ext cx="8246745" cy="390525"/>
           </a:xfrm>
           <a:prstGeom prst="rect">
             <a:avLst/>
@@ -10037,11 +10037,11 @@
           <a:p>
             <a:pPr algn="l">
               <a:lnSpc>
-                <a:spcPts val="2342"/>
+                <a:spcPts val="2624"/>
               </a:lnSpc>
             </a:pPr>
             <a:r>
-              <a:rPr sz="1301" b="1">
+              <a:rPr sz="1458" b="1">
                 <a:solidFill>
                   <a:srgbClr val="3F5266"/>
                 </a:solidFill>
@@ -10070,8 +10070,8 @@
         </p:blipFill>
         <p:spPr>
           <a:xfrm>
-            <a:off x="5895022" y="1967865"/>
-            <a:ext cx="173355" cy="173355"/>
+            <a:off x="5779770" y="1741170"/>
+            <a:ext cx="194310" cy="194310"/>
           </a:xfrm>
           <a:prstGeom prst="rect">
             <a:avLst/>
@@ -10094,8 +10094,8 @@
         </p:blipFill>
         <p:spPr>
           <a:xfrm>
-            <a:off x="3021330" y="2581275"/>
-            <a:ext cx="173355" cy="173355"/>
+            <a:off x="3137535" y="2426970"/>
+            <a:ext cx="194310" cy="194310"/>
           </a:xfrm>
           <a:prstGeom prst="rect">
             <a:avLst/>
@@ -10118,8 +10118,8 @@
         </p:blipFill>
         <p:spPr>
           <a:xfrm>
-            <a:off x="3021330" y="3157538"/>
-            <a:ext cx="173355" cy="173355"/>
+            <a:off x="3137535" y="3072765"/>
+            <a:ext cx="194310" cy="194310"/>
           </a:xfrm>
           <a:prstGeom prst="rect">
             <a:avLst/>
@@ -10142,8 +10142,8 @@
         </p:blipFill>
         <p:spPr>
           <a:xfrm>
-            <a:off x="3021330" y="3733800"/>
-            <a:ext cx="173355" cy="173355"/>
+            <a:off x="3137535" y="3719512"/>
+            <a:ext cx="194310" cy="194310"/>
           </a:xfrm>
           <a:prstGeom prst="rect">
             <a:avLst/>
@@ -10166,8 +10166,8 @@
         </p:blipFill>
         <p:spPr>
           <a:xfrm>
-            <a:off x="3021330" y="4311015"/>
-            <a:ext cx="173355" cy="173355"/>
+            <a:off x="3137535" y="4365308"/>
+            <a:ext cx="194310" cy="194310"/>
           </a:xfrm>
           <a:prstGeom prst="rect">
             <a:avLst/>
@@ -10190,8 +10190,8 @@
         </p:blipFill>
         <p:spPr>
           <a:xfrm>
-            <a:off x="3021330" y="4887278"/>
-            <a:ext cx="173355" cy="173355"/>
+            <a:off x="3137535" y="5012055"/>
+            <a:ext cx="194310" cy="194310"/>
           </a:xfrm>
           <a:prstGeom prst="rect">
             <a:avLst/>
@@ -10214,8 +10214,8 @@
         </p:blipFill>
         <p:spPr>
           <a:xfrm>
-            <a:off x="3021330" y="5464492"/>
-            <a:ext cx="173355" cy="173355"/>
+            <a:off x="3137535" y="5657850"/>
+            <a:ext cx="194310" cy="194310"/>
           </a:xfrm>
           <a:prstGeom prst="rect">
             <a:avLst/>
@@ -10256,8 +10256,8 @@
         </p:nvSpPr>
         <p:spPr>
           <a:xfrm>
-            <a:off x="6348412" y="2617470"/>
-            <a:ext cx="1019175" cy="407670"/>
+            <a:off x="6286500" y="2467928"/>
+            <a:ext cx="1142048" cy="456248"/>
           </a:xfrm>
           <a:prstGeom prst="roundRect">
             <a:avLst>
@@ -10300,8 +10300,8 @@
         </p:nvSpPr>
         <p:spPr>
           <a:xfrm>
-            <a:off x="6234112" y="2617470"/>
-            <a:ext cx="1247775" cy="464820"/>
+            <a:off x="6435090" y="2467928"/>
+            <a:ext cx="1108710" cy="513398"/>
           </a:xfrm>
           <a:prstGeom prst="rect">
             <a:avLst/>
@@ -10316,11 +10316,11 @@
           <a:p>
             <a:pPr algn="ctr">
               <a:lnSpc>
-                <a:spcPts val="2342"/>
+                <a:spcPts val="2624"/>
               </a:lnSpc>
             </a:pPr>
             <a:r>
-              <a:rPr sz="1301" b="1">
+              <a:rPr sz="1458" b="1">
                 <a:solidFill>
                   <a:srgbClr val="FFFFFF"/>
                 </a:solidFill>
@@ -10341,8 +10341,8 @@
         </p:nvSpPr>
         <p:spPr>
           <a:xfrm>
-            <a:off x="3562350" y="3175635"/>
-            <a:ext cx="6591300" cy="1511618"/>
+            <a:off x="3179445" y="3093720"/>
+            <a:ext cx="7358062" cy="1685925"/>
           </a:xfrm>
           <a:prstGeom prst="rect">
             <a:avLst/>
@@ -10357,11 +10357,11 @@
           <a:p>
             <a:pPr algn="ctr">
               <a:lnSpc>
-                <a:spcPts val="3817"/>
+                <a:spcPts val="4276"/>
               </a:lnSpc>
             </a:pPr>
             <a:r>
-              <a:rPr sz="2385" b="1">
+              <a:rPr sz="2673" b="1">
                 <a:solidFill>
                   <a:srgbClr val="3F5266"/>
                 </a:solidFill>
@@ -10372,7 +10372,7 @@
               <a:t>今日あなたが持ってきたもの——</a:t>
             </a:r>
             <a:r>
-              <a:rPr sz="2385" b="1">
+              <a:rPr sz="2673" b="1">
                 <a:solidFill>
                   <a:srgbClr val="3F5266"/>
                 </a:solidFill>
@@ -10383,7 +10383,7 @@
               <a:t>スマホ、無料の教科書、給食。</a:t>
             </a:r>
             <a:r>
-              <a:rPr sz="2385" b="1">
+              <a:rPr sz="2673" b="1">
                 <a:solidFill>
                   <a:srgbClr val="3F5266"/>
                 </a:solidFill>
@@ -10394,7 +10394,7 @@
               <a:t>それは、</a:t>
             </a:r>
             <a:r>
-              <a:rPr sz="2385" b="1">
+              <a:rPr sz="2673" b="1">
                 <a:solidFill>
                   <a:srgbClr val="5B7FA8"/>
                 </a:solidFill>
@@ -10405,7 +10405,7 @@
               <a:t>どの家庭カードの世界</a:t>
             </a:r>
             <a:r>
-              <a:rPr sz="2385" b="1">
+              <a:rPr sz="2673" b="1">
                 <a:solidFill>
                   <a:srgbClr val="3F5266"/>
                 </a:solidFill>
@@ -10426,8 +10426,8 @@
         </p:nvSpPr>
         <p:spPr>
           <a:xfrm>
-            <a:off x="5501640" y="4781550"/>
-            <a:ext cx="2711768" cy="304800"/>
+            <a:off x="5591175" y="4892992"/>
+            <a:ext cx="2771775" cy="335280"/>
           </a:xfrm>
           <a:prstGeom prst="rect">
             <a:avLst/>
@@ -10442,11 +10442,11 @@
           <a:p>
             <a:pPr algn="ctr">
               <a:lnSpc>
-                <a:spcPts val="1952"/>
+                <a:spcPts val="2187"/>
               </a:lnSpc>
             </a:pPr>
             <a:r>
-              <a:rPr sz="1084" b="1">
+              <a:rPr sz="1214" b="1">
                 <a:solidFill>
                   <a:srgbClr val="8A97A5"/>
                 </a:solidFill>
@@ -10475,8 +10475,8 @@
         </p:blipFill>
         <p:spPr>
           <a:xfrm>
-            <a:off x="5615940" y="4832985"/>
-            <a:ext cx="144780" cy="144780"/>
+            <a:off x="5467350" y="4951095"/>
+            <a:ext cx="161925" cy="161925"/>
           </a:xfrm>
           <a:prstGeom prst="rect">
             <a:avLst/>
@@ -10517,8 +10517,8 @@
         </p:nvSpPr>
         <p:spPr>
           <a:xfrm>
-            <a:off x="6350318" y="2617470"/>
-            <a:ext cx="1015365" cy="407670"/>
+            <a:off x="6289358" y="2467928"/>
+            <a:ext cx="1137285" cy="456248"/>
           </a:xfrm>
           <a:prstGeom prst="roundRect">
             <a:avLst>
@@ -10561,8 +10561,8 @@
         </p:nvSpPr>
         <p:spPr>
           <a:xfrm>
-            <a:off x="6236018" y="2617470"/>
-            <a:ext cx="1243965" cy="464820"/>
+            <a:off x="6436995" y="2467928"/>
+            <a:ext cx="1103948" cy="513398"/>
           </a:xfrm>
           <a:prstGeom prst="rect">
             <a:avLst/>
@@ -10577,11 +10577,11 @@
           <a:p>
             <a:pPr algn="ctr">
               <a:lnSpc>
-                <a:spcPts val="2342"/>
+                <a:spcPts val="2624"/>
               </a:lnSpc>
             </a:pPr>
             <a:r>
-              <a:rPr sz="1301" b="1">
+              <a:rPr sz="1458" b="1">
                 <a:solidFill>
                   <a:srgbClr val="FFFFFF"/>
                 </a:solidFill>
@@ -10602,8 +10602,8 @@
         </p:nvSpPr>
         <p:spPr>
           <a:xfrm>
-            <a:off x="4168140" y="3175635"/>
-            <a:ext cx="5379720" cy="1511618"/>
+            <a:off x="3857625" y="3093720"/>
+            <a:ext cx="5999798" cy="1685925"/>
           </a:xfrm>
           <a:prstGeom prst="rect">
             <a:avLst/>
@@ -10618,11 +10618,11 @@
           <a:p>
             <a:pPr algn="ctr">
               <a:lnSpc>
-                <a:spcPts val="3817"/>
+                <a:spcPts val="4276"/>
               </a:lnSpc>
             </a:pPr>
             <a:r>
-              <a:rPr sz="2385" b="1">
+              <a:rPr sz="2673" b="1">
                 <a:solidFill>
                   <a:srgbClr val="3F5266"/>
                 </a:solidFill>
@@ -10633,7 +10633,7 @@
               <a:t>日本にいる私たちが、</a:t>
             </a:r>
             <a:r>
-              <a:rPr sz="2385" b="1">
+              <a:rPr sz="2673" b="1">
                 <a:solidFill>
                   <a:srgbClr val="3F5266"/>
                 </a:solidFill>
@@ -10644,7 +10644,7 @@
               <a:t>世界の遺児にわたせる</a:t>
             </a:r>
             <a:r>
-              <a:rPr sz="2385" b="1">
+              <a:rPr sz="2673" b="1">
                 <a:solidFill>
                   <a:srgbClr val="5B7FA8"/>
                 </a:solidFill>
@@ -10655,7 +10655,7 @@
               <a:t>「カギ」</a:t>
             </a:r>
             <a:r>
-              <a:rPr sz="2385" b="1">
+              <a:rPr sz="2673" b="1">
                 <a:solidFill>
                   <a:srgbClr val="3F5266"/>
                 </a:solidFill>
@@ -10666,7 +10666,7 @@
               <a:t>って、</a:t>
             </a:r>
             <a:r>
-              <a:rPr sz="2385" b="1">
+              <a:rPr sz="2673" b="1">
                 <a:solidFill>
                   <a:srgbClr val="3F5266"/>
                 </a:solidFill>
@@ -10687,8 +10687,8 @@
         </p:nvSpPr>
         <p:spPr>
           <a:xfrm>
-            <a:off x="4709160" y="4781550"/>
-            <a:ext cx="4298632" cy="304800"/>
+            <a:off x="4702492" y="4892992"/>
+            <a:ext cx="4549140" cy="335280"/>
           </a:xfrm>
           <a:prstGeom prst="rect">
             <a:avLst/>
@@ -10703,11 +10703,11 @@
           <a:p>
             <a:pPr algn="ctr">
               <a:lnSpc>
-                <a:spcPts val="1952"/>
+                <a:spcPts val="2187"/>
               </a:lnSpc>
             </a:pPr>
             <a:r>
-              <a:rPr sz="1084" b="1">
+              <a:rPr sz="1214" b="1">
                 <a:solidFill>
                   <a:srgbClr val="8A97A5"/>
                 </a:solidFill>
@@ -10736,8 +10736,8 @@
         </p:blipFill>
         <p:spPr>
           <a:xfrm>
-            <a:off x="4823460" y="4832985"/>
-            <a:ext cx="144780" cy="144780"/>
+            <a:off x="4577715" y="4951095"/>
+            <a:ext cx="161925" cy="161925"/>
           </a:xfrm>
           <a:prstGeom prst="rect">
             <a:avLst/>
@@ -10778,8 +10778,8 @@
         </p:nvSpPr>
         <p:spPr>
           <a:xfrm>
-            <a:off x="5790248" y="1839278"/>
-            <a:ext cx="2136458" cy="421005"/>
+            <a:off x="5661660" y="1598295"/>
+            <a:ext cx="2393632" cy="471488"/>
           </a:xfrm>
           <a:prstGeom prst="roundRect">
             <a:avLst>
@@ -10822,12 +10822,12 @@
         </p:nvSpPr>
         <p:spPr>
           <a:xfrm>
-            <a:off x="3672840" y="3643312"/>
-            <a:ext cx="1430655" cy="904875"/>
+            <a:off x="3291840" y="3618548"/>
+            <a:ext cx="1600200" cy="1010602"/>
           </a:xfrm>
           <a:prstGeom prst="roundRect">
             <a:avLst>
-              <a:gd name="adj" fmla="val 15221"/>
+              <a:gd name="adj" fmla="val 15268"/>
             </a:avLst>
           </a:prstGeom>
           <a:solidFill>
@@ -10868,12 +10868,12 @@
         </p:nvSpPr>
         <p:spPr>
           <a:xfrm>
-            <a:off x="5530215" y="3643312"/>
-            <a:ext cx="2166938" cy="904875"/>
+            <a:off x="5371148" y="3618548"/>
+            <a:ext cx="2426018" cy="1010602"/>
           </a:xfrm>
           <a:prstGeom prst="roundRect">
             <a:avLst>
-              <a:gd name="adj" fmla="val 15221"/>
+              <a:gd name="adj" fmla="val 15268"/>
             </a:avLst>
           </a:prstGeom>
           <a:solidFill>
@@ -10914,12 +10914,12 @@
         </p:nvSpPr>
         <p:spPr>
           <a:xfrm>
-            <a:off x="8123872" y="3643312"/>
-            <a:ext cx="1919288" cy="904875"/>
+            <a:off x="8275320" y="3618548"/>
+            <a:ext cx="2148840" cy="1010602"/>
           </a:xfrm>
           <a:prstGeom prst="roundRect">
             <a:avLst>
-              <a:gd name="adj" fmla="val 15221"/>
+              <a:gd name="adj" fmla="val 15268"/>
             </a:avLst>
           </a:prstGeom>
           <a:solidFill>
@@ -10960,8 +10960,8 @@
         </p:nvSpPr>
         <p:spPr>
           <a:xfrm>
-            <a:off x="4362450" y="4968240"/>
-            <a:ext cx="4991100" cy="54292"/>
+            <a:off x="4061460" y="5106352"/>
+            <a:ext cx="5594032" cy="54292"/>
           </a:xfrm>
           <a:prstGeom prst="rect">
             <a:avLst/>
@@ -11004,8 +11004,8 @@
         </p:nvSpPr>
         <p:spPr>
           <a:xfrm>
-            <a:off x="6058852" y="5337810"/>
-            <a:ext cx="2395538" cy="54292"/>
+            <a:off x="5962650" y="5520690"/>
+            <a:ext cx="2685098" cy="54292"/>
           </a:xfrm>
           <a:prstGeom prst="rect">
             <a:avLst/>
@@ -11048,8 +11048,8 @@
         </p:nvSpPr>
         <p:spPr>
           <a:xfrm>
-            <a:off x="5675948" y="1839278"/>
-            <a:ext cx="2365058" cy="478155"/>
+            <a:off x="6050280" y="1598295"/>
+            <a:ext cx="2119312" cy="528638"/>
           </a:xfrm>
           <a:prstGeom prst="rect">
             <a:avLst/>
@@ -11064,11 +11064,11 @@
           <a:p>
             <a:pPr algn="ctr">
               <a:lnSpc>
-                <a:spcPts val="2342"/>
+                <a:spcPts val="2624"/>
               </a:lnSpc>
             </a:pPr>
             <a:r>
-              <a:rPr sz="1301" b="1">
+              <a:rPr sz="1458" b="1">
                 <a:solidFill>
                   <a:srgbClr val="FFFFFF"/>
                 </a:solidFill>
@@ -11089,8 +11089,8 @@
         </p:nvSpPr>
         <p:spPr>
           <a:xfrm>
-            <a:off x="4776788" y="2411730"/>
-            <a:ext cx="4161472" cy="1136332"/>
+            <a:off x="4540568" y="2239328"/>
+            <a:ext cx="4635818" cy="1266825"/>
           </a:xfrm>
           <a:prstGeom prst="rect">
             <a:avLst/>
@@ -11105,11 +11105,11 @@
           <a:p>
             <a:pPr algn="ctr">
               <a:lnSpc>
-                <a:spcPts val="4251"/>
+                <a:spcPts val="4762"/>
               </a:lnSpc>
             </a:pPr>
             <a:r>
-              <a:rPr sz="3036" b="1">
+              <a:rPr sz="3401" b="1">
                 <a:solidFill>
                   <a:srgbClr val="3F5266"/>
                 </a:solidFill>
@@ -11120,7 +11120,7 @@
               <a:t>生まれた場所の差は、</a:t>
             </a:r>
             <a:r>
-              <a:rPr sz="3036" b="1">
+              <a:rPr sz="3401" b="1">
                 <a:solidFill>
                   <a:srgbClr val="3F5266"/>
                 </a:solidFill>
@@ -11141,8 +11141,8 @@
         </p:nvSpPr>
         <p:spPr>
           <a:xfrm>
-            <a:off x="3774758" y="4176712"/>
-            <a:ext cx="1226820" cy="280035"/>
+            <a:off x="3422332" y="4215765"/>
+            <a:ext cx="1343025" cy="306705"/>
           </a:xfrm>
           <a:prstGeom prst="rect">
             <a:avLst/>
@@ -11157,11 +11157,11 @@
           <a:p>
             <a:pPr algn="ctr">
               <a:lnSpc>
-                <a:spcPts val="1756"/>
+                <a:spcPts val="1968"/>
               </a:lnSpc>
             </a:pPr>
             <a:r>
-              <a:rPr sz="976" b="1">
+              <a:rPr sz="1093" b="1">
                 <a:solidFill>
                   <a:srgbClr val="8A97A5"/>
                 </a:solidFill>
@@ -11182,8 +11182,8 @@
         </p:nvSpPr>
         <p:spPr>
           <a:xfrm>
-            <a:off x="5085398" y="3643312"/>
-            <a:ext cx="462915" cy="962025"/>
+            <a:off x="4886325" y="3618548"/>
+            <a:ext cx="490538" cy="1067752"/>
           </a:xfrm>
           <a:prstGeom prst="rect">
             <a:avLst/>
@@ -11198,11 +11198,11 @@
           <a:p>
             <a:pPr algn="ctr">
               <a:lnSpc>
-                <a:spcPts val="3318"/>
+                <a:spcPts val="3717"/>
               </a:lnSpc>
             </a:pPr>
             <a:r>
-              <a:rPr sz="1843" b="1">
+              <a:rPr sz="2065" b="1">
                 <a:solidFill>
                   <a:srgbClr val="F4879F"/>
                 </a:solidFill>
@@ -11223,8 +11223,8 @@
         </p:nvSpPr>
         <p:spPr>
           <a:xfrm>
-            <a:off x="5632132" y="4176712"/>
-            <a:ext cx="1963102" cy="280035"/>
+            <a:off x="5497830" y="4215765"/>
+            <a:ext cx="2172652" cy="306705"/>
           </a:xfrm>
           <a:prstGeom prst="rect">
             <a:avLst/>
@@ -11239,11 +11239,11 @@
           <a:p>
             <a:pPr algn="ctr">
               <a:lnSpc>
-                <a:spcPts val="1756"/>
+                <a:spcPts val="1968"/>
               </a:lnSpc>
             </a:pPr>
             <a:r>
-              <a:rPr sz="976" b="1">
+              <a:rPr sz="1093" b="1">
                 <a:solidFill>
                   <a:srgbClr val="8A97A5"/>
                 </a:solidFill>
@@ -11264,8 +11264,8 @@
         </p:nvSpPr>
         <p:spPr>
           <a:xfrm>
-            <a:off x="7679055" y="3643312"/>
-            <a:ext cx="462915" cy="962025"/>
+            <a:off x="7790498" y="3618548"/>
+            <a:ext cx="490538" cy="1067752"/>
           </a:xfrm>
           <a:prstGeom prst="rect">
             <a:avLst/>
@@ -11280,11 +11280,11 @@
           <a:p>
             <a:pPr algn="ctr">
               <a:lnSpc>
-                <a:spcPts val="3318"/>
+                <a:spcPts val="3717"/>
               </a:lnSpc>
             </a:pPr>
             <a:r>
-              <a:rPr sz="1843" b="1">
+              <a:rPr sz="2065" b="1">
                 <a:solidFill>
                   <a:srgbClr val="F4879F"/>
                 </a:solidFill>
@@ -11305,8 +11305,8 @@
         </p:nvSpPr>
         <p:spPr>
           <a:xfrm>
-            <a:off x="8225790" y="4176712"/>
-            <a:ext cx="1715452" cy="280035"/>
+            <a:off x="8402002" y="4215765"/>
+            <a:ext cx="1895475" cy="306705"/>
           </a:xfrm>
           <a:prstGeom prst="rect">
             <a:avLst/>
@@ -11321,11 +11321,11 @@
           <a:p>
             <a:pPr algn="ctr">
               <a:lnSpc>
-                <a:spcPts val="1756"/>
+                <a:spcPts val="1968"/>
               </a:lnSpc>
             </a:pPr>
             <a:r>
-              <a:rPr sz="976" b="1">
+              <a:rPr sz="1093" b="1">
                 <a:solidFill>
                   <a:srgbClr val="8A97A5"/>
                 </a:solidFill>
@@ -11346,8 +11346,8 @@
         </p:nvSpPr>
         <p:spPr>
           <a:xfrm>
-            <a:off x="3549015" y="4698682"/>
-            <a:ext cx="6617018" cy="1164908"/>
+            <a:off x="3164205" y="4798695"/>
+            <a:ext cx="7388542" cy="1298258"/>
           </a:xfrm>
           <a:prstGeom prst="rect">
             <a:avLst/>
@@ -11362,11 +11362,11 @@
           <a:p>
             <a:pPr algn="ctr">
               <a:lnSpc>
-                <a:spcPts val="2909"/>
+                <a:spcPts val="3259"/>
               </a:lnSpc>
             </a:pPr>
             <a:r>
-              <a:rPr sz="1572" b="1">
+              <a:rPr sz="1761" b="1">
                 <a:solidFill>
                   <a:srgbClr val="3F5266"/>
                 </a:solidFill>
@@ -11377,7 +11377,7 @@
               <a:t>学べば報われる、は、場が用意されている人の話です。</a:t>
             </a:r>
             <a:r>
-              <a:rPr sz="1572" b="1">
+              <a:rPr sz="1761" b="1">
                 <a:solidFill>
                   <a:srgbClr val="3F5266"/>
                 </a:solidFill>
@@ -11388,7 +11388,7 @@
               <a:t>そしてその差は、</a:t>
             </a:r>
             <a:r>
-              <a:rPr sz="1572" b="1">
+              <a:rPr sz="1761" b="1">
                 <a:solidFill>
                   <a:srgbClr val="3F5266"/>
                 </a:solidFill>
@@ -11399,7 +11399,7 @@
               <a:t>次の世代の「生まれの差」</a:t>
             </a:r>
             <a:r>
-              <a:rPr sz="1572" b="1">
+              <a:rPr sz="1761" b="1">
                 <a:solidFill>
                   <a:srgbClr val="3F5266"/>
                 </a:solidFill>
@@ -11410,7 +11410,7 @@
               <a:t>へ——。</a:t>
             </a:r>
             <a:r>
-              <a:rPr sz="1572" b="1">
+              <a:rPr sz="1761" b="1">
                 <a:solidFill>
                   <a:srgbClr val="3F5266"/>
                 </a:solidFill>
@@ -11439,8 +11439,8 @@
         </p:blipFill>
         <p:spPr>
           <a:xfrm>
-            <a:off x="5995988" y="1963102"/>
-            <a:ext cx="173355" cy="173355"/>
+            <a:off x="5893118" y="1736408"/>
+            <a:ext cx="194310" cy="194310"/>
           </a:xfrm>
           <a:prstGeom prst="rect">
             <a:avLst/>
@@ -11481,8 +11481,8 @@
         </p:nvSpPr>
         <p:spPr>
           <a:xfrm>
-            <a:off x="5512118" y="1797368"/>
-            <a:ext cx="2691765" cy="421005"/>
+            <a:off x="5350192" y="1435418"/>
+            <a:ext cx="3015615" cy="471488"/>
           </a:xfrm>
           <a:prstGeom prst="roundRect">
             <a:avLst>
@@ -11525,12 +11525,12 @@
         </p:nvSpPr>
         <p:spPr>
           <a:xfrm>
-            <a:off x="1234440" y="2369820"/>
-            <a:ext cx="11247120" cy="624840"/>
+            <a:off x="1234440" y="2076450"/>
+            <a:ext cx="11247120" cy="698182"/>
           </a:xfrm>
           <a:prstGeom prst="roundRect">
             <a:avLst>
-              <a:gd name="adj" fmla="val 22042"/>
+              <a:gd name="adj" fmla="val 22100"/>
             </a:avLst>
           </a:prstGeom>
           <a:solidFill>
@@ -11571,8 +11571,8 @@
         </p:nvSpPr>
         <p:spPr>
           <a:xfrm>
-            <a:off x="1436370" y="2516505"/>
-            <a:ext cx="343852" cy="343852"/>
+            <a:off x="1460182" y="2240280"/>
+            <a:ext cx="385762" cy="385762"/>
           </a:xfrm>
           <a:prstGeom prst="ellipse">
             <a:avLst/>
@@ -11613,12 +11613,12 @@
         </p:nvSpPr>
         <p:spPr>
           <a:xfrm>
-            <a:off x="1234440" y="3118485"/>
-            <a:ext cx="11247120" cy="624840"/>
+            <a:off x="1234440" y="2913698"/>
+            <a:ext cx="11247120" cy="933450"/>
           </a:xfrm>
           <a:prstGeom prst="roundRect">
             <a:avLst>
-              <a:gd name="adj" fmla="val 22042"/>
+              <a:gd name="adj" fmla="val 16530"/>
             </a:avLst>
           </a:prstGeom>
           <a:solidFill>
@@ -11659,8 +11659,8 @@
         </p:nvSpPr>
         <p:spPr>
           <a:xfrm>
-            <a:off x="1436370" y="3265170"/>
-            <a:ext cx="343852" cy="343852"/>
+            <a:off x="1460182" y="3077528"/>
+            <a:ext cx="385762" cy="385762"/>
           </a:xfrm>
           <a:prstGeom prst="ellipse">
             <a:avLst/>
@@ -11701,12 +11701,12 @@
         </p:nvSpPr>
         <p:spPr>
           <a:xfrm>
-            <a:off x="1234440" y="3867150"/>
-            <a:ext cx="11247120" cy="835342"/>
+            <a:off x="1234440" y="3985260"/>
+            <a:ext cx="11247120" cy="933450"/>
           </a:xfrm>
           <a:prstGeom prst="roundRect">
             <a:avLst>
-              <a:gd name="adj" fmla="val 16488"/>
+              <a:gd name="adj" fmla="val 16530"/>
             </a:avLst>
           </a:prstGeom>
           <a:solidFill>
@@ -11747,8 +11747,8 @@
         </p:nvSpPr>
         <p:spPr>
           <a:xfrm>
-            <a:off x="1436370" y="4013835"/>
-            <a:ext cx="343852" cy="343852"/>
+            <a:off x="1460182" y="4149090"/>
+            <a:ext cx="385762" cy="385762"/>
           </a:xfrm>
           <a:prstGeom prst="ellipse">
             <a:avLst/>
@@ -11789,12 +11789,12 @@
         </p:nvSpPr>
         <p:spPr>
           <a:xfrm>
-            <a:off x="1234440" y="4825365"/>
-            <a:ext cx="11247120" cy="624840"/>
+            <a:off x="1234440" y="5057775"/>
+            <a:ext cx="11247120" cy="698182"/>
           </a:xfrm>
           <a:prstGeom prst="roundRect">
             <a:avLst>
-              <a:gd name="adj" fmla="val 22042"/>
+              <a:gd name="adj" fmla="val 22100"/>
             </a:avLst>
           </a:prstGeom>
           <a:solidFill>
@@ -11835,8 +11835,8 @@
         </p:nvSpPr>
         <p:spPr>
           <a:xfrm>
-            <a:off x="1436370" y="4972050"/>
-            <a:ext cx="343852" cy="343852"/>
+            <a:off x="1460182" y="5221605"/>
+            <a:ext cx="385762" cy="385762"/>
           </a:xfrm>
           <a:prstGeom prst="ellipse">
             <a:avLst/>
@@ -11877,8 +11877,8 @@
         </p:nvSpPr>
         <p:spPr>
           <a:xfrm>
-            <a:off x="5397818" y="1797368"/>
-            <a:ext cx="2920365" cy="478155"/>
+            <a:off x="5738812" y="1435418"/>
+            <a:ext cx="2741295" cy="528638"/>
           </a:xfrm>
           <a:prstGeom prst="rect">
             <a:avLst/>
@@ -11893,11 +11893,11 @@
           <a:p>
             <a:pPr algn="ctr">
               <a:lnSpc>
-                <a:spcPts val="2342"/>
+                <a:spcPts val="2624"/>
               </a:lnSpc>
             </a:pPr>
             <a:r>
-              <a:rPr sz="1301" b="1">
+              <a:rPr sz="1458" b="1">
                 <a:solidFill>
                   <a:srgbClr val="7A6320"/>
                 </a:solidFill>
@@ -11918,8 +11918,8 @@
         </p:nvSpPr>
         <p:spPr>
           <a:xfrm>
-            <a:off x="1436370" y="2516505"/>
-            <a:ext cx="572452" cy="401002"/>
+            <a:off x="1614488" y="2240280"/>
+            <a:ext cx="460058" cy="442912"/>
           </a:xfrm>
           <a:prstGeom prst="rect">
             <a:avLst/>
@@ -11934,11 +11934,11 @@
           <a:p>
             <a:pPr algn="l">
               <a:lnSpc>
-                <a:spcPts val="2342"/>
+                <a:spcPts val="2624"/>
               </a:lnSpc>
             </a:pPr>
             <a:r>
-              <a:rPr sz="1301" b="1">
+              <a:rPr sz="1458" b="1">
                 <a:solidFill>
                   <a:srgbClr val="FFFFFF"/>
                 </a:solidFill>
@@ -11959,8 +11959,8 @@
         </p:nvSpPr>
         <p:spPr>
           <a:xfrm>
-            <a:off x="1932622" y="2503170"/>
-            <a:ext cx="10575608" cy="340995"/>
+            <a:off x="2015490" y="2225040"/>
+            <a:ext cx="10468928" cy="375285"/>
           </a:xfrm>
           <a:prstGeom prst="rect">
             <a:avLst/>
@@ -11975,11 +11975,11 @@
           <a:p>
             <a:pPr algn="l">
               <a:lnSpc>
-                <a:spcPts val="2236"/>
+                <a:spcPts val="2505"/>
               </a:lnSpc>
             </a:pPr>
             <a:r>
-              <a:rPr sz="1355" b="1">
+              <a:rPr sz="1518" b="1">
                 <a:solidFill>
                   <a:srgbClr val="3F5266"/>
                 </a:solidFill>
@@ -11990,7 +11990,7 @@
               <a:t>この連鎖は、</a:t>
             </a:r>
             <a:r>
-              <a:rPr sz="1355" b="1">
+              <a:rPr sz="1518" b="1">
                 <a:solidFill>
                   <a:srgbClr val="5B7FA8"/>
                 </a:solidFill>
@@ -12001,7 +12001,7 @@
               <a:t>本人の努力だけでは断ち切れない</a:t>
             </a:r>
             <a:r>
-              <a:rPr sz="1355" b="1">
+              <a:rPr sz="1518" b="1">
                 <a:solidFill>
                   <a:srgbClr val="3F5266"/>
                 </a:solidFill>
@@ -12022,8 +12022,8 @@
         </p:nvSpPr>
         <p:spPr>
           <a:xfrm>
-            <a:off x="1436370" y="3265170"/>
-            <a:ext cx="572452" cy="401002"/>
+            <a:off x="1610678" y="3077528"/>
+            <a:ext cx="462915" cy="442912"/>
           </a:xfrm>
           <a:prstGeom prst="rect">
             <a:avLst/>
@@ -12038,11 +12038,11 @@
           <a:p>
             <a:pPr algn="l">
               <a:lnSpc>
-                <a:spcPts val="2342"/>
+                <a:spcPts val="2624"/>
               </a:lnSpc>
             </a:pPr>
             <a:r>
-              <a:rPr sz="1301" b="1">
+              <a:rPr sz="1458" b="1">
                 <a:solidFill>
                   <a:srgbClr val="FFFFFF"/>
                 </a:solidFill>
@@ -12063,8 +12063,8 @@
         </p:nvSpPr>
         <p:spPr>
           <a:xfrm>
-            <a:off x="1932622" y="3251835"/>
-            <a:ext cx="10575608" cy="340995"/>
+            <a:off x="2015490" y="3062288"/>
+            <a:ext cx="10468928" cy="693420"/>
           </a:xfrm>
           <a:prstGeom prst="rect">
             <a:avLst/>
@@ -12079,11 +12079,11 @@
           <a:p>
             <a:pPr algn="l">
               <a:lnSpc>
-                <a:spcPts val="2236"/>
+                <a:spcPts val="2505"/>
               </a:lnSpc>
             </a:pPr>
             <a:r>
-              <a:rPr sz="1355" b="1">
+              <a:rPr sz="1518" b="1">
                 <a:solidFill>
                   <a:srgbClr val="3F5266"/>
                 </a:solidFill>
@@ -12094,7 +12094,7 @@
               <a:t>あしなが育英会は</a:t>
             </a:r>
             <a:r>
-              <a:rPr sz="1355" b="1">
+              <a:rPr sz="1518" b="1">
                 <a:solidFill>
                   <a:srgbClr val="5B7FA8"/>
                 </a:solidFill>
@@ -12105,7 +12105,7 @@
               <a:t>「あしながウガンダ」</a:t>
             </a:r>
             <a:r>
-              <a:rPr sz="1355" b="1">
+              <a:rPr sz="1518" b="1">
                 <a:solidFill>
                   <a:srgbClr val="3F5266"/>
                 </a:solidFill>
@@ -12126,8 +12126,8 @@
         </p:nvSpPr>
         <p:spPr>
           <a:xfrm>
-            <a:off x="1436370" y="4013835"/>
-            <a:ext cx="572452" cy="401002"/>
+            <a:off x="1607820" y="4149090"/>
+            <a:ext cx="465772" cy="442912"/>
           </a:xfrm>
           <a:prstGeom prst="rect">
             <a:avLst/>
@@ -12142,11 +12142,11 @@
           <a:p>
             <a:pPr algn="l">
               <a:lnSpc>
-                <a:spcPts val="2342"/>
+                <a:spcPts val="2624"/>
               </a:lnSpc>
             </a:pPr>
             <a:r>
-              <a:rPr sz="1301" b="1">
+              <a:rPr sz="1458" b="1">
                 <a:solidFill>
                   <a:srgbClr val="FFFFFF"/>
                 </a:solidFill>
@@ -12167,8 +12167,8 @@
         </p:nvSpPr>
         <p:spPr>
           <a:xfrm>
-            <a:off x="1932622" y="4000500"/>
-            <a:ext cx="10575608" cy="625792"/>
+            <a:off x="2015490" y="4133850"/>
+            <a:ext cx="10468928" cy="693420"/>
           </a:xfrm>
           <a:prstGeom prst="rect">
             <a:avLst/>
@@ -12183,11 +12183,11 @@
           <a:p>
             <a:pPr algn="l">
               <a:lnSpc>
-                <a:spcPts val="2236"/>
+                <a:spcPts val="2505"/>
               </a:lnSpc>
             </a:pPr>
             <a:r>
-              <a:rPr sz="1355" b="1">
+              <a:rPr sz="1518" b="1">
                 <a:solidFill>
                   <a:srgbClr val="5B7FA8"/>
                 </a:solidFill>
@@ -12198,7 +12198,7 @@
               <a:t>AAI</a:t>
             </a:r>
             <a:r>
-              <a:rPr sz="1355" b="1">
+              <a:rPr sz="1518" b="1">
                 <a:solidFill>
                   <a:srgbClr val="3F5266"/>
                 </a:solidFill>
@@ -12209,7 +12209,7 @@
               <a:t>は、アフリカの遺児を海外の大学へ送り出す奨学金。カギはお金ではなく、まなびと</a:t>
             </a:r>
             <a:r>
-              <a:rPr sz="1355" b="1">
+              <a:rPr sz="1518" b="1">
                 <a:solidFill>
                   <a:srgbClr val="5B7FA8"/>
                 </a:solidFill>
@@ -12220,7 +12220,7 @@
               <a:t>「志」</a:t>
             </a:r>
             <a:r>
-              <a:rPr sz="1355" b="1">
+              <a:rPr sz="1518" b="1">
                 <a:solidFill>
                   <a:srgbClr val="3F5266"/>
                 </a:solidFill>
@@ -12241,8 +12241,8 @@
         </p:nvSpPr>
         <p:spPr>
           <a:xfrm>
-            <a:off x="1436370" y="4972050"/>
-            <a:ext cx="572452" cy="401002"/>
+            <a:off x="1606868" y="5221605"/>
+            <a:ext cx="467678" cy="442912"/>
           </a:xfrm>
           <a:prstGeom prst="rect">
             <a:avLst/>
@@ -12257,11 +12257,11 @@
           <a:p>
             <a:pPr algn="l">
               <a:lnSpc>
-                <a:spcPts val="2342"/>
+                <a:spcPts val="2624"/>
               </a:lnSpc>
             </a:pPr>
             <a:r>
-              <a:rPr sz="1301" b="1">
+              <a:rPr sz="1458" b="1">
                 <a:solidFill>
                   <a:srgbClr val="FFFFFF"/>
                 </a:solidFill>
@@ -12282,8 +12282,8 @@
         </p:nvSpPr>
         <p:spPr>
           <a:xfrm>
-            <a:off x="1932622" y="4958715"/>
-            <a:ext cx="10575608" cy="340995"/>
+            <a:off x="2015490" y="5206365"/>
+            <a:ext cx="10468928" cy="375285"/>
           </a:xfrm>
           <a:prstGeom prst="rect">
             <a:avLst/>
@@ -12298,11 +12298,11 @@
           <a:p>
             <a:pPr algn="l">
               <a:lnSpc>
-                <a:spcPts val="2236"/>
+                <a:spcPts val="2505"/>
               </a:lnSpc>
             </a:pPr>
             <a:r>
-              <a:rPr sz="1355" b="1">
+              <a:rPr sz="1518" b="1">
                 <a:solidFill>
                   <a:srgbClr val="3F5266"/>
                 </a:solidFill>
@@ -12313,7 +12313,7 @@
               <a:t>そして、その入り口に立っているのが——</a:t>
             </a:r>
             <a:r>
-              <a:rPr sz="1355" b="1">
+              <a:rPr sz="1518" b="1">
                 <a:solidFill>
                   <a:srgbClr val="5B7FA8"/>
                 </a:solidFill>
@@ -12334,8 +12334,8 @@
         </p:nvSpPr>
         <p:spPr>
           <a:xfrm>
-            <a:off x="2894648" y="5601652"/>
-            <a:ext cx="7927658" cy="304800"/>
+            <a:off x="2430780" y="5925502"/>
+            <a:ext cx="8853488" cy="335280"/>
           </a:xfrm>
           <a:prstGeom prst="rect">
             <a:avLst/>
@@ -12350,11 +12350,11 @@
           <a:p>
             <a:pPr algn="ctr">
               <a:lnSpc>
-                <a:spcPts val="1952"/>
+                <a:spcPts val="2187"/>
               </a:lnSpc>
             </a:pPr>
             <a:r>
-              <a:rPr sz="1084" b="1">
+              <a:rPr sz="1214" b="1">
                 <a:solidFill>
                   <a:srgbClr val="8A97A5"/>
                 </a:solidFill>
@@ -12383,8 +12383,8 @@
         </p:blipFill>
         <p:spPr>
           <a:xfrm>
-            <a:off x="5718810" y="1921192"/>
-            <a:ext cx="173355" cy="173355"/>
+            <a:off x="5581650" y="1574482"/>
+            <a:ext cx="194310" cy="194310"/>
           </a:xfrm>
           <a:prstGeom prst="rect">
             <a:avLst/>
@@ -12425,8 +12425,8 @@
         </p:nvSpPr>
         <p:spPr>
           <a:xfrm>
-            <a:off x="5604510" y="2551748"/>
-            <a:ext cx="2506028" cy="421005"/>
+            <a:off x="5454015" y="2394585"/>
+            <a:ext cx="2807970" cy="471488"/>
           </a:xfrm>
           <a:prstGeom prst="roundRect">
             <a:avLst>
@@ -12469,8 +12469,8 @@
         </p:nvSpPr>
         <p:spPr>
           <a:xfrm>
-            <a:off x="5859780" y="4994910"/>
-            <a:ext cx="998220" cy="54292"/>
+            <a:off x="5738812" y="5136832"/>
+            <a:ext cx="1119188" cy="54292"/>
           </a:xfrm>
           <a:prstGeom prst="rect">
             <a:avLst/>
@@ -12513,8 +12513,8 @@
         </p:nvSpPr>
         <p:spPr>
           <a:xfrm>
-            <a:off x="5490210" y="2551748"/>
-            <a:ext cx="2734628" cy="478155"/>
+            <a:off x="5842635" y="2394585"/>
+            <a:ext cx="2533650" cy="528638"/>
           </a:xfrm>
           <a:prstGeom prst="rect">
             <a:avLst/>
@@ -12529,11 +12529,11 @@
           <a:p>
             <a:pPr algn="ctr">
               <a:lnSpc>
-                <a:spcPts val="2342"/>
+                <a:spcPts val="2624"/>
               </a:lnSpc>
             </a:pPr>
             <a:r>
-              <a:rPr sz="1301" b="1">
+              <a:rPr sz="1458" b="1">
                 <a:solidFill>
                   <a:srgbClr val="FFFFFF"/>
                 </a:solidFill>
@@ -12554,8 +12554,8 @@
         </p:nvSpPr>
         <p:spPr>
           <a:xfrm>
-            <a:off x="3811905" y="3124200"/>
-            <a:ext cx="6092190" cy="1136332"/>
+            <a:off x="3458528" y="3036570"/>
+            <a:ext cx="6798945" cy="1266825"/>
           </a:xfrm>
           <a:prstGeom prst="rect">
             <a:avLst/>
@@ -12570,11 +12570,11 @@
           <a:p>
             <a:pPr algn="ctr">
               <a:lnSpc>
-                <a:spcPts val="4251"/>
+                <a:spcPts val="4762"/>
               </a:lnSpc>
             </a:pPr>
             <a:r>
-              <a:rPr sz="3036" b="1">
+              <a:rPr sz="3401" b="1">
                 <a:solidFill>
                   <a:srgbClr val="3F5266"/>
                 </a:solidFill>
@@ -12585,7 +12585,7 @@
               <a:t>今度は</a:t>
             </a:r>
             <a:r>
-              <a:rPr sz="3036" b="1">
+              <a:rPr sz="3401" b="1">
                 <a:solidFill>
                   <a:srgbClr val="5B7FA8"/>
                 </a:solidFill>
@@ -12596,7 +12596,7 @@
               <a:t>「届ける側」</a:t>
             </a:r>
             <a:r>
-              <a:rPr sz="3036" b="1">
+              <a:rPr sz="3401" b="1">
                 <a:solidFill>
                   <a:srgbClr val="3F5266"/>
                 </a:solidFill>
@@ -12607,7 +12607,7 @@
               <a:t>として、</a:t>
             </a:r>
             <a:r>
-              <a:rPr sz="3036" b="1">
+              <a:rPr sz="3401" b="1">
                 <a:solidFill>
                   <a:srgbClr val="3F5266"/>
                 </a:solidFill>
@@ -12628,8 +12628,8 @@
         </p:nvSpPr>
         <p:spPr>
           <a:xfrm>
-            <a:off x="3749040" y="4355782"/>
-            <a:ext cx="6217920" cy="796290"/>
+            <a:off x="3387090" y="4415790"/>
+            <a:ext cx="6940868" cy="884872"/>
           </a:xfrm>
           <a:prstGeom prst="rect">
             <a:avLst/>
@@ -12644,11 +12644,11 @@
           <a:p>
             <a:pPr algn="ctr">
               <a:lnSpc>
-                <a:spcPts val="2909"/>
+                <a:spcPts val="3259"/>
               </a:lnSpc>
             </a:pPr>
             <a:r>
-              <a:rPr sz="1572" b="1">
+              <a:rPr sz="1761" b="1">
                 <a:solidFill>
                   <a:srgbClr val="3F5266"/>
                 </a:solidFill>
@@ -12659,7 +12659,7 @@
               <a:t>このゲームは、まだ完成していません。</a:t>
             </a:r>
             <a:r>
-              <a:rPr sz="1572" b="1">
+              <a:rPr sz="1761" b="1">
                 <a:solidFill>
                   <a:srgbClr val="3F5266"/>
                 </a:solidFill>
@@ -12670,7 +12670,7 @@
               <a:t>今日みなさんが感じた</a:t>
             </a:r>
             <a:r>
-              <a:rPr sz="1572" b="1">
+              <a:rPr sz="1761" b="1">
                 <a:solidFill>
                   <a:srgbClr val="3F5266"/>
                 </a:solidFill>
@@ -12681,7 +12681,7 @@
               <a:t>引っかかり</a:t>
             </a:r>
             <a:r>
-              <a:rPr sz="1572" b="1">
+              <a:rPr sz="1761" b="1">
                 <a:solidFill>
                   <a:srgbClr val="3F5266"/>
                 </a:solidFill>
@@ -12710,8 +12710,8 @@
         </p:blipFill>
         <p:spPr>
           <a:xfrm>
-            <a:off x="5811202" y="2675572"/>
-            <a:ext cx="173355" cy="173355"/>
+            <a:off x="5685472" y="2533650"/>
+            <a:ext cx="194310" cy="194310"/>
           </a:xfrm>
           <a:prstGeom prst="rect">
             <a:avLst/>
@@ -12752,8 +12752,8 @@
         </p:nvSpPr>
         <p:spPr>
           <a:xfrm>
-            <a:off x="4864418" y="2313622"/>
-            <a:ext cx="3987165" cy="421005"/>
+            <a:off x="4624388" y="2127885"/>
+            <a:ext cx="4467225" cy="471488"/>
           </a:xfrm>
           <a:prstGeom prst="roundRect">
             <a:avLst>
@@ -12796,12 +12796,12 @@
         </p:nvSpPr>
         <p:spPr>
           <a:xfrm>
-            <a:off x="1371600" y="2886075"/>
-            <a:ext cx="5431155" cy="722948"/>
+            <a:off x="1371600" y="2769870"/>
+            <a:ext cx="5424488" cy="809625"/>
           </a:xfrm>
           <a:prstGeom prst="roundRect">
             <a:avLst>
-              <a:gd name="adj" fmla="val 17146"/>
+              <a:gd name="adj" fmla="val 17152"/>
             </a:avLst>
           </a:prstGeom>
           <a:solidFill>
@@ -12840,12 +12840,12 @@
         </p:nvSpPr>
         <p:spPr>
           <a:xfrm>
-            <a:off x="1523048" y="2989898"/>
-            <a:ext cx="516255" cy="516255"/>
+            <a:off x="1541145" y="2885122"/>
+            <a:ext cx="579120" cy="579120"/>
           </a:xfrm>
           <a:prstGeom prst="roundRect">
             <a:avLst>
-              <a:gd name="adj" fmla="val 18675"/>
+              <a:gd name="adj" fmla="val 18651"/>
             </a:avLst>
           </a:prstGeom>
           <a:solidFill>
@@ -12884,12 +12884,12 @@
         </p:nvSpPr>
         <p:spPr>
           <a:xfrm>
-            <a:off x="6913245" y="2886075"/>
-            <a:ext cx="5431155" cy="722948"/>
+            <a:off x="6919912" y="2769870"/>
+            <a:ext cx="5424488" cy="809625"/>
           </a:xfrm>
           <a:prstGeom prst="roundRect">
             <a:avLst>
-              <a:gd name="adj" fmla="val 17146"/>
+              <a:gd name="adj" fmla="val 17152"/>
             </a:avLst>
           </a:prstGeom>
           <a:solidFill>
@@ -12928,12 +12928,12 @@
         </p:nvSpPr>
         <p:spPr>
           <a:xfrm>
-            <a:off x="7064692" y="2989898"/>
-            <a:ext cx="516255" cy="516255"/>
+            <a:off x="7089458" y="2885122"/>
+            <a:ext cx="579120" cy="579120"/>
           </a:xfrm>
           <a:prstGeom prst="roundRect">
             <a:avLst>
-              <a:gd name="adj" fmla="val 18675"/>
+              <a:gd name="adj" fmla="val 18651"/>
             </a:avLst>
           </a:prstGeom>
           <a:solidFill>
@@ -12972,12 +12972,12 @@
         </p:nvSpPr>
         <p:spPr>
           <a:xfrm>
-            <a:off x="1371600" y="3719512"/>
-            <a:ext cx="5431155" cy="722948"/>
+            <a:off x="1371600" y="3703320"/>
+            <a:ext cx="5424488" cy="809625"/>
           </a:xfrm>
           <a:prstGeom prst="roundRect">
             <a:avLst>
-              <a:gd name="adj" fmla="val 17146"/>
+              <a:gd name="adj" fmla="val 17152"/>
             </a:avLst>
           </a:prstGeom>
           <a:solidFill>
@@ -13016,12 +13016,12 @@
         </p:nvSpPr>
         <p:spPr>
           <a:xfrm>
-            <a:off x="1523048" y="3822382"/>
-            <a:ext cx="516255" cy="516255"/>
+            <a:off x="1541145" y="3818572"/>
+            <a:ext cx="579120" cy="579120"/>
           </a:xfrm>
           <a:prstGeom prst="roundRect">
             <a:avLst>
-              <a:gd name="adj" fmla="val 18675"/>
+              <a:gd name="adj" fmla="val 18651"/>
             </a:avLst>
           </a:prstGeom>
           <a:solidFill>
@@ -13060,12 +13060,12 @@
         </p:nvSpPr>
         <p:spPr>
           <a:xfrm>
-            <a:off x="6913245" y="3719512"/>
-            <a:ext cx="5431155" cy="722948"/>
+            <a:off x="6919912" y="3703320"/>
+            <a:ext cx="5424488" cy="809625"/>
           </a:xfrm>
           <a:prstGeom prst="roundRect">
             <a:avLst>
-              <a:gd name="adj" fmla="val 17146"/>
+              <a:gd name="adj" fmla="val 17152"/>
             </a:avLst>
           </a:prstGeom>
           <a:solidFill>
@@ -13104,12 +13104,12 @@
         </p:nvSpPr>
         <p:spPr>
           <a:xfrm>
-            <a:off x="7064692" y="3822382"/>
-            <a:ext cx="516255" cy="516255"/>
+            <a:off x="7089458" y="3818572"/>
+            <a:ext cx="579120" cy="579120"/>
           </a:xfrm>
           <a:prstGeom prst="roundRect">
             <a:avLst>
-              <a:gd name="adj" fmla="val 18675"/>
+              <a:gd name="adj" fmla="val 18651"/>
             </a:avLst>
           </a:prstGeom>
           <a:solidFill>
@@ -13148,8 +13148,8 @@
         </p:nvSpPr>
         <p:spPr>
           <a:xfrm>
-            <a:off x="5160645" y="5233035"/>
-            <a:ext cx="3194685" cy="54292"/>
+            <a:off x="4955858" y="5403532"/>
+            <a:ext cx="3579495" cy="54292"/>
           </a:xfrm>
           <a:prstGeom prst="rect">
             <a:avLst/>
@@ -13192,8 +13192,8 @@
         </p:nvSpPr>
         <p:spPr>
           <a:xfrm>
-            <a:off x="4750118" y="2313622"/>
-            <a:ext cx="4215765" cy="478155"/>
+            <a:off x="5013008" y="2127885"/>
+            <a:ext cx="4192905" cy="528638"/>
           </a:xfrm>
           <a:prstGeom prst="rect">
             <a:avLst/>
@@ -13208,11 +13208,11 @@
           <a:p>
             <a:pPr algn="ctr">
               <a:lnSpc>
-                <a:spcPts val="2342"/>
+                <a:spcPts val="2624"/>
               </a:lnSpc>
             </a:pPr>
             <a:r>
-              <a:rPr sz="1301" b="1">
+              <a:rPr sz="1458" b="1">
                 <a:solidFill>
                   <a:srgbClr val="FFFFFF"/>
                 </a:solidFill>
@@ -13233,8 +13233,8 @@
         </p:nvSpPr>
         <p:spPr>
           <a:xfrm>
-            <a:off x="2149792" y="3110865"/>
-            <a:ext cx="3245168" cy="331470"/>
+            <a:off x="2243138" y="3037522"/>
+            <a:ext cx="3608070" cy="331470"/>
           </a:xfrm>
           <a:prstGeom prst="rect">
             <a:avLst/>
@@ -13253,7 +13253,7 @@
               </a:lnSpc>
             </a:pPr>
             <a:r>
-              <a:rPr sz="1247" b="1">
+              <a:rPr sz="1397" b="1">
                 <a:solidFill>
                   <a:srgbClr val="3F5266"/>
                 </a:solidFill>
@@ -13264,7 +13264,7 @@
               <a:t>時間</a:t>
             </a:r>
             <a:r>
-              <a:rPr sz="1003" b="1">
+              <a:rPr sz="1123" b="1">
                 <a:solidFill>
                   <a:srgbClr val="8A97A5"/>
                 </a:solidFill>
@@ -13285,8 +13285,8 @@
         </p:nvSpPr>
         <p:spPr>
           <a:xfrm>
-            <a:off x="7691438" y="3110865"/>
-            <a:ext cx="3790950" cy="331470"/>
+            <a:off x="7791450" y="3037522"/>
+            <a:ext cx="4219575" cy="331470"/>
           </a:xfrm>
           <a:prstGeom prst="rect">
             <a:avLst/>
@@ -13305,7 +13305,7 @@
               </a:lnSpc>
             </a:pPr>
             <a:r>
-              <a:rPr sz="1247" b="1">
+              <a:rPr sz="1397" b="1">
                 <a:solidFill>
                   <a:srgbClr val="3F5266"/>
                 </a:solidFill>
@@ -13316,7 +13316,7 @@
               <a:t>つまずき</a:t>
             </a:r>
             <a:r>
-              <a:rPr sz="1003" b="1">
+              <a:rPr sz="1123" b="1">
                 <a:solidFill>
                   <a:srgbClr val="8A97A5"/>
                 </a:solidFill>
@@ -13337,8 +13337,8 @@
         </p:nvSpPr>
         <p:spPr>
           <a:xfrm>
-            <a:off x="2149792" y="3943350"/>
-            <a:ext cx="3219450" cy="331470"/>
+            <a:off x="2243138" y="3970972"/>
+            <a:ext cx="3579495" cy="331470"/>
           </a:xfrm>
           <a:prstGeom prst="rect">
             <a:avLst/>
@@ -13357,7 +13357,7 @@
               </a:lnSpc>
             </a:pPr>
             <a:r>
-              <a:rPr sz="1247" b="1">
+              <a:rPr sz="1397" b="1">
                 <a:solidFill>
                   <a:srgbClr val="3F5266"/>
                 </a:solidFill>
@@ -13368,7 +13368,7 @@
               <a:t>表現</a:t>
             </a:r>
             <a:r>
-              <a:rPr sz="1003" b="1">
+              <a:rPr sz="1123" b="1">
                 <a:solidFill>
                   <a:srgbClr val="8A97A5"/>
                 </a:solidFill>
@@ -13389,8 +13389,8 @@
         </p:nvSpPr>
         <p:spPr>
           <a:xfrm>
-            <a:off x="7691438" y="3943350"/>
-            <a:ext cx="3123248" cy="331470"/>
+            <a:off x="7791450" y="3970972"/>
+            <a:ext cx="3471862" cy="331470"/>
           </a:xfrm>
           <a:prstGeom prst="rect">
             <a:avLst/>
@@ -13409,7 +13409,7 @@
               </a:lnSpc>
             </a:pPr>
             <a:r>
-              <a:rPr sz="1247" b="1">
+              <a:rPr sz="1397" b="1">
                 <a:solidFill>
                   <a:srgbClr val="3F5266"/>
                 </a:solidFill>
@@ -13420,7 +13420,7 @@
               <a:t>届け方</a:t>
             </a:r>
             <a:r>
-              <a:rPr sz="1003" b="1">
+              <a:rPr sz="1123" b="1">
                 <a:solidFill>
                   <a:srgbClr val="8A97A5"/>
                 </a:solidFill>
@@ -13441,8 +13441,8 @@
         </p:nvSpPr>
         <p:spPr>
           <a:xfrm>
-            <a:off x="4248150" y="4593908"/>
-            <a:ext cx="5219700" cy="796290"/>
+            <a:off x="3947160" y="4682490"/>
+            <a:ext cx="5822632" cy="884872"/>
           </a:xfrm>
           <a:prstGeom prst="rect">
             <a:avLst/>
@@ -13457,11 +13457,11 @@
           <a:p>
             <a:pPr algn="ctr">
               <a:lnSpc>
-                <a:spcPts val="2909"/>
+                <a:spcPts val="3259"/>
               </a:lnSpc>
             </a:pPr>
             <a:r>
-              <a:rPr sz="1572" b="1">
+              <a:rPr sz="1761" b="1">
                 <a:solidFill>
                   <a:srgbClr val="3F5266"/>
                 </a:solidFill>
@@ -13472,7 +13472,7 @@
               <a:t>数字のバランス、扉の選択肢、エンディングの文章——</a:t>
             </a:r>
             <a:r>
-              <a:rPr sz="1572" b="1">
+              <a:rPr sz="1761" b="1">
                 <a:solidFill>
                   <a:srgbClr val="3F5266"/>
                 </a:solidFill>
@@ -13483,7 +13483,7 @@
               <a:t>「ここは違うと思う」を、遠慮なく</a:t>
             </a:r>
             <a:r>
-              <a:rPr sz="1572" b="1">
+              <a:rPr sz="1761" b="1">
                 <a:solidFill>
                   <a:srgbClr val="3F5266"/>
                 </a:solidFill>
@@ -13512,8 +13512,8 @@
         </p:blipFill>
         <p:spPr>
           <a:xfrm>
-            <a:off x="5071110" y="2437448"/>
-            <a:ext cx="173355" cy="173355"/>
+            <a:off x="4855845" y="2266950"/>
+            <a:ext cx="194310" cy="194310"/>
           </a:xfrm>
           <a:prstGeom prst="rect">
             <a:avLst/>
@@ -13536,8 +13536,8 @@
         </p:blipFill>
         <p:spPr>
           <a:xfrm>
-            <a:off x="1664018" y="3130868"/>
-            <a:ext cx="234315" cy="234315"/>
+            <a:off x="1699260" y="3043238"/>
+            <a:ext cx="261938" cy="261938"/>
           </a:xfrm>
           <a:prstGeom prst="rect">
             <a:avLst/>
@@ -13560,8 +13560,8 @@
         </p:blipFill>
         <p:spPr>
           <a:xfrm>
-            <a:off x="7205662" y="3130868"/>
-            <a:ext cx="234315" cy="234315"/>
+            <a:off x="7247572" y="3043238"/>
+            <a:ext cx="261938" cy="261938"/>
           </a:xfrm>
           <a:prstGeom prst="rect">
             <a:avLst/>
@@ -13584,8 +13584,8 @@
         </p:blipFill>
         <p:spPr>
           <a:xfrm>
-            <a:off x="1664018" y="3964305"/>
-            <a:ext cx="234315" cy="234315"/>
+            <a:off x="1699260" y="3976688"/>
+            <a:ext cx="261938" cy="261938"/>
           </a:xfrm>
           <a:prstGeom prst="rect">
             <a:avLst/>
@@ -13608,8 +13608,8 @@
         </p:blipFill>
         <p:spPr>
           <a:xfrm>
-            <a:off x="7205662" y="3964305"/>
-            <a:ext cx="234315" cy="234315"/>
+            <a:off x="7247572" y="3976688"/>
+            <a:ext cx="261938" cy="261938"/>
           </a:xfrm>
           <a:prstGeom prst="rect">
             <a:avLst/>
@@ -13650,8 +13650,8 @@
         </p:nvSpPr>
         <p:spPr>
           <a:xfrm>
-            <a:off x="5141595" y="2366962"/>
-            <a:ext cx="3431858" cy="421005"/>
+            <a:off x="4935855" y="2187892"/>
+            <a:ext cx="3845242" cy="471488"/>
           </a:xfrm>
           <a:prstGeom prst="roundRect">
             <a:avLst>
@@ -13694,8 +13694,8 @@
         </p:nvSpPr>
         <p:spPr>
           <a:xfrm>
-            <a:off x="3164205" y="5179695"/>
-            <a:ext cx="4592002" cy="54292"/>
+            <a:off x="2718435" y="5344477"/>
+            <a:ext cx="5146358" cy="54292"/>
           </a:xfrm>
           <a:prstGeom prst="rect">
             <a:avLst/>
@@ -13738,8 +13738,8 @@
         </p:nvSpPr>
         <p:spPr>
           <a:xfrm>
-            <a:off x="5027295" y="2366962"/>
-            <a:ext cx="3660458" cy="478155"/>
+            <a:off x="5324475" y="2187892"/>
+            <a:ext cx="3570922" cy="528638"/>
           </a:xfrm>
           <a:prstGeom prst="rect">
             <a:avLst/>
@@ -13754,11 +13754,11 @@
           <a:p>
             <a:pPr algn="ctr">
               <a:lnSpc>
-                <a:spcPts val="2342"/>
+                <a:spcPts val="2624"/>
               </a:lnSpc>
             </a:pPr>
             <a:r>
-              <a:rPr sz="1301" b="1">
+              <a:rPr sz="1458" b="1">
                 <a:solidFill>
                   <a:srgbClr val="FFFFFF"/>
                 </a:solidFill>
@@ -13779,8 +13779,8 @@
         </p:nvSpPr>
         <p:spPr>
           <a:xfrm>
-            <a:off x="4384358" y="2940368"/>
-            <a:ext cx="4948238" cy="1136332"/>
+            <a:off x="4099560" y="2829878"/>
+            <a:ext cx="5516880" cy="1266825"/>
           </a:xfrm>
           <a:prstGeom prst="rect">
             <a:avLst/>
@@ -13795,11 +13795,11 @@
           <a:p>
             <a:pPr algn="ctr">
               <a:lnSpc>
-                <a:spcPts val="4251"/>
+                <a:spcPts val="4762"/>
               </a:lnSpc>
             </a:pPr>
             <a:r>
-              <a:rPr sz="3036" b="1">
+              <a:rPr sz="3401" b="1">
                 <a:solidFill>
                   <a:srgbClr val="3F5266"/>
                 </a:solidFill>
@@ -13810,7 +13810,7 @@
               <a:t>うまく言葉にならなくても</a:t>
             </a:r>
             <a:r>
-              <a:rPr sz="3036" b="1">
+              <a:rPr sz="3401" b="1">
                 <a:solidFill>
                   <a:srgbClr val="3F5266"/>
                 </a:solidFill>
@@ -13831,8 +13831,8 @@
         </p:nvSpPr>
         <p:spPr>
           <a:xfrm>
-            <a:off x="3049905" y="4170998"/>
-            <a:ext cx="7615238" cy="1164908"/>
+            <a:off x="2604135" y="4209098"/>
+            <a:ext cx="8507730" cy="1298258"/>
           </a:xfrm>
           <a:prstGeom prst="rect">
             <a:avLst/>
@@ -13847,11 +13847,11 @@
           <a:p>
             <a:pPr algn="ctr">
               <a:lnSpc>
-                <a:spcPts val="2909"/>
+                <a:spcPts val="3259"/>
               </a:lnSpc>
             </a:pPr>
             <a:r>
-              <a:rPr sz="1572" b="1">
+              <a:rPr sz="1761" b="1">
                 <a:solidFill>
                   <a:srgbClr val="3F5266"/>
                 </a:solidFill>
@@ -13862,7 +13862,7 @@
               <a:t>今日いちばん心に残った場面。</a:t>
             </a:r>
             <a:r>
-              <a:rPr sz="1572" b="1">
+              <a:rPr sz="1761" b="1">
                 <a:solidFill>
                   <a:srgbClr val="3F5266"/>
                 </a:solidFill>
@@ -13873,7 +13873,7 @@
               <a:t>自分のカードを見たときのこと、他の人のカードを知ったときのこと。</a:t>
             </a:r>
             <a:r>
-              <a:rPr sz="1572" b="1">
+              <a:rPr sz="1761" b="1">
                 <a:solidFill>
                   <a:srgbClr val="3F5266"/>
                 </a:solidFill>
@@ -13884,7 +13884,7 @@
               <a:t>街頭に立つときの言葉が、ひとつでも変わったなら</a:t>
             </a:r>
             <a:r>
-              <a:rPr sz="1572" b="1">
+              <a:rPr sz="1761" b="1">
                 <a:solidFill>
                   <a:srgbClr val="3F5266"/>
                 </a:solidFill>
@@ -13913,8 +13913,8 @@
         </p:blipFill>
         <p:spPr>
           <a:xfrm>
-            <a:off x="5348288" y="2490788"/>
-            <a:ext cx="173355" cy="173355"/>
+            <a:off x="5167312" y="2326958"/>
+            <a:ext cx="194310" cy="194310"/>
           </a:xfrm>
           <a:prstGeom prst="rect">
             <a:avLst/>
@@ -13955,8 +13955,8 @@
         </p:nvSpPr>
         <p:spPr>
           <a:xfrm>
-            <a:off x="6410325" y="2443162"/>
-            <a:ext cx="895350" cy="1102042"/>
+            <a:off x="6356032" y="2272665"/>
+            <a:ext cx="1002982" cy="1234440"/>
           </a:xfrm>
           <a:prstGeom prst="roundRect">
             <a:avLst>
@@ -13999,8 +13999,8 @@
         </p:nvSpPr>
         <p:spPr>
           <a:xfrm>
-            <a:off x="6513195" y="2546032"/>
-            <a:ext cx="688658" cy="895350"/>
+            <a:off x="6472238" y="2388870"/>
+            <a:ext cx="771525" cy="1002982"/>
           </a:xfrm>
           <a:prstGeom prst="roundRect">
             <a:avLst>
@@ -14043,8 +14043,8 @@
         </p:nvSpPr>
         <p:spPr>
           <a:xfrm>
-            <a:off x="4271010" y="3695700"/>
-            <a:ext cx="5173980" cy="674370"/>
+            <a:off x="3973830" y="3676650"/>
+            <a:ext cx="5769292" cy="748665"/>
           </a:xfrm>
           <a:prstGeom prst="rect">
             <a:avLst/>
@@ -14059,11 +14059,11 @@
           <a:p>
             <a:pPr algn="ctr">
               <a:lnSpc>
-                <a:spcPts val="4858"/>
+                <a:spcPts val="5443"/>
               </a:lnSpc>
             </a:pPr>
             <a:r>
-              <a:rPr sz="3470" b="1">
+              <a:rPr sz="3888" b="1">
                 <a:solidFill>
                   <a:srgbClr val="3F5266"/>
                 </a:solidFill>
@@ -14084,8 +14084,8 @@
         </p:nvSpPr>
         <p:spPr>
           <a:xfrm>
-            <a:off x="4647248" y="4464368"/>
-            <a:ext cx="4421505" cy="796290"/>
+            <a:off x="4393882" y="4537710"/>
+            <a:ext cx="4927282" cy="884872"/>
           </a:xfrm>
           <a:prstGeom prst="rect">
             <a:avLst/>
@@ -14100,11 +14100,11 @@
           <a:p>
             <a:pPr algn="ctr">
               <a:lnSpc>
-                <a:spcPts val="2909"/>
+                <a:spcPts val="3259"/>
               </a:lnSpc>
             </a:pPr>
             <a:r>
-              <a:rPr sz="1572" b="1">
+              <a:rPr sz="1761" b="1">
                 <a:solidFill>
                   <a:srgbClr val="3F5266"/>
                 </a:solidFill>
@@ -14115,7 +14115,7 @@
               <a:t>あなたの前にも、世界のどこかの子の前にも、</a:t>
             </a:r>
             <a:r>
-              <a:rPr sz="1572" b="1">
+              <a:rPr sz="1761" b="1">
                 <a:solidFill>
                   <a:srgbClr val="3F5266"/>
                 </a:solidFill>
@@ -14162,8 +14162,8 @@
         </p:nvSpPr>
         <p:spPr>
           <a:xfrm>
-            <a:off x="5277802" y="2155508"/>
-            <a:ext cx="3161348" cy="421005"/>
+            <a:off x="5087302" y="1953578"/>
+            <a:ext cx="3541395" cy="471488"/>
           </a:xfrm>
           <a:prstGeom prst="roundRect">
             <a:avLst>
@@ -14206,12 +14206,12 @@
         </p:nvSpPr>
         <p:spPr>
           <a:xfrm>
-            <a:off x="960120" y="2727960"/>
-            <a:ext cx="3821430" cy="1872615"/>
+            <a:off x="960120" y="2594610"/>
+            <a:ext cx="3808095" cy="2092642"/>
           </a:xfrm>
           <a:prstGeom prst="roundRect">
             <a:avLst>
-              <a:gd name="adj" fmla="val 8090"/>
+              <a:gd name="adj" fmla="val 8111"/>
             </a:avLst>
           </a:prstGeom>
           <a:solidFill>
@@ -14252,8 +14252,8 @@
         </p:nvSpPr>
         <p:spPr>
           <a:xfrm>
-            <a:off x="1134428" y="3870960"/>
-            <a:ext cx="3471862" cy="541020"/>
+            <a:off x="1154430" y="3873818"/>
+            <a:ext cx="3419475" cy="603885"/>
           </a:xfrm>
           <a:prstGeom prst="rect">
             <a:avLst/>
@@ -14294,12 +14294,12 @@
         </p:nvSpPr>
         <p:spPr>
           <a:xfrm>
-            <a:off x="4947285" y="2727960"/>
-            <a:ext cx="3821430" cy="1872615"/>
+            <a:off x="4953952" y="2594610"/>
+            <a:ext cx="3808095" cy="2092642"/>
           </a:xfrm>
           <a:prstGeom prst="roundRect">
             <a:avLst>
-              <a:gd name="adj" fmla="val 8090"/>
+              <a:gd name="adj" fmla="val 8111"/>
             </a:avLst>
           </a:prstGeom>
           <a:solidFill>
@@ -14340,8 +14340,8 @@
         </p:nvSpPr>
         <p:spPr>
           <a:xfrm>
-            <a:off x="5121592" y="3870960"/>
-            <a:ext cx="3471862" cy="541020"/>
+            <a:off x="5148262" y="3873818"/>
+            <a:ext cx="3419475" cy="603885"/>
           </a:xfrm>
           <a:prstGeom prst="rect">
             <a:avLst/>
@@ -14382,12 +14382,12 @@
         </p:nvSpPr>
         <p:spPr>
           <a:xfrm>
-            <a:off x="8934450" y="2727960"/>
-            <a:ext cx="3821430" cy="1872615"/>
+            <a:off x="8946832" y="2594610"/>
+            <a:ext cx="3808095" cy="2092642"/>
           </a:xfrm>
           <a:prstGeom prst="roundRect">
             <a:avLst>
-              <a:gd name="adj" fmla="val 8090"/>
+              <a:gd name="adj" fmla="val 8111"/>
             </a:avLst>
           </a:prstGeom>
           <a:solidFill>
@@ -14428,8 +14428,8 @@
         </p:nvSpPr>
         <p:spPr>
           <a:xfrm>
-            <a:off x="9108758" y="3870960"/>
-            <a:ext cx="3471862" cy="541020"/>
+            <a:off x="9142095" y="3873818"/>
+            <a:ext cx="3419475" cy="603885"/>
           </a:xfrm>
           <a:prstGeom prst="rect">
             <a:avLst/>
@@ -14470,8 +14470,8 @@
         </p:nvSpPr>
         <p:spPr>
           <a:xfrm>
-            <a:off x="6358890" y="5391150"/>
-            <a:ext cx="1198245" cy="54292"/>
+            <a:off x="6298882" y="5578792"/>
+            <a:ext cx="1343025" cy="54292"/>
           </a:xfrm>
           <a:prstGeom prst="rect">
             <a:avLst/>
@@ -14514,8 +14514,8 @@
         </p:nvSpPr>
         <p:spPr>
           <a:xfrm>
-            <a:off x="5163502" y="2155508"/>
-            <a:ext cx="3389948" cy="478155"/>
+            <a:off x="5475922" y="1953578"/>
+            <a:ext cx="3267075" cy="528638"/>
           </a:xfrm>
           <a:prstGeom prst="rect">
             <a:avLst/>
@@ -14530,11 +14530,11 @@
           <a:p>
             <a:pPr algn="ctr">
               <a:lnSpc>
-                <a:spcPts val="2342"/>
+                <a:spcPts val="2624"/>
               </a:lnSpc>
             </a:pPr>
             <a:r>
-              <a:rPr sz="1301" b="1">
+              <a:rPr sz="1458" b="1">
                 <a:solidFill>
                   <a:srgbClr val="7A6320"/>
                 </a:solidFill>
@@ -14555,8 +14555,8 @@
         </p:nvSpPr>
         <p:spPr>
           <a:xfrm>
-            <a:off x="1134428" y="2916555"/>
-            <a:ext cx="3700462" cy="354330"/>
+            <a:off x="1425892" y="2805112"/>
+            <a:ext cx="3376612" cy="390525"/>
           </a:xfrm>
           <a:prstGeom prst="rect">
             <a:avLst/>
@@ -14571,11 +14571,11 @@
           <a:p>
             <a:pPr algn="l">
               <a:lnSpc>
-                <a:spcPts val="2342"/>
+                <a:spcPts val="2624"/>
               </a:lnSpc>
             </a:pPr>
             <a:r>
-              <a:rPr sz="1301" b="1">
+              <a:rPr sz="1458" b="1">
                 <a:solidFill>
                   <a:srgbClr val="C4703E"/>
                 </a:solidFill>
@@ -14596,8 +14596,8 @@
         </p:nvSpPr>
         <p:spPr>
           <a:xfrm>
-            <a:off x="1134428" y="3296602"/>
-            <a:ext cx="3700462" cy="548640"/>
+            <a:off x="1154430" y="3230880"/>
+            <a:ext cx="3648075" cy="607695"/>
           </a:xfrm>
           <a:prstGeom prst="rect">
             <a:avLst/>
@@ -14612,11 +14612,11 @@
           <a:p>
             <a:pPr algn="l">
               <a:lnSpc>
-                <a:spcPts val="1935"/>
+                <a:spcPts val="2168"/>
               </a:lnSpc>
             </a:pPr>
             <a:r>
-              <a:rPr sz="1138" b="1">
+              <a:rPr sz="1275" b="1">
                 <a:solidFill>
                   <a:srgbClr val="3F5266"/>
                 </a:solidFill>
@@ -14637,8 +14637,8 @@
         </p:nvSpPr>
         <p:spPr>
           <a:xfrm>
-            <a:off x="1134428" y="3870960"/>
-            <a:ext cx="3700462" cy="598170"/>
+            <a:off x="1154430" y="3873818"/>
+            <a:ext cx="3648075" cy="661035"/>
           </a:xfrm>
           <a:prstGeom prst="rect">
             <a:avLst/>
@@ -14653,11 +14653,11 @@
           <a:p>
             <a:pPr algn="l">
               <a:lnSpc>
-                <a:spcPts val="1756"/>
+                <a:spcPts val="1968"/>
               </a:lnSpc>
             </a:pPr>
             <a:r>
-              <a:rPr sz="976" b="1">
+              <a:rPr sz="1093" b="1">
                 <a:solidFill>
                   <a:srgbClr val="8A97A5"/>
                 </a:solidFill>
@@ -14678,8 +14678,8 @@
         </p:nvSpPr>
         <p:spPr>
           <a:xfrm>
-            <a:off x="5121592" y="2916555"/>
-            <a:ext cx="3700462" cy="354330"/>
+            <a:off x="5419725" y="2805112"/>
+            <a:ext cx="3376612" cy="390525"/>
           </a:xfrm>
           <a:prstGeom prst="rect">
             <a:avLst/>
@@ -14694,11 +14694,11 @@
           <a:p>
             <a:pPr algn="l">
               <a:lnSpc>
-                <a:spcPts val="2342"/>
+                <a:spcPts val="2624"/>
               </a:lnSpc>
             </a:pPr>
             <a:r>
-              <a:rPr sz="1301" b="1">
+              <a:rPr sz="1458" b="1">
                 <a:solidFill>
                   <a:srgbClr val="5B7FA8"/>
                 </a:solidFill>
@@ -14719,8 +14719,8 @@
         </p:nvSpPr>
         <p:spPr>
           <a:xfrm>
-            <a:off x="5121592" y="3296602"/>
-            <a:ext cx="3700462" cy="548640"/>
+            <a:off x="5148262" y="3230880"/>
+            <a:ext cx="3648075" cy="607695"/>
           </a:xfrm>
           <a:prstGeom prst="rect">
             <a:avLst/>
@@ -14735,11 +14735,11 @@
           <a:p>
             <a:pPr algn="l">
               <a:lnSpc>
-                <a:spcPts val="1935"/>
+                <a:spcPts val="2168"/>
               </a:lnSpc>
             </a:pPr>
             <a:r>
-              <a:rPr sz="1138" b="1">
+              <a:rPr sz="1275" b="1">
                 <a:solidFill>
                   <a:srgbClr val="3F5266"/>
                 </a:solidFill>
@@ -14760,8 +14760,8 @@
         </p:nvSpPr>
         <p:spPr>
           <a:xfrm>
-            <a:off x="5121592" y="3870960"/>
-            <a:ext cx="3700462" cy="598170"/>
+            <a:off x="5148262" y="3873818"/>
+            <a:ext cx="3648075" cy="661035"/>
           </a:xfrm>
           <a:prstGeom prst="rect">
             <a:avLst/>
@@ -14776,11 +14776,11 @@
           <a:p>
             <a:pPr algn="l">
               <a:lnSpc>
-                <a:spcPts val="1756"/>
+                <a:spcPts val="1968"/>
               </a:lnSpc>
             </a:pPr>
             <a:r>
-              <a:rPr sz="976" b="1">
+              <a:rPr sz="1093" b="1">
                 <a:solidFill>
                   <a:srgbClr val="8A97A5"/>
                 </a:solidFill>
@@ -14801,8 +14801,8 @@
         </p:nvSpPr>
         <p:spPr>
           <a:xfrm>
-            <a:off x="9108758" y="2916555"/>
-            <a:ext cx="3700462" cy="354330"/>
+            <a:off x="9413558" y="2805112"/>
+            <a:ext cx="3376612" cy="390525"/>
           </a:xfrm>
           <a:prstGeom prst="rect">
             <a:avLst/>
@@ -14817,11 +14817,11 @@
           <a:p>
             <a:pPr algn="l">
               <a:lnSpc>
-                <a:spcPts val="2342"/>
+                <a:spcPts val="2624"/>
               </a:lnSpc>
             </a:pPr>
             <a:r>
-              <a:rPr sz="1301" b="1">
+              <a:rPr sz="1458" b="1">
                 <a:solidFill>
                   <a:srgbClr val="5FA882"/>
                 </a:solidFill>
@@ -14842,8 +14842,8 @@
         </p:nvSpPr>
         <p:spPr>
           <a:xfrm>
-            <a:off x="9108758" y="3296602"/>
-            <a:ext cx="3700462" cy="548640"/>
+            <a:off x="9142095" y="3230880"/>
+            <a:ext cx="3648075" cy="607695"/>
           </a:xfrm>
           <a:prstGeom prst="rect">
             <a:avLst/>
@@ -14858,11 +14858,11 @@
           <a:p>
             <a:pPr algn="l">
               <a:lnSpc>
-                <a:spcPts val="1935"/>
+                <a:spcPts val="2168"/>
               </a:lnSpc>
             </a:pPr>
             <a:r>
-              <a:rPr sz="1138" b="1">
+              <a:rPr sz="1275" b="1">
                 <a:solidFill>
                   <a:srgbClr val="3F5266"/>
                 </a:solidFill>
@@ -14883,8 +14883,8 @@
         </p:nvSpPr>
         <p:spPr>
           <a:xfrm>
-            <a:off x="9108758" y="3870960"/>
-            <a:ext cx="3700462" cy="598170"/>
+            <a:off x="9142095" y="3873818"/>
+            <a:ext cx="3648075" cy="661035"/>
           </a:xfrm>
           <a:prstGeom prst="rect">
             <a:avLst/>
@@ -14899,11 +14899,11 @@
           <a:p>
             <a:pPr algn="l">
               <a:lnSpc>
-                <a:spcPts val="1756"/>
+                <a:spcPts val="1968"/>
               </a:lnSpc>
             </a:pPr>
             <a:r>
-              <a:rPr sz="976" b="1">
+              <a:rPr sz="1093" b="1">
                 <a:solidFill>
                   <a:srgbClr val="8A97A5"/>
                 </a:solidFill>
@@ -14924,8 +14924,8 @@
         </p:nvSpPr>
         <p:spPr>
           <a:xfrm>
-            <a:off x="4448175" y="4752022"/>
-            <a:ext cx="4820602" cy="796290"/>
+            <a:off x="4170045" y="4857750"/>
+            <a:ext cx="5374958" cy="884872"/>
           </a:xfrm>
           <a:prstGeom prst="rect">
             <a:avLst/>
@@ -14940,11 +14940,11 @@
           <a:p>
             <a:pPr algn="ctr">
               <a:lnSpc>
-                <a:spcPts val="2909"/>
+                <a:spcPts val="3259"/>
               </a:lnSpc>
             </a:pPr>
             <a:r>
-              <a:rPr sz="1572" b="1">
+              <a:rPr sz="1761" b="1">
                 <a:solidFill>
                   <a:srgbClr val="3F5266"/>
                 </a:solidFill>
@@ -14955,7 +14955,7 @@
               <a:t>同じ「学校に行く」でも、そこに至るまでが違う。</a:t>
             </a:r>
             <a:r>
-              <a:rPr sz="1572" b="1">
+              <a:rPr sz="1761" b="1">
                 <a:solidFill>
                   <a:srgbClr val="3F5266"/>
                 </a:solidFill>
@@ -14966,7 +14966,7 @@
               <a:t>この差が、そのまま</a:t>
             </a:r>
             <a:r>
-              <a:rPr sz="1572" b="1">
+              <a:rPr sz="1761" b="1">
                 <a:solidFill>
                   <a:srgbClr val="3F5266"/>
                 </a:solidFill>
@@ -14977,7 +14977,7 @@
               <a:t>ゲームの数字</a:t>
             </a:r>
             <a:r>
-              <a:rPr sz="1572" b="1">
+              <a:rPr sz="1761" b="1">
                 <a:solidFill>
                   <a:srgbClr val="3F5266"/>
                 </a:solidFill>
@@ -15006,8 +15006,8 @@
         </p:blipFill>
         <p:spPr>
           <a:xfrm>
-            <a:off x="5484495" y="2279332"/>
-            <a:ext cx="173355" cy="173355"/>
+            <a:off x="5318760" y="2091690"/>
+            <a:ext cx="194310" cy="194310"/>
           </a:xfrm>
           <a:prstGeom prst="rect">
             <a:avLst/>
@@ -15030,8 +15030,8 @@
         </p:blipFill>
         <p:spPr>
           <a:xfrm>
-            <a:off x="1134428" y="2978468"/>
-            <a:ext cx="173355" cy="173355"/>
+            <a:off x="1154430" y="2874645"/>
+            <a:ext cx="194310" cy="194310"/>
           </a:xfrm>
           <a:prstGeom prst="rect">
             <a:avLst/>
@@ -15054,8 +15054,8 @@
         </p:blipFill>
         <p:spPr>
           <a:xfrm>
-            <a:off x="5121592" y="2978468"/>
-            <a:ext cx="173355" cy="173355"/>
+            <a:off x="5148262" y="2874645"/>
+            <a:ext cx="194310" cy="194310"/>
           </a:xfrm>
           <a:prstGeom prst="rect">
             <a:avLst/>
@@ -15078,8 +15078,8 @@
         </p:blipFill>
         <p:spPr>
           <a:xfrm>
-            <a:off x="9108758" y="2978468"/>
-            <a:ext cx="173355" cy="173355"/>
+            <a:off x="9142095" y="2874645"/>
+            <a:ext cx="194310" cy="194310"/>
           </a:xfrm>
           <a:prstGeom prst="rect">
             <a:avLst/>
@@ -15120,8 +15120,8 @@
         </p:nvSpPr>
         <p:spPr>
           <a:xfrm>
-            <a:off x="5512118" y="2121218"/>
-            <a:ext cx="2691765" cy="421005"/>
+            <a:off x="5350192" y="1913572"/>
+            <a:ext cx="3015615" cy="471488"/>
           </a:xfrm>
           <a:prstGeom prst="roundRect">
             <a:avLst>
@@ -15164,12 +15164,12 @@
         </p:nvSpPr>
         <p:spPr>
           <a:xfrm>
-            <a:off x="3878580" y="3925252"/>
-            <a:ext cx="5958840" cy="1200150"/>
+            <a:off x="3521392" y="3934778"/>
+            <a:ext cx="6674168" cy="1343025"/>
           </a:xfrm>
           <a:prstGeom prst="roundRect">
             <a:avLst>
-              <a:gd name="adj" fmla="val 14919"/>
+              <a:gd name="adj" fmla="val 14936"/>
             </a:avLst>
           </a:prstGeom>
           <a:solidFill>
@@ -15210,8 +15210,8 @@
         </p:nvSpPr>
         <p:spPr>
           <a:xfrm>
-            <a:off x="5397818" y="2121218"/>
-            <a:ext cx="2920365" cy="478155"/>
+            <a:off x="5738812" y="1913572"/>
+            <a:ext cx="2741295" cy="528638"/>
           </a:xfrm>
           <a:prstGeom prst="rect">
             <a:avLst/>
@@ -15226,11 +15226,11 @@
           <a:p>
             <a:pPr algn="ctr">
               <a:lnSpc>
-                <a:spcPts val="2342"/>
+                <a:spcPts val="2624"/>
               </a:lnSpc>
             </a:pPr>
             <a:r>
-              <a:rPr sz="1301" b="1">
+              <a:rPr sz="1458" b="1">
                 <a:solidFill>
                   <a:srgbClr val="FFFFFF"/>
                 </a:solidFill>
@@ -15251,8 +15251,8 @@
         </p:nvSpPr>
         <p:spPr>
           <a:xfrm>
-            <a:off x="3204210" y="2694622"/>
-            <a:ext cx="7307580" cy="1136332"/>
+            <a:off x="2777490" y="2555558"/>
+            <a:ext cx="8161020" cy="1266825"/>
           </a:xfrm>
           <a:prstGeom prst="rect">
             <a:avLst/>
@@ -15267,11 +15267,11 @@
           <a:p>
             <a:pPr algn="ctr">
               <a:lnSpc>
-                <a:spcPts val="4251"/>
+                <a:spcPts val="4762"/>
               </a:lnSpc>
             </a:pPr>
             <a:r>
-              <a:rPr sz="3036" b="1">
+              <a:rPr sz="3401" b="1">
                 <a:solidFill>
                   <a:srgbClr val="3F5266"/>
                 </a:solidFill>
@@ -15282,7 +15282,7 @@
               <a:t>同じ盤面、同じサイコロ、同じルール。</a:t>
             </a:r>
             <a:r>
-              <a:rPr sz="3036" b="1">
+              <a:rPr sz="3401" b="1">
                 <a:solidFill>
                   <a:srgbClr val="F4879F"/>
                 </a:solidFill>
@@ -15303,8 +15303,8 @@
         </p:nvSpPr>
         <p:spPr>
           <a:xfrm>
-            <a:off x="3764280" y="3925252"/>
-            <a:ext cx="6187440" cy="1257300"/>
+            <a:off x="3763328" y="3934778"/>
+            <a:ext cx="6545580" cy="1400175"/>
           </a:xfrm>
           <a:prstGeom prst="rect">
             <a:avLst/>
@@ -15319,11 +15319,11 @@
           <a:p>
             <a:pPr algn="ctr">
               <a:lnSpc>
-                <a:spcPts val="3025"/>
+                <a:spcPts val="3389"/>
               </a:lnSpc>
             </a:pPr>
             <a:r>
-              <a:rPr sz="1680" b="1">
+              <a:rPr sz="1883" b="1">
                 <a:solidFill>
                   <a:srgbClr val="3F5266"/>
                 </a:solidFill>
@@ -15335,7 +15335,7 @@
     説明ではなく、</a:t>
             </a:r>
             <a:r>
-              <a:rPr sz="1680" b="1">
+              <a:rPr sz="1883" b="1">
                 <a:solidFill>
                   <a:srgbClr val="5B7FA8"/>
                 </a:solidFill>
@@ -15346,7 +15346,7 @@
               <a:t>自分の手番で</a:t>
             </a:r>
             <a:r>
-              <a:rPr sz="1680" b="1">
+              <a:rPr sz="1883" b="1">
                 <a:solidFill>
                   <a:srgbClr val="3F5266"/>
                 </a:solidFill>
@@ -15357,7 +15357,7 @@
               <a:t>それが起きる。</a:t>
             </a:r>
             <a:r>
-              <a:rPr sz="1680" b="1">
+              <a:rPr sz="1883" b="1">
                 <a:solidFill>
                   <a:srgbClr val="3F5266"/>
                 </a:solidFill>
@@ -15369,7 +15369,7 @@
     その差が結果にどう出るかを、</a:t>
             </a:r>
             <a:r>
-              <a:rPr sz="1680" b="1">
+              <a:rPr sz="1883" b="1">
                 <a:solidFill>
                   <a:srgbClr val="F4879F"/>
                 </a:solidFill>
@@ -15380,7 +15380,7 @@
               <a:t>25分で一度通しておく</a:t>
             </a:r>
             <a:r>
-              <a:rPr sz="1680" b="1">
+              <a:rPr sz="1883" b="1">
                 <a:solidFill>
                   <a:srgbClr val="3F5266"/>
                 </a:solidFill>
@@ -15402,8 +15402,8 @@
         </p:nvSpPr>
         <p:spPr>
           <a:xfrm>
-            <a:off x="3507105" y="5276850"/>
-            <a:ext cx="6701790" cy="304800"/>
+            <a:off x="3117532" y="5446395"/>
+            <a:ext cx="7480935" cy="335280"/>
           </a:xfrm>
           <a:prstGeom prst="rect">
             <a:avLst/>
@@ -15418,11 +15418,11 @@
           <a:p>
             <a:pPr algn="ctr">
               <a:lnSpc>
-                <a:spcPts val="1952"/>
+                <a:spcPts val="2187"/>
               </a:lnSpc>
             </a:pPr>
             <a:r>
-              <a:rPr sz="1084" b="1">
+              <a:rPr sz="1214" b="1">
                 <a:solidFill>
                   <a:srgbClr val="8A97A5"/>
                 </a:solidFill>
@@ -15451,8 +15451,8 @@
         </p:blipFill>
         <p:spPr>
           <a:xfrm>
-            <a:off x="5718810" y="2245042"/>
-            <a:ext cx="173355" cy="173355"/>
+            <a:off x="5581650" y="2052638"/>
+            <a:ext cx="194310" cy="194310"/>
           </a:xfrm>
           <a:prstGeom prst="rect">
             <a:avLst/>
@@ -15493,8 +15493,8 @@
         </p:nvSpPr>
         <p:spPr>
           <a:xfrm>
-            <a:off x="5091112" y="343852"/>
-            <a:ext cx="3533775" cy="421005"/>
+            <a:off x="4878705" y="385762"/>
+            <a:ext cx="3959542" cy="471488"/>
           </a:xfrm>
           <a:prstGeom prst="roundRect">
             <a:avLst>
@@ -15537,8 +15537,8 @@
         </p:nvSpPr>
         <p:spPr>
           <a:xfrm>
-            <a:off x="5959792" y="6833235"/>
-            <a:ext cx="2795588" cy="54292"/>
+            <a:off x="5851208" y="6732270"/>
+            <a:ext cx="3132772" cy="54292"/>
           </a:xfrm>
           <a:prstGeom prst="rect">
             <a:avLst/>
@@ -15581,8 +15581,8 @@
         </p:nvSpPr>
         <p:spPr>
           <a:xfrm>
-            <a:off x="4121468" y="7201852"/>
-            <a:ext cx="4474845" cy="54292"/>
+            <a:off x="3790950" y="7146608"/>
+            <a:ext cx="5015865" cy="54292"/>
           </a:xfrm>
           <a:prstGeom prst="rect">
             <a:avLst/>
@@ -15633,8 +15633,8 @@
         </p:blipFill>
         <p:spPr>
           <a:xfrm>
-            <a:off x="411480" y="917258"/>
-            <a:ext cx="4206240" cy="2433638"/>
+            <a:off x="411480" y="1027748"/>
+            <a:ext cx="4194810" cy="2262188"/>
           </a:xfrm>
           <a:prstGeom prst="rect">
             <a:avLst/>
@@ -15657,8 +15657,8 @@
         </p:blipFill>
         <p:spPr>
           <a:xfrm>
-            <a:off x="4754880" y="917258"/>
-            <a:ext cx="4206240" cy="2433638"/>
+            <a:off x="4760595" y="1027748"/>
+            <a:ext cx="4194810" cy="2262188"/>
           </a:xfrm>
           <a:prstGeom prst="rect">
             <a:avLst/>
@@ -15681,8 +15681,8 @@
         </p:blipFill>
         <p:spPr>
           <a:xfrm>
-            <a:off x="9098280" y="917258"/>
-            <a:ext cx="4206240" cy="2433638"/>
+            <a:off x="9109710" y="1027748"/>
+            <a:ext cx="4194810" cy="2262188"/>
           </a:xfrm>
           <a:prstGeom prst="rect">
             <a:avLst/>
@@ -15705,8 +15705,8 @@
         </p:blipFill>
         <p:spPr>
           <a:xfrm>
-            <a:off x="411480" y="3719512"/>
-            <a:ext cx="4206240" cy="2433638"/>
+            <a:off x="411480" y="3703320"/>
+            <a:ext cx="4194810" cy="2262188"/>
           </a:xfrm>
           <a:prstGeom prst="rect">
             <a:avLst/>
@@ -15729,8 +15729,8 @@
         </p:blipFill>
         <p:spPr>
           <a:xfrm>
-            <a:off x="4754880" y="3719512"/>
-            <a:ext cx="4206240" cy="2433638"/>
+            <a:off x="4760595" y="3703320"/>
+            <a:ext cx="4194810" cy="2262188"/>
           </a:xfrm>
           <a:prstGeom prst="rect">
             <a:avLst/>
@@ -15753,8 +15753,8 @@
         </p:blipFill>
         <p:spPr>
           <a:xfrm>
-            <a:off x="9098280" y="3719512"/>
-            <a:ext cx="4206240" cy="2433638"/>
+            <a:off x="9109710" y="3703320"/>
+            <a:ext cx="4194810" cy="2262188"/>
           </a:xfrm>
           <a:prstGeom prst="rect">
             <a:avLst/>
@@ -15769,8 +15769,8 @@
         </p:nvSpPr>
         <p:spPr>
           <a:xfrm>
-            <a:off x="4976812" y="343852"/>
-            <a:ext cx="3762375" cy="478155"/>
+            <a:off x="5267325" y="385762"/>
+            <a:ext cx="3685222" cy="528638"/>
           </a:xfrm>
           <a:prstGeom prst="rect">
             <a:avLst/>
@@ -15785,11 +15785,11 @@
           <a:p>
             <a:pPr algn="ctr">
               <a:lnSpc>
-                <a:spcPts val="2342"/>
+                <a:spcPts val="2624"/>
               </a:lnSpc>
             </a:pPr>
             <a:r>
-              <a:rPr sz="1301" b="1">
+              <a:rPr sz="1458" b="1">
                 <a:solidFill>
                   <a:srgbClr val="FFFFFF"/>
                 </a:solidFill>
@@ -15810,8 +15810,8 @@
         </p:nvSpPr>
         <p:spPr>
           <a:xfrm>
-            <a:off x="1189672" y="3398520"/>
-            <a:ext cx="2648902" cy="267652"/>
+            <a:off x="1038225" y="3343275"/>
+            <a:ext cx="2940368" cy="293370"/>
           </a:xfrm>
           <a:prstGeom prst="rect">
             <a:avLst/>
@@ -15826,11 +15826,11 @@
           <a:p>
             <a:pPr algn="ctr">
               <a:lnSpc>
-                <a:spcPts val="1659"/>
+                <a:spcPts val="1858"/>
               </a:lnSpc>
             </a:pPr>
             <a:r>
-              <a:rPr sz="921" b="1">
+              <a:rPr sz="1032" b="1">
                 <a:solidFill>
                   <a:srgbClr val="8A97A5"/>
                 </a:solidFill>
@@ -15851,8 +15851,8 @@
         </p:nvSpPr>
         <p:spPr>
           <a:xfrm>
-            <a:off x="5534978" y="3398520"/>
-            <a:ext cx="2646045" cy="267652"/>
+            <a:off x="5389245" y="3343275"/>
+            <a:ext cx="2937510" cy="293370"/>
           </a:xfrm>
           <a:prstGeom prst="rect">
             <a:avLst/>
@@ -15867,11 +15867,11 @@
           <a:p>
             <a:pPr algn="ctr">
               <a:lnSpc>
-                <a:spcPts val="1659"/>
+                <a:spcPts val="1858"/>
               </a:lnSpc>
             </a:pPr>
             <a:r>
-              <a:rPr sz="921" b="1">
+              <a:rPr sz="1032" b="1">
                 <a:solidFill>
                   <a:srgbClr val="8A97A5"/>
                 </a:solidFill>
@@ -15892,8 +15892,8 @@
         </p:nvSpPr>
         <p:spPr>
           <a:xfrm>
-            <a:off x="9643110" y="3398520"/>
-            <a:ext cx="3117532" cy="267652"/>
+            <a:off x="9474518" y="3343275"/>
+            <a:ext cx="3465195" cy="293370"/>
           </a:xfrm>
           <a:prstGeom prst="rect">
             <a:avLst/>
@@ -15908,11 +15908,11 @@
           <a:p>
             <a:pPr algn="ctr">
               <a:lnSpc>
-                <a:spcPts val="1659"/>
+                <a:spcPts val="1858"/>
               </a:lnSpc>
             </a:pPr>
             <a:r>
-              <a:rPr sz="921" b="1">
+              <a:rPr sz="1032" b="1">
                 <a:solidFill>
                   <a:srgbClr val="8A97A5"/>
                 </a:solidFill>
@@ -15933,8 +15933,8 @@
         </p:nvSpPr>
         <p:spPr>
           <a:xfrm>
-            <a:off x="831532" y="6200775"/>
-            <a:ext cx="3366135" cy="267652"/>
+            <a:off x="637222" y="6019800"/>
+            <a:ext cx="3744278" cy="293370"/>
           </a:xfrm>
           <a:prstGeom prst="rect">
             <a:avLst/>
@@ -15949,11 +15949,11 @@
           <a:p>
             <a:pPr algn="ctr">
               <a:lnSpc>
-                <a:spcPts val="1659"/>
+                <a:spcPts val="1858"/>
               </a:lnSpc>
             </a:pPr>
             <a:r>
-              <a:rPr sz="921" b="1">
+              <a:rPr sz="1032" b="1">
                 <a:solidFill>
                   <a:srgbClr val="8A97A5"/>
                 </a:solidFill>
@@ -15964,7 +15964,7 @@
               <a:t>ウガンダ・両親あり：はじめ40万／基本給</a:t>
             </a:r>
             <a:r>
-              <a:rPr sz="921" b="1">
+              <a:rPr sz="1032" b="1">
                 <a:solidFill>
                   <a:srgbClr val="8A97A5"/>
                 </a:solidFill>
@@ -15975,7 +15975,7 @@
               <a:t>10万</a:t>
             </a:r>
             <a:r>
-              <a:rPr sz="921" b="1">
+              <a:rPr sz="1032" b="1">
                 <a:solidFill>
                   <a:srgbClr val="8A97A5"/>
                 </a:solidFill>
@@ -15986,7 +15986,7 @@
               <a:t>／★1つ＝</a:t>
             </a:r>
             <a:r>
-              <a:rPr sz="921" b="1">
+              <a:rPr sz="1032" b="1">
                 <a:solidFill>
                   <a:srgbClr val="8A97A5"/>
                 </a:solidFill>
@@ -16007,8 +16007,8 @@
         </p:nvSpPr>
         <p:spPr>
           <a:xfrm>
-            <a:off x="5118735" y="6200775"/>
-            <a:ext cx="3478530" cy="267652"/>
+            <a:off x="4923472" y="6019800"/>
+            <a:ext cx="3870008" cy="293370"/>
           </a:xfrm>
           <a:prstGeom prst="rect">
             <a:avLst/>
@@ -16023,11 +16023,11 @@
           <a:p>
             <a:pPr algn="ctr">
               <a:lnSpc>
-                <a:spcPts val="1659"/>
+                <a:spcPts val="1858"/>
               </a:lnSpc>
             </a:pPr>
             <a:r>
-              <a:rPr sz="921" b="1">
+              <a:rPr sz="1032" b="1">
                 <a:solidFill>
                   <a:srgbClr val="8A97A5"/>
                 </a:solidFill>
@@ -16038,7 +16038,7 @@
               <a:t>遺児・</a:t>
             </a:r>
             <a:r>
-              <a:rPr sz="921" b="1">
+              <a:rPr sz="1032" b="1">
                 <a:solidFill>
                   <a:srgbClr val="8A97A5"/>
                 </a:solidFill>
@@ -16049,7 +16049,7 @@
               <a:t>支援と出会えた</a:t>
             </a:r>
             <a:r>
-              <a:rPr sz="921" b="1">
+              <a:rPr sz="1032" b="1">
                 <a:solidFill>
                   <a:srgbClr val="8A97A5"/>
                 </a:solidFill>
@@ -16060,7 +16060,7 @@
               <a:t>：はじめ20万／基本給</a:t>
             </a:r>
             <a:r>
-              <a:rPr sz="921" b="1">
+              <a:rPr sz="1032" b="1">
                 <a:solidFill>
                   <a:srgbClr val="8A97A5"/>
                 </a:solidFill>
@@ -16071,7 +16071,7 @@
               <a:t>10万</a:t>
             </a:r>
             <a:r>
-              <a:rPr sz="921" b="1">
+              <a:rPr sz="1032" b="1">
                 <a:solidFill>
                   <a:srgbClr val="8A97A5"/>
                 </a:solidFill>
@@ -16082,7 +16082,7 @@
               <a:t>／★1つ＝</a:t>
             </a:r>
             <a:r>
-              <a:rPr sz="921" b="1">
+              <a:rPr sz="1032" b="1">
                 <a:solidFill>
                   <a:srgbClr val="8A97A5"/>
                 </a:solidFill>
@@ -16103,8 +16103,8 @@
         </p:nvSpPr>
         <p:spPr>
           <a:xfrm>
-            <a:off x="9682162" y="6200775"/>
-            <a:ext cx="3038475" cy="267652"/>
+            <a:off x="9518332" y="6019800"/>
+            <a:ext cx="3376612" cy="293370"/>
           </a:xfrm>
           <a:prstGeom prst="rect">
             <a:avLst/>
@@ -16119,11 +16119,11 @@
           <a:p>
             <a:pPr algn="ctr">
               <a:lnSpc>
-                <a:spcPts val="1659"/>
+                <a:spcPts val="1858"/>
               </a:lnSpc>
             </a:pPr>
             <a:r>
-              <a:rPr sz="921" b="1">
+              <a:rPr sz="1032" b="1">
                 <a:solidFill>
                   <a:srgbClr val="8A97A5"/>
                 </a:solidFill>
@@ -16134,7 +16134,7 @@
               <a:t>遺児・</a:t>
             </a:r>
             <a:r>
-              <a:rPr sz="921" b="1">
+              <a:rPr sz="1032" b="1">
                 <a:solidFill>
                   <a:srgbClr val="8A97A5"/>
                 </a:solidFill>
@@ -16145,7 +16145,7 @@
               <a:t>まだ出会えていない</a:t>
             </a:r>
             <a:r>
-              <a:rPr sz="921" b="1">
+              <a:rPr sz="1032" b="1">
                 <a:solidFill>
                   <a:srgbClr val="8A97A5"/>
                 </a:solidFill>
@@ -16166,8 +16166,8 @@
         </p:nvSpPr>
         <p:spPr>
           <a:xfrm>
-            <a:off x="3008948" y="6563678"/>
-            <a:ext cx="7699058" cy="796290"/>
+            <a:off x="2557462" y="6424612"/>
+            <a:ext cx="8600122" cy="884872"/>
           </a:xfrm>
           <a:prstGeom prst="rect">
             <a:avLst/>
@@ -16182,11 +16182,11 @@
           <a:p>
             <a:pPr algn="ctr">
               <a:lnSpc>
-                <a:spcPts val="2909"/>
+                <a:spcPts val="3259"/>
               </a:lnSpc>
             </a:pPr>
             <a:r>
-              <a:rPr sz="1572" b="1">
+              <a:rPr sz="1761" b="1">
                 <a:solidFill>
                   <a:srgbClr val="3F5266"/>
                 </a:solidFill>
@@ -16197,7 +16197,7 @@
               <a:t>カードに出るのは</a:t>
             </a:r>
             <a:r>
-              <a:rPr sz="1572" b="1">
+              <a:rPr sz="1761" b="1">
                 <a:solidFill>
                   <a:srgbClr val="3F5266"/>
                 </a:solidFill>
@@ -16208,7 +16208,7 @@
               <a:t>物語・いまの持ちもの・とくい</a:t>
             </a:r>
             <a:r>
-              <a:rPr sz="1572" b="1">
+              <a:rPr sz="1761" b="1">
                 <a:solidFill>
                   <a:srgbClr val="3F5266"/>
                 </a:solidFill>
@@ -16219,7 +16219,7 @@
               <a:t>だけ。</a:t>
             </a:r>
             <a:r>
-              <a:rPr sz="1572" b="1">
+              <a:rPr sz="1761" b="1">
                 <a:solidFill>
                   <a:srgbClr val="3F5266"/>
                 </a:solidFill>
@@ -16230,7 +16230,7 @@
               <a:t>下に書いた</a:t>
             </a:r>
             <a:r>
-              <a:rPr sz="1572" b="1">
+              <a:rPr sz="1761" b="1">
                 <a:solidFill>
                   <a:srgbClr val="3F5266"/>
                 </a:solidFill>
@@ -16241,7 +16241,7 @@
               <a:t>基本給と★1つの値は、画面のどこにも出ないまま</a:t>
             </a:r>
             <a:r>
-              <a:rPr sz="1572" b="1">
+              <a:rPr sz="1761" b="1">
                 <a:solidFill>
                   <a:srgbClr val="3F5266"/>
                 </a:solidFill>
@@ -16270,8 +16270,8 @@
         </p:blipFill>
         <p:spPr>
           <a:xfrm>
-            <a:off x="5297805" y="467678"/>
-            <a:ext cx="173355" cy="173355"/>
+            <a:off x="5110162" y="524828"/>
+            <a:ext cx="194310" cy="194310"/>
           </a:xfrm>
           <a:prstGeom prst="rect">
             <a:avLst/>
@@ -16312,8 +16312,8 @@
         </p:nvSpPr>
         <p:spPr>
           <a:xfrm>
-            <a:off x="5327332" y="2097405"/>
-            <a:ext cx="3061335" cy="421005"/>
+            <a:off x="5142548" y="1885950"/>
+            <a:ext cx="3429952" cy="471488"/>
           </a:xfrm>
           <a:prstGeom prst="roundRect">
             <a:avLst>
@@ -16356,8 +16356,8 @@
         </p:nvSpPr>
         <p:spPr>
           <a:xfrm>
-            <a:off x="5717858" y="4710112"/>
-            <a:ext cx="2878455" cy="54292"/>
+            <a:off x="5580698" y="4818698"/>
+            <a:ext cx="3225165" cy="54292"/>
           </a:xfrm>
           <a:prstGeom prst="rect">
             <a:avLst/>
@@ -16400,8 +16400,8 @@
         </p:nvSpPr>
         <p:spPr>
           <a:xfrm>
-            <a:off x="5213032" y="2097405"/>
-            <a:ext cx="3289935" cy="478155"/>
+            <a:off x="5531168" y="1885950"/>
+            <a:ext cx="3155632" cy="528638"/>
           </a:xfrm>
           <a:prstGeom prst="rect">
             <a:avLst/>
@@ -16416,11 +16416,11 @@
           <a:p>
             <a:pPr algn="ctr">
               <a:lnSpc>
-                <a:spcPts val="2342"/>
+                <a:spcPts val="2624"/>
               </a:lnSpc>
             </a:pPr>
             <a:r>
-              <a:rPr sz="1301" b="1">
+              <a:rPr sz="1458" b="1">
                 <a:solidFill>
                   <a:srgbClr val="FFFFFF"/>
                 </a:solidFill>
@@ -16441,8 +16441,8 @@
         </p:nvSpPr>
         <p:spPr>
           <a:xfrm>
-            <a:off x="3597592" y="2669858"/>
-            <a:ext cx="6520815" cy="1676400"/>
+            <a:off x="3218498" y="2526982"/>
+            <a:ext cx="7279958" cy="1871662"/>
           </a:xfrm>
           <a:prstGeom prst="rect">
             <a:avLst/>
@@ -16457,11 +16457,11 @@
           <a:p>
             <a:pPr algn="ctr">
               <a:lnSpc>
-                <a:spcPts val="4251"/>
+                <a:spcPts val="4762"/>
               </a:lnSpc>
             </a:pPr>
             <a:r>
-              <a:rPr sz="3036" b="1">
+              <a:rPr sz="3401" b="1">
                 <a:solidFill>
                   <a:srgbClr val="3F5266"/>
                 </a:solidFill>
@@ -16472,7 +16472,7 @@
               <a:t>カギが足りずに開けられないのと、</a:t>
             </a:r>
             <a:r>
-              <a:rPr sz="3036" b="1">
+              <a:rPr sz="3401" b="1">
                 <a:solidFill>
                   <a:srgbClr val="F4879F"/>
                 </a:solidFill>
@@ -16483,7 +16483,7 @@
               <a:t>扉があることすら知らない</a:t>
             </a:r>
             <a:r>
-              <a:rPr sz="3036" b="1">
+              <a:rPr sz="3401" b="1">
                 <a:solidFill>
                   <a:srgbClr val="3F5266"/>
                 </a:solidFill>
@@ -16494,7 +16494,7 @@
               <a:t>のは、</a:t>
             </a:r>
             <a:r>
-              <a:rPr sz="3036" b="1">
+              <a:rPr sz="3401" b="1">
                 <a:solidFill>
                   <a:srgbClr val="3F5266"/>
                 </a:solidFill>
@@ -16515,8 +16515,8 @@
         </p:nvSpPr>
         <p:spPr>
           <a:xfrm>
-            <a:off x="4007168" y="4440555"/>
-            <a:ext cx="5702618" cy="1164908"/>
+            <a:off x="3676650" y="4511040"/>
+            <a:ext cx="6362700" cy="1298258"/>
           </a:xfrm>
           <a:prstGeom prst="rect">
             <a:avLst/>
@@ -16531,11 +16531,11 @@
           <a:p>
             <a:pPr algn="ctr">
               <a:lnSpc>
-                <a:spcPts val="2909"/>
+                <a:spcPts val="3259"/>
               </a:lnSpc>
             </a:pPr>
             <a:r>
-              <a:rPr sz="1572" b="1">
+              <a:rPr sz="1761" b="1">
                 <a:solidFill>
                   <a:srgbClr val="3F5266"/>
                 </a:solidFill>
@@ -16546,7 +16546,7 @@
               <a:t>どのチームにも、</a:t>
             </a:r>
             <a:r>
-              <a:rPr sz="1572" b="1">
+              <a:rPr sz="1761" b="1">
                 <a:solidFill>
                   <a:srgbClr val="3F5266"/>
                 </a:solidFill>
@@ -16557,7 +16557,7 @@
               <a:t>ウガンダの遺児の家庭が必ず1人</a:t>
             </a:r>
             <a:r>
-              <a:rPr sz="1572" b="1">
+              <a:rPr sz="1761" b="1">
                 <a:solidFill>
                   <a:srgbClr val="3F5266"/>
                 </a:solidFill>
@@ -16568,7 +16568,7 @@
               <a:t>入ります。</a:t>
             </a:r>
             <a:r>
-              <a:rPr sz="1572" b="1">
+              <a:rPr sz="1761" b="1">
                 <a:solidFill>
                   <a:srgbClr val="3F5266"/>
                 </a:solidFill>
@@ -16579,7 +16579,7 @@
               <a:t>その人に何が見えていて、何が見えていなかったか——</a:t>
             </a:r>
             <a:r>
-              <a:rPr sz="1572" b="1">
+              <a:rPr sz="1761" b="1">
                 <a:solidFill>
                   <a:srgbClr val="3F5266"/>
                 </a:solidFill>
@@ -16608,8 +16608,8 @@
         </p:blipFill>
         <p:spPr>
           <a:xfrm>
-            <a:off x="5534025" y="2221230"/>
-            <a:ext cx="173355" cy="173355"/>
+            <a:off x="5374005" y="2024062"/>
+            <a:ext cx="194310" cy="194310"/>
           </a:xfrm>
           <a:prstGeom prst="rect">
             <a:avLst/>
@@ -16650,8 +16650,8 @@
         </p:nvSpPr>
         <p:spPr>
           <a:xfrm>
-            <a:off x="5696902" y="343852"/>
-            <a:ext cx="2321242" cy="421005"/>
+            <a:off x="5557838" y="385762"/>
+            <a:ext cx="2601278" cy="471488"/>
           </a:xfrm>
           <a:prstGeom prst="roundRect">
             <a:avLst>
@@ -16694,12 +16694,12 @@
         </p:nvSpPr>
         <p:spPr>
           <a:xfrm>
-            <a:off x="548640" y="6371272"/>
-            <a:ext cx="4142422" cy="930592"/>
+            <a:off x="548640" y="6277928"/>
+            <a:ext cx="4133850" cy="974408"/>
           </a:xfrm>
           <a:prstGeom prst="roundRect">
             <a:avLst>
-              <a:gd name="adj" fmla="val 11840"/>
+              <a:gd name="adj" fmla="val 12668"/>
             </a:avLst>
           </a:prstGeom>
           <a:solidFill>
@@ -16740,12 +16740,12 @@
         </p:nvSpPr>
         <p:spPr>
           <a:xfrm>
-            <a:off x="4787265" y="6371272"/>
-            <a:ext cx="4142422" cy="930592"/>
+            <a:off x="4791075" y="6277928"/>
+            <a:ext cx="4133850" cy="974408"/>
           </a:xfrm>
           <a:prstGeom prst="roundRect">
             <a:avLst>
-              <a:gd name="adj" fmla="val 11840"/>
+              <a:gd name="adj" fmla="val 12668"/>
             </a:avLst>
           </a:prstGeom>
           <a:solidFill>
@@ -16786,12 +16786,12 @@
         </p:nvSpPr>
         <p:spPr>
           <a:xfrm>
-            <a:off x="9024938" y="6371272"/>
-            <a:ext cx="4142422" cy="930592"/>
+            <a:off x="9032558" y="6277928"/>
+            <a:ext cx="4133850" cy="974408"/>
           </a:xfrm>
           <a:prstGeom prst="roundRect">
             <a:avLst>
-              <a:gd name="adj" fmla="val 11840"/>
+              <a:gd name="adj" fmla="val 12668"/>
             </a:avLst>
           </a:prstGeom>
           <a:solidFill>
@@ -16840,8 +16840,8 @@
         </p:blipFill>
         <p:spPr>
           <a:xfrm>
-            <a:off x="2583180" y="917258"/>
-            <a:ext cx="8550592" cy="5343525"/>
+            <a:off x="2756535" y="1027748"/>
+            <a:ext cx="8202930" cy="5126355"/>
           </a:xfrm>
           <a:prstGeom prst="rect">
             <a:avLst/>
@@ -16856,8 +16856,8 @@
         </p:nvSpPr>
         <p:spPr>
           <a:xfrm>
-            <a:off x="5582602" y="343852"/>
-            <a:ext cx="2549842" cy="478155"/>
+            <a:off x="5946458" y="385762"/>
+            <a:ext cx="2326958" cy="528638"/>
           </a:xfrm>
           <a:prstGeom prst="rect">
             <a:avLst/>
@@ -16872,11 +16872,11 @@
           <a:p>
             <a:pPr algn="ctr">
               <a:lnSpc>
-                <a:spcPts val="2342"/>
+                <a:spcPts val="2624"/>
               </a:lnSpc>
             </a:pPr>
             <a:r>
-              <a:rPr sz="1301" b="1">
+              <a:rPr sz="1458" b="1">
                 <a:solidFill>
                   <a:srgbClr val="FFFFFF"/>
                 </a:solidFill>
@@ -16897,8 +16897,8 @@
         </p:nvSpPr>
         <p:spPr>
           <a:xfrm>
-            <a:off x="695325" y="6456045"/>
-            <a:ext cx="4076700" cy="269558"/>
+            <a:off x="960120" y="6372225"/>
+            <a:ext cx="3788092" cy="294322"/>
           </a:xfrm>
           <a:prstGeom prst="rect">
             <a:avLst/>
@@ -16913,11 +16913,11 @@
           <a:p>
             <a:pPr algn="l">
               <a:lnSpc>
-                <a:spcPts val="1670"/>
+                <a:spcPts val="1871"/>
               </a:lnSpc>
             </a:pPr>
             <a:r>
-              <a:rPr sz="1192" b="1">
+              <a:rPr sz="1336" b="1">
                 <a:solidFill>
                   <a:srgbClr val="3F5266"/>
                 </a:solidFill>
@@ -16938,8 +16938,8 @@
         </p:nvSpPr>
         <p:spPr>
           <a:xfrm>
-            <a:off x="4933950" y="6456045"/>
-            <a:ext cx="4076700" cy="269558"/>
+            <a:off x="5201602" y="6372225"/>
+            <a:ext cx="3788092" cy="294322"/>
           </a:xfrm>
           <a:prstGeom prst="rect">
             <a:avLst/>
@@ -16954,11 +16954,11 @@
           <a:p>
             <a:pPr algn="l">
               <a:lnSpc>
-                <a:spcPts val="1670"/>
+                <a:spcPts val="1871"/>
               </a:lnSpc>
             </a:pPr>
             <a:r>
-              <a:rPr sz="1192" b="1">
+              <a:rPr sz="1336" b="1">
                 <a:solidFill>
                   <a:srgbClr val="3F5266"/>
                 </a:solidFill>
@@ -16979,8 +16979,8 @@
         </p:nvSpPr>
         <p:spPr>
           <a:xfrm>
-            <a:off x="9172575" y="6456045"/>
-            <a:ext cx="4076700" cy="269558"/>
+            <a:off x="9444038" y="6372225"/>
+            <a:ext cx="3788092" cy="294322"/>
           </a:xfrm>
           <a:prstGeom prst="rect">
             <a:avLst/>
@@ -16995,11 +16995,11 @@
           <a:p>
             <a:pPr algn="l">
               <a:lnSpc>
-                <a:spcPts val="1670"/>
+                <a:spcPts val="1871"/>
               </a:lnSpc>
             </a:pPr>
             <a:r>
-              <a:rPr sz="1192" b="1">
+              <a:rPr sz="1336" b="1">
                 <a:solidFill>
                   <a:srgbClr val="3F5266"/>
                 </a:solidFill>
@@ -17028,8 +17028,8 @@
         </p:blipFill>
         <p:spPr>
           <a:xfrm>
-            <a:off x="5903595" y="467678"/>
-            <a:ext cx="173355" cy="173355"/>
+            <a:off x="5789295" y="524828"/>
+            <a:ext cx="194310" cy="194310"/>
           </a:xfrm>
           <a:prstGeom prst="rect">
             <a:avLst/>
@@ -17052,8 +17052,8 @@
         </p:blipFill>
         <p:spPr>
           <a:xfrm>
-            <a:off x="695325" y="6482715"/>
-            <a:ext cx="159068" cy="159068"/>
+            <a:off x="712470" y="6401752"/>
+            <a:ext cx="178118" cy="178118"/>
           </a:xfrm>
           <a:prstGeom prst="rect">
             <a:avLst/>
@@ -17076,8 +17076,8 @@
         </p:blipFill>
         <p:spPr>
           <a:xfrm>
-            <a:off x="4933950" y="6482715"/>
-            <a:ext cx="159068" cy="159068"/>
+            <a:off x="4954905" y="6401752"/>
+            <a:ext cx="178118" cy="178118"/>
           </a:xfrm>
           <a:prstGeom prst="rect">
             <a:avLst/>
@@ -17100,8 +17100,8 @@
         </p:blipFill>
         <p:spPr>
           <a:xfrm>
-            <a:off x="9172575" y="6482715"/>
-            <a:ext cx="159068" cy="159068"/>
+            <a:off x="9196388" y="6401752"/>
+            <a:ext cx="178118" cy="178118"/>
           </a:xfrm>
           <a:prstGeom prst="rect">
             <a:avLst/>
@@ -17142,8 +17142,8 @@
         </p:nvSpPr>
         <p:spPr>
           <a:xfrm>
-            <a:off x="5049202" y="2306002"/>
-            <a:ext cx="3616642" cy="421005"/>
+            <a:off x="4832032" y="2000250"/>
+            <a:ext cx="4052888" cy="471488"/>
           </a:xfrm>
           <a:prstGeom prst="roundRect">
             <a:avLst>
@@ -17186,12 +17186,12 @@
         </p:nvSpPr>
         <p:spPr>
           <a:xfrm>
-            <a:off x="4733925" y="2879408"/>
-            <a:ext cx="1652588" cy="1652588"/>
+            <a:off x="4477702" y="2642235"/>
+            <a:ext cx="1851660" cy="1851660"/>
           </a:xfrm>
           <a:prstGeom prst="roundRect">
             <a:avLst>
-              <a:gd name="adj" fmla="val 8334"/>
+              <a:gd name="adj" fmla="val 8333"/>
             </a:avLst>
           </a:prstGeom>
           <a:solidFill>
@@ -17232,12 +17232,12 @@
         </p:nvSpPr>
         <p:spPr>
           <a:xfrm>
-            <a:off x="6627495" y="3216592"/>
-            <a:ext cx="2353628" cy="686752"/>
+            <a:off x="6598920" y="3020378"/>
+            <a:ext cx="2638425" cy="769620"/>
           </a:xfrm>
           <a:prstGeom prst="roundRect">
             <a:avLst>
-              <a:gd name="adj" fmla="val 20055"/>
+              <a:gd name="adj" fmla="val 20049"/>
             </a:avLst>
           </a:prstGeom>
           <a:solidFill>
@@ -17276,12 +17276,12 @@
         </p:nvSpPr>
         <p:spPr>
           <a:xfrm>
-            <a:off x="1645920" y="4683442"/>
-            <a:ext cx="5163502" cy="656272"/>
+            <a:off x="1645920" y="4663440"/>
+            <a:ext cx="5157788" cy="974408"/>
           </a:xfrm>
           <a:prstGeom prst="roundRect">
             <a:avLst>
-              <a:gd name="adj" fmla="val 16789"/>
+              <a:gd name="adj" fmla="val 12668"/>
             </a:avLst>
           </a:prstGeom>
           <a:solidFill>
@@ -17322,12 +17322,12 @@
         </p:nvSpPr>
         <p:spPr>
           <a:xfrm>
-            <a:off x="6905625" y="4683442"/>
-            <a:ext cx="5163502" cy="656272"/>
+            <a:off x="6912292" y="4663440"/>
+            <a:ext cx="5157788" cy="974408"/>
           </a:xfrm>
           <a:prstGeom prst="roundRect">
             <a:avLst>
-              <a:gd name="adj" fmla="val 16789"/>
+              <a:gd name="adj" fmla="val 12668"/>
             </a:avLst>
           </a:prstGeom>
           <a:solidFill>
@@ -17368,8 +17368,8 @@
         </p:nvSpPr>
         <p:spPr>
           <a:xfrm>
-            <a:off x="4934902" y="2306002"/>
-            <a:ext cx="3845242" cy="478155"/>
+            <a:off x="5220652" y="2000250"/>
+            <a:ext cx="3778568" cy="528638"/>
           </a:xfrm>
           <a:prstGeom prst="rect">
             <a:avLst/>
@@ -17384,11 +17384,11 @@
           <a:p>
             <a:pPr algn="ctr">
               <a:lnSpc>
-                <a:spcPts val="2342"/>
+                <a:spcPts val="2624"/>
               </a:lnSpc>
             </a:pPr>
             <a:r>
-              <a:rPr sz="1301" b="1">
+              <a:rPr sz="1458" b="1">
                 <a:solidFill>
                   <a:srgbClr val="FFFFFF"/>
                 </a:solidFill>
@@ -17409,8 +17409,8 @@
         </p:nvSpPr>
         <p:spPr>
           <a:xfrm>
-            <a:off x="6513195" y="3216592"/>
-            <a:ext cx="2582228" cy="743902"/>
+            <a:off x="7244715" y="3020378"/>
+            <a:ext cx="2107882" cy="826770"/>
           </a:xfrm>
           <a:prstGeom prst="rect">
             <a:avLst/>
@@ -17425,11 +17425,11 @@
           <a:p>
             <a:pPr algn="ctr">
               <a:lnSpc>
-                <a:spcPts val="3025"/>
+                <a:spcPts val="3389"/>
               </a:lnSpc>
             </a:pPr>
             <a:r>
-              <a:rPr sz="1680" b="1">
+              <a:rPr sz="1883" b="1">
                 <a:solidFill>
                   <a:srgbClr val="5B7FA8"/>
                 </a:solidFill>
@@ -17450,8 +17450,8 @@
         </p:nvSpPr>
         <p:spPr>
           <a:xfrm>
-            <a:off x="6513195" y="3958590"/>
-            <a:ext cx="2582228" cy="292418"/>
+            <a:off x="6484620" y="3850958"/>
+            <a:ext cx="2867025" cy="320992"/>
           </a:xfrm>
           <a:prstGeom prst="rect">
             <a:avLst/>
@@ -17466,11 +17466,11 @@
           <a:p>
             <a:pPr algn="ctr">
               <a:lnSpc>
-                <a:spcPts val="1854"/>
+                <a:spcPts val="2077"/>
               </a:lnSpc>
             </a:pPr>
             <a:r>
-              <a:rPr sz="1030" b="1">
+              <a:rPr sz="1154" b="1">
                 <a:solidFill>
                   <a:srgbClr val="8A97A5"/>
                 </a:solidFill>
@@ -17491,8 +17491,8 @@
         </p:nvSpPr>
         <p:spPr>
           <a:xfrm>
-            <a:off x="1793558" y="4768215"/>
-            <a:ext cx="5097780" cy="269558"/>
+            <a:off x="2057400" y="4757738"/>
+            <a:ext cx="4812030" cy="294322"/>
           </a:xfrm>
           <a:prstGeom prst="rect">
             <a:avLst/>
@@ -17507,11 +17507,11 @@
           <a:p>
             <a:pPr algn="l">
               <a:lnSpc>
-                <a:spcPts val="1670"/>
+                <a:spcPts val="1871"/>
               </a:lnSpc>
             </a:pPr>
             <a:r>
-              <a:rPr sz="1192" b="1">
+              <a:rPr sz="1336" b="1">
                 <a:solidFill>
                   <a:srgbClr val="3F5266"/>
                 </a:solidFill>
@@ -17532,8 +17532,8 @@
         </p:nvSpPr>
         <p:spPr>
           <a:xfrm>
-            <a:off x="7053262" y="4768215"/>
-            <a:ext cx="5097780" cy="269558"/>
+            <a:off x="7322820" y="4757738"/>
+            <a:ext cx="4812030" cy="294322"/>
           </a:xfrm>
           <a:prstGeom prst="rect">
             <a:avLst/>
@@ -17548,11 +17548,11 @@
           <a:p>
             <a:pPr algn="l">
               <a:lnSpc>
-                <a:spcPts val="1670"/>
+                <a:spcPts val="1871"/>
               </a:lnSpc>
             </a:pPr>
             <a:r>
-              <a:rPr sz="1192" b="1">
+              <a:rPr sz="1336" b="1">
                 <a:solidFill>
                   <a:srgbClr val="3F5266"/>
                 </a:solidFill>
@@ -17581,8 +17581,8 @@
         </p:blipFill>
         <p:spPr>
           <a:xfrm>
-            <a:off x="5255895" y="2429828"/>
-            <a:ext cx="173355" cy="173355"/>
+            <a:off x="5063490" y="2139315"/>
+            <a:ext cx="194310" cy="194310"/>
           </a:xfrm>
           <a:prstGeom prst="rect">
             <a:avLst/>
@@ -17605,8 +17605,8 @@
         </p:blipFill>
         <p:spPr>
           <a:xfrm>
-            <a:off x="1793558" y="4794885"/>
-            <a:ext cx="159068" cy="159068"/>
+            <a:off x="1809750" y="4787265"/>
+            <a:ext cx="178118" cy="178118"/>
           </a:xfrm>
           <a:prstGeom prst="rect">
             <a:avLst/>
@@ -17629,8 +17629,8 @@
         </p:blipFill>
         <p:spPr>
           <a:xfrm>
-            <a:off x="7053262" y="4794885"/>
-            <a:ext cx="159068" cy="159068"/>
+            <a:off x="7075170" y="4787265"/>
+            <a:ext cx="178118" cy="178118"/>
           </a:xfrm>
           <a:prstGeom prst="rect">
             <a:avLst/>
@@ -17671,8 +17671,8 @@
         </p:nvSpPr>
         <p:spPr>
           <a:xfrm>
-            <a:off x="5174932" y="343852"/>
-            <a:ext cx="3366135" cy="421005"/>
+            <a:off x="4972050" y="385762"/>
+            <a:ext cx="3771900" cy="471488"/>
           </a:xfrm>
           <a:prstGeom prst="roundRect">
             <a:avLst>
@@ -17715,8 +17715,8 @@
         </p:nvSpPr>
         <p:spPr>
           <a:xfrm>
-            <a:off x="6205538" y="6833235"/>
-            <a:ext cx="882015" cy="54292"/>
+            <a:off x="6126480" y="6732270"/>
+            <a:ext cx="987742" cy="54292"/>
           </a:xfrm>
           <a:prstGeom prst="rect">
             <a:avLst/>
@@ -17767,8 +17767,8 @@
         </p:blipFill>
         <p:spPr>
           <a:xfrm>
-            <a:off x="2428875" y="917258"/>
-            <a:ext cx="8858250" cy="5535930"/>
+            <a:off x="2638425" y="1027748"/>
+            <a:ext cx="8438198" cy="5273992"/>
           </a:xfrm>
           <a:prstGeom prst="rect">
             <a:avLst/>
@@ -17783,8 +17783,8 @@
         </p:nvSpPr>
         <p:spPr>
           <a:xfrm>
-            <a:off x="5060632" y="343852"/>
-            <a:ext cx="3594735" cy="478155"/>
+            <a:off x="5360670" y="385762"/>
+            <a:ext cx="3497580" cy="528638"/>
           </a:xfrm>
           <a:prstGeom prst="rect">
             <a:avLst/>
@@ -17799,11 +17799,11 @@
           <a:p>
             <a:pPr algn="ctr">
               <a:lnSpc>
-                <a:spcPts val="2342"/>
+                <a:spcPts val="2624"/>
               </a:lnSpc>
             </a:pPr>
             <a:r>
-              <a:rPr sz="1301" b="1">
+              <a:rPr sz="1458" b="1">
                 <a:solidFill>
                   <a:srgbClr val="FFFFFF"/>
                 </a:solidFill>
@@ -17824,8 +17824,8 @@
         </p:nvSpPr>
         <p:spPr>
           <a:xfrm>
-            <a:off x="3719512" y="6563678"/>
-            <a:ext cx="6276975" cy="796290"/>
+            <a:off x="3354705" y="6424612"/>
+            <a:ext cx="7007542" cy="884872"/>
           </a:xfrm>
           <a:prstGeom prst="rect">
             <a:avLst/>
@@ -17840,11 +17840,11 @@
           <a:p>
             <a:pPr algn="ctr">
               <a:lnSpc>
-                <a:spcPts val="2909"/>
+                <a:spcPts val="3259"/>
               </a:lnSpc>
             </a:pPr>
             <a:r>
-              <a:rPr sz="1572" b="1">
+              <a:rPr sz="1761" b="1">
                 <a:solidFill>
                   <a:srgbClr val="3F5266"/>
                 </a:solidFill>
@@ -17855,7 +17855,7 @@
               <a:t>15歳まではサイコロなしで</a:t>
             </a:r>
             <a:r>
-              <a:rPr sz="1572" b="1">
+              <a:rPr sz="1761" b="1">
                 <a:solidFill>
                   <a:srgbClr val="3F5266"/>
                 </a:solidFill>
@@ -17866,7 +17866,7 @@
               <a:t>1マスずつ</a:t>
             </a:r>
             <a:r>
-              <a:rPr sz="1572" b="1">
+              <a:rPr sz="1761" b="1">
                 <a:solidFill>
                   <a:srgbClr val="3F5266"/>
                 </a:solidFill>
@@ -17877,7 +17877,7 @@
               <a:t>——人生の土台をつくる期間。</a:t>
             </a:r>
             <a:r>
-              <a:rPr sz="1572" b="1">
+              <a:rPr sz="1761" b="1">
                 <a:solidFill>
                   <a:srgbClr val="3F5266"/>
                 </a:solidFill>
@@ -17906,8 +17906,8 @@
         </p:blipFill>
         <p:spPr>
           <a:xfrm>
-            <a:off x="5381625" y="467678"/>
-            <a:ext cx="173355" cy="173355"/>
+            <a:off x="5203508" y="524828"/>
+            <a:ext cx="194310" cy="194310"/>
           </a:xfrm>
           <a:prstGeom prst="rect">
             <a:avLst/>

--- a/slides.pptx
+++ b/slides.pptx
@@ -5671,6 +5671,13 @@
               </a:rPr>
               <a:t>。</a:t>
             </a:r>
+          </a:p>
+          <a:p>
+            <a:pPr algn="ctr">
+              <a:lnSpc>
+                <a:spcPts val="2952"/>
+              </a:lnSpc>
+            </a:pPr>
             <a:r>
               <a:rPr sz="1640" b="1">
                 <a:solidFill>
@@ -5705,6 +5712,13 @@
               </a:rPr>
               <a:t>。はたらきはじめの基本給も、20万と10万。</a:t>
             </a:r>
+          </a:p>
+          <a:p>
+            <a:pPr algn="ctr">
+              <a:lnSpc>
+                <a:spcPts val="2952"/>
+              </a:lnSpc>
+            </a:pPr>
             <a:r>
               <a:rPr sz="1336" b="1">
                 <a:solidFill>
@@ -8115,6 +8129,13 @@
               </a:rPr>
               <a:t>19年間の扉が全部ならびます。</a:t>
             </a:r>
+          </a:p>
+          <a:p>
+            <a:pPr algn="ctr">
+              <a:lnSpc>
+                <a:spcPts val="3259"/>
+              </a:lnSpc>
+            </a:pPr>
             <a:r>
               <a:rPr sz="1761" b="1">
                 <a:solidFill>
@@ -8159,6 +8180,13 @@
               </a:rPr>
               <a:t>見えてなかった</a:t>
             </a:r>
+          </a:p>
+          <a:p>
+            <a:pPr algn="ctr">
+              <a:lnSpc>
+                <a:spcPts val="3259"/>
+              </a:lnSpc>
+            </a:pPr>
             <a:r>
               <a:rPr sz="1761" b="1">
                 <a:solidFill>
@@ -8193,6 +8221,13 @@
               </a:rPr>
               <a:t>が、ここで初めて分かります。</a:t>
             </a:r>
+          </a:p>
+          <a:p>
+            <a:pPr algn="ctr">
+              <a:lnSpc>
+                <a:spcPts val="3259"/>
+              </a:lnSpc>
+            </a:pPr>
             <a:r>
               <a:rPr sz="1761" b="1">
                 <a:solidFill>
@@ -8520,6 +8555,13 @@
               </a:rPr>
               <a:t>を2人さがしてください。</a:t>
             </a:r>
+          </a:p>
+          <a:p>
+            <a:pPr algn="ctr">
+              <a:lnSpc>
+                <a:spcPts val="4276"/>
+              </a:lnSpc>
+            </a:pPr>
             <a:r>
               <a:rPr sz="2673" b="1">
                 <a:solidFill>
@@ -8531,6 +8573,13 @@
               </a:rPr>
               <a:t>おかねの増え方は、同じでしたか？</a:t>
             </a:r>
+          </a:p>
+          <a:p>
+            <a:pPr algn="ctr">
+              <a:lnSpc>
+                <a:spcPts val="4276"/>
+              </a:lnSpc>
+            </a:pPr>
             <a:r>
               <a:rPr sz="2673" b="1">
                 <a:solidFill>
@@ -8803,6 +8852,13 @@
               </a:rPr>
               <a:t>を</a:t>
             </a:r>
+          </a:p>
+          <a:p>
+            <a:pPr algn="ctr">
+              <a:lnSpc>
+                <a:spcPts val="4276"/>
+              </a:lnSpc>
+            </a:pPr>
             <a:r>
               <a:rPr sz="2673" b="1">
                 <a:solidFill>
@@ -8814,6 +8870,13 @@
               </a:rPr>
               <a:t>読み上げてください。</a:t>
             </a:r>
+          </a:p>
+          <a:p>
+            <a:pPr algn="ctr">
+              <a:lnSpc>
+                <a:spcPts val="4276"/>
+              </a:lnSpc>
+            </a:pPr>
             <a:r>
               <a:rPr sz="2673" b="1">
                 <a:solidFill>
@@ -9064,6 +9127,13 @@
               </a:rPr>
               <a:t>ウガンダの遺児の家庭だった人のネタバラシを、</a:t>
             </a:r>
+          </a:p>
+          <a:p>
+            <a:pPr algn="ctr">
+              <a:lnSpc>
+                <a:spcPts val="4276"/>
+              </a:lnSpc>
+            </a:pPr>
             <a:r>
               <a:rPr sz="2673" b="1">
                 <a:solidFill>
@@ -9086,6 +9156,13 @@
               </a:rPr>
               <a:t>開いてください。</a:t>
             </a:r>
+          </a:p>
+          <a:p>
+            <a:pPr algn="ctr">
+              <a:lnSpc>
+                <a:spcPts val="4276"/>
+              </a:lnSpc>
+            </a:pPr>
             <a:r>
               <a:rPr sz="2673" b="1">
                 <a:solidFill>
@@ -10371,6 +10448,13 @@
               </a:rPr>
               <a:t>今日あなたが持ってきたもの——</a:t>
             </a:r>
+          </a:p>
+          <a:p>
+            <a:pPr algn="ctr">
+              <a:lnSpc>
+                <a:spcPts val="4276"/>
+              </a:lnSpc>
+            </a:pPr>
             <a:r>
               <a:rPr sz="2673" b="1">
                 <a:solidFill>
@@ -10382,6 +10466,13 @@
               </a:rPr>
               <a:t>スマホ、無料の教科書、給食。</a:t>
             </a:r>
+          </a:p>
+          <a:p>
+            <a:pPr algn="ctr">
+              <a:lnSpc>
+                <a:spcPts val="4276"/>
+              </a:lnSpc>
+            </a:pPr>
             <a:r>
               <a:rPr sz="2673" b="1">
                 <a:solidFill>
@@ -10632,6 +10723,13 @@
               </a:rPr>
               <a:t>日本にいる私たちが、</a:t>
             </a:r>
+          </a:p>
+          <a:p>
+            <a:pPr algn="ctr">
+              <a:lnSpc>
+                <a:spcPts val="4276"/>
+              </a:lnSpc>
+            </a:pPr>
             <a:r>
               <a:rPr sz="2673" b="1">
                 <a:solidFill>
@@ -10665,6 +10763,13 @@
               </a:rPr>
               <a:t>って、</a:t>
             </a:r>
+          </a:p>
+          <a:p>
+            <a:pPr algn="ctr">
+              <a:lnSpc>
+                <a:spcPts val="4276"/>
+              </a:lnSpc>
+            </a:pPr>
             <a:r>
               <a:rPr sz="2673" b="1">
                 <a:solidFill>
@@ -11119,6 +11224,13 @@
               </a:rPr>
               <a:t>生まれた場所の差は、</a:t>
             </a:r>
+          </a:p>
+          <a:p>
+            <a:pPr algn="ctr">
+              <a:lnSpc>
+                <a:spcPts val="4762"/>
+              </a:lnSpc>
+            </a:pPr>
             <a:r>
               <a:rPr sz="3401" b="1">
                 <a:solidFill>
@@ -11376,6 +11488,13 @@
               </a:rPr>
               <a:t>学べば報われる、は、場が用意されている人の話です。</a:t>
             </a:r>
+          </a:p>
+          <a:p>
+            <a:pPr algn="ctr">
+              <a:lnSpc>
+                <a:spcPts val="3259"/>
+              </a:lnSpc>
+            </a:pPr>
             <a:r>
               <a:rPr sz="1761" b="1">
                 <a:solidFill>
@@ -11409,6 +11528,13 @@
               </a:rPr>
               <a:t>へ——。</a:t>
             </a:r>
+          </a:p>
+          <a:p>
+            <a:pPr algn="ctr">
+              <a:lnSpc>
+                <a:spcPts val="3259"/>
+              </a:lnSpc>
+            </a:pPr>
             <a:r>
               <a:rPr sz="1761" b="1">
                 <a:solidFill>
@@ -12606,6 +12732,13 @@
               </a:rPr>
               <a:t>として、</a:t>
             </a:r>
+          </a:p>
+          <a:p>
+            <a:pPr algn="ctr">
+              <a:lnSpc>
+                <a:spcPts val="4762"/>
+              </a:lnSpc>
+            </a:pPr>
             <a:r>
               <a:rPr sz="3401" b="1">
                 <a:solidFill>
@@ -12658,6 +12791,13 @@
               </a:rPr>
               <a:t>このゲームは、まだ完成していません。</a:t>
             </a:r>
+          </a:p>
+          <a:p>
+            <a:pPr algn="ctr">
+              <a:lnSpc>
+                <a:spcPts val="3259"/>
+              </a:lnSpc>
+            </a:pPr>
             <a:r>
               <a:rPr sz="1761" b="1">
                 <a:solidFill>
@@ -13471,6 +13611,13 @@
               </a:rPr>
               <a:t>数字のバランス、扉の選択肢、エンディングの文章——</a:t>
             </a:r>
+          </a:p>
+          <a:p>
+            <a:pPr algn="ctr">
+              <a:lnSpc>
+                <a:spcPts val="3259"/>
+              </a:lnSpc>
+            </a:pPr>
             <a:r>
               <a:rPr sz="1761" b="1">
                 <a:solidFill>
@@ -13809,6 +13956,13 @@
               </a:rPr>
               <a:t>うまく言葉にならなくても</a:t>
             </a:r>
+          </a:p>
+          <a:p>
+            <a:pPr algn="ctr">
+              <a:lnSpc>
+                <a:spcPts val="4762"/>
+              </a:lnSpc>
+            </a:pPr>
             <a:r>
               <a:rPr sz="3401" b="1">
                 <a:solidFill>
@@ -13861,6 +14015,13 @@
               </a:rPr>
               <a:t>今日いちばん心に残った場面。</a:t>
             </a:r>
+          </a:p>
+          <a:p>
+            <a:pPr algn="ctr">
+              <a:lnSpc>
+                <a:spcPts val="3259"/>
+              </a:lnSpc>
+            </a:pPr>
             <a:r>
               <a:rPr sz="1761" b="1">
                 <a:solidFill>
@@ -13872,6 +14033,13 @@
               </a:rPr>
               <a:t>自分のカードを見たときのこと、他の人のカードを知ったときのこと。</a:t>
             </a:r>
+          </a:p>
+          <a:p>
+            <a:pPr algn="ctr">
+              <a:lnSpc>
+                <a:spcPts val="3259"/>
+              </a:lnSpc>
+            </a:pPr>
             <a:r>
               <a:rPr sz="1761" b="1">
                 <a:solidFill>
@@ -14114,6 +14282,13 @@
               </a:rPr>
               <a:t>あなたの前にも、世界のどこかの子の前にも、</a:t>
             </a:r>
+          </a:p>
+          <a:p>
+            <a:pPr algn="ctr">
+              <a:lnSpc>
+                <a:spcPts val="3259"/>
+              </a:lnSpc>
+            </a:pPr>
             <a:r>
               <a:rPr sz="1761" b="1">
                 <a:solidFill>
@@ -14954,6 +15129,13 @@
               </a:rPr>
               <a:t>同じ「学校に行く」でも、そこに至るまでが違う。</a:t>
             </a:r>
+          </a:p>
+          <a:p>
+            <a:pPr algn="ctr">
+              <a:lnSpc>
+                <a:spcPts val="3259"/>
+              </a:lnSpc>
+            </a:pPr>
             <a:r>
               <a:rPr sz="1761" b="1">
                 <a:solidFill>
@@ -15281,6 +15463,13 @@
               </a:rPr>
               <a:t>同じ盤面、同じサイコロ、同じルール。</a:t>
             </a:r>
+          </a:p>
+          <a:p>
+            <a:pPr algn="ctr">
+              <a:lnSpc>
+                <a:spcPts val="4762"/>
+              </a:lnSpc>
+            </a:pPr>
             <a:r>
               <a:rPr sz="3401" b="1">
                 <a:solidFill>
@@ -15356,6 +15545,13 @@
               </a:rPr>
               <a:t>それが起きる。</a:t>
             </a:r>
+          </a:p>
+          <a:p>
+            <a:pPr algn="ctr">
+              <a:lnSpc>
+                <a:spcPts val="3389"/>
+              </a:lnSpc>
+            </a:pPr>
             <a:r>
               <a:rPr sz="1883" b="1">
                 <a:solidFill>
@@ -16218,6 +16414,13 @@
               </a:rPr>
               <a:t>だけ。</a:t>
             </a:r>
+          </a:p>
+          <a:p>
+            <a:pPr algn="ctr">
+              <a:lnSpc>
+                <a:spcPts val="3259"/>
+              </a:lnSpc>
+            </a:pPr>
             <a:r>
               <a:rPr sz="1761" b="1">
                 <a:solidFill>
@@ -16471,6 +16674,13 @@
               </a:rPr>
               <a:t>カギが足りずに開けられないのと、</a:t>
             </a:r>
+          </a:p>
+          <a:p>
+            <a:pPr algn="ctr">
+              <a:lnSpc>
+                <a:spcPts val="4762"/>
+              </a:lnSpc>
+            </a:pPr>
             <a:r>
               <a:rPr sz="3401" b="1">
                 <a:solidFill>
@@ -16493,6 +16703,13 @@
               </a:rPr>
               <a:t>のは、</a:t>
             </a:r>
+          </a:p>
+          <a:p>
+            <a:pPr algn="ctr">
+              <a:lnSpc>
+                <a:spcPts val="4762"/>
+              </a:lnSpc>
+            </a:pPr>
             <a:r>
               <a:rPr sz="3401" b="1">
                 <a:solidFill>
@@ -16567,6 +16784,13 @@
               </a:rPr>
               <a:t>入ります。</a:t>
             </a:r>
+          </a:p>
+          <a:p>
+            <a:pPr algn="ctr">
+              <a:lnSpc>
+                <a:spcPts val="3259"/>
+              </a:lnSpc>
+            </a:pPr>
             <a:r>
               <a:rPr sz="1761" b="1">
                 <a:solidFill>
@@ -16578,6 +16802,13 @@
               </a:rPr>
               <a:t>その人に何が見えていて、何が見えていなかったか——</a:t>
             </a:r>
+          </a:p>
+          <a:p>
+            <a:pPr algn="ctr">
+              <a:lnSpc>
+                <a:spcPts val="3259"/>
+              </a:lnSpc>
+            </a:pPr>
             <a:r>
               <a:rPr sz="1761" b="1">
                 <a:solidFill>
@@ -17876,6 +18107,13 @@
               </a:rPr>
               <a:t>——人生の土台をつくる期間。</a:t>
             </a:r>
+          </a:p>
+          <a:p>
+            <a:pPr algn="ctr">
+              <a:lnSpc>
+                <a:spcPts val="3259"/>
+              </a:lnSpc>
+            </a:pPr>
             <a:r>
               <a:rPr sz="1761" b="1">
                 <a:solidFill>

--- a/slides.pptx
+++ b/slides.pptx
@@ -8137,6 +8137,17 @@
               </a:lnSpc>
             </a:pPr>
             <a:r>
+              <a:rPr sz="1761" b="0">
+                <a:solidFill>
+                  <a:srgbClr val="4CA872"/>
+                </a:solidFill>
+                <a:latin typeface="Zen Maru Gothic"/>
+                <a:ea typeface="Zen Maru Gothic"/>
+                <a:cs typeface="Zen Maru Gothic"/>
+              </a:rPr>
+              <a:t>　</a:t>
+            </a:r>
+            <a:r>
               <a:rPr sz="1761" b="1">
                 <a:solidFill>
                   <a:srgbClr val="4CA872"/>
@@ -8148,6 +8159,17 @@
               <a:t>えらんだ</a:t>
             </a:r>
             <a:r>
+              <a:rPr sz="1761" b="0">
+                <a:solidFill>
+                  <a:srgbClr val="4CA872"/>
+                </a:solidFill>
+                <a:latin typeface="Zen Maru Gothic"/>
+                <a:ea typeface="Zen Maru Gothic"/>
+                <a:cs typeface="Zen Maru Gothic"/>
+              </a:rPr>
+              <a:t>　</a:t>
+            </a:r>
+            <a:r>
               <a:rPr sz="1761" b="1">
                 <a:solidFill>
                   <a:srgbClr val="4CA872"/>
@@ -8159,6 +8181,17 @@
               <a:t>開けられた</a:t>
             </a:r>
             <a:r>
+              <a:rPr sz="1761" b="0">
+                <a:solidFill>
+                  <a:srgbClr val="C98A3C"/>
+                </a:solidFill>
+                <a:latin typeface="Zen Maru Gothic"/>
+                <a:ea typeface="Zen Maru Gothic"/>
+                <a:cs typeface="Zen Maru Gothic"/>
+              </a:rPr>
+              <a:t>　</a:t>
+            </a:r>
+            <a:r>
               <a:rPr sz="1761" b="1">
                 <a:solidFill>
                   <a:srgbClr val="C98A3C"/>
@@ -8168,6 +8201,17 @@
                 <a:cs typeface="Zen Maru Gothic"/>
               </a:rPr>
               <a:t>カギ不足</a:t>
+            </a:r>
+            <a:r>
+              <a:rPr sz="1761" b="0">
+                <a:solidFill>
+                  <a:srgbClr val="7E6BC4"/>
+                </a:solidFill>
+                <a:latin typeface="Zen Maru Gothic"/>
+                <a:ea typeface="Zen Maru Gothic"/>
+                <a:cs typeface="Zen Maru Gothic"/>
+              </a:rPr>
+              <a:t>　</a:t>
             </a:r>
             <a:r>
               <a:rPr sz="1761" b="1">

--- a/slides.pptx
+++ b/slides.pptx
@@ -5618,8 +5618,8 @@
         </p:nvSpPr>
         <p:spPr>
           <a:xfrm>
-            <a:off x="3227070" y="5645468"/>
-            <a:ext cx="7617142" cy="1664018"/>
+            <a:off x="2870835" y="5645468"/>
+            <a:ext cx="7974330" cy="1664018"/>
           </a:xfrm>
           <a:prstGeom prst="rect">
             <a:avLst/>
@@ -6085,8 +6085,8 @@
         </p:nvSpPr>
         <p:spPr>
           <a:xfrm>
-            <a:off x="1614488" y="3194685"/>
-            <a:ext cx="460058" cy="442912"/>
+            <a:off x="1460182" y="3194685"/>
+            <a:ext cx="614362" cy="442912"/>
           </a:xfrm>
           <a:prstGeom prst="rect">
             <a:avLst/>
@@ -6200,8 +6200,8 @@
         </p:nvSpPr>
         <p:spPr>
           <a:xfrm>
-            <a:off x="1610678" y="4267200"/>
-            <a:ext cx="462915" cy="442912"/>
+            <a:off x="1460182" y="4267200"/>
+            <a:ext cx="614362" cy="442912"/>
           </a:xfrm>
           <a:prstGeom prst="rect">
             <a:avLst/>
@@ -6884,8 +6884,8 @@
         </p:nvSpPr>
         <p:spPr>
           <a:xfrm>
-            <a:off x="4188142" y="4124325"/>
-            <a:ext cx="1139190" cy="474345"/>
+            <a:off x="3956685" y="4124325"/>
+            <a:ext cx="1370648" cy="474345"/>
           </a:xfrm>
           <a:prstGeom prst="rect">
             <a:avLst/>
@@ -6921,8 +6921,8 @@
         </p:nvSpPr>
         <p:spPr>
           <a:xfrm>
-            <a:off x="5437822" y="4124325"/>
-            <a:ext cx="1139190" cy="474345"/>
+            <a:off x="5206365" y="4124325"/>
+            <a:ext cx="1370648" cy="474345"/>
           </a:xfrm>
           <a:prstGeom prst="rect">
             <a:avLst/>
@@ -6958,8 +6958,8 @@
         </p:nvSpPr>
         <p:spPr>
           <a:xfrm>
-            <a:off x="6687502" y="4124325"/>
-            <a:ext cx="842010" cy="474345"/>
+            <a:off x="6456045" y="4124325"/>
+            <a:ext cx="1073468" cy="474345"/>
           </a:xfrm>
           <a:prstGeom prst="rect">
             <a:avLst/>
@@ -6995,8 +6995,8 @@
         </p:nvSpPr>
         <p:spPr>
           <a:xfrm>
-            <a:off x="7640002" y="4124325"/>
-            <a:ext cx="870585" cy="474345"/>
+            <a:off x="7408545" y="4124325"/>
+            <a:ext cx="1102042" cy="474345"/>
           </a:xfrm>
           <a:prstGeom prst="rect">
             <a:avLst/>
@@ -7032,8 +7032,8 @@
         </p:nvSpPr>
         <p:spPr>
           <a:xfrm>
-            <a:off x="8620125" y="4124325"/>
-            <a:ext cx="1139190" cy="474345"/>
+            <a:off x="8389620" y="4124325"/>
+            <a:ext cx="1370648" cy="474345"/>
           </a:xfrm>
           <a:prstGeom prst="rect">
             <a:avLst/>
@@ -8506,8 +8506,8 @@
         </p:nvSpPr>
         <p:spPr>
           <a:xfrm>
-            <a:off x="6441758" y="2467928"/>
-            <a:ext cx="1093470" cy="513398"/>
+            <a:off x="6179820" y="2467928"/>
+            <a:ext cx="1356360" cy="513398"/>
           </a:xfrm>
           <a:prstGeom prst="rect">
             <a:avLst/>
@@ -8803,8 +8803,8 @@
         </p:nvSpPr>
         <p:spPr>
           <a:xfrm>
-            <a:off x="6438900" y="2467928"/>
-            <a:ext cx="1100138" cy="513398"/>
+            <a:off x="6176962" y="2467928"/>
+            <a:ext cx="1362075" cy="513398"/>
           </a:xfrm>
           <a:prstGeom prst="rect">
             <a:avLst/>
@@ -9100,8 +9100,8 @@
         </p:nvSpPr>
         <p:spPr>
           <a:xfrm>
-            <a:off x="6436042" y="2467928"/>
-            <a:ext cx="1105852" cy="513398"/>
+            <a:off x="6174105" y="2467928"/>
+            <a:ext cx="1367790" cy="513398"/>
           </a:xfrm>
           <a:prstGeom prst="rect">
             <a:avLst/>
@@ -9691,8 +9691,8 @@
         </p:nvSpPr>
         <p:spPr>
           <a:xfrm>
-            <a:off x="2365058" y="2344102"/>
-            <a:ext cx="602932" cy="418148"/>
+            <a:off x="2045018" y="2344102"/>
+            <a:ext cx="922972" cy="418148"/>
           </a:xfrm>
           <a:prstGeom prst="rect">
             <a:avLst/>
@@ -9773,8 +9773,8 @@
         </p:nvSpPr>
         <p:spPr>
           <a:xfrm>
-            <a:off x="2371725" y="2989898"/>
-            <a:ext cx="596265" cy="418148"/>
+            <a:off x="2045018" y="2989898"/>
+            <a:ext cx="922972" cy="418148"/>
           </a:xfrm>
           <a:prstGeom prst="rect">
             <a:avLst/>
@@ -9855,8 +9855,8 @@
         </p:nvSpPr>
         <p:spPr>
           <a:xfrm>
-            <a:off x="2353628" y="3636645"/>
-            <a:ext cx="614362" cy="418148"/>
+            <a:off x="2045018" y="3636645"/>
+            <a:ext cx="922972" cy="418148"/>
           </a:xfrm>
           <a:prstGeom prst="rect">
             <a:avLst/>
@@ -9937,8 +9937,8 @@
         </p:nvSpPr>
         <p:spPr>
           <a:xfrm>
-            <a:off x="2364105" y="4282440"/>
-            <a:ext cx="602932" cy="418148"/>
+            <a:off x="2045018" y="4282440"/>
+            <a:ext cx="922972" cy="418148"/>
           </a:xfrm>
           <a:prstGeom prst="rect">
             <a:avLst/>
@@ -10019,8 +10019,8 @@
         </p:nvSpPr>
         <p:spPr>
           <a:xfrm>
-            <a:off x="2354580" y="4928235"/>
-            <a:ext cx="613410" cy="418148"/>
+            <a:off x="2045018" y="4928235"/>
+            <a:ext cx="922972" cy="418148"/>
           </a:xfrm>
           <a:prstGeom prst="rect">
             <a:avLst/>
@@ -10101,8 +10101,8 @@
         </p:nvSpPr>
         <p:spPr>
           <a:xfrm>
-            <a:off x="2444115" y="5574982"/>
-            <a:ext cx="523875" cy="418148"/>
+            <a:off x="2045018" y="5574982"/>
+            <a:ext cx="922972" cy="418148"/>
           </a:xfrm>
           <a:prstGeom prst="rect">
             <a:avLst/>
@@ -10421,8 +10421,8 @@
         </p:nvSpPr>
         <p:spPr>
           <a:xfrm>
-            <a:off x="6435090" y="2467928"/>
-            <a:ext cx="1108710" cy="513398"/>
+            <a:off x="6172200" y="2467928"/>
+            <a:ext cx="1370648" cy="513398"/>
           </a:xfrm>
           <a:prstGeom prst="rect">
             <a:avLst/>
@@ -10696,8 +10696,8 @@
         </p:nvSpPr>
         <p:spPr>
           <a:xfrm>
-            <a:off x="6436995" y="2467928"/>
-            <a:ext cx="1103948" cy="513398"/>
+            <a:off x="6175058" y="2467928"/>
+            <a:ext cx="1365885" cy="513398"/>
           </a:xfrm>
           <a:prstGeom prst="rect">
             <a:avLst/>
@@ -11297,8 +11297,8 @@
         </p:nvSpPr>
         <p:spPr>
           <a:xfrm>
-            <a:off x="3422332" y="4215765"/>
-            <a:ext cx="1343025" cy="306705"/>
+            <a:off x="3418522" y="4215765"/>
+            <a:ext cx="1347788" cy="306705"/>
           </a:xfrm>
           <a:prstGeom prst="rect">
             <a:avLst/>
@@ -12088,8 +12088,8 @@
         </p:nvSpPr>
         <p:spPr>
           <a:xfrm>
-            <a:off x="1614488" y="2240280"/>
-            <a:ext cx="460058" cy="442912"/>
+            <a:off x="1460182" y="2240280"/>
+            <a:ext cx="614362" cy="442912"/>
           </a:xfrm>
           <a:prstGeom prst="rect">
             <a:avLst/>
@@ -12192,8 +12192,8 @@
         </p:nvSpPr>
         <p:spPr>
           <a:xfrm>
-            <a:off x="1610678" y="3077528"/>
-            <a:ext cx="462915" cy="442912"/>
+            <a:off x="1460182" y="3077528"/>
+            <a:ext cx="614362" cy="442912"/>
           </a:xfrm>
           <a:prstGeom prst="rect">
             <a:avLst/>
@@ -12296,8 +12296,8 @@
         </p:nvSpPr>
         <p:spPr>
           <a:xfrm>
-            <a:off x="1607820" y="4149090"/>
-            <a:ext cx="465772" cy="442912"/>
+            <a:off x="1460182" y="4149090"/>
+            <a:ext cx="614362" cy="442912"/>
           </a:xfrm>
           <a:prstGeom prst="rect">
             <a:avLst/>
@@ -12411,8 +12411,8 @@
         </p:nvSpPr>
         <p:spPr>
           <a:xfrm>
-            <a:off x="1606868" y="5221605"/>
-            <a:ext cx="467678" cy="442912"/>
+            <a:off x="1460182" y="5221605"/>
+            <a:ext cx="614362" cy="442912"/>
           </a:xfrm>
           <a:prstGeom prst="rect">
             <a:avLst/>
@@ -15536,8 +15536,8 @@
         </p:nvSpPr>
         <p:spPr>
           <a:xfrm>
-            <a:off x="3763328" y="3934778"/>
-            <a:ext cx="6545580" cy="1400175"/>
+            <a:off x="3407092" y="3934778"/>
+            <a:ext cx="6902768" cy="1400175"/>
           </a:xfrm>
           <a:prstGeom prst="rect">
             <a:avLst/>
@@ -17684,8 +17684,8 @@
         </p:nvSpPr>
         <p:spPr>
           <a:xfrm>
-            <a:off x="7244715" y="3020378"/>
-            <a:ext cx="2107882" cy="826770"/>
+            <a:off x="6484620" y="3020378"/>
+            <a:ext cx="2867025" cy="826770"/>
           </a:xfrm>
           <a:prstGeom prst="rect">
             <a:avLst/>

--- a/slides.pptx
+++ b/slides.pptx
@@ -3350,8 +3350,8 @@
         </p:nvSpPr>
         <p:spPr>
           <a:xfrm>
-            <a:off x="4263390" y="3518535"/>
-            <a:ext cx="5189220" cy="878205"/>
+            <a:off x="4091940" y="3518535"/>
+            <a:ext cx="5532120" cy="878205"/>
           </a:xfrm>
           <a:prstGeom prst="rect">
             <a:avLst/>
@@ -3402,8 +3402,8 @@
         </p:nvSpPr>
         <p:spPr>
           <a:xfrm>
-            <a:off x="2781300" y="4509135"/>
-            <a:ext cx="8152448" cy="470535"/>
+            <a:off x="2609850" y="4509135"/>
+            <a:ext cx="8495348" cy="470535"/>
           </a:xfrm>
           <a:prstGeom prst="rect">
             <a:avLst/>
@@ -3443,8 +3443,8 @@
         </p:nvSpPr>
         <p:spPr>
           <a:xfrm>
-            <a:off x="4574858" y="5093018"/>
-            <a:ext cx="1509712" cy="487680"/>
+            <a:off x="4403408" y="5093018"/>
+            <a:ext cx="1852612" cy="487680"/>
           </a:xfrm>
           <a:prstGeom prst="rect">
             <a:avLst/>
@@ -3484,8 +3484,8 @@
         </p:nvSpPr>
         <p:spPr>
           <a:xfrm>
-            <a:off x="6404610" y="5093018"/>
-            <a:ext cx="1630680" cy="487680"/>
+            <a:off x="6233160" y="5093018"/>
+            <a:ext cx="1973580" cy="487680"/>
           </a:xfrm>
           <a:prstGeom prst="rect">
             <a:avLst/>
@@ -3525,8 +3525,8 @@
         </p:nvSpPr>
         <p:spPr>
           <a:xfrm>
-            <a:off x="8354378" y="5093018"/>
-            <a:ext cx="1226820" cy="487680"/>
+            <a:off x="8182928" y="5093018"/>
+            <a:ext cx="1569720" cy="487680"/>
           </a:xfrm>
           <a:prstGeom prst="rect">
             <a:avLst/>
@@ -4236,8 +4236,8 @@
         </p:nvSpPr>
         <p:spPr>
           <a:xfrm>
-            <a:off x="6096000" y="2403158"/>
-            <a:ext cx="2025968" cy="528638"/>
+            <a:off x="5924550" y="2403158"/>
+            <a:ext cx="2368868" cy="528638"/>
           </a:xfrm>
           <a:prstGeom prst="rect">
             <a:avLst/>
@@ -4278,7 +4278,7 @@
         <p:spPr>
           <a:xfrm>
             <a:off x="1694498" y="3175635"/>
-            <a:ext cx="3128010" cy="605790"/>
+            <a:ext cx="3242310" cy="605790"/>
           </a:xfrm>
           <a:prstGeom prst="rect">
             <a:avLst/>
@@ -4330,7 +4330,7 @@
         <p:spPr>
           <a:xfrm>
             <a:off x="5758815" y="3175635"/>
-            <a:ext cx="3128010" cy="605790"/>
+            <a:ext cx="3242310" cy="605790"/>
           </a:xfrm>
           <a:prstGeom prst="rect">
             <a:avLst/>
@@ -4382,7 +4382,7 @@
         <p:spPr>
           <a:xfrm>
             <a:off x="9823132" y="3175635"/>
-            <a:ext cx="3128010" cy="605790"/>
+            <a:ext cx="3242310" cy="605790"/>
           </a:xfrm>
           <a:prstGeom prst="rect">
             <a:avLst/>
@@ -4434,7 +4434,7 @@
         <p:spPr>
           <a:xfrm>
             <a:off x="1694498" y="4245292"/>
-            <a:ext cx="2829878" cy="331470"/>
+            <a:ext cx="2944178" cy="331470"/>
           </a:xfrm>
           <a:prstGeom prst="rect">
             <a:avLst/>
@@ -4486,7 +4486,7 @@
         <p:spPr>
           <a:xfrm>
             <a:off x="5758815" y="4245292"/>
-            <a:ext cx="3098482" cy="331470"/>
+            <a:ext cx="3212782" cy="331470"/>
           </a:xfrm>
           <a:prstGeom prst="rect">
             <a:avLst/>
@@ -4538,7 +4538,7 @@
         <p:spPr>
           <a:xfrm>
             <a:off x="9823132" y="4108132"/>
-            <a:ext cx="3128010" cy="605790"/>
+            <a:ext cx="3242310" cy="605790"/>
           </a:xfrm>
           <a:prstGeom prst="rect">
             <a:avLst/>
@@ -4589,8 +4589,8 @@
         </p:nvSpPr>
         <p:spPr>
           <a:xfrm>
-            <a:off x="4557712" y="4957762"/>
-            <a:ext cx="4601528" cy="335280"/>
+            <a:off x="4386262" y="4957762"/>
+            <a:ext cx="4944428" cy="335280"/>
           </a:xfrm>
           <a:prstGeom prst="rect">
             <a:avLst/>
@@ -5054,8 +5054,8 @@
         </p:nvSpPr>
         <p:spPr>
           <a:xfrm>
-            <a:off x="4938712" y="385762"/>
-            <a:ext cx="4341495" cy="528638"/>
+            <a:off x="4767262" y="385762"/>
+            <a:ext cx="4684395" cy="528638"/>
           </a:xfrm>
           <a:prstGeom prst="rect">
             <a:avLst/>
@@ -5095,8 +5095,8 @@
         </p:nvSpPr>
         <p:spPr>
           <a:xfrm>
-            <a:off x="2785110" y="5890260"/>
-            <a:ext cx="1395412" cy="320992"/>
+            <a:off x="2613660" y="5890260"/>
+            <a:ext cx="1738312" cy="320992"/>
           </a:xfrm>
           <a:prstGeom prst="rect">
             <a:avLst/>
@@ -5136,8 +5136,8 @@
         </p:nvSpPr>
         <p:spPr>
           <a:xfrm>
-            <a:off x="6589395" y="3312795"/>
-            <a:ext cx="537210" cy="612458"/>
+            <a:off x="6417945" y="3312795"/>
+            <a:ext cx="880110" cy="612458"/>
           </a:xfrm>
           <a:prstGeom prst="rect">
             <a:avLst/>
@@ -5177,8 +5177,8 @@
         </p:nvSpPr>
         <p:spPr>
           <a:xfrm>
-            <a:off x="8873490" y="5890260"/>
-            <a:ext cx="2719388" cy="320992"/>
+            <a:off x="8702040" y="5890260"/>
+            <a:ext cx="3062288" cy="320992"/>
           </a:xfrm>
           <a:prstGeom prst="rect">
             <a:avLst/>
@@ -5219,7 +5219,7 @@
         <p:spPr>
           <a:xfrm>
             <a:off x="960120" y="6372225"/>
-            <a:ext cx="3788092" cy="294322"/>
+            <a:ext cx="3902392" cy="294322"/>
           </a:xfrm>
           <a:prstGeom prst="rect">
             <a:avLst/>
@@ -5260,7 +5260,7 @@
         <p:spPr>
           <a:xfrm>
             <a:off x="5201602" y="6372225"/>
-            <a:ext cx="3788092" cy="294322"/>
+            <a:ext cx="3902392" cy="294322"/>
           </a:xfrm>
           <a:prstGeom prst="rect">
             <a:avLst/>
@@ -5301,7 +5301,7 @@
         <p:spPr>
           <a:xfrm>
             <a:off x="9444038" y="6372225"/>
-            <a:ext cx="3788092" cy="294322"/>
+            <a:ext cx="3902392" cy="294322"/>
           </a:xfrm>
           <a:prstGeom prst="rect">
             <a:avLst/>
@@ -5577,8 +5577,8 @@
         </p:nvSpPr>
         <p:spPr>
           <a:xfrm>
-            <a:off x="5427345" y="385762"/>
-            <a:ext cx="3363278" cy="528638"/>
+            <a:off x="5255895" y="385762"/>
+            <a:ext cx="3706178" cy="528638"/>
           </a:xfrm>
           <a:prstGeom prst="rect">
             <a:avLst/>
@@ -5618,8 +5618,8 @@
         </p:nvSpPr>
         <p:spPr>
           <a:xfrm>
-            <a:off x="2870835" y="5645468"/>
-            <a:ext cx="7974330" cy="1664018"/>
+            <a:off x="2699385" y="5645468"/>
+            <a:ext cx="8317230" cy="1664018"/>
           </a:xfrm>
           <a:prstGeom prst="rect">
             <a:avLst/>
@@ -6044,8 +6044,8 @@
         </p:nvSpPr>
         <p:spPr>
           <a:xfrm>
-            <a:off x="5634990" y="2389822"/>
-            <a:ext cx="2948940" cy="528638"/>
+            <a:off x="5463540" y="2389822"/>
+            <a:ext cx="3291840" cy="528638"/>
           </a:xfrm>
           <a:prstGeom prst="rect">
             <a:avLst/>
@@ -6086,7 +6086,7 @@
         <p:spPr>
           <a:xfrm>
             <a:off x="1460182" y="3194685"/>
-            <a:ext cx="614362" cy="442912"/>
+            <a:ext cx="728662" cy="442912"/>
           </a:xfrm>
           <a:prstGeom prst="rect">
             <a:avLst/>
@@ -6127,7 +6127,7 @@
         <p:spPr>
           <a:xfrm>
             <a:off x="2015490" y="3179445"/>
-            <a:ext cx="10468928" cy="693420"/>
+            <a:ext cx="10583228" cy="693420"/>
           </a:xfrm>
           <a:prstGeom prst="rect">
             <a:avLst/>
@@ -6201,7 +6201,7 @@
         <p:spPr>
           <a:xfrm>
             <a:off x="1460182" y="4267200"/>
-            <a:ext cx="614362" cy="442912"/>
+            <a:ext cx="728662" cy="442912"/>
           </a:xfrm>
           <a:prstGeom prst="rect">
             <a:avLst/>
@@ -6242,7 +6242,7 @@
         <p:spPr>
           <a:xfrm>
             <a:off x="2015490" y="4251960"/>
-            <a:ext cx="10468928" cy="375285"/>
+            <a:ext cx="10583228" cy="375285"/>
           </a:xfrm>
           <a:prstGeom prst="rect">
             <a:avLst/>
@@ -6315,8 +6315,8 @@
         </p:nvSpPr>
         <p:spPr>
           <a:xfrm>
-            <a:off x="4274820" y="4971098"/>
-            <a:ext cx="5166360" cy="335280"/>
+            <a:off x="4103370" y="4971098"/>
+            <a:ext cx="5509260" cy="335280"/>
           </a:xfrm>
           <a:prstGeom prst="rect">
             <a:avLst/>
@@ -6802,8 +6802,8 @@
         </p:nvSpPr>
         <p:spPr>
           <a:xfrm>
-            <a:off x="6256972" y="2001202"/>
-            <a:ext cx="1704022" cy="528638"/>
+            <a:off x="6085522" y="2001202"/>
+            <a:ext cx="2046922" cy="528638"/>
           </a:xfrm>
           <a:prstGeom prst="rect">
             <a:avLst/>
@@ -6843,8 +6843,8 @@
         </p:nvSpPr>
         <p:spPr>
           <a:xfrm>
-            <a:off x="5243512" y="2643188"/>
-            <a:ext cx="3228022" cy="1368742"/>
+            <a:off x="5072062" y="2643188"/>
+            <a:ext cx="3570922" cy="1368742"/>
           </a:xfrm>
           <a:prstGeom prst="rect">
             <a:avLst/>
@@ -6884,8 +6884,8 @@
         </p:nvSpPr>
         <p:spPr>
           <a:xfrm>
-            <a:off x="3956685" y="4124325"/>
-            <a:ext cx="1370648" cy="474345"/>
+            <a:off x="3785235" y="4124325"/>
+            <a:ext cx="1713548" cy="474345"/>
           </a:xfrm>
           <a:prstGeom prst="rect">
             <a:avLst/>
@@ -6921,8 +6921,8 @@
         </p:nvSpPr>
         <p:spPr>
           <a:xfrm>
-            <a:off x="5206365" y="4124325"/>
-            <a:ext cx="1370648" cy="474345"/>
+            <a:off x="5034915" y="4124325"/>
+            <a:ext cx="1713548" cy="474345"/>
           </a:xfrm>
           <a:prstGeom prst="rect">
             <a:avLst/>
@@ -6958,8 +6958,8 @@
         </p:nvSpPr>
         <p:spPr>
           <a:xfrm>
-            <a:off x="6456045" y="4124325"/>
-            <a:ext cx="1073468" cy="474345"/>
+            <a:off x="6284595" y="4124325"/>
+            <a:ext cx="1416368" cy="474345"/>
           </a:xfrm>
           <a:prstGeom prst="rect">
             <a:avLst/>
@@ -6995,8 +6995,8 @@
         </p:nvSpPr>
         <p:spPr>
           <a:xfrm>
-            <a:off x="7408545" y="4124325"/>
-            <a:ext cx="1102042" cy="474345"/>
+            <a:off x="7237095" y="4124325"/>
+            <a:ext cx="1444942" cy="474345"/>
           </a:xfrm>
           <a:prstGeom prst="rect">
             <a:avLst/>
@@ -7032,8 +7032,8 @@
         </p:nvSpPr>
         <p:spPr>
           <a:xfrm>
-            <a:off x="8389620" y="4124325"/>
-            <a:ext cx="1370648" cy="474345"/>
+            <a:off x="8218170" y="4124325"/>
+            <a:ext cx="1713548" cy="474345"/>
           </a:xfrm>
           <a:prstGeom prst="rect">
             <a:avLst/>
@@ -7069,8 +7069,8 @@
         </p:nvSpPr>
         <p:spPr>
           <a:xfrm>
-            <a:off x="3448050" y="4711065"/>
-            <a:ext cx="2697480" cy="487680"/>
+            <a:off x="3276600" y="4711065"/>
+            <a:ext cx="3040380" cy="487680"/>
           </a:xfrm>
           <a:prstGeom prst="rect">
             <a:avLst/>
@@ -7110,8 +7110,8 @@
         </p:nvSpPr>
         <p:spPr>
           <a:xfrm>
-            <a:off x="6464618" y="4711065"/>
-            <a:ext cx="1886902" cy="487680"/>
+            <a:off x="6293168" y="4711065"/>
+            <a:ext cx="2229802" cy="487680"/>
           </a:xfrm>
           <a:prstGeom prst="rect">
             <a:avLst/>
@@ -7151,8 +7151,8 @@
         </p:nvSpPr>
         <p:spPr>
           <a:xfrm>
-            <a:off x="8671560" y="4711065"/>
-            <a:ext cx="2036445" cy="487680"/>
+            <a:off x="8500110" y="4711065"/>
+            <a:ext cx="2379345" cy="487680"/>
           </a:xfrm>
           <a:prstGeom prst="rect">
             <a:avLst/>
@@ -7192,8 +7192,8 @@
         </p:nvSpPr>
         <p:spPr>
           <a:xfrm>
-            <a:off x="6409372" y="5373052"/>
-            <a:ext cx="897255" cy="320992"/>
+            <a:off x="6237922" y="5373052"/>
+            <a:ext cx="1240155" cy="320992"/>
           </a:xfrm>
           <a:prstGeom prst="rect">
             <a:avLst/>
@@ -7561,8 +7561,8 @@
         </p:nvSpPr>
         <p:spPr>
           <a:xfrm>
-            <a:off x="5634990" y="385762"/>
-            <a:ext cx="2948940" cy="528638"/>
+            <a:off x="5463540" y="385762"/>
+            <a:ext cx="3291840" cy="528638"/>
           </a:xfrm>
           <a:prstGeom prst="rect">
             <a:avLst/>
@@ -7603,7 +7603,7 @@
         <p:spPr>
           <a:xfrm>
             <a:off x="960120" y="6372225"/>
-            <a:ext cx="3788092" cy="294322"/>
+            <a:ext cx="3902392" cy="294322"/>
           </a:xfrm>
           <a:prstGeom prst="rect">
             <a:avLst/>
@@ -7644,7 +7644,7 @@
         <p:spPr>
           <a:xfrm>
             <a:off x="5201602" y="6372225"/>
-            <a:ext cx="3788092" cy="294322"/>
+            <a:ext cx="3902392" cy="294322"/>
           </a:xfrm>
           <a:prstGeom prst="rect">
             <a:avLst/>
@@ -7685,7 +7685,7 @@
         <p:spPr>
           <a:xfrm>
             <a:off x="9444038" y="6372225"/>
-            <a:ext cx="3788092" cy="294322"/>
+            <a:ext cx="3902392" cy="294322"/>
           </a:xfrm>
           <a:prstGeom prst="rect">
             <a:avLst/>
@@ -8047,8 +8047,8 @@
         </p:nvSpPr>
         <p:spPr>
           <a:xfrm>
-            <a:off x="5634990" y="385762"/>
-            <a:ext cx="2948940" cy="528638"/>
+            <a:off x="5463540" y="385762"/>
+            <a:ext cx="3291840" cy="528638"/>
           </a:xfrm>
           <a:prstGeom prst="rect">
             <a:avLst/>
@@ -8088,8 +8088,8 @@
         </p:nvSpPr>
         <p:spPr>
           <a:xfrm>
-            <a:off x="1932622" y="5597842"/>
-            <a:ext cx="9849802" cy="1712595"/>
+            <a:off x="1761172" y="5597842"/>
+            <a:ext cx="10192702" cy="1712595"/>
           </a:xfrm>
           <a:prstGeom prst="rect">
             <a:avLst/>
@@ -8506,8 +8506,8 @@
         </p:nvSpPr>
         <p:spPr>
           <a:xfrm>
-            <a:off x="6179820" y="2467928"/>
-            <a:ext cx="1356360" cy="513398"/>
+            <a:off x="6008370" y="2467928"/>
+            <a:ext cx="1699260" cy="513398"/>
           </a:xfrm>
           <a:prstGeom prst="rect">
             <a:avLst/>
@@ -8547,8 +8547,8 @@
         </p:nvSpPr>
         <p:spPr>
           <a:xfrm>
-            <a:off x="2593658" y="3093720"/>
-            <a:ext cx="8528685" cy="1685925"/>
+            <a:off x="2422208" y="3093720"/>
+            <a:ext cx="8871585" cy="1685925"/>
           </a:xfrm>
           <a:prstGeom prst="rect">
             <a:avLst/>
@@ -8668,8 +8668,8 @@
         </p:nvSpPr>
         <p:spPr>
           <a:xfrm>
-            <a:off x="4110990" y="4892992"/>
-            <a:ext cx="5733098" cy="335280"/>
+            <a:off x="3939540" y="4892992"/>
+            <a:ext cx="6075998" cy="335280"/>
           </a:xfrm>
           <a:prstGeom prst="rect">
             <a:avLst/>
@@ -8803,8 +8803,8 @@
         </p:nvSpPr>
         <p:spPr>
           <a:xfrm>
-            <a:off x="6176962" y="2467928"/>
-            <a:ext cx="1362075" cy="513398"/>
+            <a:off x="6005512" y="2467928"/>
+            <a:ext cx="1704975" cy="513398"/>
           </a:xfrm>
           <a:prstGeom prst="rect">
             <a:avLst/>
@@ -8844,8 +8844,8 @@
         </p:nvSpPr>
         <p:spPr>
           <a:xfrm>
-            <a:off x="2669858" y="3093720"/>
-            <a:ext cx="8376285" cy="1685925"/>
+            <a:off x="2498408" y="3093720"/>
+            <a:ext cx="8719185" cy="1685925"/>
           </a:xfrm>
           <a:prstGeom prst="rect">
             <a:avLst/>
@@ -8965,8 +8965,8 @@
         </p:nvSpPr>
         <p:spPr>
           <a:xfrm>
-            <a:off x="5396865" y="4892992"/>
-            <a:ext cx="3160395" cy="335280"/>
+            <a:off x="5225415" y="4892992"/>
+            <a:ext cx="3503295" cy="335280"/>
           </a:xfrm>
           <a:prstGeom prst="rect">
             <a:avLst/>
@@ -9100,8 +9100,8 @@
         </p:nvSpPr>
         <p:spPr>
           <a:xfrm>
-            <a:off x="6174105" y="2467928"/>
-            <a:ext cx="1367790" cy="513398"/>
+            <a:off x="6002655" y="2467928"/>
+            <a:ext cx="1710690" cy="513398"/>
           </a:xfrm>
           <a:prstGeom prst="rect">
             <a:avLst/>
@@ -9141,8 +9141,8 @@
         </p:nvSpPr>
         <p:spPr>
           <a:xfrm>
-            <a:off x="3009900" y="3093720"/>
-            <a:ext cx="7697152" cy="1685925"/>
+            <a:off x="2838450" y="3093720"/>
+            <a:ext cx="8040052" cy="1685925"/>
           </a:xfrm>
           <a:prstGeom prst="rect">
             <a:avLst/>
@@ -9251,8 +9251,8 @@
         </p:nvSpPr>
         <p:spPr>
           <a:xfrm>
-            <a:off x="4702492" y="4892992"/>
-            <a:ext cx="4549140" cy="335280"/>
+            <a:off x="4531042" y="4892992"/>
+            <a:ext cx="4892040" cy="335280"/>
           </a:xfrm>
           <a:prstGeom prst="rect">
             <a:avLst/>
@@ -9650,8 +9650,8 @@
         </p:nvSpPr>
         <p:spPr>
           <a:xfrm>
-            <a:off x="5936932" y="1602105"/>
-            <a:ext cx="2346008" cy="528638"/>
+            <a:off x="5765482" y="1602105"/>
+            <a:ext cx="2688908" cy="528638"/>
           </a:xfrm>
           <a:prstGeom prst="rect">
             <a:avLst/>
@@ -9691,8 +9691,8 @@
         </p:nvSpPr>
         <p:spPr>
           <a:xfrm>
-            <a:off x="2045018" y="2344102"/>
-            <a:ext cx="922972" cy="418148"/>
+            <a:off x="1930718" y="2344102"/>
+            <a:ext cx="1037272" cy="418148"/>
           </a:xfrm>
           <a:prstGeom prst="rect">
             <a:avLst/>
@@ -9733,7 +9733,7 @@
         <p:spPr>
           <a:xfrm>
             <a:off x="3424238" y="2357438"/>
-            <a:ext cx="8246745" cy="390525"/>
+            <a:ext cx="8361045" cy="390525"/>
           </a:xfrm>
           <a:prstGeom prst="rect">
             <a:avLst/>
@@ -9773,8 +9773,8 @@
         </p:nvSpPr>
         <p:spPr>
           <a:xfrm>
-            <a:off x="2045018" y="2989898"/>
-            <a:ext cx="922972" cy="418148"/>
+            <a:off x="1930718" y="2989898"/>
+            <a:ext cx="1037272" cy="418148"/>
           </a:xfrm>
           <a:prstGeom prst="rect">
             <a:avLst/>
@@ -9815,7 +9815,7 @@
         <p:spPr>
           <a:xfrm>
             <a:off x="3424238" y="3004185"/>
-            <a:ext cx="8246745" cy="390525"/>
+            <a:ext cx="8361045" cy="390525"/>
           </a:xfrm>
           <a:prstGeom prst="rect">
             <a:avLst/>
@@ -9855,8 +9855,8 @@
         </p:nvSpPr>
         <p:spPr>
           <a:xfrm>
-            <a:off x="2045018" y="3636645"/>
-            <a:ext cx="922972" cy="418148"/>
+            <a:off x="1930718" y="3636645"/>
+            <a:ext cx="1037272" cy="418148"/>
           </a:xfrm>
           <a:prstGeom prst="rect">
             <a:avLst/>
@@ -9897,7 +9897,7 @@
         <p:spPr>
           <a:xfrm>
             <a:off x="3424238" y="3649980"/>
-            <a:ext cx="8246745" cy="390525"/>
+            <a:ext cx="8361045" cy="390525"/>
           </a:xfrm>
           <a:prstGeom prst="rect">
             <a:avLst/>
@@ -9937,8 +9937,8 @@
         </p:nvSpPr>
         <p:spPr>
           <a:xfrm>
-            <a:off x="2045018" y="4282440"/>
-            <a:ext cx="922972" cy="418148"/>
+            <a:off x="1930718" y="4282440"/>
+            <a:ext cx="1037272" cy="418148"/>
           </a:xfrm>
           <a:prstGeom prst="rect">
             <a:avLst/>
@@ -9979,7 +9979,7 @@
         <p:spPr>
           <a:xfrm>
             <a:off x="3424238" y="4295775"/>
-            <a:ext cx="8246745" cy="390525"/>
+            <a:ext cx="8361045" cy="390525"/>
           </a:xfrm>
           <a:prstGeom prst="rect">
             <a:avLst/>
@@ -10019,8 +10019,8 @@
         </p:nvSpPr>
         <p:spPr>
           <a:xfrm>
-            <a:off x="2045018" y="4928235"/>
-            <a:ext cx="922972" cy="418148"/>
+            <a:off x="1930718" y="4928235"/>
+            <a:ext cx="1037272" cy="418148"/>
           </a:xfrm>
           <a:prstGeom prst="rect">
             <a:avLst/>
@@ -10061,7 +10061,7 @@
         <p:spPr>
           <a:xfrm>
             <a:off x="3424238" y="4942522"/>
-            <a:ext cx="8246745" cy="390525"/>
+            <a:ext cx="8361045" cy="390525"/>
           </a:xfrm>
           <a:prstGeom prst="rect">
             <a:avLst/>
@@ -10101,8 +10101,8 @@
         </p:nvSpPr>
         <p:spPr>
           <a:xfrm>
-            <a:off x="2045018" y="5574982"/>
-            <a:ext cx="922972" cy="418148"/>
+            <a:off x="1930718" y="5574982"/>
+            <a:ext cx="1037272" cy="418148"/>
           </a:xfrm>
           <a:prstGeom prst="rect">
             <a:avLst/>
@@ -10143,7 +10143,7 @@
         <p:spPr>
           <a:xfrm>
             <a:off x="3424238" y="5588318"/>
-            <a:ext cx="8246745" cy="390525"/>
+            <a:ext cx="8361045" cy="390525"/>
           </a:xfrm>
           <a:prstGeom prst="rect">
             <a:avLst/>
@@ -10421,8 +10421,8 @@
         </p:nvSpPr>
         <p:spPr>
           <a:xfrm>
-            <a:off x="6172200" y="2467928"/>
-            <a:ext cx="1370648" cy="513398"/>
+            <a:off x="6000750" y="2467928"/>
+            <a:ext cx="1713548" cy="513398"/>
           </a:xfrm>
           <a:prstGeom prst="rect">
             <a:avLst/>
@@ -10462,8 +10462,8 @@
         </p:nvSpPr>
         <p:spPr>
           <a:xfrm>
-            <a:off x="3179445" y="3093720"/>
-            <a:ext cx="7358062" cy="1685925"/>
+            <a:off x="3007995" y="3093720"/>
+            <a:ext cx="7700962" cy="1685925"/>
           </a:xfrm>
           <a:prstGeom prst="rect">
             <a:avLst/>
@@ -10561,8 +10561,8 @@
         </p:nvSpPr>
         <p:spPr>
           <a:xfrm>
-            <a:off x="5591175" y="4892992"/>
-            <a:ext cx="2771775" cy="335280"/>
+            <a:off x="5419725" y="4892992"/>
+            <a:ext cx="3114675" cy="335280"/>
           </a:xfrm>
           <a:prstGeom prst="rect">
             <a:avLst/>
@@ -10696,8 +10696,8 @@
         </p:nvSpPr>
         <p:spPr>
           <a:xfrm>
-            <a:off x="6175058" y="2467928"/>
-            <a:ext cx="1365885" cy="513398"/>
+            <a:off x="6003608" y="2467928"/>
+            <a:ext cx="1708785" cy="513398"/>
           </a:xfrm>
           <a:prstGeom prst="rect">
             <a:avLst/>
@@ -10737,8 +10737,8 @@
         </p:nvSpPr>
         <p:spPr>
           <a:xfrm>
-            <a:off x="3857625" y="3093720"/>
-            <a:ext cx="5999798" cy="1685925"/>
+            <a:off x="3686175" y="3093720"/>
+            <a:ext cx="6342698" cy="1685925"/>
           </a:xfrm>
           <a:prstGeom prst="rect">
             <a:avLst/>
@@ -10836,8 +10836,8 @@
         </p:nvSpPr>
         <p:spPr>
           <a:xfrm>
-            <a:off x="4702492" y="4892992"/>
-            <a:ext cx="4549140" cy="335280"/>
+            <a:off x="4531042" y="4892992"/>
+            <a:ext cx="4892040" cy="335280"/>
           </a:xfrm>
           <a:prstGeom prst="rect">
             <a:avLst/>
@@ -11197,8 +11197,8 @@
         </p:nvSpPr>
         <p:spPr>
           <a:xfrm>
-            <a:off x="6050280" y="1598295"/>
-            <a:ext cx="2119312" cy="528638"/>
+            <a:off x="5878830" y="1598295"/>
+            <a:ext cx="2462212" cy="528638"/>
           </a:xfrm>
           <a:prstGeom prst="rect">
             <a:avLst/>
@@ -11238,8 +11238,8 @@
         </p:nvSpPr>
         <p:spPr>
           <a:xfrm>
-            <a:off x="4540568" y="2239328"/>
-            <a:ext cx="4635818" cy="1266825"/>
+            <a:off x="4369118" y="2239328"/>
+            <a:ext cx="4978718" cy="1266825"/>
           </a:xfrm>
           <a:prstGeom prst="rect">
             <a:avLst/>
@@ -11297,8 +11297,8 @@
         </p:nvSpPr>
         <p:spPr>
           <a:xfrm>
-            <a:off x="3418522" y="4215765"/>
-            <a:ext cx="1347788" cy="306705"/>
+            <a:off x="3247072" y="4215765"/>
+            <a:ext cx="1690688" cy="306705"/>
           </a:xfrm>
           <a:prstGeom prst="rect">
             <a:avLst/>
@@ -11338,8 +11338,8 @@
         </p:nvSpPr>
         <p:spPr>
           <a:xfrm>
-            <a:off x="4886325" y="3618548"/>
-            <a:ext cx="490538" cy="1067752"/>
+            <a:off x="4714875" y="3618548"/>
+            <a:ext cx="833438" cy="1067752"/>
           </a:xfrm>
           <a:prstGeom prst="rect">
             <a:avLst/>
@@ -11379,8 +11379,8 @@
         </p:nvSpPr>
         <p:spPr>
           <a:xfrm>
-            <a:off x="5497830" y="4215765"/>
-            <a:ext cx="2172652" cy="306705"/>
+            <a:off x="5326380" y="4215765"/>
+            <a:ext cx="2515552" cy="306705"/>
           </a:xfrm>
           <a:prstGeom prst="rect">
             <a:avLst/>
@@ -11420,8 +11420,8 @@
         </p:nvSpPr>
         <p:spPr>
           <a:xfrm>
-            <a:off x="7790498" y="3618548"/>
-            <a:ext cx="490538" cy="1067752"/>
+            <a:off x="7619048" y="3618548"/>
+            <a:ext cx="833438" cy="1067752"/>
           </a:xfrm>
           <a:prstGeom prst="rect">
             <a:avLst/>
@@ -11461,8 +11461,8 @@
         </p:nvSpPr>
         <p:spPr>
           <a:xfrm>
-            <a:off x="8402002" y="4215765"/>
-            <a:ext cx="1895475" cy="306705"/>
+            <a:off x="8230552" y="4215765"/>
+            <a:ext cx="2238375" cy="306705"/>
           </a:xfrm>
           <a:prstGeom prst="rect">
             <a:avLst/>
@@ -11502,8 +11502,8 @@
         </p:nvSpPr>
         <p:spPr>
           <a:xfrm>
-            <a:off x="3164205" y="4798695"/>
-            <a:ext cx="7388542" cy="1298258"/>
+            <a:off x="2992755" y="4798695"/>
+            <a:ext cx="7731442" cy="1298258"/>
           </a:xfrm>
           <a:prstGeom prst="rect">
             <a:avLst/>
@@ -12047,8 +12047,8 @@
         </p:nvSpPr>
         <p:spPr>
           <a:xfrm>
-            <a:off x="5738812" y="1435418"/>
-            <a:ext cx="2741295" cy="528638"/>
+            <a:off x="5567362" y="1435418"/>
+            <a:ext cx="3084195" cy="528638"/>
           </a:xfrm>
           <a:prstGeom prst="rect">
             <a:avLst/>
@@ -12089,7 +12089,7 @@
         <p:spPr>
           <a:xfrm>
             <a:off x="1460182" y="2240280"/>
-            <a:ext cx="614362" cy="442912"/>
+            <a:ext cx="728662" cy="442912"/>
           </a:xfrm>
           <a:prstGeom prst="rect">
             <a:avLst/>
@@ -12130,7 +12130,7 @@
         <p:spPr>
           <a:xfrm>
             <a:off x="2015490" y="2225040"/>
-            <a:ext cx="10468928" cy="375285"/>
+            <a:ext cx="10583228" cy="375285"/>
           </a:xfrm>
           <a:prstGeom prst="rect">
             <a:avLst/>
@@ -12193,7 +12193,7 @@
         <p:spPr>
           <a:xfrm>
             <a:off x="1460182" y="3077528"/>
-            <a:ext cx="614362" cy="442912"/>
+            <a:ext cx="728662" cy="442912"/>
           </a:xfrm>
           <a:prstGeom prst="rect">
             <a:avLst/>
@@ -12234,7 +12234,7 @@
         <p:spPr>
           <a:xfrm>
             <a:off x="2015490" y="3062288"/>
-            <a:ext cx="10468928" cy="693420"/>
+            <a:ext cx="10583228" cy="693420"/>
           </a:xfrm>
           <a:prstGeom prst="rect">
             <a:avLst/>
@@ -12297,7 +12297,7 @@
         <p:spPr>
           <a:xfrm>
             <a:off x="1460182" y="4149090"/>
-            <a:ext cx="614362" cy="442912"/>
+            <a:ext cx="728662" cy="442912"/>
           </a:xfrm>
           <a:prstGeom prst="rect">
             <a:avLst/>
@@ -12338,7 +12338,7 @@
         <p:spPr>
           <a:xfrm>
             <a:off x="2015490" y="4133850"/>
-            <a:ext cx="10468928" cy="693420"/>
+            <a:ext cx="10583228" cy="693420"/>
           </a:xfrm>
           <a:prstGeom prst="rect">
             <a:avLst/>
@@ -12412,7 +12412,7 @@
         <p:spPr>
           <a:xfrm>
             <a:off x="1460182" y="5221605"/>
-            <a:ext cx="614362" cy="442912"/>
+            <a:ext cx="728662" cy="442912"/>
           </a:xfrm>
           <a:prstGeom prst="rect">
             <a:avLst/>
@@ -12453,7 +12453,7 @@
         <p:spPr>
           <a:xfrm>
             <a:off x="2015490" y="5206365"/>
-            <a:ext cx="10468928" cy="375285"/>
+            <a:ext cx="10583228" cy="375285"/>
           </a:xfrm>
           <a:prstGeom prst="rect">
             <a:avLst/>
@@ -12504,8 +12504,8 @@
         </p:nvSpPr>
         <p:spPr>
           <a:xfrm>
-            <a:off x="2430780" y="5925502"/>
-            <a:ext cx="8853488" cy="335280"/>
+            <a:off x="2259330" y="5925502"/>
+            <a:ext cx="9196388" cy="335280"/>
           </a:xfrm>
           <a:prstGeom prst="rect">
             <a:avLst/>
@@ -12683,8 +12683,8 @@
         </p:nvSpPr>
         <p:spPr>
           <a:xfrm>
-            <a:off x="5842635" y="2394585"/>
-            <a:ext cx="2533650" cy="528638"/>
+            <a:off x="5671185" y="2394585"/>
+            <a:ext cx="2876550" cy="528638"/>
           </a:xfrm>
           <a:prstGeom prst="rect">
             <a:avLst/>
@@ -12724,8 +12724,8 @@
         </p:nvSpPr>
         <p:spPr>
           <a:xfrm>
-            <a:off x="3458528" y="3036570"/>
-            <a:ext cx="6798945" cy="1266825"/>
+            <a:off x="3287078" y="3036570"/>
+            <a:ext cx="7141845" cy="1266825"/>
           </a:xfrm>
           <a:prstGeom prst="rect">
             <a:avLst/>
@@ -12805,8 +12805,8 @@
         </p:nvSpPr>
         <p:spPr>
           <a:xfrm>
-            <a:off x="3387090" y="4415790"/>
-            <a:ext cx="6940868" cy="884872"/>
+            <a:off x="3215640" y="4415790"/>
+            <a:ext cx="7283768" cy="884872"/>
           </a:xfrm>
           <a:prstGeom prst="rect">
             <a:avLst/>
@@ -13376,8 +13376,8 @@
         </p:nvSpPr>
         <p:spPr>
           <a:xfrm>
-            <a:off x="5013008" y="2127885"/>
-            <a:ext cx="4192905" cy="528638"/>
+            <a:off x="4841558" y="2127885"/>
+            <a:ext cx="4535805" cy="528638"/>
           </a:xfrm>
           <a:prstGeom prst="rect">
             <a:avLst/>
@@ -13418,7 +13418,7 @@
         <p:spPr>
           <a:xfrm>
             <a:off x="2243138" y="3037522"/>
-            <a:ext cx="3608070" cy="331470"/>
+            <a:ext cx="3722370" cy="331470"/>
           </a:xfrm>
           <a:prstGeom prst="rect">
             <a:avLst/>
@@ -13470,7 +13470,7 @@
         <p:spPr>
           <a:xfrm>
             <a:off x="7791450" y="3037522"/>
-            <a:ext cx="4219575" cy="331470"/>
+            <a:ext cx="4333875" cy="331470"/>
           </a:xfrm>
           <a:prstGeom prst="rect">
             <a:avLst/>
@@ -13522,7 +13522,7 @@
         <p:spPr>
           <a:xfrm>
             <a:off x="2243138" y="3970972"/>
-            <a:ext cx="3579495" cy="331470"/>
+            <a:ext cx="3693795" cy="331470"/>
           </a:xfrm>
           <a:prstGeom prst="rect">
             <a:avLst/>
@@ -13574,7 +13574,7 @@
         <p:spPr>
           <a:xfrm>
             <a:off x="7791450" y="3970972"/>
-            <a:ext cx="3471862" cy="331470"/>
+            <a:ext cx="3586162" cy="331470"/>
           </a:xfrm>
           <a:prstGeom prst="rect">
             <a:avLst/>
@@ -13625,8 +13625,8 @@
         </p:nvSpPr>
         <p:spPr>
           <a:xfrm>
-            <a:off x="3947160" y="4682490"/>
-            <a:ext cx="5822632" cy="884872"/>
+            <a:off x="3775710" y="4682490"/>
+            <a:ext cx="6165532" cy="884872"/>
           </a:xfrm>
           <a:prstGeom prst="rect">
             <a:avLst/>
@@ -13929,8 +13929,8 @@
         </p:nvSpPr>
         <p:spPr>
           <a:xfrm>
-            <a:off x="5324475" y="2187892"/>
-            <a:ext cx="3570922" cy="528638"/>
+            <a:off x="5153025" y="2187892"/>
+            <a:ext cx="3913822" cy="528638"/>
           </a:xfrm>
           <a:prstGeom prst="rect">
             <a:avLst/>
@@ -13970,8 +13970,8 @@
         </p:nvSpPr>
         <p:spPr>
           <a:xfrm>
-            <a:off x="4099560" y="2829878"/>
-            <a:ext cx="5516880" cy="1266825"/>
+            <a:off x="3928110" y="2829878"/>
+            <a:ext cx="5859780" cy="1266825"/>
           </a:xfrm>
           <a:prstGeom prst="rect">
             <a:avLst/>
@@ -14029,8 +14029,8 @@
         </p:nvSpPr>
         <p:spPr>
           <a:xfrm>
-            <a:off x="2604135" y="4209098"/>
-            <a:ext cx="8507730" cy="1298258"/>
+            <a:off x="2432685" y="4209098"/>
+            <a:ext cx="8850630" cy="1298258"/>
           </a:xfrm>
           <a:prstGeom prst="rect">
             <a:avLst/>
@@ -14255,8 +14255,8 @@
         </p:nvSpPr>
         <p:spPr>
           <a:xfrm>
-            <a:off x="3973830" y="3676650"/>
-            <a:ext cx="5769292" cy="748665"/>
+            <a:off x="3802380" y="3676650"/>
+            <a:ext cx="6112192" cy="748665"/>
           </a:xfrm>
           <a:prstGeom prst="rect">
             <a:avLst/>
@@ -14296,8 +14296,8 @@
         </p:nvSpPr>
         <p:spPr>
           <a:xfrm>
-            <a:off x="4393882" y="4537710"/>
-            <a:ext cx="4927282" cy="884872"/>
+            <a:off x="4222432" y="4537710"/>
+            <a:ext cx="5270182" cy="884872"/>
           </a:xfrm>
           <a:prstGeom prst="rect">
             <a:avLst/>
@@ -14733,8 +14733,8 @@
         </p:nvSpPr>
         <p:spPr>
           <a:xfrm>
-            <a:off x="5475922" y="1953578"/>
-            <a:ext cx="3267075" cy="528638"/>
+            <a:off x="5304472" y="1953578"/>
+            <a:ext cx="3609975" cy="528638"/>
           </a:xfrm>
           <a:prstGeom prst="rect">
             <a:avLst/>
@@ -14775,7 +14775,7 @@
         <p:spPr>
           <a:xfrm>
             <a:off x="1425892" y="2805112"/>
-            <a:ext cx="3376612" cy="390525"/>
+            <a:ext cx="3490912" cy="390525"/>
           </a:xfrm>
           <a:prstGeom prst="rect">
             <a:avLst/>
@@ -14816,7 +14816,7 @@
         <p:spPr>
           <a:xfrm>
             <a:off x="1154430" y="3230880"/>
-            <a:ext cx="3648075" cy="607695"/>
+            <a:ext cx="3762375" cy="607695"/>
           </a:xfrm>
           <a:prstGeom prst="rect">
             <a:avLst/>
@@ -14857,7 +14857,7 @@
         <p:spPr>
           <a:xfrm>
             <a:off x="1154430" y="3873818"/>
-            <a:ext cx="3648075" cy="661035"/>
+            <a:ext cx="3762375" cy="661035"/>
           </a:xfrm>
           <a:prstGeom prst="rect">
             <a:avLst/>
@@ -14898,7 +14898,7 @@
         <p:spPr>
           <a:xfrm>
             <a:off x="5419725" y="2805112"/>
-            <a:ext cx="3376612" cy="390525"/>
+            <a:ext cx="3490912" cy="390525"/>
           </a:xfrm>
           <a:prstGeom prst="rect">
             <a:avLst/>
@@ -14939,7 +14939,7 @@
         <p:spPr>
           <a:xfrm>
             <a:off x="5148262" y="3230880"/>
-            <a:ext cx="3648075" cy="607695"/>
+            <a:ext cx="3762375" cy="607695"/>
           </a:xfrm>
           <a:prstGeom prst="rect">
             <a:avLst/>
@@ -14980,7 +14980,7 @@
         <p:spPr>
           <a:xfrm>
             <a:off x="5148262" y="3873818"/>
-            <a:ext cx="3648075" cy="661035"/>
+            <a:ext cx="3762375" cy="661035"/>
           </a:xfrm>
           <a:prstGeom prst="rect">
             <a:avLst/>
@@ -15021,7 +15021,7 @@
         <p:spPr>
           <a:xfrm>
             <a:off x="9413558" y="2805112"/>
-            <a:ext cx="3376612" cy="390525"/>
+            <a:ext cx="3490912" cy="390525"/>
           </a:xfrm>
           <a:prstGeom prst="rect">
             <a:avLst/>
@@ -15062,7 +15062,7 @@
         <p:spPr>
           <a:xfrm>
             <a:off x="9142095" y="3230880"/>
-            <a:ext cx="3648075" cy="607695"/>
+            <a:ext cx="3762375" cy="607695"/>
           </a:xfrm>
           <a:prstGeom prst="rect">
             <a:avLst/>
@@ -15103,7 +15103,7 @@
         <p:spPr>
           <a:xfrm>
             <a:off x="9142095" y="3873818"/>
-            <a:ext cx="3648075" cy="661035"/>
+            <a:ext cx="3762375" cy="661035"/>
           </a:xfrm>
           <a:prstGeom prst="rect">
             <a:avLst/>
@@ -15143,8 +15143,8 @@
         </p:nvSpPr>
         <p:spPr>
           <a:xfrm>
-            <a:off x="4170045" y="4857750"/>
-            <a:ext cx="5374958" cy="884872"/>
+            <a:off x="3998595" y="4857750"/>
+            <a:ext cx="5717858" cy="884872"/>
           </a:xfrm>
           <a:prstGeom prst="rect">
             <a:avLst/>
@@ -15436,8 +15436,8 @@
         </p:nvSpPr>
         <p:spPr>
           <a:xfrm>
-            <a:off x="5738812" y="1913572"/>
-            <a:ext cx="2741295" cy="528638"/>
+            <a:off x="5567362" y="1913572"/>
+            <a:ext cx="3084195" cy="528638"/>
           </a:xfrm>
           <a:prstGeom prst="rect">
             <a:avLst/>
@@ -15477,8 +15477,8 @@
         </p:nvSpPr>
         <p:spPr>
           <a:xfrm>
-            <a:off x="2777490" y="2555558"/>
-            <a:ext cx="8161020" cy="1266825"/>
+            <a:off x="2606040" y="2555558"/>
+            <a:ext cx="8503920" cy="1266825"/>
           </a:xfrm>
           <a:prstGeom prst="rect">
             <a:avLst/>
@@ -15536,8 +15536,8 @@
         </p:nvSpPr>
         <p:spPr>
           <a:xfrm>
-            <a:off x="3407092" y="3934778"/>
-            <a:ext cx="6902768" cy="1400175"/>
+            <a:off x="3235642" y="3934778"/>
+            <a:ext cx="7245668" cy="1400175"/>
           </a:xfrm>
           <a:prstGeom prst="rect">
             <a:avLst/>
@@ -15642,8 +15642,8 @@
         </p:nvSpPr>
         <p:spPr>
           <a:xfrm>
-            <a:off x="3117532" y="5446395"/>
-            <a:ext cx="7480935" cy="335280"/>
+            <a:off x="2946082" y="5446395"/>
+            <a:ext cx="7823835" cy="335280"/>
           </a:xfrm>
           <a:prstGeom prst="rect">
             <a:avLst/>
@@ -16009,8 +16009,8 @@
         </p:nvSpPr>
         <p:spPr>
           <a:xfrm>
-            <a:off x="5267325" y="385762"/>
-            <a:ext cx="3685222" cy="528638"/>
+            <a:off x="5095875" y="385762"/>
+            <a:ext cx="4028122" cy="528638"/>
           </a:xfrm>
           <a:prstGeom prst="rect">
             <a:avLst/>
@@ -16050,8 +16050,8 @@
         </p:nvSpPr>
         <p:spPr>
           <a:xfrm>
-            <a:off x="1038225" y="3343275"/>
-            <a:ext cx="2940368" cy="293370"/>
+            <a:off x="866775" y="3343275"/>
+            <a:ext cx="3283268" cy="293370"/>
           </a:xfrm>
           <a:prstGeom prst="rect">
             <a:avLst/>
@@ -16091,8 +16091,8 @@
         </p:nvSpPr>
         <p:spPr>
           <a:xfrm>
-            <a:off x="5389245" y="3343275"/>
-            <a:ext cx="2937510" cy="293370"/>
+            <a:off x="5217795" y="3343275"/>
+            <a:ext cx="3280410" cy="293370"/>
           </a:xfrm>
           <a:prstGeom prst="rect">
             <a:avLst/>
@@ -16132,8 +16132,8 @@
         </p:nvSpPr>
         <p:spPr>
           <a:xfrm>
-            <a:off x="9474518" y="3343275"/>
-            <a:ext cx="3465195" cy="293370"/>
+            <a:off x="9303068" y="3343275"/>
+            <a:ext cx="3808095" cy="293370"/>
           </a:xfrm>
           <a:prstGeom prst="rect">
             <a:avLst/>
@@ -16173,8 +16173,8 @@
         </p:nvSpPr>
         <p:spPr>
           <a:xfrm>
-            <a:off x="637222" y="6019800"/>
-            <a:ext cx="3744278" cy="293370"/>
+            <a:off x="465773" y="6019800"/>
+            <a:ext cx="4087178" cy="293370"/>
           </a:xfrm>
           <a:prstGeom prst="rect">
             <a:avLst/>
@@ -16247,8 +16247,8 @@
         </p:nvSpPr>
         <p:spPr>
           <a:xfrm>
-            <a:off x="4923472" y="6019800"/>
-            <a:ext cx="3870008" cy="293370"/>
+            <a:off x="4752022" y="6019800"/>
+            <a:ext cx="4212908" cy="293370"/>
           </a:xfrm>
           <a:prstGeom prst="rect">
             <a:avLst/>
@@ -16343,8 +16343,8 @@
         </p:nvSpPr>
         <p:spPr>
           <a:xfrm>
-            <a:off x="9518332" y="6019800"/>
-            <a:ext cx="3376612" cy="293370"/>
+            <a:off x="9346882" y="6019800"/>
+            <a:ext cx="3719512" cy="293370"/>
           </a:xfrm>
           <a:prstGeom prst="rect">
             <a:avLst/>
@@ -16406,8 +16406,8 @@
         </p:nvSpPr>
         <p:spPr>
           <a:xfrm>
-            <a:off x="2557462" y="6424612"/>
-            <a:ext cx="8600122" cy="884872"/>
+            <a:off x="2386012" y="6424612"/>
+            <a:ext cx="8943022" cy="884872"/>
           </a:xfrm>
           <a:prstGeom prst="rect">
             <a:avLst/>
@@ -16647,8 +16647,8 @@
         </p:nvSpPr>
         <p:spPr>
           <a:xfrm>
-            <a:off x="5531168" y="1885950"/>
-            <a:ext cx="3155632" cy="528638"/>
+            <a:off x="5359718" y="1885950"/>
+            <a:ext cx="3498532" cy="528638"/>
           </a:xfrm>
           <a:prstGeom prst="rect">
             <a:avLst/>
@@ -16688,8 +16688,8 @@
         </p:nvSpPr>
         <p:spPr>
           <a:xfrm>
-            <a:off x="3218498" y="2526982"/>
-            <a:ext cx="7279958" cy="1871662"/>
+            <a:off x="3047048" y="2526982"/>
+            <a:ext cx="7622858" cy="1871662"/>
           </a:xfrm>
           <a:prstGeom prst="rect">
             <a:avLst/>
@@ -16776,8 +16776,8 @@
         </p:nvSpPr>
         <p:spPr>
           <a:xfrm>
-            <a:off x="3676650" y="4511040"/>
-            <a:ext cx="6362700" cy="1298258"/>
+            <a:off x="3505200" y="4511040"/>
+            <a:ext cx="6705600" cy="1298258"/>
           </a:xfrm>
           <a:prstGeom prst="rect">
             <a:avLst/>
@@ -17131,8 +17131,8 @@
         </p:nvSpPr>
         <p:spPr>
           <a:xfrm>
-            <a:off x="5946458" y="385762"/>
-            <a:ext cx="2326958" cy="528638"/>
+            <a:off x="5775008" y="385762"/>
+            <a:ext cx="2669858" cy="528638"/>
           </a:xfrm>
           <a:prstGeom prst="rect">
             <a:avLst/>
@@ -17173,7 +17173,7 @@
         <p:spPr>
           <a:xfrm>
             <a:off x="960120" y="6372225"/>
-            <a:ext cx="3788092" cy="294322"/>
+            <a:ext cx="3902392" cy="294322"/>
           </a:xfrm>
           <a:prstGeom prst="rect">
             <a:avLst/>
@@ -17214,7 +17214,7 @@
         <p:spPr>
           <a:xfrm>
             <a:off x="5201602" y="6372225"/>
-            <a:ext cx="3788092" cy="294322"/>
+            <a:ext cx="3902392" cy="294322"/>
           </a:xfrm>
           <a:prstGeom prst="rect">
             <a:avLst/>
@@ -17255,7 +17255,7 @@
         <p:spPr>
           <a:xfrm>
             <a:off x="9444038" y="6372225"/>
-            <a:ext cx="3788092" cy="294322"/>
+            <a:ext cx="3902392" cy="294322"/>
           </a:xfrm>
           <a:prstGeom prst="rect">
             <a:avLst/>
@@ -17643,8 +17643,8 @@
         </p:nvSpPr>
         <p:spPr>
           <a:xfrm>
-            <a:off x="5220652" y="2000250"/>
-            <a:ext cx="3778568" cy="528638"/>
+            <a:off x="5049202" y="2000250"/>
+            <a:ext cx="4121468" cy="528638"/>
           </a:xfrm>
           <a:prstGeom prst="rect">
             <a:avLst/>
@@ -17684,8 +17684,8 @@
         </p:nvSpPr>
         <p:spPr>
           <a:xfrm>
-            <a:off x="6484620" y="3020378"/>
-            <a:ext cx="2867025" cy="826770"/>
+            <a:off x="6313170" y="3020378"/>
+            <a:ext cx="3209925" cy="826770"/>
           </a:xfrm>
           <a:prstGeom prst="rect">
             <a:avLst/>
@@ -17725,8 +17725,8 @@
         </p:nvSpPr>
         <p:spPr>
           <a:xfrm>
-            <a:off x="6484620" y="3850958"/>
-            <a:ext cx="2867025" cy="320992"/>
+            <a:off x="6313170" y="3850958"/>
+            <a:ext cx="3209925" cy="320992"/>
           </a:xfrm>
           <a:prstGeom prst="rect">
             <a:avLst/>
@@ -17767,7 +17767,7 @@
         <p:spPr>
           <a:xfrm>
             <a:off x="2057400" y="4757738"/>
-            <a:ext cx="4812030" cy="294322"/>
+            <a:ext cx="4926330" cy="294322"/>
           </a:xfrm>
           <a:prstGeom prst="rect">
             <a:avLst/>
@@ -17808,7 +17808,7 @@
         <p:spPr>
           <a:xfrm>
             <a:off x="7322820" y="4757738"/>
-            <a:ext cx="4812030" cy="294322"/>
+            <a:ext cx="4926330" cy="294322"/>
           </a:xfrm>
           <a:prstGeom prst="rect">
             <a:avLst/>
@@ -18058,8 +18058,8 @@
         </p:nvSpPr>
         <p:spPr>
           <a:xfrm>
-            <a:off x="5360670" y="385762"/>
-            <a:ext cx="3497580" cy="528638"/>
+            <a:off x="5189220" y="385762"/>
+            <a:ext cx="3840480" cy="528638"/>
           </a:xfrm>
           <a:prstGeom prst="rect">
             <a:avLst/>
@@ -18099,8 +18099,8 @@
         </p:nvSpPr>
         <p:spPr>
           <a:xfrm>
-            <a:off x="3354705" y="6424612"/>
-            <a:ext cx="7007542" cy="884872"/>
+            <a:off x="3183255" y="6424612"/>
+            <a:ext cx="7350442" cy="884872"/>
           </a:xfrm>
           <a:prstGeom prst="rect">
             <a:avLst/>

--- a/slides.pptx
+++ b/slides.pptx
@@ -11297,6 +11297,47 @@
         </p:nvSpPr>
         <p:spPr>
           <a:xfrm>
+            <a:off x="3247072" y="3820478"/>
+            <a:ext cx="1690688" cy="381000"/>
+          </a:xfrm>
+          <a:prstGeom prst="rect">
+            <a:avLst/>
+          </a:prstGeom>
+          <a:noFill/>
+        </p:spPr>
+        <p:txBody>
+          <a:bodyPr wrap="square" lIns="0" rIns="0" tIns="0" bIns="0" anchor="t">
+            <a:spAutoFit/>
+          </a:bodyPr>
+          <a:lstStyle/>
+          <a:p>
+            <a:pPr algn="ctr">
+              <a:lnSpc>
+                <a:spcPts val="3171"/>
+              </a:lnSpc>
+            </a:pPr>
+            <a:r>
+              <a:rPr sz="1761" b="1">
+                <a:solidFill>
+                  <a:srgbClr val="3F5266"/>
+                </a:solidFill>
+                <a:latin typeface="Zen Maru Gothic"/>
+                <a:ea typeface="Zen Maru Gothic"/>
+                <a:cs typeface="Zen Maru Gothic"/>
+              </a:rPr>
+              <a:t>生まれの差</a:t>
+            </a:r>
+          </a:p>
+        </p:txBody>
+      </p:sp>
+      <p:sp>
+        <p:nvSpPr>
+          <p:cNvPr id="11" name="TextBox 10"/>
+          <p:cNvSpPr txBox="1"/>
+          <p:nvPr/>
+        </p:nvSpPr>
+        <p:spPr>
+          <a:xfrm>
             <a:off x="3247072" y="4215765"/>
             <a:ext cx="1690688" cy="306705"/>
           </a:xfrm>
@@ -11332,7 +11373,7 @@
       </p:sp>
       <p:sp>
         <p:nvSpPr>
-          <p:cNvPr id="11" name="TextBox 10"/>
+          <p:cNvPr id="12" name="TextBox 11"/>
           <p:cNvSpPr txBox="1"/>
           <p:nvPr/>
         </p:nvSpPr>
@@ -11373,7 +11414,48 @@
       </p:sp>
       <p:sp>
         <p:nvSpPr>
-          <p:cNvPr id="12" name="TextBox 11"/>
+          <p:cNvPr id="13" name="TextBox 12"/>
+          <p:cNvSpPr txBox="1"/>
+          <p:nvPr/>
+        </p:nvSpPr>
+        <p:spPr>
+          <a:xfrm>
+            <a:off x="5514975" y="3820478"/>
+            <a:ext cx="2137410" cy="381000"/>
+          </a:xfrm>
+          <a:prstGeom prst="rect">
+            <a:avLst/>
+          </a:prstGeom>
+          <a:noFill/>
+        </p:spPr>
+        <p:txBody>
+          <a:bodyPr wrap="square" lIns="0" rIns="0" tIns="0" bIns="0" anchor="t">
+            <a:spAutoFit/>
+          </a:bodyPr>
+          <a:lstStyle/>
+          <a:p>
+            <a:pPr algn="ctr">
+              <a:lnSpc>
+                <a:spcPts val="3171"/>
+              </a:lnSpc>
+            </a:pPr>
+            <a:r>
+              <a:rPr sz="1761" b="1">
+                <a:solidFill>
+                  <a:srgbClr val="3F5266"/>
+                </a:solidFill>
+                <a:latin typeface="Zen Maru Gothic"/>
+                <a:ea typeface="Zen Maru Gothic"/>
+                <a:cs typeface="Zen Maru Gothic"/>
+              </a:rPr>
+              <a:t>見える世界の差</a:t>
+            </a:r>
+          </a:p>
+        </p:txBody>
+      </p:sp>
+      <p:sp>
+        <p:nvSpPr>
+          <p:cNvPr id="14" name="TextBox 13"/>
           <p:cNvSpPr txBox="1"/>
           <p:nvPr/>
         </p:nvSpPr>
@@ -11414,7 +11496,7 @@
       </p:sp>
       <p:sp>
         <p:nvSpPr>
-          <p:cNvPr id="13" name="TextBox 12"/>
+          <p:cNvPr id="15" name="TextBox 14"/>
           <p:cNvSpPr txBox="1"/>
           <p:nvPr/>
         </p:nvSpPr>
@@ -11455,7 +11537,48 @@
       </p:sp>
       <p:sp>
         <p:nvSpPr>
-          <p:cNvPr id="14" name="TextBox 13"/>
+          <p:cNvPr id="16" name="TextBox 15"/>
+          <p:cNvSpPr txBox="1"/>
+          <p:nvPr/>
+        </p:nvSpPr>
+        <p:spPr>
+          <a:xfrm>
+            <a:off x="8503920" y="3820478"/>
+            <a:ext cx="1690688" cy="381000"/>
+          </a:xfrm>
+          <a:prstGeom prst="rect">
+            <a:avLst/>
+          </a:prstGeom>
+          <a:noFill/>
+        </p:spPr>
+        <p:txBody>
+          <a:bodyPr wrap="square" lIns="0" rIns="0" tIns="0" bIns="0" anchor="t">
+            <a:spAutoFit/>
+          </a:bodyPr>
+          <a:lstStyle/>
+          <a:p>
+            <a:pPr algn="ctr">
+              <a:lnSpc>
+                <a:spcPts val="3171"/>
+              </a:lnSpc>
+            </a:pPr>
+            <a:r>
+              <a:rPr sz="1761" b="1">
+                <a:solidFill>
+                  <a:srgbClr val="3F5266"/>
+                </a:solidFill>
+                <a:latin typeface="Zen Maru Gothic"/>
+                <a:ea typeface="Zen Maru Gothic"/>
+                <a:cs typeface="Zen Maru Gothic"/>
+              </a:rPr>
+              <a:t>実る場の差</a:t>
+            </a:r>
+          </a:p>
+        </p:txBody>
+      </p:sp>
+      <p:sp>
+        <p:nvSpPr>
+          <p:cNvPr id="17" name="TextBox 16"/>
           <p:cNvSpPr txBox="1"/>
           <p:nvPr/>
         </p:nvSpPr>
@@ -11496,7 +11619,7 @@
       </p:sp>
       <p:sp>
         <p:nvSpPr>
-          <p:cNvPr id="15" name="TextBox 14"/>
+          <p:cNvPr id="18" name="TextBox 17"/>
           <p:cNvSpPr txBox="1"/>
           <p:nvPr/>
         </p:nvSpPr>
@@ -11595,7 +11718,7 @@
       </p:sp>
       <p:pic>
         <p:nvPicPr>
-          <p:cNvPr id="16" name="Picture 15" descr="995d0a3bd7.png"/>
+          <p:cNvPr id="19" name="Picture 18" descr="995d0a3bd7.png"/>
           <p:cNvPicPr>
             <a:picLocks noChangeAspect="1"/>
           </p:cNvPicPr>
@@ -17684,6 +17807,58 @@
         </p:nvSpPr>
         <p:spPr>
           <a:xfrm>
+            <a:off x="4745355" y="3336608"/>
+            <a:ext cx="1317308" cy="506730"/>
+          </a:xfrm>
+          <a:prstGeom prst="rect">
+            <a:avLst/>
+          </a:prstGeom>
+          <a:noFill/>
+        </p:spPr>
+        <p:txBody>
+          <a:bodyPr wrap="square" lIns="0" rIns="0" tIns="0" bIns="0" anchor="t">
+            <a:spAutoFit/>
+          </a:bodyPr>
+          <a:lstStyle/>
+          <a:p>
+            <a:pPr algn="ctr">
+              <a:lnSpc>
+                <a:spcPts val="1968"/>
+              </a:lnSpc>
+            </a:pPr>
+            <a:r>
+              <a:rPr sz="1093" b="1">
+                <a:solidFill>
+                  <a:srgbClr val="8A97A5"/>
+                </a:solidFill>
+                <a:latin typeface="Zen Maru Gothic"/>
+                <a:ea typeface="Zen Maru Gothic"/>
+                <a:cs typeface="Zen Maru Gothic"/>
+              </a:rPr>
+              <a:t>QRコードを</a:t>
+            </a:r>
+            <a:r>
+              <a:rPr sz="1093" b="1">
+                <a:solidFill>
+                  <a:srgbClr val="8A97A5"/>
+                </a:solidFill>
+                <a:latin typeface="Zen Maru Gothic"/>
+                <a:ea typeface="Zen Maru Gothic"/>
+                <a:cs typeface="Zen Maru Gothic"/>
+              </a:rPr>
+              <a:t>ここに貼る</a:t>
+            </a:r>
+          </a:p>
+        </p:txBody>
+      </p:sp>
+      <p:sp>
+        <p:nvSpPr>
+          <p:cNvPr id="9" name="TextBox 8"/>
+          <p:cNvSpPr txBox="1"/>
+          <p:nvPr/>
+        </p:nvSpPr>
+        <p:spPr>
+          <a:xfrm>
             <a:off x="6313170" y="3020378"/>
             <a:ext cx="3209925" cy="826770"/>
           </a:xfrm>
@@ -17719,7 +17894,7 @@
       </p:sp>
       <p:sp>
         <p:nvSpPr>
-          <p:cNvPr id="9" name="TextBox 8"/>
+          <p:cNvPr id="10" name="TextBox 9"/>
           <p:cNvSpPr txBox="1"/>
           <p:nvPr/>
         </p:nvSpPr>
@@ -17760,7 +17935,7 @@
       </p:sp>
       <p:sp>
         <p:nvSpPr>
-          <p:cNvPr id="10" name="TextBox 9"/>
+          <p:cNvPr id="11" name="TextBox 10"/>
           <p:cNvSpPr txBox="1"/>
           <p:nvPr/>
         </p:nvSpPr>
@@ -17801,7 +17976,7 @@
       </p:sp>
       <p:sp>
         <p:nvSpPr>
-          <p:cNvPr id="11" name="TextBox 10"/>
+          <p:cNvPr id="12" name="TextBox 11"/>
           <p:cNvSpPr txBox="1"/>
           <p:nvPr/>
         </p:nvSpPr>
@@ -17842,7 +18017,7 @@
       </p:sp>
       <p:pic>
         <p:nvPicPr>
-          <p:cNvPr id="12" name="Picture 11" descr="995d0a3bd7.png"/>
+          <p:cNvPr id="13" name="Picture 12" descr="995d0a3bd7.png"/>
           <p:cNvPicPr>
             <a:picLocks noChangeAspect="1"/>
           </p:cNvPicPr>
@@ -17866,7 +18041,7 @@
       </p:pic>
       <p:pic>
         <p:nvPicPr>
-          <p:cNvPr id="13" name="Picture 12" descr="a3e3bfe91d.png"/>
+          <p:cNvPr id="14" name="Picture 13" descr="a3e3bfe91d.png"/>
           <p:cNvPicPr>
             <a:picLocks noChangeAspect="1"/>
           </p:cNvPicPr>
@@ -17890,7 +18065,7 @@
       </p:pic>
       <p:pic>
         <p:nvPicPr>
-          <p:cNvPr id="14" name="Picture 13" descr="1f11ed96ec.png"/>
+          <p:cNvPr id="15" name="Picture 14" descr="1f11ed96ec.png"/>
           <p:cNvPicPr>
             <a:picLocks noChangeAspect="1"/>
           </p:cNvPicPr>

--- a/slides.pptx
+++ b/slides.pptx
@@ -5218,6 +5218,47 @@
         </p:nvSpPr>
         <p:spPr>
           <a:xfrm>
+            <a:off x="712470" y="6647498"/>
+            <a:ext cx="3196590" cy="257175"/>
+          </a:xfrm>
+          <a:prstGeom prst="rect">
+            <a:avLst/>
+          </a:prstGeom>
+          <a:noFill/>
+        </p:spPr>
+        <p:txBody>
+          <a:bodyPr wrap="square" lIns="0" rIns="0" tIns="0" bIns="0" anchor="t">
+            <a:spAutoFit/>
+          </a:bodyPr>
+          <a:lstStyle/>
+          <a:p>
+            <a:pPr algn="l">
+              <a:lnSpc>
+                <a:spcPts val="2160"/>
+              </a:lnSpc>
+            </a:pPr>
+            <a:r>
+              <a:rPr sz="1123" b="1">
+                <a:solidFill>
+                  <a:srgbClr val="8A97A5"/>
+                </a:solidFill>
+                <a:latin typeface="Zen Maru Gothic"/>
+                <a:ea typeface="Zen Maru Gothic"/>
+                <a:cs typeface="Zen Maru Gothic"/>
+              </a:rPr>
+              <a:t>カギがいくつ必要かは、ここでは分からない</a:t>
+            </a:r>
+          </a:p>
+        </p:txBody>
+      </p:sp>
+      <p:sp>
+        <p:nvSpPr>
+          <p:cNvPr id="13" name="TextBox 12"/>
+          <p:cNvSpPr txBox="1"/>
+          <p:nvPr/>
+        </p:nvSpPr>
+        <p:spPr>
+          <a:xfrm>
             <a:off x="960120" y="6372225"/>
             <a:ext cx="3902392" cy="294322"/>
           </a:xfrm>
@@ -5253,7 +5294,48 @@
       </p:sp>
       <p:sp>
         <p:nvSpPr>
-          <p:cNvPr id="13" name="TextBox 12"/>
+          <p:cNvPr id="14" name="TextBox 13"/>
+          <p:cNvSpPr txBox="1"/>
+          <p:nvPr/>
+        </p:nvSpPr>
+        <p:spPr>
+          <a:xfrm>
+            <a:off x="4954905" y="6647498"/>
+            <a:ext cx="4052888" cy="531495"/>
+          </a:xfrm>
+          <a:prstGeom prst="rect">
+            <a:avLst/>
+          </a:prstGeom>
+          <a:noFill/>
+        </p:spPr>
+        <p:txBody>
+          <a:bodyPr wrap="square" lIns="0" rIns="0" tIns="0" bIns="0" anchor="t">
+            <a:spAutoFit/>
+          </a:bodyPr>
+          <a:lstStyle/>
+          <a:p>
+            <a:pPr algn="l">
+              <a:lnSpc>
+                <a:spcPts val="2160"/>
+              </a:lnSpc>
+            </a:pPr>
+            <a:r>
+              <a:rPr sz="1123" b="1">
+                <a:solidFill>
+                  <a:srgbClr val="8A97A5"/>
+                </a:solidFill>
+                <a:latin typeface="Zen Maru Gothic"/>
+                <a:ea typeface="Zen Maru Gothic"/>
+                <a:cs typeface="Zen Maru Gothic"/>
+              </a:rPr>
+              <a:t>カギが足りなければ「このトビラは開かなかった」。カギの要らない道は必ず選べる</a:t>
+            </a:r>
+          </a:p>
+        </p:txBody>
+      </p:sp>
+      <p:sp>
+        <p:nvSpPr>
+          <p:cNvPr id="15" name="TextBox 14"/>
           <p:cNvSpPr txBox="1"/>
           <p:nvPr/>
         </p:nvSpPr>
@@ -5294,7 +5376,48 @@
       </p:sp>
       <p:sp>
         <p:nvSpPr>
-          <p:cNvPr id="14" name="TextBox 13"/>
+          <p:cNvPr id="16" name="TextBox 15"/>
+          <p:cNvSpPr txBox="1"/>
+          <p:nvPr/>
+        </p:nvSpPr>
+        <p:spPr>
+          <a:xfrm>
+            <a:off x="9196388" y="6647498"/>
+            <a:ext cx="3482340" cy="257175"/>
+          </a:xfrm>
+          <a:prstGeom prst="rect">
+            <a:avLst/>
+          </a:prstGeom>
+          <a:noFill/>
+        </p:spPr>
+        <p:txBody>
+          <a:bodyPr wrap="square" lIns="0" rIns="0" tIns="0" bIns="0" anchor="t">
+            <a:spAutoFit/>
+          </a:bodyPr>
+          <a:lstStyle/>
+          <a:p>
+            <a:pPr algn="l">
+              <a:lnSpc>
+                <a:spcPts val="2160"/>
+              </a:lnSpc>
+            </a:pPr>
+            <a:r>
+              <a:rPr sz="1123" b="1">
+                <a:solidFill>
+                  <a:srgbClr val="8A97A5"/>
+                </a:solidFill>
+                <a:latin typeface="Zen Maru Gothic"/>
+                <a:ea typeface="Zen Maru Gothic"/>
+                <a:cs typeface="Zen Maru Gothic"/>
+              </a:rPr>
+              <a:t>そもそも中身が見えない。選ぶことすらできない</a:t>
+            </a:r>
+          </a:p>
+        </p:txBody>
+      </p:sp>
+      <p:sp>
+        <p:nvSpPr>
+          <p:cNvPr id="17" name="TextBox 16"/>
           <p:cNvSpPr txBox="1"/>
           <p:nvPr/>
         </p:nvSpPr>
@@ -5335,7 +5458,7 @@
       </p:sp>
       <p:pic>
         <p:nvPicPr>
-          <p:cNvPr id="15" name="Picture 14" descr="9606657304.png"/>
+          <p:cNvPr id="18" name="Picture 17" descr="9606657304.png"/>
           <p:cNvPicPr>
             <a:picLocks noChangeAspect="1"/>
           </p:cNvPicPr>
@@ -5359,7 +5482,7 @@
       </p:pic>
       <p:pic>
         <p:nvPicPr>
-          <p:cNvPr id="16" name="Picture 15" descr="5b29d22da6.png"/>
+          <p:cNvPr id="19" name="Picture 18" descr="5b29d22da6.png"/>
           <p:cNvPicPr>
             <a:picLocks noChangeAspect="1"/>
           </p:cNvPicPr>
@@ -5383,7 +5506,7 @@
       </p:pic>
       <p:pic>
         <p:nvPicPr>
-          <p:cNvPr id="17" name="Picture 16" descr="2facab2a32.png"/>
+          <p:cNvPr id="20" name="Picture 19" descr="2facab2a32.png"/>
           <p:cNvPicPr>
             <a:picLocks noChangeAspect="1"/>
           </p:cNvPicPr>
@@ -5407,7 +5530,7 @@
       </p:pic>
       <p:pic>
         <p:nvPicPr>
-          <p:cNvPr id="18" name="Picture 17" descr="37db8309e8.png"/>
+          <p:cNvPr id="21" name="Picture 20" descr="37db8309e8.png"/>
           <p:cNvPicPr>
             <a:picLocks noChangeAspect="1"/>
           </p:cNvPicPr>
@@ -7602,6 +7725,47 @@
         </p:nvSpPr>
         <p:spPr>
           <a:xfrm>
+            <a:off x="712470" y="6647498"/>
+            <a:ext cx="3482340" cy="257175"/>
+          </a:xfrm>
+          <a:prstGeom prst="rect">
+            <a:avLst/>
+          </a:prstGeom>
+          <a:noFill/>
+        </p:spPr>
+        <p:txBody>
+          <a:bodyPr wrap="square" lIns="0" rIns="0" tIns="0" bIns="0" anchor="t">
+            <a:spAutoFit/>
+          </a:bodyPr>
+          <a:lstStyle/>
+          <a:p>
+            <a:pPr algn="l">
+              <a:lnSpc>
+                <a:spcPts val="2160"/>
+              </a:lnSpc>
+            </a:pPr>
+            <a:r>
+              <a:rPr sz="1123" b="1">
+                <a:solidFill>
+                  <a:srgbClr val="8A97A5"/>
+                </a:solidFill>
+                <a:latin typeface="Zen Maru Gothic"/>
+                <a:ea typeface="Zen Maru Gothic"/>
+                <a:cs typeface="Zen Maru Gothic"/>
+              </a:rPr>
+              <a:t>同数なら残ったお金。お金の多さでは決まらない</a:t>
+            </a:r>
+          </a:p>
+        </p:txBody>
+      </p:sp>
+      <p:sp>
+        <p:nvSpPr>
+          <p:cNvPr id="9" name="TextBox 8"/>
+          <p:cNvSpPr txBox="1"/>
+          <p:nvPr/>
+        </p:nvSpPr>
+        <p:spPr>
+          <a:xfrm>
             <a:off x="960120" y="6372225"/>
             <a:ext cx="3902392" cy="294322"/>
           </a:xfrm>
@@ -7637,7 +7801,48 @@
       </p:sp>
       <p:sp>
         <p:nvSpPr>
-          <p:cNvPr id="9" name="TextBox 8"/>
+          <p:cNvPr id="10" name="TextBox 9"/>
+          <p:cNvSpPr txBox="1"/>
+          <p:nvPr/>
+        </p:nvSpPr>
+        <p:spPr>
+          <a:xfrm>
+            <a:off x="4954905" y="6647498"/>
+            <a:ext cx="3339465" cy="257175"/>
+          </a:xfrm>
+          <a:prstGeom prst="rect">
+            <a:avLst/>
+          </a:prstGeom>
+          <a:noFill/>
+        </p:spPr>
+        <p:txBody>
+          <a:bodyPr wrap="square" lIns="0" rIns="0" tIns="0" bIns="0" anchor="t">
+            <a:spAutoFit/>
+          </a:bodyPr>
+          <a:lstStyle/>
+          <a:p>
+            <a:pPr algn="l">
+              <a:lnSpc>
+                <a:spcPts val="2160"/>
+              </a:lnSpc>
+            </a:pPr>
+            <a:r>
+              <a:rPr sz="1123" b="1">
+                <a:solidFill>
+                  <a:srgbClr val="8A97A5"/>
+                </a:solidFill>
+                <a:latin typeface="Zen Maru Gothic"/>
+                <a:ea typeface="Zen Maru Gothic"/>
+                <a:cs typeface="Zen Maru Gothic"/>
+              </a:rPr>
+              <a:t>誰がどこに生まれていたのかが、ここで分かる</a:t>
+            </a:r>
+          </a:p>
+        </p:txBody>
+      </p:sp>
+      <p:sp>
+        <p:nvSpPr>
+          <p:cNvPr id="11" name="TextBox 10"/>
           <p:cNvSpPr txBox="1"/>
           <p:nvPr/>
         </p:nvSpPr>
@@ -7678,7 +7883,48 @@
       </p:sp>
       <p:sp>
         <p:nvSpPr>
-          <p:cNvPr id="10" name="TextBox 9"/>
+          <p:cNvPr id="12" name="TextBox 11"/>
+          <p:cNvSpPr txBox="1"/>
+          <p:nvPr/>
+        </p:nvSpPr>
+        <p:spPr>
+          <a:xfrm>
+            <a:off x="9196388" y="6647498"/>
+            <a:ext cx="4052888" cy="531495"/>
+          </a:xfrm>
+          <a:prstGeom prst="rect">
+            <a:avLst/>
+          </a:prstGeom>
+          <a:noFill/>
+        </p:spPr>
+        <p:txBody>
+          <a:bodyPr wrap="square" lIns="0" rIns="0" tIns="0" bIns="0" anchor="t">
+            <a:spAutoFit/>
+          </a:bodyPr>
+          <a:lstStyle/>
+          <a:p>
+            <a:pPr algn="l">
+              <a:lnSpc>
+                <a:spcPts val="2160"/>
+              </a:lnSpc>
+            </a:pPr>
+            <a:r>
+              <a:rPr sz="1123" b="1">
+                <a:solidFill>
+                  <a:srgbClr val="8A97A5"/>
+                </a:solidFill>
+                <a:latin typeface="Zen Maru Gothic"/>
+                <a:ea typeface="Zen Maru Gothic"/>
+                <a:cs typeface="Zen Maru Gothic"/>
+              </a:rPr>
+              <a:t>借りた人はまだ返し終わっていない。ゴールは、終わりではなかった</a:t>
+            </a:r>
+          </a:p>
+        </p:txBody>
+      </p:sp>
+      <p:sp>
+        <p:nvSpPr>
+          <p:cNvPr id="13" name="TextBox 12"/>
           <p:cNvSpPr txBox="1"/>
           <p:nvPr/>
         </p:nvSpPr>
@@ -7719,7 +7965,7 @@
       </p:sp>
       <p:pic>
         <p:nvPicPr>
-          <p:cNvPr id="11" name="Picture 10" descr="8ece8238b1.png"/>
+          <p:cNvPr id="14" name="Picture 13" descr="8ece8238b1.png"/>
           <p:cNvPicPr>
             <a:picLocks noChangeAspect="1"/>
           </p:cNvPicPr>
@@ -7743,7 +7989,7 @@
       </p:pic>
       <p:pic>
         <p:nvPicPr>
-          <p:cNvPr id="12" name="Picture 11" descr="eea51cc229.png"/>
+          <p:cNvPr id="15" name="Picture 14" descr="eea51cc229.png"/>
           <p:cNvPicPr>
             <a:picLocks noChangeAspect="1"/>
           </p:cNvPicPr>
@@ -7767,7 +8013,7 @@
       </p:pic>
       <p:pic>
         <p:nvPicPr>
-          <p:cNvPr id="13" name="Picture 12" descr="a33551a2c4.png"/>
+          <p:cNvPr id="16" name="Picture 15" descr="a33551a2c4.png"/>
           <p:cNvPicPr>
             <a:picLocks noChangeAspect="1"/>
           </p:cNvPicPr>
@@ -7791,7 +8037,7 @@
       </p:pic>
       <p:pic>
         <p:nvPicPr>
-          <p:cNvPr id="14" name="Picture 13" descr="5baef69d53.png"/>
+          <p:cNvPr id="17" name="Picture 16" descr="5baef69d53.png"/>
           <p:cNvPicPr>
             <a:picLocks noChangeAspect="1"/>
           </p:cNvPicPr>
@@ -17295,6 +17541,47 @@
         </p:nvSpPr>
         <p:spPr>
           <a:xfrm>
+            <a:off x="712470" y="6647498"/>
+            <a:ext cx="4023360" cy="531495"/>
+          </a:xfrm>
+          <a:prstGeom prst="rect">
+            <a:avLst/>
+          </a:prstGeom>
+          <a:noFill/>
+        </p:spPr>
+        <p:txBody>
+          <a:bodyPr wrap="square" lIns="0" rIns="0" tIns="0" bIns="0" anchor="t">
+            <a:spAutoFit/>
+          </a:bodyPr>
+          <a:lstStyle/>
+          <a:p>
+            <a:pPr algn="l">
+              <a:lnSpc>
+                <a:spcPts val="2160"/>
+              </a:lnSpc>
+            </a:pPr>
+            <a:r>
+              <a:rPr sz="1123" b="1">
+                <a:solidFill>
+                  <a:srgbClr val="8A97A5"/>
+                </a:solidFill>
+                <a:latin typeface="Zen Maru Gothic"/>
+                <a:ea typeface="Zen Maru Gothic"/>
+                <a:cs typeface="Zen Maru Gothic"/>
+              </a:rPr>
+              <a:t>3〜4人で1チーム。その中で「ルームをつくる」係を1人決める</a:t>
+            </a:r>
+          </a:p>
+        </p:txBody>
+      </p:sp>
+      <p:sp>
+        <p:nvSpPr>
+          <p:cNvPr id="9" name="TextBox 8"/>
+          <p:cNvSpPr txBox="1"/>
+          <p:nvPr/>
+        </p:nvSpPr>
+        <p:spPr>
+          <a:xfrm>
             <a:off x="960120" y="6372225"/>
             <a:ext cx="3902392" cy="294322"/>
           </a:xfrm>
@@ -17330,7 +17617,48 @@
       </p:sp>
       <p:sp>
         <p:nvSpPr>
-          <p:cNvPr id="9" name="TextBox 8"/>
+          <p:cNvPr id="10" name="TextBox 9"/>
+          <p:cNvSpPr txBox="1"/>
+          <p:nvPr/>
+        </p:nvSpPr>
+        <p:spPr>
+          <a:xfrm>
+            <a:off x="4954905" y="6647498"/>
+            <a:ext cx="4123372" cy="531495"/>
+          </a:xfrm>
+          <a:prstGeom prst="rect">
+            <a:avLst/>
+          </a:prstGeom>
+          <a:noFill/>
+        </p:spPr>
+        <p:txBody>
+          <a:bodyPr wrap="square" lIns="0" rIns="0" tIns="0" bIns="0" anchor="t">
+            <a:spAutoFit/>
+          </a:bodyPr>
+          <a:lstStyle/>
+          <a:p>
+            <a:pPr algn="l">
+              <a:lnSpc>
+                <a:spcPts val="2160"/>
+              </a:lnSpc>
+            </a:pPr>
+            <a:r>
+              <a:rPr sz="1123" b="1">
+                <a:solidFill>
+                  <a:srgbClr val="8A97A5"/>
+                </a:solidFill>
+                <a:latin typeface="Zen Maru Gothic"/>
+                <a:ea typeface="Zen Maru Gothic"/>
+                <a:cs typeface="Zen Maru Gothic"/>
+              </a:rPr>
+              <a:t>進行役の画面に6文字が出る。チームに口で伝え、ほかの人は「ルームに参加」</a:t>
+            </a:r>
+          </a:p>
+        </p:txBody>
+      </p:sp>
+      <p:sp>
+        <p:nvSpPr>
+          <p:cNvPr id="11" name="TextBox 10"/>
           <p:cNvSpPr txBox="1"/>
           <p:nvPr/>
         </p:nvSpPr>
@@ -17371,7 +17699,48 @@
       </p:sp>
       <p:sp>
         <p:nvSpPr>
-          <p:cNvPr id="10" name="TextBox 9"/>
+          <p:cNvPr id="12" name="TextBox 11"/>
+          <p:cNvSpPr txBox="1"/>
+          <p:nvPr/>
+        </p:nvSpPr>
+        <p:spPr>
+          <a:xfrm>
+            <a:off x="9196388" y="6647498"/>
+            <a:ext cx="4090988" cy="531495"/>
+          </a:xfrm>
+          <a:prstGeom prst="rect">
+            <a:avLst/>
+          </a:prstGeom>
+          <a:noFill/>
+        </p:spPr>
+        <p:txBody>
+          <a:bodyPr wrap="square" lIns="0" rIns="0" tIns="0" bIns="0" anchor="t">
+            <a:spAutoFit/>
+          </a:bodyPr>
+          <a:lstStyle/>
+          <a:p>
+            <a:pPr algn="l">
+              <a:lnSpc>
+                <a:spcPts val="2160"/>
+              </a:lnSpc>
+            </a:pPr>
+            <a:r>
+              <a:rPr sz="1123" b="1">
+                <a:solidFill>
+                  <a:srgbClr val="8A97A5"/>
+                </a:solidFill>
+                <a:latin typeface="Zen Maru Gothic"/>
+                <a:ea typeface="Zen Maru Gothic"/>
+                <a:cs typeface="Zen Maru Gothic"/>
+              </a:rPr>
+              <a:t>全員そろっても「ゲーム開始」はまだ押さない。⚠️のチェックボックスは触らない</a:t>
+            </a:r>
+          </a:p>
+        </p:txBody>
+      </p:sp>
+      <p:sp>
+        <p:nvSpPr>
+          <p:cNvPr id="13" name="TextBox 12"/>
           <p:cNvSpPr txBox="1"/>
           <p:nvPr/>
         </p:nvSpPr>
@@ -17412,7 +17781,7 @@
       </p:sp>
       <p:pic>
         <p:nvPicPr>
-          <p:cNvPr id="11" name="Picture 10" descr="ea4815045a.png"/>
+          <p:cNvPr id="14" name="Picture 13" descr="ea4815045a.png"/>
           <p:cNvPicPr>
             <a:picLocks noChangeAspect="1"/>
           </p:cNvPicPr>
@@ -17436,7 +17805,7 @@
       </p:pic>
       <p:pic>
         <p:nvPicPr>
-          <p:cNvPr id="12" name="Picture 11" descr="b21aaf87cb.png"/>
+          <p:cNvPr id="15" name="Picture 14" descr="b21aaf87cb.png"/>
           <p:cNvPicPr>
             <a:picLocks noChangeAspect="1"/>
           </p:cNvPicPr>
@@ -17460,7 +17829,7 @@
       </p:pic>
       <p:pic>
         <p:nvPicPr>
-          <p:cNvPr id="13" name="Picture 12" descr="5b29d22da6.png"/>
+          <p:cNvPr id="16" name="Picture 15" descr="5b29d22da6.png"/>
           <p:cNvPicPr>
             <a:picLocks noChangeAspect="1"/>
           </p:cNvPicPr>
@@ -17484,7 +17853,7 @@
       </p:pic>
       <p:pic>
         <p:nvPicPr>
-          <p:cNvPr id="14" name="Picture 13" descr="dadcd76fda.png"/>
+          <p:cNvPr id="17" name="Picture 16" descr="dadcd76fda.png"/>
           <p:cNvPicPr>
             <a:picLocks noChangeAspect="1"/>
           </p:cNvPicPr>
@@ -17808,7 +18177,7 @@
         <p:spPr>
           <a:xfrm>
             <a:off x="4745355" y="3336608"/>
-            <a:ext cx="1317308" cy="506730"/>
+            <a:ext cx="1317308" cy="257175"/>
           </a:xfrm>
           <a:prstGeom prst="rect">
             <a:avLst/>
@@ -17837,6 +18206,36 @@
               </a:rPr>
               <a:t>QRコードを</a:t>
             </a:r>
+          </a:p>
+        </p:txBody>
+      </p:sp>
+      <p:sp>
+        <p:nvSpPr>
+          <p:cNvPr id="9" name="TextBox 8"/>
+          <p:cNvSpPr txBox="1"/>
+          <p:nvPr/>
+        </p:nvSpPr>
+        <p:spPr>
+          <a:xfrm>
+            <a:off x="4770120" y="3586162"/>
+            <a:ext cx="1265872" cy="257175"/>
+          </a:xfrm>
+          <a:prstGeom prst="rect">
+            <a:avLst/>
+          </a:prstGeom>
+          <a:noFill/>
+        </p:spPr>
+        <p:txBody>
+          <a:bodyPr wrap="square" lIns="0" rIns="0" tIns="0" bIns="0" anchor="t">
+            <a:spAutoFit/>
+          </a:bodyPr>
+          <a:lstStyle/>
+          <a:p>
+            <a:pPr algn="ctr">
+              <a:lnSpc>
+                <a:spcPts val="1968"/>
+              </a:lnSpc>
+            </a:pPr>
             <a:r>
               <a:rPr sz="1093" b="1">
                 <a:solidFill>
@@ -17853,7 +18252,7 @@
       </p:sp>
       <p:sp>
         <p:nvSpPr>
-          <p:cNvPr id="9" name="TextBox 8"/>
+          <p:cNvPr id="10" name="TextBox 9"/>
           <p:cNvSpPr txBox="1"/>
           <p:nvPr/>
         </p:nvSpPr>
@@ -17894,7 +18293,7 @@
       </p:sp>
       <p:sp>
         <p:nvSpPr>
-          <p:cNvPr id="10" name="TextBox 9"/>
+          <p:cNvPr id="11" name="TextBox 10"/>
           <p:cNvSpPr txBox="1"/>
           <p:nvPr/>
         </p:nvSpPr>
@@ -17935,7 +18334,48 @@
       </p:sp>
       <p:sp>
         <p:nvSpPr>
-          <p:cNvPr id="11" name="TextBox 10"/>
+          <p:cNvPr id="12" name="TextBox 11"/>
+          <p:cNvSpPr txBox="1"/>
+          <p:nvPr/>
+        </p:nvSpPr>
+        <p:spPr>
+          <a:xfrm>
+            <a:off x="1809750" y="5033010"/>
+            <a:ext cx="5051108" cy="531495"/>
+          </a:xfrm>
+          <a:prstGeom prst="rect">
+            <a:avLst/>
+          </a:prstGeom>
+          <a:noFill/>
+        </p:spPr>
+        <p:txBody>
+          <a:bodyPr wrap="square" lIns="0" rIns="0" tIns="0" bIns="0" anchor="t">
+            <a:spAutoFit/>
+          </a:bodyPr>
+          <a:lstStyle/>
+          <a:p>
+            <a:pPr algn="l">
+              <a:lnSpc>
+                <a:spcPts val="2160"/>
+              </a:lnSpc>
+            </a:pPr>
+            <a:r>
+              <a:rPr sz="1123" b="1">
+                <a:solidFill>
+                  <a:srgbClr val="8A97A5"/>
+                </a:solidFill>
+                <a:latin typeface="Zen Maru Gothic"/>
+                <a:ea typeface="Zen Maru Gothic"/>
+                <a:cs typeface="Zen Maru Gothic"/>
+              </a:rPr>
+              <a:t>人に見せない、隣をのぞかない。誰にどれが配られたかは最後まで秘密です</a:t>
+            </a:r>
+          </a:p>
+        </p:txBody>
+      </p:sp>
+      <p:sp>
+        <p:nvSpPr>
+          <p:cNvPr id="13" name="TextBox 12"/>
           <p:cNvSpPr txBox="1"/>
           <p:nvPr/>
         </p:nvSpPr>
@@ -17976,7 +18416,48 @@
       </p:sp>
       <p:sp>
         <p:nvSpPr>
-          <p:cNvPr id="12" name="TextBox 11"/>
+          <p:cNvPr id="14" name="TextBox 13"/>
+          <p:cNvSpPr txBox="1"/>
+          <p:nvPr/>
+        </p:nvSpPr>
+        <p:spPr>
+          <a:xfrm>
+            <a:off x="7075170" y="5033010"/>
+            <a:ext cx="5051108" cy="531495"/>
+          </a:xfrm>
+          <a:prstGeom prst="rect">
+            <a:avLst/>
+          </a:prstGeom>
+          <a:noFill/>
+        </p:spPr>
+        <p:txBody>
+          <a:bodyPr wrap="square" lIns="0" rIns="0" tIns="0" bIns="0" anchor="t">
+            <a:spAutoFit/>
+          </a:bodyPr>
+          <a:lstStyle/>
+          <a:p>
+            <a:pPr algn="l">
+              <a:lnSpc>
+                <a:spcPts val="2160"/>
+              </a:lnSpc>
+            </a:pPr>
+            <a:r>
+              <a:rPr sz="1123" b="1">
+                <a:solidFill>
+                  <a:srgbClr val="8A97A5"/>
+                </a:solidFill>
+                <a:latin typeface="Zen Maru Gothic"/>
+                <a:ea typeface="Zen Maru Gothic"/>
+                <a:cs typeface="Zen Maru Gothic"/>
+              </a:rPr>
+              <a:t>同じページを開き直せば復帰できます。ただし開始後の途中参加はできません</a:t>
+            </a:r>
+          </a:p>
+        </p:txBody>
+      </p:sp>
+      <p:sp>
+        <p:nvSpPr>
+          <p:cNvPr id="15" name="TextBox 14"/>
           <p:cNvSpPr txBox="1"/>
           <p:nvPr/>
         </p:nvSpPr>
@@ -18017,7 +18498,7 @@
       </p:sp>
       <p:pic>
         <p:nvPicPr>
-          <p:cNvPr id="13" name="Picture 12" descr="995d0a3bd7.png"/>
+          <p:cNvPr id="16" name="Picture 15" descr="995d0a3bd7.png"/>
           <p:cNvPicPr>
             <a:picLocks noChangeAspect="1"/>
           </p:cNvPicPr>
@@ -18041,7 +18522,7 @@
       </p:pic>
       <p:pic>
         <p:nvPicPr>
-          <p:cNvPr id="14" name="Picture 13" descr="a3e3bfe91d.png"/>
+          <p:cNvPr id="17" name="Picture 16" descr="a3e3bfe91d.png"/>
           <p:cNvPicPr>
             <a:picLocks noChangeAspect="1"/>
           </p:cNvPicPr>
@@ -18065,7 +18546,7 @@
       </p:pic>
       <p:pic>
         <p:nvPicPr>
-          <p:cNvPr id="15" name="Picture 14" descr="1f11ed96ec.png"/>
+          <p:cNvPr id="18" name="Picture 17" descr="1f11ed96ec.png"/>
           <p:cNvPicPr>
             <a:picLocks noChangeAspect="1"/>
           </p:cNvPicPr>

--- a/slides.pptx
+++ b/slides.pptx
@@ -4868,21 +4868,19 @@
         </p:nvSpPr>
         <p:spPr>
           <a:xfrm>
-            <a:off x="548640" y="6277928"/>
-            <a:ext cx="4133850" cy="974408"/>
+            <a:off x="548640" y="6296978"/>
+            <a:ext cx="4133850" cy="955358"/>
           </a:xfrm>
           <a:prstGeom prst="roundRect">
             <a:avLst>
-              <a:gd name="adj" fmla="val 12668"/>
+              <a:gd name="adj" fmla="val 12921"/>
             </a:avLst>
           </a:prstGeom>
           <a:solidFill>
             <a:srgbClr val="FFFFFF"/>
           </a:solidFill>
-          <a:ln w="9525">
-            <a:solidFill>
-              <a:srgbClr val="E3EDF4"/>
-            </a:solidFill>
+          <a:ln>
+            <a:noFill/>
           </a:ln>
           <a:effectLst/>
         </p:spPr>
@@ -4914,21 +4912,19 @@
         </p:nvSpPr>
         <p:spPr>
           <a:xfrm>
-            <a:off x="4791075" y="6277928"/>
-            <a:ext cx="4133850" cy="974408"/>
+            <a:off x="4791075" y="6296978"/>
+            <a:ext cx="4133850" cy="955358"/>
           </a:xfrm>
           <a:prstGeom prst="roundRect">
             <a:avLst>
-              <a:gd name="adj" fmla="val 12668"/>
+              <a:gd name="adj" fmla="val 12921"/>
             </a:avLst>
           </a:prstGeom>
           <a:solidFill>
             <a:srgbClr val="FFFFFF"/>
           </a:solidFill>
-          <a:ln w="9525">
-            <a:solidFill>
-              <a:srgbClr val="E3EDF4"/>
-            </a:solidFill>
+          <a:ln>
+            <a:noFill/>
           </a:ln>
           <a:effectLst/>
         </p:spPr>
@@ -4960,21 +4956,19 @@
         </p:nvSpPr>
         <p:spPr>
           <a:xfrm>
-            <a:off x="9032558" y="6277928"/>
-            <a:ext cx="4133850" cy="974408"/>
+            <a:off x="9032558" y="6296978"/>
+            <a:ext cx="4133850" cy="955358"/>
           </a:xfrm>
           <a:prstGeom prst="roundRect">
             <a:avLst>
-              <a:gd name="adj" fmla="val 12668"/>
+              <a:gd name="adj" fmla="val 12921"/>
             </a:avLst>
           </a:prstGeom>
           <a:solidFill>
             <a:srgbClr val="FFFFFF"/>
           </a:solidFill>
-          <a:ln w="9525">
-            <a:solidFill>
-              <a:srgbClr val="E3EDF4"/>
-            </a:solidFill>
+          <a:ln>
+            <a:noFill/>
           </a:ln>
           <a:effectLst/>
         </p:spPr>
@@ -5014,8 +5008,8 @@
         </p:blipFill>
         <p:spPr>
           <a:xfrm>
-            <a:off x="385762" y="1027748"/>
-            <a:ext cx="6194108" cy="4801552"/>
+            <a:off x="385763" y="1503581"/>
+            <a:ext cx="6194107" cy="3868935"/>
           </a:xfrm>
           <a:prstGeom prst="rect">
             <a:avLst/>
@@ -5038,8 +5032,8 @@
         </p:blipFill>
         <p:spPr>
           <a:xfrm>
-            <a:off x="7136130" y="1027748"/>
-            <a:ext cx="6194108" cy="4801552"/>
+            <a:off x="7136130" y="1503581"/>
+            <a:ext cx="6194107" cy="3868935"/>
           </a:xfrm>
           <a:prstGeom prst="rect">
             <a:avLst/>
@@ -5095,7 +5089,7 @@
         </p:nvSpPr>
         <p:spPr>
           <a:xfrm>
-            <a:off x="2613660" y="5890260"/>
+            <a:off x="2613660" y="5909310"/>
             <a:ext cx="1738312" cy="320992"/>
           </a:xfrm>
           <a:prstGeom prst="rect">
@@ -5136,7 +5130,7 @@
         </p:nvSpPr>
         <p:spPr>
           <a:xfrm>
-            <a:off x="6417945" y="3312795"/>
+            <a:off x="6417945" y="3322320"/>
             <a:ext cx="880110" cy="612458"/>
           </a:xfrm>
           <a:prstGeom prst="rect">
@@ -5177,7 +5171,7 @@
         </p:nvSpPr>
         <p:spPr>
           <a:xfrm>
-            <a:off x="8702040" y="5890260"/>
+            <a:off x="8702040" y="5909310"/>
             <a:ext cx="3062288" cy="320992"/>
           </a:xfrm>
           <a:prstGeom prst="rect">
@@ -5218,7 +5212,7 @@
         </p:nvSpPr>
         <p:spPr>
           <a:xfrm>
-            <a:off x="712470" y="6647498"/>
+            <a:off x="702945" y="6657022"/>
             <a:ext cx="3196590" cy="257175"/>
           </a:xfrm>
           <a:prstGeom prst="rect">
@@ -5259,8 +5253,8 @@
         </p:nvSpPr>
         <p:spPr>
           <a:xfrm>
-            <a:off x="960120" y="6372225"/>
-            <a:ext cx="3902392" cy="294322"/>
+            <a:off x="950595" y="6381750"/>
+            <a:ext cx="3921442" cy="294322"/>
           </a:xfrm>
           <a:prstGeom prst="rect">
             <a:avLst/>
@@ -5300,7 +5294,7 @@
         </p:nvSpPr>
         <p:spPr>
           <a:xfrm>
-            <a:off x="4954905" y="6647498"/>
+            <a:off x="4945380" y="6657022"/>
             <a:ext cx="4052888" cy="531495"/>
           </a:xfrm>
           <a:prstGeom prst="rect">
@@ -5341,8 +5335,8 @@
         </p:nvSpPr>
         <p:spPr>
           <a:xfrm>
-            <a:off x="5201602" y="6372225"/>
-            <a:ext cx="3902392" cy="294322"/>
+            <a:off x="5192078" y="6381750"/>
+            <a:ext cx="3921442" cy="294322"/>
           </a:xfrm>
           <a:prstGeom prst="rect">
             <a:avLst/>
@@ -5382,7 +5376,7 @@
         </p:nvSpPr>
         <p:spPr>
           <a:xfrm>
-            <a:off x="9196388" y="6647498"/>
+            <a:off x="9186862" y="6657022"/>
             <a:ext cx="3482340" cy="257175"/>
           </a:xfrm>
           <a:prstGeom prst="rect">
@@ -5423,8 +5417,8 @@
         </p:nvSpPr>
         <p:spPr>
           <a:xfrm>
-            <a:off x="9444038" y="6372225"/>
-            <a:ext cx="3902392" cy="294322"/>
+            <a:off x="9434512" y="6381750"/>
+            <a:ext cx="3921442" cy="294322"/>
           </a:xfrm>
           <a:prstGeom prst="rect">
             <a:avLst/>
@@ -5496,7 +5490,7 @@
         </p:blipFill>
         <p:spPr>
           <a:xfrm>
-            <a:off x="712470" y="6401752"/>
+            <a:off x="702945" y="6411278"/>
             <a:ext cx="178118" cy="178118"/>
           </a:xfrm>
           <a:prstGeom prst="rect">
@@ -5520,7 +5514,7 @@
         </p:blipFill>
         <p:spPr>
           <a:xfrm>
-            <a:off x="4954905" y="6401752"/>
+            <a:off x="4945380" y="6411278"/>
             <a:ext cx="178118" cy="178118"/>
           </a:xfrm>
           <a:prstGeom prst="rect">
@@ -5544,7 +5538,7 @@
         </p:blipFill>
         <p:spPr>
           <a:xfrm>
-            <a:off x="9196388" y="6401752"/>
+            <a:off x="9186862" y="6411278"/>
             <a:ext cx="178118" cy="178118"/>
           </a:xfrm>
           <a:prstGeom prst="rect">
@@ -5630,21 +5624,19 @@
         </p:nvSpPr>
         <p:spPr>
           <a:xfrm>
-            <a:off x="2985135" y="5645468"/>
-            <a:ext cx="7745730" cy="1606868"/>
+            <a:off x="2994660" y="5664518"/>
+            <a:ext cx="7726680" cy="1587818"/>
           </a:xfrm>
           <a:prstGeom prst="roundRect">
             <a:avLst>
-              <a:gd name="adj" fmla="val 12483"/>
+              <a:gd name="adj" fmla="val 12633"/>
             </a:avLst>
           </a:prstGeom>
           <a:solidFill>
             <a:srgbClr val="FFFFFF"/>
           </a:solidFill>
-          <a:ln w="9525">
-            <a:solidFill>
-              <a:srgbClr val="E3EDF4"/>
-            </a:solidFill>
+          <a:ln>
+            <a:noFill/>
           </a:ln>
           <a:effectLst/>
         </p:spPr>
@@ -5684,8 +5676,8 @@
         </p:blipFill>
         <p:spPr>
           <a:xfrm>
-            <a:off x="3260408" y="1027748"/>
-            <a:ext cx="7195185" cy="4494848"/>
+            <a:off x="3245168" y="1027880"/>
+            <a:ext cx="7225665" cy="4513632"/>
           </a:xfrm>
           <a:prstGeom prst="rect">
             <a:avLst/>
@@ -5741,8 +5733,8 @@
         </p:nvSpPr>
         <p:spPr>
           <a:xfrm>
-            <a:off x="2699385" y="5645468"/>
-            <a:ext cx="8317230" cy="1664018"/>
+            <a:off x="2708910" y="5664518"/>
+            <a:ext cx="8298180" cy="1644968"/>
           </a:xfrm>
           <a:prstGeom prst="rect">
             <a:avLst/>
@@ -5947,7 +5939,7 @@
         </p:nvSpPr>
         <p:spPr>
           <a:xfrm>
-            <a:off x="5246370" y="2389822"/>
+            <a:off x="5246370" y="2408872"/>
             <a:ext cx="3223260" cy="471488"/>
           </a:xfrm>
           <a:prstGeom prst="roundRect">
@@ -5991,21 +5983,19 @@
         </p:nvSpPr>
         <p:spPr>
           <a:xfrm>
-            <a:off x="1234440" y="3030855"/>
-            <a:ext cx="11247120" cy="933450"/>
+            <a:off x="1234440" y="3049905"/>
+            <a:ext cx="11247120" cy="914400"/>
           </a:xfrm>
           <a:prstGeom prst="roundRect">
             <a:avLst>
-              <a:gd name="adj" fmla="val 16530"/>
+              <a:gd name="adj" fmla="val 16875"/>
             </a:avLst>
           </a:prstGeom>
           <a:solidFill>
             <a:srgbClr val="FFFFFF"/>
           </a:solidFill>
-          <a:ln w="9525">
-            <a:solidFill>
-              <a:srgbClr val="E3EDF4"/>
-            </a:solidFill>
+          <a:ln>
+            <a:noFill/>
           </a:ln>
           <a:effectLst/>
         </p:spPr>
@@ -6037,7 +6027,7 @@
         </p:nvSpPr>
         <p:spPr>
           <a:xfrm>
-            <a:off x="1460182" y="3194685"/>
+            <a:off x="1450658" y="3204210"/>
             <a:ext cx="385762" cy="385762"/>
           </a:xfrm>
           <a:prstGeom prst="ellipse">
@@ -6080,20 +6070,18 @@
         <p:spPr>
           <a:xfrm>
             <a:off x="1234440" y="4103370"/>
-            <a:ext cx="11247120" cy="698182"/>
+            <a:ext cx="11247120" cy="679132"/>
           </a:xfrm>
           <a:prstGeom prst="roundRect">
             <a:avLst>
-              <a:gd name="adj" fmla="val 22100"/>
+              <a:gd name="adj" fmla="val 22720"/>
             </a:avLst>
           </a:prstGeom>
           <a:solidFill>
             <a:srgbClr val="FFFFFF"/>
           </a:solidFill>
-          <a:ln w="9525">
-            <a:solidFill>
-              <a:srgbClr val="E3EDF4"/>
-            </a:solidFill>
+          <a:ln>
+            <a:noFill/>
           </a:ln>
           <a:effectLst/>
         </p:spPr>
@@ -6125,7 +6113,7 @@
         </p:nvSpPr>
         <p:spPr>
           <a:xfrm>
-            <a:off x="1460182" y="4267200"/>
+            <a:off x="1450658" y="4257675"/>
             <a:ext cx="385762" cy="385762"/>
           </a:xfrm>
           <a:prstGeom prst="ellipse">
@@ -6167,7 +6155,7 @@
         </p:nvSpPr>
         <p:spPr>
           <a:xfrm>
-            <a:off x="5463540" y="2389822"/>
+            <a:off x="5463540" y="2408872"/>
             <a:ext cx="3291840" cy="528638"/>
           </a:xfrm>
           <a:prstGeom prst="rect">
@@ -6208,7 +6196,7 @@
         </p:nvSpPr>
         <p:spPr>
           <a:xfrm>
-            <a:off x="1460182" y="3194685"/>
+            <a:off x="1450658" y="3204210"/>
             <a:ext cx="728662" cy="442912"/>
           </a:xfrm>
           <a:prstGeom prst="rect">
@@ -6249,8 +6237,8 @@
         </p:nvSpPr>
         <p:spPr>
           <a:xfrm>
-            <a:off x="2015490" y="3179445"/>
-            <a:ext cx="10583228" cy="693420"/>
+            <a:off x="2005965" y="3188970"/>
+            <a:ext cx="10602278" cy="693420"/>
           </a:xfrm>
           <a:prstGeom prst="rect">
             <a:avLst/>
@@ -6323,7 +6311,7 @@
         </p:nvSpPr>
         <p:spPr>
           <a:xfrm>
-            <a:off x="1460182" y="4267200"/>
+            <a:off x="1450658" y="4257675"/>
             <a:ext cx="728662" cy="442912"/>
           </a:xfrm>
           <a:prstGeom prst="rect">
@@ -6364,8 +6352,8 @@
         </p:nvSpPr>
         <p:spPr>
           <a:xfrm>
-            <a:off x="2015490" y="4251960"/>
-            <a:ext cx="10583228" cy="375285"/>
+            <a:off x="2005965" y="4242435"/>
+            <a:ext cx="10602278" cy="375285"/>
           </a:xfrm>
           <a:prstGeom prst="rect">
             <a:avLst/>
@@ -6438,7 +6426,7 @@
         </p:nvSpPr>
         <p:spPr>
           <a:xfrm>
-            <a:off x="4103370" y="4971098"/>
+            <a:off x="4103370" y="4952048"/>
             <a:ext cx="5509260" cy="335280"/>
           </a:xfrm>
           <a:prstGeom prst="rect">
@@ -6487,7 +6475,7 @@
         </p:blipFill>
         <p:spPr>
           <a:xfrm>
-            <a:off x="5477828" y="2527935"/>
+            <a:off x="5477828" y="2546985"/>
             <a:ext cx="194310" cy="194310"/>
           </a:xfrm>
           <a:prstGeom prst="rect">
@@ -7522,21 +7510,19 @@
         </p:nvSpPr>
         <p:spPr>
           <a:xfrm>
-            <a:off x="548640" y="6277928"/>
-            <a:ext cx="4133850" cy="974408"/>
+            <a:off x="548640" y="6296978"/>
+            <a:ext cx="4133850" cy="955358"/>
           </a:xfrm>
           <a:prstGeom prst="roundRect">
             <a:avLst>
-              <a:gd name="adj" fmla="val 12668"/>
+              <a:gd name="adj" fmla="val 12921"/>
             </a:avLst>
           </a:prstGeom>
           <a:solidFill>
             <a:srgbClr val="FFFFFF"/>
           </a:solidFill>
-          <a:ln w="9525">
-            <a:solidFill>
-              <a:srgbClr val="E3EDF4"/>
-            </a:solidFill>
+          <a:ln>
+            <a:noFill/>
           </a:ln>
           <a:effectLst/>
         </p:spPr>
@@ -7568,21 +7554,19 @@
         </p:nvSpPr>
         <p:spPr>
           <a:xfrm>
-            <a:off x="4791075" y="6277928"/>
-            <a:ext cx="4133850" cy="974408"/>
+            <a:off x="4791075" y="6296978"/>
+            <a:ext cx="4133850" cy="955358"/>
           </a:xfrm>
           <a:prstGeom prst="roundRect">
             <a:avLst>
-              <a:gd name="adj" fmla="val 12668"/>
+              <a:gd name="adj" fmla="val 12921"/>
             </a:avLst>
           </a:prstGeom>
           <a:solidFill>
             <a:srgbClr val="FFFFFF"/>
           </a:solidFill>
-          <a:ln w="9525">
-            <a:solidFill>
-              <a:srgbClr val="E3EDF4"/>
-            </a:solidFill>
+          <a:ln>
+            <a:noFill/>
           </a:ln>
           <a:effectLst/>
         </p:spPr>
@@ -7614,21 +7598,19 @@
         </p:nvSpPr>
         <p:spPr>
           <a:xfrm>
-            <a:off x="9032558" y="6277928"/>
-            <a:ext cx="4133850" cy="974408"/>
+            <a:off x="9032558" y="6296978"/>
+            <a:ext cx="4133850" cy="955358"/>
           </a:xfrm>
           <a:prstGeom prst="roundRect">
             <a:avLst>
-              <a:gd name="adj" fmla="val 12668"/>
+              <a:gd name="adj" fmla="val 12921"/>
             </a:avLst>
           </a:prstGeom>
           <a:solidFill>
             <a:srgbClr val="FFFFFF"/>
           </a:solidFill>
-          <a:ln w="9525">
-            <a:solidFill>
-              <a:srgbClr val="E3EDF4"/>
-            </a:solidFill>
+          <a:ln>
+            <a:noFill/>
           </a:ln>
           <a:effectLst/>
         </p:spPr>
@@ -7668,8 +7650,8 @@
         </p:blipFill>
         <p:spPr>
           <a:xfrm>
-            <a:off x="2754630" y="1027748"/>
-            <a:ext cx="8207692" cy="5126355"/>
+            <a:off x="2739956" y="1027748"/>
+            <a:ext cx="8237041" cy="5145405"/>
           </a:xfrm>
           <a:prstGeom prst="rect">
             <a:avLst/>
@@ -7725,7 +7707,7 @@
         </p:nvSpPr>
         <p:spPr>
           <a:xfrm>
-            <a:off x="712470" y="6647498"/>
+            <a:off x="702945" y="6657022"/>
             <a:ext cx="3482340" cy="257175"/>
           </a:xfrm>
           <a:prstGeom prst="rect">
@@ -7766,8 +7748,8 @@
         </p:nvSpPr>
         <p:spPr>
           <a:xfrm>
-            <a:off x="960120" y="6372225"/>
-            <a:ext cx="3902392" cy="294322"/>
+            <a:off x="950595" y="6381750"/>
+            <a:ext cx="3921442" cy="294322"/>
           </a:xfrm>
           <a:prstGeom prst="rect">
             <a:avLst/>
@@ -7807,7 +7789,7 @@
         </p:nvSpPr>
         <p:spPr>
           <a:xfrm>
-            <a:off x="4954905" y="6647498"/>
+            <a:off x="4945380" y="6657022"/>
             <a:ext cx="3339465" cy="257175"/>
           </a:xfrm>
           <a:prstGeom prst="rect">
@@ -7848,8 +7830,8 @@
         </p:nvSpPr>
         <p:spPr>
           <a:xfrm>
-            <a:off x="5201602" y="6372225"/>
-            <a:ext cx="3902392" cy="294322"/>
+            <a:off x="5192078" y="6381750"/>
+            <a:ext cx="3921442" cy="294322"/>
           </a:xfrm>
           <a:prstGeom prst="rect">
             <a:avLst/>
@@ -7889,7 +7871,7 @@
         </p:nvSpPr>
         <p:spPr>
           <a:xfrm>
-            <a:off x="9196388" y="6647498"/>
+            <a:off x="9186862" y="6657022"/>
             <a:ext cx="4052888" cy="531495"/>
           </a:xfrm>
           <a:prstGeom prst="rect">
@@ -7930,8 +7912,8 @@
         </p:nvSpPr>
         <p:spPr>
           <a:xfrm>
-            <a:off x="9444038" y="6372225"/>
-            <a:ext cx="3902392" cy="294322"/>
+            <a:off x="9434512" y="6381750"/>
+            <a:ext cx="3921442" cy="294322"/>
           </a:xfrm>
           <a:prstGeom prst="rect">
             <a:avLst/>
@@ -8003,7 +7985,7 @@
         </p:blipFill>
         <p:spPr>
           <a:xfrm>
-            <a:off x="712470" y="6401752"/>
+            <a:off x="702945" y="6411278"/>
             <a:ext cx="178118" cy="178118"/>
           </a:xfrm>
           <a:prstGeom prst="rect">
@@ -8027,7 +8009,7 @@
         </p:blipFill>
         <p:spPr>
           <a:xfrm>
-            <a:off x="4954905" y="6401752"/>
+            <a:off x="4945380" y="6411278"/>
             <a:ext cx="178118" cy="178118"/>
           </a:xfrm>
           <a:prstGeom prst="rect">
@@ -8051,7 +8033,7 @@
         </p:blipFill>
         <p:spPr>
           <a:xfrm>
-            <a:off x="9196388" y="6401752"/>
+            <a:off x="9186862" y="6411278"/>
             <a:ext cx="178118" cy="178118"/>
           </a:xfrm>
           <a:prstGeom prst="rect">
@@ -8277,8 +8259,8 @@
         </p:blipFill>
         <p:spPr>
           <a:xfrm>
-            <a:off x="3298508" y="1027748"/>
-            <a:ext cx="7118032" cy="4446270"/>
+            <a:off x="3298610" y="1027748"/>
+            <a:ext cx="7117828" cy="4446270"/>
           </a:xfrm>
           <a:prstGeom prst="rect">
             <a:avLst/>
@@ -11173,7 +11155,7 @@
         </p:nvSpPr>
         <p:spPr>
           <a:xfrm>
-            <a:off x="5661660" y="1598295"/>
+            <a:off x="5661660" y="1607820"/>
             <a:ext cx="2393632" cy="471488"/>
           </a:xfrm>
           <a:prstGeom prst="roundRect">
@@ -11217,21 +11199,19 @@
         </p:nvSpPr>
         <p:spPr>
           <a:xfrm>
-            <a:off x="3291840" y="3618548"/>
-            <a:ext cx="1600200" cy="1010602"/>
+            <a:off x="3320415" y="3628072"/>
+            <a:ext cx="1581150" cy="991552"/>
           </a:xfrm>
           <a:prstGeom prst="roundRect">
             <a:avLst>
-              <a:gd name="adj" fmla="val 15268"/>
+              <a:gd name="adj" fmla="val 15561"/>
             </a:avLst>
           </a:prstGeom>
           <a:solidFill>
             <a:srgbClr val="FFFFFF"/>
           </a:solidFill>
-          <a:ln w="9525">
-            <a:solidFill>
-              <a:srgbClr val="E3EDF4"/>
-            </a:solidFill>
+          <a:ln>
+            <a:noFill/>
           </a:ln>
           <a:effectLst/>
         </p:spPr>
@@ -11263,21 +11243,19 @@
         </p:nvSpPr>
         <p:spPr>
           <a:xfrm>
-            <a:off x="5371148" y="3618548"/>
-            <a:ext cx="2426018" cy="1010602"/>
+            <a:off x="5380672" y="3628072"/>
+            <a:ext cx="2406968" cy="991552"/>
           </a:xfrm>
           <a:prstGeom prst="roundRect">
             <a:avLst>
-              <a:gd name="adj" fmla="val 15268"/>
+              <a:gd name="adj" fmla="val 15561"/>
             </a:avLst>
           </a:prstGeom>
           <a:solidFill>
             <a:srgbClr val="FFFFFF"/>
           </a:solidFill>
-          <a:ln w="9525">
-            <a:solidFill>
-              <a:srgbClr val="E3EDF4"/>
-            </a:solidFill>
+          <a:ln>
+            <a:noFill/>
           </a:ln>
           <a:effectLst/>
         </p:spPr>
@@ -11309,21 +11287,19 @@
         </p:nvSpPr>
         <p:spPr>
           <a:xfrm>
-            <a:off x="8275320" y="3618548"/>
-            <a:ext cx="2148840" cy="1010602"/>
+            <a:off x="8265795" y="3628072"/>
+            <a:ext cx="2129790" cy="991552"/>
           </a:xfrm>
           <a:prstGeom prst="roundRect">
             <a:avLst>
-              <a:gd name="adj" fmla="val 15268"/>
+              <a:gd name="adj" fmla="val 15561"/>
             </a:avLst>
           </a:prstGeom>
           <a:solidFill>
             <a:srgbClr val="FFFFFF"/>
           </a:solidFill>
-          <a:ln w="9525">
-            <a:solidFill>
-              <a:srgbClr val="E3EDF4"/>
-            </a:solidFill>
+          <a:ln>
+            <a:noFill/>
           </a:ln>
           <a:effectLst/>
         </p:spPr>
@@ -11355,7 +11331,7 @@
         </p:nvSpPr>
         <p:spPr>
           <a:xfrm>
-            <a:off x="4061460" y="5106352"/>
+            <a:off x="4061460" y="5096827"/>
             <a:ext cx="5594032" cy="54292"/>
           </a:xfrm>
           <a:prstGeom prst="rect">
@@ -11399,7 +11375,7 @@
         </p:nvSpPr>
         <p:spPr>
           <a:xfrm>
-            <a:off x="5962650" y="5520690"/>
+            <a:off x="5962650" y="5511165"/>
             <a:ext cx="2685098" cy="54292"/>
           </a:xfrm>
           <a:prstGeom prst="rect">
@@ -11443,7 +11419,7 @@
         </p:nvSpPr>
         <p:spPr>
           <a:xfrm>
-            <a:off x="5878830" y="1598295"/>
+            <a:off x="5878830" y="1607820"/>
             <a:ext cx="2462212" cy="528638"/>
           </a:xfrm>
           <a:prstGeom prst="rect">
@@ -11484,7 +11460,7 @@
         </p:nvSpPr>
         <p:spPr>
           <a:xfrm>
-            <a:off x="4369118" y="2239328"/>
+            <a:off x="4369118" y="2248852"/>
             <a:ext cx="4978718" cy="1266825"/>
           </a:xfrm>
           <a:prstGeom prst="rect">
@@ -11543,7 +11519,7 @@
         </p:nvSpPr>
         <p:spPr>
           <a:xfrm>
-            <a:off x="3247072" y="3820478"/>
+            <a:off x="3266122" y="3820478"/>
             <a:ext cx="1690688" cy="381000"/>
           </a:xfrm>
           <a:prstGeom prst="rect">
@@ -11584,7 +11560,7 @@
         </p:nvSpPr>
         <p:spPr>
           <a:xfrm>
-            <a:off x="3247072" y="4215765"/>
+            <a:off x="3266122" y="4215765"/>
             <a:ext cx="1690688" cy="306705"/>
           </a:xfrm>
           <a:prstGeom prst="rect">
@@ -11625,8 +11601,8 @@
         </p:nvSpPr>
         <p:spPr>
           <a:xfrm>
-            <a:off x="4714875" y="3618548"/>
-            <a:ext cx="833438" cy="1067752"/>
+            <a:off x="4724400" y="3628072"/>
+            <a:ext cx="833438" cy="1048702"/>
           </a:xfrm>
           <a:prstGeom prst="rect">
             <a:avLst/>
@@ -11748,8 +11724,8 @@
         </p:nvSpPr>
         <p:spPr>
           <a:xfrm>
-            <a:off x="7619048" y="3618548"/>
-            <a:ext cx="833438" cy="1067752"/>
+            <a:off x="7609522" y="3628072"/>
+            <a:ext cx="833438" cy="1048702"/>
           </a:xfrm>
           <a:prstGeom prst="rect">
             <a:avLst/>
@@ -11789,7 +11765,7 @@
         </p:nvSpPr>
         <p:spPr>
           <a:xfrm>
-            <a:off x="8503920" y="3820478"/>
+            <a:off x="8484870" y="3820478"/>
             <a:ext cx="1690688" cy="381000"/>
           </a:xfrm>
           <a:prstGeom prst="rect">
@@ -11830,7 +11806,7 @@
         </p:nvSpPr>
         <p:spPr>
           <a:xfrm>
-            <a:off x="8230552" y="4215765"/>
+            <a:off x="8211502" y="4215765"/>
             <a:ext cx="2238375" cy="306705"/>
           </a:xfrm>
           <a:prstGeom prst="rect">
@@ -11871,7 +11847,7 @@
         </p:nvSpPr>
         <p:spPr>
           <a:xfrm>
-            <a:off x="2992755" y="4798695"/>
+            <a:off x="2992755" y="4789170"/>
             <a:ext cx="7731442" cy="1298258"/>
           </a:xfrm>
           <a:prstGeom prst="rect">
@@ -11978,7 +11954,7 @@
         </p:blipFill>
         <p:spPr>
           <a:xfrm>
-            <a:off x="5893118" y="1736408"/>
+            <a:off x="5893118" y="1745932"/>
             <a:ext cx="194310" cy="194310"/>
           </a:xfrm>
           <a:prstGeom prst="rect">
@@ -12020,7 +11996,7 @@
         </p:nvSpPr>
         <p:spPr>
           <a:xfrm>
-            <a:off x="5350192" y="1435418"/>
+            <a:off x="5350192" y="1473518"/>
             <a:ext cx="3015615" cy="471488"/>
           </a:xfrm>
           <a:prstGeom prst="roundRect">
@@ -12064,21 +12040,19 @@
         </p:nvSpPr>
         <p:spPr>
           <a:xfrm>
-            <a:off x="1234440" y="2076450"/>
-            <a:ext cx="11247120" cy="698182"/>
+            <a:off x="1234440" y="2114550"/>
+            <a:ext cx="11247120" cy="679132"/>
           </a:xfrm>
           <a:prstGeom prst="roundRect">
             <a:avLst>
-              <a:gd name="adj" fmla="val 22100"/>
+              <a:gd name="adj" fmla="val 22720"/>
             </a:avLst>
           </a:prstGeom>
           <a:solidFill>
             <a:srgbClr val="FFFFFF"/>
           </a:solidFill>
-          <a:ln w="9525">
-            <a:solidFill>
-              <a:srgbClr val="E3EDF4"/>
-            </a:solidFill>
+          <a:ln>
+            <a:noFill/>
           </a:ln>
           <a:effectLst/>
         </p:spPr>
@@ -12110,7 +12084,7 @@
         </p:nvSpPr>
         <p:spPr>
           <a:xfrm>
-            <a:off x="1460182" y="2240280"/>
+            <a:off x="1450658" y="2268855"/>
             <a:ext cx="385762" cy="385762"/>
           </a:xfrm>
           <a:prstGeom prst="ellipse">
@@ -12152,21 +12126,19 @@
         </p:nvSpPr>
         <p:spPr>
           <a:xfrm>
-            <a:off x="1234440" y="2913698"/>
-            <a:ext cx="11247120" cy="933450"/>
+            <a:off x="1234440" y="2932748"/>
+            <a:ext cx="11247120" cy="914400"/>
           </a:xfrm>
           <a:prstGeom prst="roundRect">
             <a:avLst>
-              <a:gd name="adj" fmla="val 16530"/>
+              <a:gd name="adj" fmla="val 16875"/>
             </a:avLst>
           </a:prstGeom>
           <a:solidFill>
             <a:srgbClr val="FFFFFF"/>
           </a:solidFill>
-          <a:ln w="9525">
-            <a:solidFill>
-              <a:srgbClr val="E3EDF4"/>
-            </a:solidFill>
+          <a:ln>
+            <a:noFill/>
           </a:ln>
           <a:effectLst/>
         </p:spPr>
@@ -12198,7 +12170,7 @@
         </p:nvSpPr>
         <p:spPr>
           <a:xfrm>
-            <a:off x="1460182" y="3077528"/>
+            <a:off x="1450658" y="3087052"/>
             <a:ext cx="385762" cy="385762"/>
           </a:xfrm>
           <a:prstGeom prst="ellipse">
@@ -12241,20 +12213,18 @@
         <p:spPr>
           <a:xfrm>
             <a:off x="1234440" y="3985260"/>
-            <a:ext cx="11247120" cy="933450"/>
+            <a:ext cx="11247120" cy="914400"/>
           </a:xfrm>
           <a:prstGeom prst="roundRect">
             <a:avLst>
-              <a:gd name="adj" fmla="val 16530"/>
+              <a:gd name="adj" fmla="val 16875"/>
             </a:avLst>
           </a:prstGeom>
           <a:solidFill>
             <a:srgbClr val="FFFFFF"/>
           </a:solidFill>
-          <a:ln w="9525">
-            <a:solidFill>
-              <a:srgbClr val="E3EDF4"/>
-            </a:solidFill>
+          <a:ln>
+            <a:noFill/>
           </a:ln>
           <a:effectLst/>
         </p:spPr>
@@ -12286,7 +12256,7 @@
         </p:nvSpPr>
         <p:spPr>
           <a:xfrm>
-            <a:off x="1460182" y="4149090"/>
+            <a:off x="1450658" y="4139565"/>
             <a:ext cx="385762" cy="385762"/>
           </a:xfrm>
           <a:prstGeom prst="ellipse">
@@ -12328,21 +12298,19 @@
         </p:nvSpPr>
         <p:spPr>
           <a:xfrm>
-            <a:off x="1234440" y="5057775"/>
-            <a:ext cx="11247120" cy="698182"/>
+            <a:off x="1234440" y="5038725"/>
+            <a:ext cx="11247120" cy="679132"/>
           </a:xfrm>
           <a:prstGeom prst="roundRect">
             <a:avLst>
-              <a:gd name="adj" fmla="val 22100"/>
+              <a:gd name="adj" fmla="val 22720"/>
             </a:avLst>
           </a:prstGeom>
           <a:solidFill>
             <a:srgbClr val="FFFFFF"/>
           </a:solidFill>
-          <a:ln w="9525">
-            <a:solidFill>
-              <a:srgbClr val="E3EDF4"/>
-            </a:solidFill>
+          <a:ln>
+            <a:noFill/>
           </a:ln>
           <a:effectLst/>
         </p:spPr>
@@ -12374,7 +12342,7 @@
         </p:nvSpPr>
         <p:spPr>
           <a:xfrm>
-            <a:off x="1460182" y="5221605"/>
+            <a:off x="1450658" y="5193030"/>
             <a:ext cx="385762" cy="385762"/>
           </a:xfrm>
           <a:prstGeom prst="ellipse">
@@ -12416,7 +12384,7 @@
         </p:nvSpPr>
         <p:spPr>
           <a:xfrm>
-            <a:off x="5567362" y="1435418"/>
+            <a:off x="5567362" y="1473518"/>
             <a:ext cx="3084195" cy="528638"/>
           </a:xfrm>
           <a:prstGeom prst="rect">
@@ -12457,7 +12425,7 @@
         </p:nvSpPr>
         <p:spPr>
           <a:xfrm>
-            <a:off x="1460182" y="2240280"/>
+            <a:off x="1450658" y="2268855"/>
             <a:ext cx="728662" cy="442912"/>
           </a:xfrm>
           <a:prstGeom prst="rect">
@@ -12498,8 +12466,8 @@
         </p:nvSpPr>
         <p:spPr>
           <a:xfrm>
-            <a:off x="2015490" y="2225040"/>
-            <a:ext cx="10583228" cy="375285"/>
+            <a:off x="2005965" y="2253615"/>
+            <a:ext cx="10602278" cy="375285"/>
           </a:xfrm>
           <a:prstGeom prst="rect">
             <a:avLst/>
@@ -12561,7 +12529,7 @@
         </p:nvSpPr>
         <p:spPr>
           <a:xfrm>
-            <a:off x="1460182" y="3077528"/>
+            <a:off x="1450658" y="3087052"/>
             <a:ext cx="728662" cy="442912"/>
           </a:xfrm>
           <a:prstGeom prst="rect">
@@ -12602,8 +12570,8 @@
         </p:nvSpPr>
         <p:spPr>
           <a:xfrm>
-            <a:off x="2015490" y="3062288"/>
-            <a:ext cx="10583228" cy="693420"/>
+            <a:off x="2005965" y="3071812"/>
+            <a:ext cx="10602278" cy="693420"/>
           </a:xfrm>
           <a:prstGeom prst="rect">
             <a:avLst/>
@@ -12665,7 +12633,7 @@
         </p:nvSpPr>
         <p:spPr>
           <a:xfrm>
-            <a:off x="1460182" y="4149090"/>
+            <a:off x="1450658" y="4139565"/>
             <a:ext cx="728662" cy="442912"/>
           </a:xfrm>
           <a:prstGeom prst="rect">
@@ -12706,8 +12674,8 @@
         </p:nvSpPr>
         <p:spPr>
           <a:xfrm>
-            <a:off x="2015490" y="4133850"/>
-            <a:ext cx="10583228" cy="693420"/>
+            <a:off x="2005965" y="4124325"/>
+            <a:ext cx="10602278" cy="693420"/>
           </a:xfrm>
           <a:prstGeom prst="rect">
             <a:avLst/>
@@ -12780,7 +12748,7 @@
         </p:nvSpPr>
         <p:spPr>
           <a:xfrm>
-            <a:off x="1460182" y="5221605"/>
+            <a:off x="1450658" y="5193030"/>
             <a:ext cx="728662" cy="442912"/>
           </a:xfrm>
           <a:prstGeom prst="rect">
@@ -12821,8 +12789,8 @@
         </p:nvSpPr>
         <p:spPr>
           <a:xfrm>
-            <a:off x="2015490" y="5206365"/>
-            <a:ext cx="10583228" cy="375285"/>
+            <a:off x="2005965" y="5177790"/>
+            <a:ext cx="10602278" cy="375285"/>
           </a:xfrm>
           <a:prstGeom prst="rect">
             <a:avLst/>
@@ -12873,7 +12841,7 @@
         </p:nvSpPr>
         <p:spPr>
           <a:xfrm>
-            <a:off x="2259330" y="5925502"/>
+            <a:off x="2259330" y="5887402"/>
             <a:ext cx="9196388" cy="335280"/>
           </a:xfrm>
           <a:prstGeom prst="rect">
@@ -12922,7 +12890,7 @@
         </p:blipFill>
         <p:spPr>
           <a:xfrm>
-            <a:off x="5581650" y="1574482"/>
+            <a:off x="5581650" y="1612582"/>
             <a:ext cx="194310" cy="194310"/>
           </a:xfrm>
           <a:prstGeom prst="rect">
@@ -14750,7 +14718,7 @@
         </p:nvSpPr>
         <p:spPr>
           <a:xfrm>
-            <a:off x="5087302" y="1953578"/>
+            <a:off x="5087302" y="1963102"/>
             <a:ext cx="3541395" cy="471488"/>
           </a:xfrm>
           <a:prstGeom prst="roundRect">
@@ -14794,21 +14762,19 @@
         </p:nvSpPr>
         <p:spPr>
           <a:xfrm>
-            <a:off x="960120" y="2594610"/>
-            <a:ext cx="3808095" cy="2092642"/>
+            <a:off x="960120" y="2604135"/>
+            <a:ext cx="3808095" cy="2073592"/>
           </a:xfrm>
           <a:prstGeom prst="roundRect">
             <a:avLst>
-              <a:gd name="adj" fmla="val 8111"/>
+              <a:gd name="adj" fmla="val 8185"/>
             </a:avLst>
           </a:prstGeom>
           <a:solidFill>
             <a:srgbClr val="FFFFFF"/>
           </a:solidFill>
-          <a:ln w="9525">
-            <a:solidFill>
-              <a:srgbClr val="E3EDF4"/>
-            </a:solidFill>
+          <a:ln>
+            <a:noFill/>
           </a:ln>
           <a:effectLst/>
         </p:spPr>
@@ -14840,8 +14806,8 @@
         </p:nvSpPr>
         <p:spPr>
           <a:xfrm>
-            <a:off x="1154430" y="3873818"/>
-            <a:ext cx="3419475" cy="603885"/>
+            <a:off x="1144905" y="3873818"/>
+            <a:ext cx="3438525" cy="603885"/>
           </a:xfrm>
           <a:prstGeom prst="rect">
             <a:avLst/>
@@ -14882,21 +14848,19 @@
         </p:nvSpPr>
         <p:spPr>
           <a:xfrm>
-            <a:off x="4953952" y="2594610"/>
-            <a:ext cx="3808095" cy="2092642"/>
+            <a:off x="4953952" y="2604135"/>
+            <a:ext cx="3808095" cy="2073592"/>
           </a:xfrm>
           <a:prstGeom prst="roundRect">
             <a:avLst>
-              <a:gd name="adj" fmla="val 8111"/>
+              <a:gd name="adj" fmla="val 8185"/>
             </a:avLst>
           </a:prstGeom>
           <a:solidFill>
             <a:srgbClr val="FFFFFF"/>
           </a:solidFill>
-          <a:ln w="9525">
-            <a:solidFill>
-              <a:srgbClr val="E3EDF4"/>
-            </a:solidFill>
+          <a:ln>
+            <a:noFill/>
           </a:ln>
           <a:effectLst/>
         </p:spPr>
@@ -14928,8 +14892,8 @@
         </p:nvSpPr>
         <p:spPr>
           <a:xfrm>
-            <a:off x="5148262" y="3873818"/>
-            <a:ext cx="3419475" cy="603885"/>
+            <a:off x="5138738" y="3873818"/>
+            <a:ext cx="3438525" cy="603885"/>
           </a:xfrm>
           <a:prstGeom prst="rect">
             <a:avLst/>
@@ -14970,21 +14934,19 @@
         </p:nvSpPr>
         <p:spPr>
           <a:xfrm>
-            <a:off x="8946832" y="2594610"/>
-            <a:ext cx="3808095" cy="2092642"/>
+            <a:off x="8946832" y="2604135"/>
+            <a:ext cx="3808095" cy="2073592"/>
           </a:xfrm>
           <a:prstGeom prst="roundRect">
             <a:avLst>
-              <a:gd name="adj" fmla="val 8111"/>
+              <a:gd name="adj" fmla="val 8185"/>
             </a:avLst>
           </a:prstGeom>
           <a:solidFill>
             <a:srgbClr val="FFFFFF"/>
           </a:solidFill>
-          <a:ln w="9525">
-            <a:solidFill>
-              <a:srgbClr val="E3EDF4"/>
-            </a:solidFill>
+          <a:ln>
+            <a:noFill/>
           </a:ln>
           <a:effectLst/>
         </p:spPr>
@@ -15016,8 +14978,8 @@
         </p:nvSpPr>
         <p:spPr>
           <a:xfrm>
-            <a:off x="9142095" y="3873818"/>
-            <a:ext cx="3419475" cy="603885"/>
+            <a:off x="9132570" y="3873818"/>
+            <a:ext cx="3438525" cy="603885"/>
           </a:xfrm>
           <a:prstGeom prst="rect">
             <a:avLst/>
@@ -15058,7 +15020,7 @@
         </p:nvSpPr>
         <p:spPr>
           <a:xfrm>
-            <a:off x="6298882" y="5578792"/>
+            <a:off x="6298882" y="5569267"/>
             <a:ext cx="1343025" cy="54292"/>
           </a:xfrm>
           <a:prstGeom prst="rect">
@@ -15102,7 +15064,7 @@
         </p:nvSpPr>
         <p:spPr>
           <a:xfrm>
-            <a:off x="5304472" y="1953578"/>
+            <a:off x="5304472" y="1963102"/>
             <a:ext cx="3609975" cy="528638"/>
           </a:xfrm>
           <a:prstGeom prst="rect">
@@ -15143,8 +15105,8 @@
         </p:nvSpPr>
         <p:spPr>
           <a:xfrm>
-            <a:off x="1425892" y="2805112"/>
-            <a:ext cx="3490912" cy="390525"/>
+            <a:off x="1416368" y="2805112"/>
+            <a:ext cx="3509962" cy="390525"/>
           </a:xfrm>
           <a:prstGeom prst="rect">
             <a:avLst/>
@@ -15184,8 +15146,8 @@
         </p:nvSpPr>
         <p:spPr>
           <a:xfrm>
-            <a:off x="1154430" y="3230880"/>
-            <a:ext cx="3762375" cy="607695"/>
+            <a:off x="1144905" y="3230880"/>
+            <a:ext cx="3781425" cy="607695"/>
           </a:xfrm>
           <a:prstGeom prst="rect">
             <a:avLst/>
@@ -15225,8 +15187,8 @@
         </p:nvSpPr>
         <p:spPr>
           <a:xfrm>
-            <a:off x="1154430" y="3873818"/>
-            <a:ext cx="3762375" cy="661035"/>
+            <a:off x="1144905" y="3873818"/>
+            <a:ext cx="3781425" cy="661035"/>
           </a:xfrm>
           <a:prstGeom prst="rect">
             <a:avLst/>
@@ -15266,8 +15228,8 @@
         </p:nvSpPr>
         <p:spPr>
           <a:xfrm>
-            <a:off x="5419725" y="2805112"/>
-            <a:ext cx="3490912" cy="390525"/>
+            <a:off x="5410200" y="2805112"/>
+            <a:ext cx="3509962" cy="390525"/>
           </a:xfrm>
           <a:prstGeom prst="rect">
             <a:avLst/>
@@ -15307,8 +15269,8 @@
         </p:nvSpPr>
         <p:spPr>
           <a:xfrm>
-            <a:off x="5148262" y="3230880"/>
-            <a:ext cx="3762375" cy="607695"/>
+            <a:off x="5138738" y="3230880"/>
+            <a:ext cx="3781425" cy="607695"/>
           </a:xfrm>
           <a:prstGeom prst="rect">
             <a:avLst/>
@@ -15348,8 +15310,8 @@
         </p:nvSpPr>
         <p:spPr>
           <a:xfrm>
-            <a:off x="5148262" y="3873818"/>
-            <a:ext cx="3762375" cy="661035"/>
+            <a:off x="5138738" y="3873818"/>
+            <a:ext cx="3781425" cy="661035"/>
           </a:xfrm>
           <a:prstGeom prst="rect">
             <a:avLst/>
@@ -15389,8 +15351,8 @@
         </p:nvSpPr>
         <p:spPr>
           <a:xfrm>
-            <a:off x="9413558" y="2805112"/>
-            <a:ext cx="3490912" cy="390525"/>
+            <a:off x="9404032" y="2805112"/>
+            <a:ext cx="3509962" cy="390525"/>
           </a:xfrm>
           <a:prstGeom prst="rect">
             <a:avLst/>
@@ -15430,8 +15392,8 @@
         </p:nvSpPr>
         <p:spPr>
           <a:xfrm>
-            <a:off x="9142095" y="3230880"/>
-            <a:ext cx="3762375" cy="607695"/>
+            <a:off x="9132570" y="3230880"/>
+            <a:ext cx="3781425" cy="607695"/>
           </a:xfrm>
           <a:prstGeom prst="rect">
             <a:avLst/>
@@ -15471,8 +15433,8 @@
         </p:nvSpPr>
         <p:spPr>
           <a:xfrm>
-            <a:off x="9142095" y="3873818"/>
-            <a:ext cx="3762375" cy="661035"/>
+            <a:off x="9132570" y="3873818"/>
+            <a:ext cx="3781425" cy="661035"/>
           </a:xfrm>
           <a:prstGeom prst="rect">
             <a:avLst/>
@@ -15512,7 +15474,7 @@
         </p:nvSpPr>
         <p:spPr>
           <a:xfrm>
-            <a:off x="3998595" y="4857750"/>
+            <a:off x="3998595" y="4848225"/>
             <a:ext cx="5717858" cy="884872"/>
           </a:xfrm>
           <a:prstGeom prst="rect">
@@ -15601,7 +15563,7 @@
         </p:blipFill>
         <p:spPr>
           <a:xfrm>
-            <a:off x="5318760" y="2091690"/>
+            <a:off x="5318760" y="2101215"/>
             <a:ext cx="194310" cy="194310"/>
           </a:xfrm>
           <a:prstGeom prst="rect">
@@ -15625,7 +15587,7 @@
         </p:blipFill>
         <p:spPr>
           <a:xfrm>
-            <a:off x="1154430" y="2874645"/>
+            <a:off x="1144905" y="2874645"/>
             <a:ext cx="194310" cy="194310"/>
           </a:xfrm>
           <a:prstGeom prst="rect">
@@ -15649,7 +15611,7 @@
         </p:blipFill>
         <p:spPr>
           <a:xfrm>
-            <a:off x="5148262" y="2874645"/>
+            <a:off x="5138738" y="2874645"/>
             <a:ext cx="194310" cy="194310"/>
           </a:xfrm>
           <a:prstGeom prst="rect">
@@ -15673,7 +15635,7 @@
         </p:blipFill>
         <p:spPr>
           <a:xfrm>
-            <a:off x="9142095" y="2874645"/>
+            <a:off x="9132570" y="2874645"/>
             <a:ext cx="194310" cy="194310"/>
           </a:xfrm>
           <a:prstGeom prst="rect">
@@ -15715,7 +15677,7 @@
         </p:nvSpPr>
         <p:spPr>
           <a:xfrm>
-            <a:off x="5350192" y="1913572"/>
+            <a:off x="5350192" y="1923098"/>
             <a:ext cx="3015615" cy="471488"/>
           </a:xfrm>
           <a:prstGeom prst="roundRect">
@@ -15759,21 +15721,19 @@
         </p:nvSpPr>
         <p:spPr>
           <a:xfrm>
-            <a:off x="3521392" y="3934778"/>
-            <a:ext cx="6674168" cy="1343025"/>
+            <a:off x="3530918" y="3944302"/>
+            <a:ext cx="6655118" cy="1323975"/>
           </a:xfrm>
           <a:prstGeom prst="roundRect">
             <a:avLst>
-              <a:gd name="adj" fmla="val 14936"/>
+              <a:gd name="adj" fmla="val 15151"/>
             </a:avLst>
           </a:prstGeom>
           <a:solidFill>
             <a:srgbClr val="FFFFFF"/>
           </a:solidFill>
-          <a:ln w="9525">
-            <a:solidFill>
-              <a:srgbClr val="E3EDF4"/>
-            </a:solidFill>
+          <a:ln>
+            <a:noFill/>
           </a:ln>
           <a:effectLst/>
         </p:spPr>
@@ -15805,7 +15765,7 @@
         </p:nvSpPr>
         <p:spPr>
           <a:xfrm>
-            <a:off x="5567362" y="1913572"/>
+            <a:off x="5567362" y="1923098"/>
             <a:ext cx="3084195" cy="528638"/>
           </a:xfrm>
           <a:prstGeom prst="rect">
@@ -15846,7 +15806,7 @@
         </p:nvSpPr>
         <p:spPr>
           <a:xfrm>
-            <a:off x="2606040" y="2555558"/>
+            <a:off x="2606040" y="2565082"/>
             <a:ext cx="8503920" cy="1266825"/>
           </a:xfrm>
           <a:prstGeom prst="rect">
@@ -15905,8 +15865,8 @@
         </p:nvSpPr>
         <p:spPr>
           <a:xfrm>
-            <a:off x="3235642" y="3934778"/>
-            <a:ext cx="7245668" cy="1400175"/>
+            <a:off x="3245168" y="3944302"/>
+            <a:ext cx="7226618" cy="1381125"/>
           </a:xfrm>
           <a:prstGeom prst="rect">
             <a:avLst/>
@@ -16011,7 +15971,7 @@
         </p:nvSpPr>
         <p:spPr>
           <a:xfrm>
-            <a:off x="2946082" y="5446395"/>
+            <a:off x="2946082" y="5436870"/>
             <a:ext cx="7823835" cy="335280"/>
           </a:xfrm>
           <a:prstGeom prst="rect">
@@ -16060,7 +16020,7 @@
         </p:blipFill>
         <p:spPr>
           <a:xfrm>
-            <a:off x="5581650" y="2052638"/>
+            <a:off x="5581650" y="2062162"/>
             <a:ext cx="194310" cy="194310"/>
           </a:xfrm>
           <a:prstGeom prst="rect">
@@ -16242,8 +16202,8 @@
         </p:blipFill>
         <p:spPr>
           <a:xfrm>
-            <a:off x="411480" y="1027748"/>
-            <a:ext cx="4194810" cy="2262188"/>
+            <a:off x="1014047" y="1027748"/>
+            <a:ext cx="2989675" cy="2262188"/>
           </a:xfrm>
           <a:prstGeom prst="rect">
             <a:avLst/>
@@ -16266,8 +16226,8 @@
         </p:blipFill>
         <p:spPr>
           <a:xfrm>
-            <a:off x="4760595" y="1027748"/>
-            <a:ext cx="4194810" cy="2262188"/>
+            <a:off x="5363162" y="1027748"/>
+            <a:ext cx="2989675" cy="2262188"/>
           </a:xfrm>
           <a:prstGeom prst="rect">
             <a:avLst/>
@@ -16290,8 +16250,8 @@
         </p:blipFill>
         <p:spPr>
           <a:xfrm>
-            <a:off x="9109710" y="1027748"/>
-            <a:ext cx="4194810" cy="2262188"/>
+            <a:off x="9712277" y="1027748"/>
+            <a:ext cx="2989675" cy="2262188"/>
           </a:xfrm>
           <a:prstGeom prst="rect">
             <a:avLst/>
@@ -16314,8 +16274,8 @@
         </p:blipFill>
         <p:spPr>
           <a:xfrm>
-            <a:off x="411480" y="3703320"/>
-            <a:ext cx="4194810" cy="2262188"/>
+            <a:off x="1014047" y="3703320"/>
+            <a:ext cx="2989675" cy="2262188"/>
           </a:xfrm>
           <a:prstGeom prst="rect">
             <a:avLst/>
@@ -16338,8 +16298,8 @@
         </p:blipFill>
         <p:spPr>
           <a:xfrm>
-            <a:off x="4760595" y="3703320"/>
-            <a:ext cx="4194810" cy="2262188"/>
+            <a:off x="5363162" y="3703320"/>
+            <a:ext cx="2989675" cy="2262188"/>
           </a:xfrm>
           <a:prstGeom prst="rect">
             <a:avLst/>
@@ -16362,8 +16322,8 @@
         </p:blipFill>
         <p:spPr>
           <a:xfrm>
-            <a:off x="9109710" y="3703320"/>
-            <a:ext cx="4194810" cy="2262188"/>
+            <a:off x="9712277" y="3703320"/>
+            <a:ext cx="2989675" cy="2262188"/>
           </a:xfrm>
           <a:prstGeom prst="rect">
             <a:avLst/>
@@ -17338,21 +17298,19 @@
         </p:nvSpPr>
         <p:spPr>
           <a:xfrm>
-            <a:off x="548640" y="6277928"/>
-            <a:ext cx="4133850" cy="974408"/>
+            <a:off x="548640" y="6296978"/>
+            <a:ext cx="4133850" cy="955358"/>
           </a:xfrm>
           <a:prstGeom prst="roundRect">
             <a:avLst>
-              <a:gd name="adj" fmla="val 12668"/>
+              <a:gd name="adj" fmla="val 12921"/>
             </a:avLst>
           </a:prstGeom>
           <a:solidFill>
             <a:srgbClr val="FFFFFF"/>
           </a:solidFill>
-          <a:ln w="9525">
-            <a:solidFill>
-              <a:srgbClr val="E3EDF4"/>
-            </a:solidFill>
+          <a:ln>
+            <a:noFill/>
           </a:ln>
           <a:effectLst/>
         </p:spPr>
@@ -17384,21 +17342,19 @@
         </p:nvSpPr>
         <p:spPr>
           <a:xfrm>
-            <a:off x="4791075" y="6277928"/>
-            <a:ext cx="4133850" cy="974408"/>
+            <a:off x="4791075" y="6296978"/>
+            <a:ext cx="4133850" cy="955358"/>
           </a:xfrm>
           <a:prstGeom prst="roundRect">
             <a:avLst>
-              <a:gd name="adj" fmla="val 12668"/>
+              <a:gd name="adj" fmla="val 12921"/>
             </a:avLst>
           </a:prstGeom>
           <a:solidFill>
             <a:srgbClr val="FFFFFF"/>
           </a:solidFill>
-          <a:ln w="9525">
-            <a:solidFill>
-              <a:srgbClr val="E3EDF4"/>
-            </a:solidFill>
+          <a:ln>
+            <a:noFill/>
           </a:ln>
           <a:effectLst/>
         </p:spPr>
@@ -17430,21 +17386,19 @@
         </p:nvSpPr>
         <p:spPr>
           <a:xfrm>
-            <a:off x="9032558" y="6277928"/>
-            <a:ext cx="4133850" cy="974408"/>
+            <a:off x="9032558" y="6296978"/>
+            <a:ext cx="4133850" cy="955358"/>
           </a:xfrm>
           <a:prstGeom prst="roundRect">
             <a:avLst>
-              <a:gd name="adj" fmla="val 12668"/>
+              <a:gd name="adj" fmla="val 12921"/>
             </a:avLst>
           </a:prstGeom>
           <a:solidFill>
             <a:srgbClr val="FFFFFF"/>
           </a:solidFill>
-          <a:ln w="9525">
-            <a:solidFill>
-              <a:srgbClr val="E3EDF4"/>
-            </a:solidFill>
+          <a:ln>
+            <a:noFill/>
           </a:ln>
           <a:effectLst/>
         </p:spPr>
@@ -17484,8 +17438,8 @@
         </p:blipFill>
         <p:spPr>
           <a:xfrm>
-            <a:off x="2756535" y="1027748"/>
-            <a:ext cx="8202930" cy="5126355"/>
+            <a:off x="2741676" y="1027748"/>
+            <a:ext cx="8232648" cy="5145405"/>
           </a:xfrm>
           <a:prstGeom prst="rect">
             <a:avLst/>
@@ -17541,8 +17495,8 @@
         </p:nvSpPr>
         <p:spPr>
           <a:xfrm>
-            <a:off x="712470" y="6647498"/>
-            <a:ext cx="4023360" cy="531495"/>
+            <a:off x="702945" y="6657022"/>
+            <a:ext cx="4166235" cy="531495"/>
           </a:xfrm>
           <a:prstGeom prst="rect">
             <a:avLst/>
@@ -17582,8 +17536,8 @@
         </p:nvSpPr>
         <p:spPr>
           <a:xfrm>
-            <a:off x="960120" y="6372225"/>
-            <a:ext cx="3902392" cy="294322"/>
+            <a:off x="950595" y="6381750"/>
+            <a:ext cx="3921442" cy="294322"/>
           </a:xfrm>
           <a:prstGeom prst="rect">
             <a:avLst/>
@@ -17623,7 +17577,7 @@
         </p:nvSpPr>
         <p:spPr>
           <a:xfrm>
-            <a:off x="4954905" y="6647498"/>
+            <a:off x="4945380" y="6657022"/>
             <a:ext cx="4123372" cy="531495"/>
           </a:xfrm>
           <a:prstGeom prst="rect">
@@ -17664,8 +17618,8 @@
         </p:nvSpPr>
         <p:spPr>
           <a:xfrm>
-            <a:off x="5201602" y="6372225"/>
-            <a:ext cx="3902392" cy="294322"/>
+            <a:off x="5192078" y="6381750"/>
+            <a:ext cx="3921442" cy="294322"/>
           </a:xfrm>
           <a:prstGeom prst="rect">
             <a:avLst/>
@@ -17705,7 +17659,7 @@
         </p:nvSpPr>
         <p:spPr>
           <a:xfrm>
-            <a:off x="9196388" y="6647498"/>
+            <a:off x="9186862" y="6657022"/>
             <a:ext cx="4090988" cy="531495"/>
           </a:xfrm>
           <a:prstGeom prst="rect">
@@ -17746,8 +17700,8 @@
         </p:nvSpPr>
         <p:spPr>
           <a:xfrm>
-            <a:off x="9444038" y="6372225"/>
-            <a:ext cx="3902392" cy="294322"/>
+            <a:off x="9434512" y="6381750"/>
+            <a:ext cx="3921442" cy="294322"/>
           </a:xfrm>
           <a:prstGeom prst="rect">
             <a:avLst/>
@@ -17819,7 +17773,7 @@
         </p:blipFill>
         <p:spPr>
           <a:xfrm>
-            <a:off x="712470" y="6401752"/>
+            <a:off x="702945" y="6411278"/>
             <a:ext cx="178118" cy="178118"/>
           </a:xfrm>
           <a:prstGeom prst="rect">
@@ -17843,7 +17797,7 @@
         </p:blipFill>
         <p:spPr>
           <a:xfrm>
-            <a:off x="4954905" y="6401752"/>
+            <a:off x="4945380" y="6411278"/>
             <a:ext cx="178118" cy="178118"/>
           </a:xfrm>
           <a:prstGeom prst="rect">
@@ -17867,7 +17821,7 @@
         </p:blipFill>
         <p:spPr>
           <a:xfrm>
-            <a:off x="9196388" y="6401752"/>
+            <a:off x="9186862" y="6411278"/>
             <a:ext cx="178118" cy="178118"/>
           </a:xfrm>
           <a:prstGeom prst="rect">
@@ -17909,7 +17863,7 @@
         </p:nvSpPr>
         <p:spPr>
           <a:xfrm>
-            <a:off x="4832032" y="2000250"/>
+            <a:off x="4832032" y="2009775"/>
             <a:ext cx="4052888" cy="471488"/>
           </a:xfrm>
           <a:prstGeom prst="roundRect">
@@ -17953,58 +17907,12 @@
         </p:nvSpPr>
         <p:spPr>
           <a:xfrm>
-            <a:off x="4477702" y="2642235"/>
+            <a:off x="4477702" y="2651760"/>
             <a:ext cx="1851660" cy="1851660"/>
           </a:xfrm>
           <a:prstGeom prst="roundRect">
             <a:avLst>
               <a:gd name="adj" fmla="val 8333"/>
-            </a:avLst>
-          </a:prstGeom>
-          <a:solidFill>
-            <a:srgbClr val="FFFFFF"/>
-          </a:solidFill>
-          <a:ln w="9525">
-            <a:solidFill>
-              <a:srgbClr val="E3EDF4"/>
-            </a:solidFill>
-          </a:ln>
-          <a:effectLst/>
-        </p:spPr>
-        <p:style>
-          <a:lnRef idx="1">
-            <a:schemeClr val="accent1"/>
-          </a:lnRef>
-          <a:fillRef idx="3">
-            <a:schemeClr val="accent1"/>
-          </a:fillRef>
-          <a:effectRef idx="2">
-            <a:schemeClr val="accent1"/>
-          </a:effectRef>
-          <a:fontRef idx="minor">
-            <a:schemeClr val="lt1"/>
-          </a:fontRef>
-        </p:style>
-        <p:txBody>
-          <a:bodyPr rtlCol="0" anchor="ctr"/>
-          <a:lstStyle/>
-          <a:p/>
-        </p:txBody>
-      </p:sp>
-      <p:sp>
-        <p:nvSpPr>
-          <p:cNvPr id="4" name="Rounded Rectangle 3"/>
-          <p:cNvSpPr/>
-          <p:nvPr/>
-        </p:nvSpPr>
-        <p:spPr>
-          <a:xfrm>
-            <a:off x="6598920" y="3020378"/>
-            <a:ext cx="2638425" cy="769620"/>
-          </a:xfrm>
-          <a:prstGeom prst="roundRect">
-            <a:avLst>
-              <a:gd name="adj" fmla="val 20049"/>
             </a:avLst>
           </a:prstGeom>
           <a:solidFill>
@@ -18037,27 +17945,25 @@
       </p:sp>
       <p:sp>
         <p:nvSpPr>
-          <p:cNvPr id="5" name="Rounded Rectangle 4"/>
+          <p:cNvPr id="4" name="Rounded Rectangle 3"/>
           <p:cNvSpPr/>
           <p:nvPr/>
         </p:nvSpPr>
         <p:spPr>
           <a:xfrm>
-            <a:off x="1645920" y="4663440"/>
-            <a:ext cx="5157788" cy="974408"/>
+            <a:off x="6598920" y="3029902"/>
+            <a:ext cx="2638425" cy="769620"/>
           </a:xfrm>
           <a:prstGeom prst="roundRect">
             <a:avLst>
-              <a:gd name="adj" fmla="val 12668"/>
+              <a:gd name="adj" fmla="val 20049"/>
             </a:avLst>
           </a:prstGeom>
           <a:solidFill>
             <a:srgbClr val="FFFFFF"/>
           </a:solidFill>
-          <a:ln w="9525">
-            <a:solidFill>
-              <a:srgbClr val="E3EDF4"/>
-            </a:solidFill>
+          <a:ln>
+            <a:noFill/>
           </a:ln>
           <a:effectLst/>
         </p:spPr>
@@ -18083,27 +17989,25 @@
       </p:sp>
       <p:sp>
         <p:nvSpPr>
-          <p:cNvPr id="6" name="Rounded Rectangle 5"/>
+          <p:cNvPr id="5" name="Rounded Rectangle 4"/>
           <p:cNvSpPr/>
           <p:nvPr/>
         </p:nvSpPr>
         <p:spPr>
           <a:xfrm>
-            <a:off x="6912292" y="4663440"/>
-            <a:ext cx="5157788" cy="974408"/>
+            <a:off x="1645920" y="4672965"/>
+            <a:ext cx="5157788" cy="955358"/>
           </a:xfrm>
           <a:prstGeom prst="roundRect">
             <a:avLst>
-              <a:gd name="adj" fmla="val 12668"/>
+              <a:gd name="adj" fmla="val 12921"/>
             </a:avLst>
           </a:prstGeom>
           <a:solidFill>
             <a:srgbClr val="FFFFFF"/>
           </a:solidFill>
-          <a:ln w="9525">
-            <a:solidFill>
-              <a:srgbClr val="E3EDF4"/>
-            </a:solidFill>
+          <a:ln>
+            <a:noFill/>
           </a:ln>
           <a:effectLst/>
         </p:spPr>
@@ -18129,13 +18033,57 @@
       </p:sp>
       <p:sp>
         <p:nvSpPr>
+          <p:cNvPr id="6" name="Rounded Rectangle 5"/>
+          <p:cNvSpPr/>
+          <p:nvPr/>
+        </p:nvSpPr>
+        <p:spPr>
+          <a:xfrm>
+            <a:off x="6912292" y="4672965"/>
+            <a:ext cx="5157788" cy="955358"/>
+          </a:xfrm>
+          <a:prstGeom prst="roundRect">
+            <a:avLst>
+              <a:gd name="adj" fmla="val 12921"/>
+            </a:avLst>
+          </a:prstGeom>
+          <a:solidFill>
+            <a:srgbClr val="FFFFFF"/>
+          </a:solidFill>
+          <a:ln>
+            <a:noFill/>
+          </a:ln>
+          <a:effectLst/>
+        </p:spPr>
+        <p:style>
+          <a:lnRef idx="1">
+            <a:schemeClr val="accent1"/>
+          </a:lnRef>
+          <a:fillRef idx="3">
+            <a:schemeClr val="accent1"/>
+          </a:fillRef>
+          <a:effectRef idx="2">
+            <a:schemeClr val="accent1"/>
+          </a:effectRef>
+          <a:fontRef idx="minor">
+            <a:schemeClr val="lt1"/>
+          </a:fontRef>
+        </p:style>
+        <p:txBody>
+          <a:bodyPr rtlCol="0" anchor="ctr"/>
+          <a:lstStyle/>
+          <a:p/>
+        </p:txBody>
+      </p:sp>
+      <p:sp>
+        <p:nvSpPr>
           <p:cNvPr id="7" name="TextBox 6"/>
           <p:cNvSpPr txBox="1"/>
           <p:nvPr/>
         </p:nvSpPr>
         <p:spPr>
           <a:xfrm>
-            <a:off x="5049202" y="2000250"/>
+            <a:off x="5049202" y="2009775"/>
             <a:ext cx="4121468" cy="528638"/>
           </a:xfrm>
           <a:prstGeom prst="rect">
@@ -18176,7 +18124,7 @@
         </p:nvSpPr>
         <p:spPr>
           <a:xfrm>
-            <a:off x="4745355" y="3336608"/>
+            <a:off x="4745355" y="3346132"/>
             <a:ext cx="1317308" cy="257175"/>
           </a:xfrm>
           <a:prstGeom prst="rect">
@@ -18217,7 +18165,7 @@
         </p:nvSpPr>
         <p:spPr>
           <a:xfrm>
-            <a:off x="4770120" y="3586162"/>
+            <a:off x="4770120" y="3595688"/>
             <a:ext cx="1265872" cy="257175"/>
           </a:xfrm>
           <a:prstGeom prst="rect">
@@ -18258,7 +18206,7 @@
         </p:nvSpPr>
         <p:spPr>
           <a:xfrm>
-            <a:off x="6313170" y="3020378"/>
+            <a:off x="6313170" y="3029902"/>
             <a:ext cx="3209925" cy="826770"/>
           </a:xfrm>
           <a:prstGeom prst="rect">
@@ -18299,7 +18247,7 @@
         </p:nvSpPr>
         <p:spPr>
           <a:xfrm>
-            <a:off x="6313170" y="3850958"/>
+            <a:off x="6313170" y="3860482"/>
             <a:ext cx="3209925" cy="320992"/>
           </a:xfrm>
           <a:prstGeom prst="rect">
@@ -18340,7 +18288,7 @@
         </p:nvSpPr>
         <p:spPr>
           <a:xfrm>
-            <a:off x="1809750" y="5033010"/>
+            <a:off x="1800225" y="5033010"/>
             <a:ext cx="5051108" cy="531495"/>
           </a:xfrm>
           <a:prstGeom prst="rect">
@@ -18381,8 +18329,8 @@
         </p:nvSpPr>
         <p:spPr>
           <a:xfrm>
-            <a:off x="2057400" y="4757738"/>
-            <a:ext cx="4926330" cy="294322"/>
+            <a:off x="2047875" y="4757738"/>
+            <a:ext cx="4945380" cy="294322"/>
           </a:xfrm>
           <a:prstGeom prst="rect">
             <a:avLst/>
@@ -18422,7 +18370,7 @@
         </p:nvSpPr>
         <p:spPr>
           <a:xfrm>
-            <a:off x="7075170" y="5033010"/>
+            <a:off x="7065645" y="5033010"/>
             <a:ext cx="5051108" cy="531495"/>
           </a:xfrm>
           <a:prstGeom prst="rect">
@@ -18463,8 +18411,8 @@
         </p:nvSpPr>
         <p:spPr>
           <a:xfrm>
-            <a:off x="7322820" y="4757738"/>
-            <a:ext cx="4926330" cy="294322"/>
+            <a:off x="7313295" y="4757738"/>
+            <a:ext cx="4945380" cy="294322"/>
           </a:xfrm>
           <a:prstGeom prst="rect">
             <a:avLst/>
@@ -18512,7 +18460,7 @@
         </p:blipFill>
         <p:spPr>
           <a:xfrm>
-            <a:off x="5063490" y="2139315"/>
+            <a:off x="5063490" y="2148840"/>
             <a:ext cx="194310" cy="194310"/>
           </a:xfrm>
           <a:prstGeom prst="rect">
@@ -18536,7 +18484,7 @@
         </p:blipFill>
         <p:spPr>
           <a:xfrm>
-            <a:off x="1809750" y="4787265"/>
+            <a:off x="1800225" y="4787265"/>
             <a:ext cx="178118" cy="178118"/>
           </a:xfrm>
           <a:prstGeom prst="rect">
@@ -18560,7 +18508,7 @@
         </p:blipFill>
         <p:spPr>
           <a:xfrm>
-            <a:off x="7075170" y="4787265"/>
+            <a:off x="7065645" y="4787265"/>
             <a:ext cx="178118" cy="178118"/>
           </a:xfrm>
           <a:prstGeom prst="rect">
@@ -18698,8 +18646,8 @@
         </p:blipFill>
         <p:spPr>
           <a:xfrm>
-            <a:off x="2638425" y="1027748"/>
-            <a:ext cx="8438198" cy="5273992"/>
+            <a:off x="2638425" y="1027807"/>
+            <a:ext cx="8438198" cy="5273873"/>
           </a:xfrm>
           <a:prstGeom prst="rect">
             <a:avLst/>

--- a/slides.pptx
+++ b/slides.pptx
@@ -6,33 +6,33 @@
   </p:sldMasterIdLst>
   <p:sldIdLst>
     <p:sldId id="256" r:id="rId7"/>
-    <p:sldId id="257" r:id="rId8"/>
-    <p:sldId id="258" r:id="rId9"/>
-    <p:sldId id="259" r:id="rId10"/>
-    <p:sldId id="260" r:id="rId11"/>
-    <p:sldId id="261" r:id="rId12"/>
-    <p:sldId id="262" r:id="rId13"/>
-    <p:sldId id="263" r:id="rId14"/>
-    <p:sldId id="264" r:id="rId15"/>
-    <p:sldId id="265" r:id="rId16"/>
-    <p:sldId id="266" r:id="rId17"/>
-    <p:sldId id="267" r:id="rId18"/>
-    <p:sldId id="268" r:id="rId19"/>
-    <p:sldId id="269" r:id="rId20"/>
-    <p:sldId id="270" r:id="rId21"/>
-    <p:sldId id="271" r:id="rId22"/>
-    <p:sldId id="272" r:id="rId23"/>
-    <p:sldId id="273" r:id="rId24"/>
-    <p:sldId id="274" r:id="rId25"/>
-    <p:sldId id="275" r:id="rId26"/>
-    <p:sldId id="276" r:id="rId27"/>
-    <p:sldId id="277" r:id="rId28"/>
-    <p:sldId id="278" r:id="rId29"/>
-    <p:sldId id="279" r:id="rId30"/>
-    <p:sldId id="280" r:id="rId31"/>
-    <p:sldId id="281" r:id="rId32"/>
-    <p:sldId id="282" r:id="rId33"/>
-    <p:sldId id="283" r:id="rId34"/>
+    <p:sldId id="257" r:id="rId9"/>
+    <p:sldId id="258" r:id="rId10"/>
+    <p:sldId id="259" r:id="rId11"/>
+    <p:sldId id="260" r:id="rId12"/>
+    <p:sldId id="261" r:id="rId13"/>
+    <p:sldId id="262" r:id="rId14"/>
+    <p:sldId id="263" r:id="rId15"/>
+    <p:sldId id="264" r:id="rId16"/>
+    <p:sldId id="265" r:id="rId17"/>
+    <p:sldId id="266" r:id="rId18"/>
+    <p:sldId id="267" r:id="rId19"/>
+    <p:sldId id="268" r:id="rId20"/>
+    <p:sldId id="269" r:id="rId21"/>
+    <p:sldId id="270" r:id="rId22"/>
+    <p:sldId id="271" r:id="rId23"/>
+    <p:sldId id="272" r:id="rId24"/>
+    <p:sldId id="273" r:id="rId25"/>
+    <p:sldId id="274" r:id="rId26"/>
+    <p:sldId id="275" r:id="rId27"/>
+    <p:sldId id="276" r:id="rId28"/>
+    <p:sldId id="277" r:id="rId29"/>
+    <p:sldId id="278" r:id="rId30"/>
+    <p:sldId id="279" r:id="rId31"/>
+    <p:sldId id="280" r:id="rId32"/>
+    <p:sldId id="281" r:id="rId33"/>
+    <p:sldId id="282" r:id="rId34"/>
+    <p:sldId id="283" r:id="rId35"/>
   </p:sldIdLst>
   <p:sldSz cx="13716000" cy="7724775" type="screen4x3"/>
   <p:notesSz cx="6858000" cy="9144000"/>
@@ -132,6 +132,3357 @@
     </a:lvl9pPr>
   </p:defaultTextStyle>
 </p:presentation>
+</file>
+
+<file path=ppt/notesMasters/notesMaster1.xml><?xml version="1.0" encoding="utf-8"?>
+<p:notesMaster xmlns:a="http://schemas.openxmlformats.org/drawingml/2006/main" xmlns:p="http://schemas.openxmlformats.org/presentationml/2006/main" xmlns:r="http://schemas.openxmlformats.org/officeDocument/2006/relationships">
+  <p:cSld>
+    <p:bg>
+      <p:bgRef idx="1001">
+        <a:schemeClr val="bg1"/>
+      </p:bgRef>
+    </p:bg>
+    <p:spTree>
+      <p:nvGrpSpPr>
+        <p:cNvPr id="1" name=""/>
+        <p:cNvGrpSpPr/>
+        <p:nvPr/>
+      </p:nvGrpSpPr>
+      <p:grpSpPr>
+        <a:xfrm>
+          <a:off x="0" y="0"/>
+          <a:ext cx="0" cy="0"/>
+          <a:chOff x="0" y="0"/>
+          <a:chExt cx="0" cy="0"/>
+        </a:xfrm>
+      </p:grpSpPr>
+      <p:sp>
+        <p:nvSpPr>
+          <p:cNvPr id="2" name="Header Placeholder 1"/>
+          <p:cNvSpPr>
+            <a:spLocks noGrp="1"/>
+          </p:cNvSpPr>
+          <p:nvPr>
+            <p:ph type="hdr" sz="quarter"/>
+          </p:nvPr>
+        </p:nvSpPr>
+        <p:spPr>
+          <a:xfrm>
+            <a:off x="0" y="0"/>
+            <a:ext cx="2971800" cy="457200"/>
+          </a:xfrm>
+          <a:prstGeom prst="rect">
+            <a:avLst/>
+          </a:prstGeom>
+        </p:spPr>
+        <p:txBody>
+          <a:bodyPr vert="horz" lIns="91440" tIns="45720" rIns="91440" bIns="45720" rtlCol="0"/>
+          <a:lstStyle>
+            <a:lvl1pPr algn="l">
+              <a:defRPr sz="1200"/>
+            </a:lvl1pPr>
+          </a:lstStyle>
+          <a:p>
+            <a:endParaRPr lang="en-US"/>
+          </a:p>
+        </p:txBody>
+      </p:sp>
+      <p:sp>
+        <p:nvSpPr>
+          <p:cNvPr id="3" name="Date Placeholder 2"/>
+          <p:cNvSpPr>
+            <a:spLocks noGrp="1"/>
+          </p:cNvSpPr>
+          <p:nvPr>
+            <p:ph type="dt" idx="1"/>
+          </p:nvPr>
+        </p:nvSpPr>
+        <p:spPr>
+          <a:xfrm>
+            <a:off x="3884613" y="0"/>
+            <a:ext cx="2971800" cy="457200"/>
+          </a:xfrm>
+          <a:prstGeom prst="rect">
+            <a:avLst/>
+          </a:prstGeom>
+        </p:spPr>
+        <p:txBody>
+          <a:bodyPr vert="horz" lIns="91440" tIns="45720" rIns="91440" bIns="45720" rtlCol="0"/>
+          <a:lstStyle>
+            <a:lvl1pPr algn="r">
+              <a:defRPr sz="1200"/>
+            </a:lvl1pPr>
+          </a:lstStyle>
+          <a:p>
+            <a:fld id="{0F89C1C7-3DCD-1040-A9CF-14679D8B5DDD}" type="datetimeFigureOut">
+              <a:rPr lang="en-US" smtClean="0"/>
+              <a:t>10/17/16</a:t>
+            </a:fld>
+            <a:endParaRPr lang="en-US"/>
+          </a:p>
+        </p:txBody>
+      </p:sp>
+      <p:sp>
+        <p:nvSpPr>
+          <p:cNvPr id="4" name="Slide Image Placeholder 3"/>
+          <p:cNvSpPr>
+            <a:spLocks noGrp="1" noRot="1" noChangeAspect="1"/>
+          </p:cNvSpPr>
+          <p:nvPr>
+            <p:ph type="sldImg" idx="2"/>
+          </p:nvPr>
+        </p:nvSpPr>
+        <p:spPr>
+          <a:xfrm>
+            <a:off x="1143000" y="685800"/>
+            <a:ext cx="4572000" cy="3429000"/>
+          </a:xfrm>
+          <a:prstGeom prst="rect">
+            <a:avLst/>
+          </a:prstGeom>
+          <a:noFill/>
+          <a:ln w="12700">
+            <a:solidFill>
+              <a:prstClr val="black"/>
+            </a:solidFill>
+          </a:ln>
+        </p:spPr>
+        <p:txBody>
+          <a:bodyPr vert="horz" lIns="91440" tIns="45720" rIns="91440" bIns="45720" rtlCol="0" anchor="ctr"/>
+          <a:lstStyle/>
+          <a:p>
+            <a:endParaRPr lang="en-US"/>
+          </a:p>
+        </p:txBody>
+      </p:sp>
+      <p:sp>
+        <p:nvSpPr>
+          <p:cNvPr id="5" name="Notes Placeholder 4"/>
+          <p:cNvSpPr>
+            <a:spLocks noGrp="1"/>
+          </p:cNvSpPr>
+          <p:nvPr>
+            <p:ph type="body" sz="quarter" idx="3"/>
+          </p:nvPr>
+        </p:nvSpPr>
+        <p:spPr>
+          <a:xfrm>
+            <a:off x="685800" y="4343400"/>
+            <a:ext cx="5486400" cy="4114800"/>
+          </a:xfrm>
+          <a:prstGeom prst="rect">
+            <a:avLst/>
+          </a:prstGeom>
+        </p:spPr>
+        <p:txBody>
+          <a:bodyPr vert="horz" lIns="91440" tIns="45720" rIns="91440" bIns="45720" rtlCol="0"/>
+          <a:lstStyle/>
+          <a:p>
+            <a:pPr lvl="0"/>
+            <a:r>
+              <a:rPr lang="en-US" smtClean="0"/>
+              <a:t>Click to edit Master text styles</a:t>
+            </a:r>
+          </a:p>
+          <a:p>
+            <a:pPr lvl="1"/>
+            <a:r>
+              <a:rPr lang="en-US" smtClean="0"/>
+              <a:t>Second level</a:t>
+            </a:r>
+          </a:p>
+          <a:p>
+            <a:pPr lvl="2"/>
+            <a:r>
+              <a:rPr lang="en-US" smtClean="0"/>
+              <a:t>Third level</a:t>
+            </a:r>
+          </a:p>
+          <a:p>
+            <a:pPr lvl="3"/>
+            <a:r>
+              <a:rPr lang="en-US" smtClean="0"/>
+              <a:t>Fourth level</a:t>
+            </a:r>
+          </a:p>
+          <a:p>
+            <a:pPr lvl="4"/>
+            <a:r>
+              <a:rPr lang="en-US" smtClean="0"/>
+              <a:t>Fifth level</a:t>
+            </a:r>
+            <a:endParaRPr lang="en-US"/>
+          </a:p>
+        </p:txBody>
+      </p:sp>
+      <p:sp>
+        <p:nvSpPr>
+          <p:cNvPr id="6" name="Footer Placeholder 5"/>
+          <p:cNvSpPr>
+            <a:spLocks noGrp="1"/>
+          </p:cNvSpPr>
+          <p:nvPr>
+            <p:ph type="ftr" sz="quarter" idx="4"/>
+          </p:nvPr>
+        </p:nvSpPr>
+        <p:spPr>
+          <a:xfrm>
+            <a:off x="0" y="8685213"/>
+            <a:ext cx="2971800" cy="457200"/>
+          </a:xfrm>
+          <a:prstGeom prst="rect">
+            <a:avLst/>
+          </a:prstGeom>
+        </p:spPr>
+        <p:txBody>
+          <a:bodyPr vert="horz" lIns="91440" tIns="45720" rIns="91440" bIns="45720" rtlCol="0" anchor="b"/>
+          <a:lstStyle>
+            <a:lvl1pPr algn="l">
+              <a:defRPr sz="1200"/>
+            </a:lvl1pPr>
+          </a:lstStyle>
+          <a:p>
+            <a:endParaRPr lang="en-US"/>
+          </a:p>
+        </p:txBody>
+      </p:sp>
+      <p:sp>
+        <p:nvSpPr>
+          <p:cNvPr id="7" name="Slide Number Placeholder 6"/>
+          <p:cNvSpPr>
+            <a:spLocks noGrp="1"/>
+          </p:cNvSpPr>
+          <p:nvPr>
+            <p:ph type="sldNum" sz="quarter" idx="5"/>
+          </p:nvPr>
+        </p:nvSpPr>
+        <p:spPr>
+          <a:xfrm>
+            <a:off x="3884613" y="8685213"/>
+            <a:ext cx="2971800" cy="457200"/>
+          </a:xfrm>
+          <a:prstGeom prst="rect">
+            <a:avLst/>
+          </a:prstGeom>
+        </p:spPr>
+        <p:txBody>
+          <a:bodyPr vert="horz" lIns="91440" tIns="45720" rIns="91440" bIns="45720" rtlCol="0" anchor="b"/>
+          <a:lstStyle>
+            <a:lvl1pPr algn="r">
+              <a:defRPr sz="1200"/>
+            </a:lvl1pPr>
+          </a:lstStyle>
+          <a:p>
+            <a:fld id="{BB5E49A5-4136-284D-997B-48E1D791AD67}" type="slidenum">
+              <a:rPr lang="en-US" smtClean="0"/>
+              <a:t>‹#›</a:t>
+            </a:fld>
+            <a:endParaRPr lang="en-US"/>
+          </a:p>
+        </p:txBody>
+      </p:sp>
+    </p:spTree>
+    <p:extLst>
+      <p:ext uri="{BB962C8B-B14F-4D97-AF65-F5344CB8AC3E}">
+        <p14:creationId xmlns:p14="http://schemas.microsoft.com/office/powerpoint/2010/main" val="2623252185"/>
+      </p:ext>
+    </p:extLst>
+  </p:cSld>
+  <p:clrMap bg1="lt1" tx1="dk1" bg2="lt2" tx2="dk2" accent1="accent1" accent2="accent2" accent3="accent3" accent4="accent4" accent5="accent5" accent6="accent6" hlink="hlink" folHlink="folHlink"/>
+  <p:notesStyle>
+    <a:lvl1pPr marL="0" algn="l" defTabSz="457200" rtl="0" eaLnBrk="1" latinLnBrk="0" hangingPunct="1">
+      <a:defRPr sz="1200" kern="1200">
+        <a:solidFill>
+          <a:schemeClr val="tx1"/>
+        </a:solidFill>
+        <a:latin typeface="+mn-lt"/>
+        <a:ea typeface="+mn-ea"/>
+        <a:cs typeface="+mn-cs"/>
+      </a:defRPr>
+    </a:lvl1pPr>
+    <a:lvl2pPr marL="457200" algn="l" defTabSz="457200" rtl="0" eaLnBrk="1" latinLnBrk="0" hangingPunct="1">
+      <a:defRPr sz="1200" kern="1200">
+        <a:solidFill>
+          <a:schemeClr val="tx1"/>
+        </a:solidFill>
+        <a:latin typeface="+mn-lt"/>
+        <a:ea typeface="+mn-ea"/>
+        <a:cs typeface="+mn-cs"/>
+      </a:defRPr>
+    </a:lvl2pPr>
+    <a:lvl3pPr marL="914400" algn="l" defTabSz="457200" rtl="0" eaLnBrk="1" latinLnBrk="0" hangingPunct="1">
+      <a:defRPr sz="1200" kern="1200">
+        <a:solidFill>
+          <a:schemeClr val="tx1"/>
+        </a:solidFill>
+        <a:latin typeface="+mn-lt"/>
+        <a:ea typeface="+mn-ea"/>
+        <a:cs typeface="+mn-cs"/>
+      </a:defRPr>
+    </a:lvl3pPr>
+    <a:lvl4pPr marL="1371600" algn="l" defTabSz="457200" rtl="0" eaLnBrk="1" latinLnBrk="0" hangingPunct="1">
+      <a:defRPr sz="1200" kern="1200">
+        <a:solidFill>
+          <a:schemeClr val="tx1"/>
+        </a:solidFill>
+        <a:latin typeface="+mn-lt"/>
+        <a:ea typeface="+mn-ea"/>
+        <a:cs typeface="+mn-cs"/>
+      </a:defRPr>
+    </a:lvl4pPr>
+    <a:lvl5pPr marL="1828800" algn="l" defTabSz="457200" rtl="0" eaLnBrk="1" latinLnBrk="0" hangingPunct="1">
+      <a:defRPr sz="1200" kern="1200">
+        <a:solidFill>
+          <a:schemeClr val="tx1"/>
+        </a:solidFill>
+        <a:latin typeface="+mn-lt"/>
+        <a:ea typeface="+mn-ea"/>
+        <a:cs typeface="+mn-cs"/>
+      </a:defRPr>
+    </a:lvl5pPr>
+    <a:lvl6pPr marL="2286000" algn="l" defTabSz="457200" rtl="0" eaLnBrk="1" latinLnBrk="0" hangingPunct="1">
+      <a:defRPr sz="1200" kern="1200">
+        <a:solidFill>
+          <a:schemeClr val="tx1"/>
+        </a:solidFill>
+        <a:latin typeface="+mn-lt"/>
+        <a:ea typeface="+mn-ea"/>
+        <a:cs typeface="+mn-cs"/>
+      </a:defRPr>
+    </a:lvl6pPr>
+    <a:lvl7pPr marL="2743200" algn="l" defTabSz="457200" rtl="0" eaLnBrk="1" latinLnBrk="0" hangingPunct="1">
+      <a:defRPr sz="1200" kern="1200">
+        <a:solidFill>
+          <a:schemeClr val="tx1"/>
+        </a:solidFill>
+        <a:latin typeface="+mn-lt"/>
+        <a:ea typeface="+mn-ea"/>
+        <a:cs typeface="+mn-cs"/>
+      </a:defRPr>
+    </a:lvl7pPr>
+    <a:lvl8pPr marL="3200400" algn="l" defTabSz="457200" rtl="0" eaLnBrk="1" latinLnBrk="0" hangingPunct="1">
+      <a:defRPr sz="1200" kern="1200">
+        <a:solidFill>
+          <a:schemeClr val="tx1"/>
+        </a:solidFill>
+        <a:latin typeface="+mn-lt"/>
+        <a:ea typeface="+mn-ea"/>
+        <a:cs typeface="+mn-cs"/>
+      </a:defRPr>
+    </a:lvl8pPr>
+    <a:lvl9pPr marL="3657600" algn="l" defTabSz="457200" rtl="0" eaLnBrk="1" latinLnBrk="0" hangingPunct="1">
+      <a:defRPr sz="1200" kern="1200">
+        <a:solidFill>
+          <a:schemeClr val="tx1"/>
+        </a:solidFill>
+        <a:latin typeface="+mn-lt"/>
+        <a:ea typeface="+mn-ea"/>
+        <a:cs typeface="+mn-cs"/>
+      </a:defRPr>
+    </a:lvl9pPr>
+  </p:notesStyle>
+</p:notesMaster>
+</file>
+
+<file path=ppt/notesSlides/notesSlide1.xml><?xml version="1.0" encoding="utf-8"?>
+<p:notes xmlns:a="http://schemas.openxmlformats.org/drawingml/2006/main" xmlns:p="http://schemas.openxmlformats.org/presentationml/2006/main" xmlns:r="http://schemas.openxmlformats.org/officeDocument/2006/relationships">
+  <p:cSld>
+    <p:spTree>
+      <p:nvGrpSpPr>
+        <p:cNvPr id="1" name=""/>
+        <p:cNvGrpSpPr/>
+        <p:nvPr/>
+      </p:nvGrpSpPr>
+      <p:grpSpPr>
+        <a:xfrm>
+          <a:off x="0" y="0"/>
+          <a:ext cx="0" cy="0"/>
+          <a:chOff x="0" y="0"/>
+          <a:chExt cx="0" cy="0"/>
+        </a:xfrm>
+      </p:grpSpPr>
+      <p:sp>
+        <p:nvSpPr>
+          <p:cNvPr id="2" name="Slide Image Placeholder 1"/>
+          <p:cNvSpPr>
+            <a:spLocks noGrp="1"/>
+          </p:cNvSpPr>
+          <p:nvPr>
+            <p:ph type="sldImg" idx="2"/>
+          </p:nvPr>
+        </p:nvSpPr>
+        <p:spPr/>
+      </p:sp>
+      <p:sp>
+        <p:nvSpPr>
+          <p:cNvPr id="3" name="Notes Placeholder 2"/>
+          <p:cNvSpPr>
+            <a:spLocks noGrp="1"/>
+          </p:cNvSpPr>
+          <p:nvPr>
+            <p:ph type="body" idx="3" sz="quarter"/>
+          </p:nvPr>
+        </p:nvSpPr>
+        <p:spPr/>
+        <p:txBody>
+          <a:bodyPr/>
+          <a:lstStyle/>
+          <a:p>
+            <a:r>
+              <a:t>1. タイトル</a:t>
+            </a:r>
+          </a:p>
+          <a:p/>
+          <a:p>
+            <a:r>
+              <a:t>【開場中〜開始まで出しておく待機画面】</a:t>
+            </a:r>
+          </a:p>
+          <a:p/>
+          <a:p>
+            <a:r>
+              <a:t>こんにちは。今日はみなさんに、あるゲームを遊んでもらいます。</a:t>
+            </a:r>
+          </a:p>
+          <a:p>
+            <a:r>
+              <a:t>「トビラ せかい版」。世界のどこかに生まれて、6歳から25歳までの19年間を歩く人生ゲームです。</a:t>
+            </a:r>
+          </a:p>
+          <a:p>
+            <a:r>
+              <a:t>3〜4人のチームで、ひとり1台の端末を使います。プレイ時間は25分。</a:t>
+            </a:r>
+          </a:p>
+        </p:txBody>
+      </p:sp>
+      <p:sp>
+        <p:nvSpPr>
+          <p:cNvPr id="4" name="Slide Number Placeholder 3"/>
+          <p:cNvSpPr>
+            <a:spLocks noGrp="1"/>
+          </p:cNvSpPr>
+          <p:nvPr>
+            <p:ph type="sldNum" idx="5" sz="quarter"/>
+          </p:nvPr>
+        </p:nvSpPr>
+        <p:spPr/>
+      </p:sp>
+    </p:spTree>
+  </p:cSld>
+  <p:clrMapOvr>
+    <a:masterClrMapping/>
+  </p:clrMapOvr>
+</p:notes>
+</file>
+
+<file path=ppt/notesSlides/notesSlide10.xml><?xml version="1.0" encoding="utf-8"?>
+<p:notes xmlns:a="http://schemas.openxmlformats.org/drawingml/2006/main" xmlns:p="http://schemas.openxmlformats.org/presentationml/2006/main" xmlns:r="http://schemas.openxmlformats.org/officeDocument/2006/relationships">
+  <p:cSld>
+    <p:spTree>
+      <p:nvGrpSpPr>
+        <p:cNvPr id="1" name=""/>
+        <p:cNvGrpSpPr/>
+        <p:nvPr/>
+      </p:nvGrpSpPr>
+      <p:grpSpPr>
+        <a:xfrm>
+          <a:off x="0" y="0"/>
+          <a:ext cx="0" cy="0"/>
+          <a:chOff x="0" y="0"/>
+          <a:chExt cx="0" cy="0"/>
+        </a:xfrm>
+      </p:grpSpPr>
+      <p:sp>
+        <p:nvSpPr>
+          <p:cNvPr id="2" name="Slide Image Placeholder 1"/>
+          <p:cNvSpPr>
+            <a:spLocks noGrp="1"/>
+          </p:cNvSpPr>
+          <p:nvPr>
+            <p:ph type="sldImg" idx="2"/>
+          </p:nvPr>
+        </p:nvSpPr>
+        <p:spPr/>
+      </p:sp>
+      <p:sp>
+        <p:nvSpPr>
+          <p:cNvPr id="3" name="Notes Placeholder 2"/>
+          <p:cNvSpPr>
+            <a:spLocks noGrp="1"/>
+          </p:cNvSpPr>
+          <p:nvPr>
+            <p:ph type="body" idx="3" sz="quarter"/>
+          </p:nvPr>
+        </p:nvSpPr>
+        <p:spPr/>
+        <p:txBody>
+          <a:bodyPr/>
+          <a:lstStyle/>
+          <a:p>
+            <a:r>
+              <a:t>10. ゲームの流れ</a:t>
+            </a:r>
+          </a:p>
+          <a:p/>
+          <a:p>
+            <a:r>
+              <a:t>ここで一度、全体の形を見ておきます。くりかえすのは、この4つだけです。</a:t>
+            </a:r>
+          </a:p>
+          <a:p/>
+          <a:p>
+            <a:r>
+              <a:t>サイコロを転がす。止まったマスで、できごとが起きる。おかねと★まなびが動く。</a:t>
+            </a:r>
+          </a:p>
+          <a:p>
+            <a:r>
+              <a:t>それを25歳まで続けて、ゴールしたときの♥ハッピーで順位が決まります。</a:t>
+            </a:r>
+          </a:p>
+          <a:p/>
+          <a:p>
+            <a:r>
+              <a:t>おかねも★まなびも、それ自体は順位になりません。</a:t>
+            </a:r>
+          </a:p>
+          <a:p>
+            <a:r>
+              <a:t>何のためにためるのかは、あとで話します。</a:t>
+            </a:r>
+          </a:p>
+          <a:p/>
+          <a:p>
+            <a:r>
+              <a:t>【この1枚で形を見せておくと、次の「マスの種類」と「トビラ」が速くなる。</a:t>
+            </a:r>
+          </a:p>
+          <a:p>
+            <a:r>
+              <a:t>　盤面（9枚目）とマスの種類（11枚目）は、ここで駆け足にしてよい】</a:t>
+            </a:r>
+          </a:p>
+          <a:p>
+            <a:r>
+              <a:t>【♥が何かはここでは説明しない。14枚目で定義する】</a:t>
+            </a:r>
+          </a:p>
+        </p:txBody>
+      </p:sp>
+      <p:sp>
+        <p:nvSpPr>
+          <p:cNvPr id="4" name="Slide Number Placeholder 3"/>
+          <p:cNvSpPr>
+            <a:spLocks noGrp="1"/>
+          </p:cNvSpPr>
+          <p:nvPr>
+            <p:ph type="sldNum" idx="5" sz="quarter"/>
+          </p:nvPr>
+        </p:nvSpPr>
+        <p:spPr/>
+      </p:sp>
+    </p:spTree>
+  </p:cSld>
+  <p:clrMapOvr>
+    <a:masterClrMapping/>
+  </p:clrMapOvr>
+</p:notes>
+</file>
+
+<file path=ppt/notesSlides/notesSlide11.xml><?xml version="1.0" encoding="utf-8"?>
+<p:notes xmlns:a="http://schemas.openxmlformats.org/drawingml/2006/main" xmlns:p="http://schemas.openxmlformats.org/presentationml/2006/main" xmlns:r="http://schemas.openxmlformats.org/officeDocument/2006/relationships">
+  <p:cSld>
+    <p:spTree>
+      <p:nvGrpSpPr>
+        <p:cNvPr id="1" name=""/>
+        <p:cNvGrpSpPr/>
+        <p:nvPr/>
+      </p:nvGrpSpPr>
+      <p:grpSpPr>
+        <a:xfrm>
+          <a:off x="0" y="0"/>
+          <a:ext cx="0" cy="0"/>
+          <a:chOff x="0" y="0"/>
+          <a:chExt cx="0" cy="0"/>
+        </a:xfrm>
+      </p:grpSpPr>
+      <p:sp>
+        <p:nvSpPr>
+          <p:cNvPr id="2" name="Slide Image Placeholder 1"/>
+          <p:cNvSpPr>
+            <a:spLocks noGrp="1"/>
+          </p:cNvSpPr>
+          <p:nvPr>
+            <p:ph type="sldImg" idx="2"/>
+          </p:nvPr>
+        </p:nvSpPr>
+        <p:spPr/>
+      </p:sp>
+      <p:sp>
+        <p:nvSpPr>
+          <p:cNvPr id="3" name="Notes Placeholder 2"/>
+          <p:cNvSpPr>
+            <a:spLocks noGrp="1"/>
+          </p:cNvSpPr>
+          <p:nvPr>
+            <p:ph type="body" idx="3" sz="quarter"/>
+          </p:nvPr>
+        </p:nvSpPr>
+        <p:spPr/>
+        <p:txBody>
+          <a:bodyPr/>
+          <a:lstStyle/>
+          <a:p>
+            <a:r>
+              <a:t>11. マスの種類</a:t>
+            </a:r>
+          </a:p>
+          <a:p/>
+          <a:p>
+            <a:r>
+              <a:t>マスは6種類。</a:t>
+            </a:r>
+          </a:p>
+          <a:p>
+            <a:r>
+              <a:t>おしごとは収入。しゅっぴは支出。できごとはカードを1枚引く。まなびは自分への投資、0円でも学べます。</a:t>
+            </a:r>
+          </a:p>
+          <a:p>
+            <a:r>
+              <a:t>ピンクのトビラが人生の分岐点。19年間で6枚に出会います。</a:t>
+            </a:r>
+          </a:p>
+          <a:p>
+            <a:r>
+              <a:t>緑のはなしあいは22歳にひとつだけ。ゲームを止めて、チームで話すマスです。数字は変わりません。</a:t>
+            </a:r>
+          </a:p>
+          <a:p/>
+          <a:p>
+            <a:r>
+              <a:t>どのマスも、止まったら画面が出て、OKを押すと次の人の番になります。</a:t>
+            </a:r>
+          </a:p>
+          <a:p/>
+          <a:p>
+            <a:r>
+              <a:t>画面の右上に、「進行」「音」「あそびかた」「じぶんのカード」のボタンがあります。</a:t>
+            </a:r>
+          </a:p>
+          <a:p>
+            <a:r>
+              <a:t>音が出ます。うるさければ「音」で切ってください。</a:t>
+            </a:r>
+          </a:p>
+          <a:p>
+            <a:r>
+              <a:t>ルールを忘れたら「あそびかた」、自分のカードを見返すときは「じぶんのカード」です。</a:t>
+            </a:r>
+          </a:p>
+          <a:p/>
+          <a:p>
+            <a:r>
+              <a:t>【「進行」は進行役だけに出る。手番とばしや参加者を外す操作なので、参加者には説明しなくてよい】</a:t>
+            </a:r>
+          </a:p>
+          <a:p>
+            <a:r>
+              <a:t>【はなしあいは、いちばんにそこへ着いた人だけが止まる。止まらないチームが出るので、</a:t>
+            </a:r>
+          </a:p>
+          <a:p>
+            <a:r>
+              <a:t>　プレイ中に全体が22歳あたりに来たら、進行役が一度声をかけて手を止めさせると確実】</a:t>
+            </a:r>
+          </a:p>
+        </p:txBody>
+      </p:sp>
+      <p:sp>
+        <p:nvSpPr>
+          <p:cNvPr id="4" name="Slide Number Placeholder 3"/>
+          <p:cNvSpPr>
+            <a:spLocks noGrp="1"/>
+          </p:cNvSpPr>
+          <p:nvPr>
+            <p:ph type="sldNum" idx="5" sz="quarter"/>
+          </p:nvPr>
+        </p:nvSpPr>
+        <p:spPr/>
+      </p:sp>
+    </p:spTree>
+  </p:cSld>
+  <p:clrMapOvr>
+    <a:masterClrMapping/>
+  </p:clrMapOvr>
+</p:notes>
+</file>
+
+<file path=ppt/notesSlides/notesSlide12.xml><?xml version="1.0" encoding="utf-8"?>
+<p:notes xmlns:a="http://schemas.openxmlformats.org/drawingml/2006/main" xmlns:p="http://schemas.openxmlformats.org/presentationml/2006/main" xmlns:r="http://schemas.openxmlformats.org/officeDocument/2006/relationships">
+  <p:cSld>
+    <p:spTree>
+      <p:nvGrpSpPr>
+        <p:cNvPr id="1" name=""/>
+        <p:cNvGrpSpPr/>
+        <p:nvPr/>
+      </p:nvGrpSpPr>
+      <p:grpSpPr>
+        <a:xfrm>
+          <a:off x="0" y="0"/>
+          <a:ext cx="0" cy="0"/>
+          <a:chOff x="0" y="0"/>
+          <a:chExt cx="0" cy="0"/>
+        </a:xfrm>
+      </p:grpSpPr>
+      <p:sp>
+        <p:nvSpPr>
+          <p:cNvPr id="2" name="Slide Image Placeholder 1"/>
+          <p:cNvSpPr>
+            <a:spLocks noGrp="1"/>
+          </p:cNvSpPr>
+          <p:nvPr>
+            <p:ph type="sldImg" idx="2"/>
+          </p:nvPr>
+        </p:nvSpPr>
+        <p:spPr/>
+      </p:sp>
+      <p:sp>
+        <p:nvSpPr>
+          <p:cNvPr id="3" name="Notes Placeholder 2"/>
+          <p:cNvSpPr>
+            <a:spLocks noGrp="1"/>
+          </p:cNvSpPr>
+          <p:nvPr>
+            <p:ph type="body" idx="3" sz="quarter"/>
+          </p:nvPr>
+        </p:nvSpPr>
+        <p:spPr/>
+        <p:txBody>
+          <a:bodyPr/>
+          <a:lstStyle/>
+          <a:p>
+            <a:r>
+              <a:t>12. トビラとカギ ★ここが核心</a:t>
+            </a:r>
+          </a:p>
+          <a:p/>
+          <a:p>
+            <a:r>
+              <a:t>ここがこのゲームの核心です。トビラでは道を選びます。画面を見てください。</a:t>
+            </a:r>
+          </a:p>
+          <a:p/>
+          <a:p>
+            <a:r>
+              <a:t>まず左。選択肢には名前しか出ません。 どれにカギがいくつ必要かは、ここでは分かりません。</a:t>
+            </a:r>
+          </a:p>
+          <a:p/>
+          <a:p>
+            <a:r>
+              <a:t>ひとつ選ぶと、右の確認画面になります。</a:t>
+            </a:r>
+          </a:p>
+          <a:p>
+            <a:r>
+              <a:t>ここではじめてカギが出て、足りていれば開く。足りなければ——</a:t>
+            </a:r>
+          </a:p>
+          <a:p>
+            <a:r>
+              <a:t>「カギが足りない……このトビラは開かなかった」と出て、ほかのトビラを選び直すことになります。</a:t>
+            </a:r>
+          </a:p>
+          <a:p/>
+          <a:p>
+            <a:r>
+              <a:t>カギの要らない道は、いつでも必ず選べます。詰むことはありません。</a:t>
+            </a:r>
+          </a:p>
+          <a:p/>
+          <a:p>
+            <a:r>
+              <a:t>そしてもうひとつ。？？？。これはそもそも中身が見えない。</a:t>
+            </a:r>
+          </a:p>
+          <a:p>
+            <a:r>
+              <a:t>名前も分からないので、選ぶことすらできません。</a:t>
+            </a:r>
+          </a:p>
+          <a:p/>
+          <a:p>
+            <a:r>
+              <a:t>つまり——開けてみるまで、開くかどうか分からない。 これを覚えておいてください。</a:t>
+            </a:r>
+          </a:p>
+          <a:p/>
+          <a:p>
+            <a:r>
+              <a:t>【？？？が「なぜ見えないのか」はここでは説明しない。結果発表の種明かしが弱くなる】</a:t>
+            </a:r>
+          </a:p>
+          <a:p>
+            <a:r>
+              <a:t>【⚠️ トビラの選び方が2段階になった（2026-09-14 のゲーム更新）。</a:t>
+            </a:r>
+          </a:p>
+          <a:p>
+            <a:r>
+              <a:t>　以前のように一覧で🔒が見えることはもうない。「選んでから分かる」が新しい体験の芯】</a:t>
+            </a:r>
+          </a:p>
+        </p:txBody>
+      </p:sp>
+      <p:sp>
+        <p:nvSpPr>
+          <p:cNvPr id="4" name="Slide Number Placeholder 3"/>
+          <p:cNvSpPr>
+            <a:spLocks noGrp="1"/>
+          </p:cNvSpPr>
+          <p:nvPr>
+            <p:ph type="sldNum" idx="5" sz="quarter"/>
+          </p:nvPr>
+        </p:nvSpPr>
+        <p:spPr/>
+      </p:sp>
+    </p:spTree>
+  </p:cSld>
+  <p:clrMapOvr>
+    <a:masterClrMapping/>
+  </p:clrMapOvr>
+</p:notes>
+</file>
+
+<file path=ppt/notesSlides/notesSlide13.xml><?xml version="1.0" encoding="utf-8"?>
+<p:notes xmlns:a="http://schemas.openxmlformats.org/drawingml/2006/main" xmlns:p="http://schemas.openxmlformats.org/presentationml/2006/main" xmlns:r="http://schemas.openxmlformats.org/officeDocument/2006/relationships">
+  <p:cSld>
+    <p:spTree>
+      <p:nvGrpSpPr>
+        <p:cNvPr id="1" name=""/>
+        <p:cNvGrpSpPr/>
+        <p:nvPr/>
+      </p:nvGrpSpPr>
+      <p:grpSpPr>
+        <a:xfrm>
+          <a:off x="0" y="0"/>
+          <a:ext cx="0" cy="0"/>
+          <a:chOff x="0" y="0"/>
+          <a:chExt cx="0" cy="0"/>
+        </a:xfrm>
+      </p:grpSpPr>
+      <p:sp>
+        <p:nvSpPr>
+          <p:cNvPr id="2" name="Slide Image Placeholder 1"/>
+          <p:cNvSpPr>
+            <a:spLocks noGrp="1"/>
+          </p:cNvSpPr>
+          <p:nvPr>
+            <p:ph type="sldImg" idx="2"/>
+          </p:nvPr>
+        </p:nvSpPr>
+        <p:spPr/>
+      </p:sp>
+      <p:sp>
+        <p:nvSpPr>
+          <p:cNvPr id="3" name="Notes Placeholder 2"/>
+          <p:cNvSpPr>
+            <a:spLocks noGrp="1"/>
+          </p:cNvSpPr>
+          <p:nvPr>
+            <p:ph type="body" idx="3" sz="quarter"/>
+          </p:nvPr>
+        </p:nvSpPr>
+        <p:spPr/>
+        <p:txBody>
+          <a:bodyPr/>
+          <a:lstStyle/>
+          <a:p>
+            <a:r>
+              <a:t>13. 同じ★でも、入るお金がちがう</a:t>
+            </a:r>
+          </a:p>
+          <a:p/>
+          <a:p>
+            <a:r>
+              <a:t>おしごとのマスに止まると、この画面が出ます。計算はしなくていい——ゲームが自動で足します。</a:t>
+            </a:r>
+          </a:p>
+          <a:p/>
+          <a:p>
+            <a:r>
+              <a:t>見てほしいのは、入る金額が人によって違うことです。</a:t>
+            </a:r>
+          </a:p>
+          <a:p>
+            <a:r>
+              <a:t>日本や欧米で育つと、★1つが10万。ウガンダで育つと、★1つは5万。</a:t>
+            </a:r>
+          </a:p>
+          <a:p>
+            <a:r>
+              <a:t>はたらきはじめの基本給も、20万と10万で違います。</a:t>
+            </a:r>
+          </a:p>
+          <a:p/>
+          <a:p>
+            <a:r>
+              <a:t>この2つは生まれた場所で決まっていて、カードにも盤面にも出てきません。</a:t>
+            </a:r>
+          </a:p>
+          <a:p>
+            <a:r>
+              <a:t>同じマスに止まって、同じ★を持っていても、入るお金は違う。</a:t>
+            </a:r>
+          </a:p>
+          <a:p/>
+          <a:p>
+            <a:r>
+              <a:t>【⚠️ おしごとのマスは飛びこされやすく、35%の人は一度も止まらない（README「この副作用は承知のうえ」）。</a:t>
+            </a:r>
+          </a:p>
+          <a:p>
+            <a:r>
+              <a:t>　しかも 2026-09-14 にカードからも基本給が消えたので、このスライドとスライド5が唯一の情報源。</a:t>
+            </a:r>
+          </a:p>
+          <a:p>
+            <a:r>
+              <a:t>　この1枚は飛ばさない】</a:t>
+            </a:r>
+          </a:p>
+        </p:txBody>
+      </p:sp>
+      <p:sp>
+        <p:nvSpPr>
+          <p:cNvPr id="4" name="Slide Number Placeholder 3"/>
+          <p:cNvSpPr>
+            <a:spLocks noGrp="1"/>
+          </p:cNvSpPr>
+          <p:nvPr>
+            <p:ph type="sldNum" idx="5" sz="quarter"/>
+          </p:nvPr>
+        </p:nvSpPr>
+        <p:spPr/>
+      </p:sp>
+    </p:spTree>
+  </p:cSld>
+  <p:clrMapOvr>
+    <a:masterClrMapping/>
+  </p:clrMapOvr>
+</p:notes>
+</file>
+
+<file path=ppt/notesSlides/notesSlide14.xml><?xml version="1.0" encoding="utf-8"?>
+<p:notes xmlns:a="http://schemas.openxmlformats.org/drawingml/2006/main" xmlns:p="http://schemas.openxmlformats.org/presentationml/2006/main" xmlns:r="http://schemas.openxmlformats.org/officeDocument/2006/relationships">
+  <p:cSld>
+    <p:spTree>
+      <p:nvGrpSpPr>
+        <p:cNvPr id="1" name=""/>
+        <p:cNvGrpSpPr/>
+        <p:nvPr/>
+      </p:nvGrpSpPr>
+      <p:grpSpPr>
+        <a:xfrm>
+          <a:off x="0" y="0"/>
+          <a:ext cx="0" cy="0"/>
+          <a:chOff x="0" y="0"/>
+          <a:chExt cx="0" cy="0"/>
+        </a:xfrm>
+      </p:grpSpPr>
+      <p:sp>
+        <p:nvSpPr>
+          <p:cNvPr id="2" name="Slide Image Placeholder 1"/>
+          <p:cNvSpPr>
+            <a:spLocks noGrp="1"/>
+          </p:cNvSpPr>
+          <p:nvPr>
+            <p:ph type="sldImg" idx="2"/>
+          </p:nvPr>
+        </p:nvSpPr>
+        <p:spPr/>
+      </p:sp>
+      <p:sp>
+        <p:nvSpPr>
+          <p:cNvPr id="3" name="Notes Placeholder 2"/>
+          <p:cNvSpPr>
+            <a:spLocks noGrp="1"/>
+          </p:cNvSpPr>
+          <p:nvPr>
+            <p:ph type="body" idx="3" sz="quarter"/>
+          </p:nvPr>
+        </p:nvSpPr>
+        <p:spPr/>
+        <p:txBody>
+          <a:bodyPr/>
+          <a:lstStyle/>
+          <a:p>
+            <a:r>
+              <a:t>14. 奨学金と、順位</a:t>
+            </a:r>
+          </a:p>
+          <a:p/>
+          <a:p>
+            <a:r>
+              <a:t>お金が足りないとき、奨学金という道があります。総額48万の貸与型。</a:t>
+            </a:r>
+          </a:p>
+          <a:p>
+            <a:r>
+              <a:t>働くたびに6万ずつ返します。ただし——25歳では返し終わりません。</a:t>
+            </a:r>
+          </a:p>
+          <a:p/>
+          <a:p>
+            <a:r>
+              <a:t>最後に順位の話。順位を決めるのは、お金ではなく♥ハッピーの数です。</a:t>
+            </a:r>
+          </a:p>
+          <a:p>
+            <a:r>
+              <a:t>♥とは——人生の選択肢を多く持ち、自分の意思で選べた回数のこと。</a:t>
+            </a:r>
+          </a:p>
+          <a:p>
+            <a:r>
+              <a:t>おかねと★まなびは、そのための「カギ」。目的ではなく手段です。</a:t>
+            </a:r>
+          </a:p>
+          <a:p/>
+          <a:p>
+            <a:r>
+              <a:t>【⚠️「支援を知っている人は返済不要の奨学金に出会える」は言わないこと。</a:t>
+            </a:r>
+          </a:p>
+          <a:p>
+            <a:r>
+              <a:t>　人によって見えている選択肢がちがうことを事前に明かすと、種明かしと問い3が弱くなる】</a:t>
+            </a:r>
+          </a:p>
+        </p:txBody>
+      </p:sp>
+      <p:sp>
+        <p:nvSpPr>
+          <p:cNvPr id="4" name="Slide Number Placeholder 3"/>
+          <p:cNvSpPr>
+            <a:spLocks noGrp="1"/>
+          </p:cNvSpPr>
+          <p:nvPr>
+            <p:ph type="sldNum" idx="5" sz="quarter"/>
+          </p:nvPr>
+        </p:nvSpPr>
+        <p:spPr/>
+      </p:sp>
+    </p:spTree>
+  </p:cSld>
+  <p:clrMapOvr>
+    <a:masterClrMapping/>
+  </p:clrMapOvr>
+</p:notes>
+</file>
+
+<file path=ppt/notesSlides/notesSlide15.xml><?xml version="1.0" encoding="utf-8"?>
+<p:notes xmlns:a="http://schemas.openxmlformats.org/drawingml/2006/main" xmlns:p="http://schemas.openxmlformats.org/presentationml/2006/main" xmlns:r="http://schemas.openxmlformats.org/officeDocument/2006/relationships">
+  <p:cSld>
+    <p:spTree>
+      <p:nvGrpSpPr>
+        <p:cNvPr id="1" name=""/>
+        <p:cNvGrpSpPr/>
+        <p:nvPr/>
+      </p:nvGrpSpPr>
+      <p:grpSpPr>
+        <a:xfrm>
+          <a:off x="0" y="0"/>
+          <a:ext cx="0" cy="0"/>
+          <a:chOff x="0" y="0"/>
+          <a:chExt cx="0" cy="0"/>
+        </a:xfrm>
+      </p:grpSpPr>
+      <p:sp>
+        <p:nvSpPr>
+          <p:cNvPr id="2" name="Slide Image Placeholder 1"/>
+          <p:cNvSpPr>
+            <a:spLocks noGrp="1"/>
+          </p:cNvSpPr>
+          <p:nvPr>
+            <p:ph type="sldImg" idx="2"/>
+          </p:nvPr>
+        </p:nvSpPr>
+        <p:spPr/>
+      </p:sp>
+      <p:sp>
+        <p:nvSpPr>
+          <p:cNvPr id="3" name="Notes Placeholder 2"/>
+          <p:cNvSpPr>
+            <a:spLocks noGrp="1"/>
+          </p:cNvSpPr>
+          <p:nvPr>
+            <p:ph type="body" idx="3" sz="quarter"/>
+          </p:nvPr>
+        </p:nvSpPr>
+        <p:spPr/>
+        <p:txBody>
+          <a:bodyPr/>
+          <a:lstStyle/>
+          <a:p>
+            <a:r>
+              <a:t>15. プレイタイム</a:t>
+            </a:r>
+          </a:p>
+          <a:p/>
+          <a:p>
+            <a:r>
+              <a:t>では始めましょう。進行役の人、「ゲーム開始」を押してください。</a:t>
+            </a:r>
+          </a:p>
+          <a:p>
+            <a:r>
+              <a:t>カードが配られたら、まず自分のカードをよく読んでください。2〜3分とります。</a:t>
+            </a:r>
+          </a:p>
+          <a:p/>
+          <a:p>
+            <a:r>
+              <a:t>【スライドの「スタート」でタイマー開始。25分】</a:t>
+            </a:r>
+          </a:p>
+          <a:p>
+            <a:r>
+              <a:t>【スタッフは会場を回り、次を見る：】</a:t>
+            </a:r>
+          </a:p>
+          <a:p>
+            <a:r>
+              <a:t>- カードが配られたか／ひとりだけ入れていないチームがないか</a:t>
+            </a:r>
+          </a:p>
+          <a:p>
+            <a:r>
+              <a:t>- OKの押し忘れで止まっていないか（自分の番なのにサイコロが押せない＝前の人のOK待ち）</a:t>
+            </a:r>
+          </a:p>
+          <a:p>
+            <a:r>
+              <a:t>- ウガンダの遺児カードを引いた人の様子</a:t>
+            </a:r>
+          </a:p>
+          <a:p>
+            <a:r>
+              <a:t>- 全体が22歳あたりに来たら、「はなしあい」で一度手を止めるよう声をかける</a:t>
+            </a:r>
+          </a:p>
+          <a:p>
+            <a:r>
+              <a:t>- 早く終わったチーム → 結果画面の「ネタバラシ」「19年間のトビラ一覧」を先に見てもらう</a:t>
+            </a:r>
+          </a:p>
+          <a:p>
+            <a:r>
+              <a:t>- 遅れているチーム → 残り5分で声をかけ、サイコロを速く回してもらう</a:t>
+            </a:r>
+          </a:p>
+        </p:txBody>
+      </p:sp>
+      <p:sp>
+        <p:nvSpPr>
+          <p:cNvPr id="4" name="Slide Number Placeholder 3"/>
+          <p:cNvSpPr>
+            <a:spLocks noGrp="1"/>
+          </p:cNvSpPr>
+          <p:nvPr>
+            <p:ph type="sldNum" idx="5" sz="quarter"/>
+          </p:nvPr>
+        </p:nvSpPr>
+        <p:spPr/>
+      </p:sp>
+    </p:spTree>
+  </p:cSld>
+  <p:clrMapOvr>
+    <a:masterClrMapping/>
+  </p:clrMapOvr>
+</p:notes>
+</file>
+
+<file path=ppt/notesSlides/notesSlide16.xml><?xml version="1.0" encoding="utf-8"?>
+<p:notes xmlns:a="http://schemas.openxmlformats.org/drawingml/2006/main" xmlns:p="http://schemas.openxmlformats.org/presentationml/2006/main" xmlns:r="http://schemas.openxmlformats.org/officeDocument/2006/relationships">
+  <p:cSld>
+    <p:spTree>
+      <p:nvGrpSpPr>
+        <p:cNvPr id="1" name=""/>
+        <p:cNvGrpSpPr/>
+        <p:nvPr/>
+      </p:nvGrpSpPr>
+      <p:grpSpPr>
+        <a:xfrm>
+          <a:off x="0" y="0"/>
+          <a:ext cx="0" cy="0"/>
+          <a:chOff x="0" y="0"/>
+          <a:chExt cx="0" cy="0"/>
+        </a:xfrm>
+      </p:grpSpPr>
+      <p:sp>
+        <p:nvSpPr>
+          <p:cNvPr id="2" name="Slide Image Placeholder 1"/>
+          <p:cNvSpPr>
+            <a:spLocks noGrp="1"/>
+          </p:cNvSpPr>
+          <p:nvPr>
+            <p:ph type="sldImg" idx="2"/>
+          </p:nvPr>
+        </p:nvSpPr>
+        <p:spPr/>
+      </p:sp>
+      <p:sp>
+        <p:nvSpPr>
+          <p:cNvPr id="3" name="Notes Placeholder 2"/>
+          <p:cNvSpPr>
+            <a:spLocks noGrp="1"/>
+          </p:cNvSpPr>
+          <p:nvPr>
+            <p:ph type="body" idx="3" sz="quarter"/>
+          </p:nvPr>
+        </p:nvSpPr>
+        <p:spPr/>
+        <p:txBody>
+          <a:bodyPr/>
+          <a:lstStyle/>
+          <a:p>
+            <a:r>
+              <a:t>16. 結果を全員で見る（3分）</a:t>
+            </a:r>
+          </a:p>
+          <a:p/>
+          <a:p>
+            <a:r>
+              <a:t>全員ゴールしましたね。まず結果画面を見ていきます。</a:t>
+            </a:r>
+          </a:p>
+          <a:p/>
+          <a:p>
+            <a:r>
+              <a:t>順位は♥の数。同数なら残ったお金です。</a:t>
+            </a:r>
+          </a:p>
+          <a:p>
+            <a:r>
+              <a:t>そして家庭カードが公開されます。誰がどこに生まれていたのかが、ここで分かります。</a:t>
+            </a:r>
+          </a:p>
+          <a:p>
+            <a:r>
+              <a:t>「25歳のいま」——それぞれのエンディングを、声に出して読んでみてください。</a:t>
+            </a:r>
+          </a:p>
+          <a:p/>
+          <a:p>
+            <a:r>
+              <a:t>奨学金を借りた人は「まだ◯◯万のこっている」と出ているはずです。ゴールは、終わりではなかった。</a:t>
+            </a:r>
+          </a:p>
+          <a:p/>
+          <a:p>
+            <a:r>
+              <a:t>【順位発表は1分で流していい。エンディングの読み上げに時間を使わせる】</a:t>
+            </a:r>
+          </a:p>
+        </p:txBody>
+      </p:sp>
+      <p:sp>
+        <p:nvSpPr>
+          <p:cNvPr id="4" name="Slide Number Placeholder 3"/>
+          <p:cNvSpPr>
+            <a:spLocks noGrp="1"/>
+          </p:cNvSpPr>
+          <p:nvPr>
+            <p:ph type="sldNum" idx="5" sz="quarter"/>
+          </p:nvPr>
+        </p:nvSpPr>
+        <p:spPr/>
+      </p:sp>
+    </p:spTree>
+  </p:cSld>
+  <p:clrMapOvr>
+    <a:masterClrMapping/>
+  </p:clrMapOvr>
+</p:notes>
+</file>
+
+<file path=ppt/notesSlides/notesSlide17.xml><?xml version="1.0" encoding="utf-8"?>
+<p:notes xmlns:a="http://schemas.openxmlformats.org/drawingml/2006/main" xmlns:p="http://schemas.openxmlformats.org/presentationml/2006/main" xmlns:r="http://schemas.openxmlformats.org/officeDocument/2006/relationships">
+  <p:cSld>
+    <p:spTree>
+      <p:nvGrpSpPr>
+        <p:cNvPr id="1" name=""/>
+        <p:cNvGrpSpPr/>
+        <p:nvPr/>
+      </p:nvGrpSpPr>
+      <p:grpSpPr>
+        <a:xfrm>
+          <a:off x="0" y="0"/>
+          <a:ext cx="0" cy="0"/>
+          <a:chOff x="0" y="0"/>
+          <a:chExt cx="0" cy="0"/>
+        </a:xfrm>
+      </p:grpSpPr>
+      <p:sp>
+        <p:nvSpPr>
+          <p:cNvPr id="2" name="Slide Image Placeholder 1"/>
+          <p:cNvSpPr>
+            <a:spLocks noGrp="1"/>
+          </p:cNvSpPr>
+          <p:nvPr>
+            <p:ph type="sldImg" idx="2"/>
+          </p:nvPr>
+        </p:nvSpPr>
+        <p:spPr/>
+      </p:sp>
+      <p:sp>
+        <p:nvSpPr>
+          <p:cNvPr id="3" name="Notes Placeholder 2"/>
+          <p:cNvSpPr>
+            <a:spLocks noGrp="1"/>
+          </p:cNvSpPr>
+          <p:nvPr>
+            <p:ph type="body" idx="3" sz="quarter"/>
+          </p:nvPr>
+        </p:nvSpPr>
+        <p:spPr/>
+        <p:txBody>
+          <a:bodyPr/>
+          <a:lstStyle/>
+          <a:p>
+            <a:r>
+              <a:t>17. 誰が、どの扉を選んだのか（7分）</a:t>
+            </a:r>
+          </a:p>
+          <a:p/>
+          <a:p>
+            <a:r>
+              <a:t>次が、このゲームの本体です。</a:t>
+            </a:r>
+          </a:p>
+          <a:p>
+            <a:r>
+              <a:t>誰のネタバラシでも、自分の画面から開けます。 人に見せてもらう必要はありません。</a:t>
+            </a:r>
+          </a:p>
+          <a:p>
+            <a:r>
+              <a:t>まず自分のぶんを開いてください。19年間に出会った扉が、全部ならびます。</a:t>
+            </a:r>
+          </a:p>
+          <a:p/>
+          <a:p>
+            <a:r>
+              <a:t>えらんだもの、開けられたもの、カギが足りなかったもの——そして、</a:t>
+            </a:r>
+          </a:p>
+          <a:p>
+            <a:r>
+              <a:t>紫の行。これがゲーム中「？？？」だったものです。</a:t>
+            </a:r>
+          </a:p>
+          <a:p>
+            <a:r>
+              <a:t>本当は何だったのかが、ここで初めて分かります。</a:t>
+            </a:r>
+          </a:p>
+          <a:p/>
+          <a:p>
+            <a:r>
+              <a:t>結果画面に戻ると、ひとりずつ「見えていなかった ◯」という数字が出ています。</a:t>
+            </a:r>
+          </a:p>
+          <a:p>
+            <a:r>
+              <a:t>自分の数字を、声に出して読み上げてみてください。</a:t>
+            </a:r>
+          </a:p>
+          <a:p/>
+          <a:p>
+            <a:r>
+              <a:t>【ここに時間をいちばん使う。「見えていなかった◯枚」を全員が声に出すと、次の問い2がそのまま立つ】</a:t>
+            </a:r>
+          </a:p>
+          <a:p>
+            <a:r>
+              <a:t>【「誰のぶんでも開ける」を必ず言うこと。 言わないと参加者は自分のぶんしか見ない】</a:t>
+            </a:r>
+          </a:p>
+        </p:txBody>
+      </p:sp>
+      <p:sp>
+        <p:nvSpPr>
+          <p:cNvPr id="4" name="Slide Number Placeholder 3"/>
+          <p:cNvSpPr>
+            <a:spLocks noGrp="1"/>
+          </p:cNvSpPr>
+          <p:nvPr>
+            <p:ph type="sldNum" idx="5" sz="quarter"/>
+          </p:nvPr>
+        </p:nvSpPr>
+        <p:spPr/>
+      </p:sp>
+    </p:spTree>
+  </p:cSld>
+  <p:clrMapOvr>
+    <a:masterClrMapping/>
+  </p:clrMapOvr>
+</p:notes>
+</file>
+
+<file path=ppt/notesSlides/notesSlide18.xml><?xml version="1.0" encoding="utf-8"?>
+<p:notes xmlns:a="http://schemas.openxmlformats.org/drawingml/2006/main" xmlns:p="http://schemas.openxmlformats.org/presentationml/2006/main" xmlns:r="http://schemas.openxmlformats.org/officeDocument/2006/relationships">
+  <p:cSld>
+    <p:spTree>
+      <p:nvGrpSpPr>
+        <p:cNvPr id="1" name=""/>
+        <p:cNvGrpSpPr/>
+        <p:nvPr/>
+      </p:nvGrpSpPr>
+      <p:grpSpPr>
+        <a:xfrm>
+          <a:off x="0" y="0"/>
+          <a:ext cx="0" cy="0"/>
+          <a:chOff x="0" y="0"/>
+          <a:chExt cx="0" cy="0"/>
+        </a:xfrm>
+      </p:grpSpPr>
+      <p:sp>
+        <p:nvSpPr>
+          <p:cNvPr id="2" name="Slide Image Placeholder 1"/>
+          <p:cNvSpPr>
+            <a:spLocks noGrp="1"/>
+          </p:cNvSpPr>
+          <p:nvPr>
+            <p:ph type="sldImg" idx="2"/>
+          </p:nvPr>
+        </p:nvSpPr>
+        <p:spPr/>
+      </p:sp>
+      <p:sp>
+        <p:nvSpPr>
+          <p:cNvPr id="3" name="Notes Placeholder 2"/>
+          <p:cNvSpPr>
+            <a:spLocks noGrp="1"/>
+          </p:cNvSpPr>
+          <p:nvPr>
+            <p:ph type="body" idx="3" sz="quarter"/>
+          </p:nvPr>
+        </p:nvSpPr>
+        <p:spPr/>
+        <p:txBody>
+          <a:bodyPr/>
+          <a:lstStyle/>
+          <a:p>
+            <a:r>
+              <a:t>18. 問い1 — かせぎの差</a:t>
+            </a:r>
+          </a:p>
+          <a:p/>
+          <a:p>
+            <a:r>
+              <a:t>ここから5つ、問いを出します。正解はありません。話したくないことは話さなくて大丈夫です。</a:t>
+            </a:r>
+          </a:p>
+          <a:p/>
+          <a:p>
+            <a:r>
+              <a:t>ひとつめ。結果画面で、★の数が近い人を2人さがしてください。</a:t>
+            </a:r>
+          </a:p>
+          <a:p>
+            <a:r>
+              <a:t>おかねの増え方は、同じでしたか？</a:t>
+            </a:r>
+          </a:p>
+          <a:p>
+            <a:r>
+              <a:t>それは、本人の努力のちがいだろうか？</a:t>
+            </a:r>
+          </a:p>
+          <a:p/>
+          <a:p>
+            <a:r>
+              <a:t>【1問あたり3分弱。時間が押していたら問い4から削る。問い2と問い3は残す】</a:t>
+            </a:r>
+          </a:p>
+          <a:p>
+            <a:r>
+              <a:t>【引き出したい答え：基本給も★1つの値も生まれた場所で決まっていた。本人にはどうしようもなかった】</a:t>
+            </a:r>
+          </a:p>
+          <a:p>
+            <a:r>
+              <a:t>【⚠️ 数字はスライド5と12にしかない。基本給20万と10万、★1つ10万と5万を口頭で添えること。</a:t>
+            </a:r>
+          </a:p>
+          <a:p>
+            <a:r>
+              <a:t>　「家庭カードを思い出して」は言わない——2026-09-14 にカードから消えている】</a:t>
+            </a:r>
+          </a:p>
+        </p:txBody>
+      </p:sp>
+      <p:sp>
+        <p:nvSpPr>
+          <p:cNvPr id="4" name="Slide Number Placeholder 3"/>
+          <p:cNvSpPr>
+            <a:spLocks noGrp="1"/>
+          </p:cNvSpPr>
+          <p:nvPr>
+            <p:ph type="sldNum" idx="5" sz="quarter"/>
+          </p:nvPr>
+        </p:nvSpPr>
+        <p:spPr/>
+      </p:sp>
+    </p:spTree>
+  </p:cSld>
+  <p:clrMapOvr>
+    <a:masterClrMapping/>
+  </p:clrMapOvr>
+</p:notes>
+</file>
+
+<file path=ppt/notesSlides/notesSlide19.xml><?xml version="1.0" encoding="utf-8"?>
+<p:notes xmlns:a="http://schemas.openxmlformats.org/drawingml/2006/main" xmlns:p="http://schemas.openxmlformats.org/presentationml/2006/main" xmlns:r="http://schemas.openxmlformats.org/officeDocument/2006/relationships">
+  <p:cSld>
+    <p:spTree>
+      <p:nvGrpSpPr>
+        <p:cNvPr id="1" name=""/>
+        <p:cNvGrpSpPr/>
+        <p:nvPr/>
+      </p:nvGrpSpPr>
+      <p:grpSpPr>
+        <a:xfrm>
+          <a:off x="0" y="0"/>
+          <a:ext cx="0" cy="0"/>
+          <a:chOff x="0" y="0"/>
+          <a:chExt cx="0" cy="0"/>
+        </a:xfrm>
+      </p:grpSpPr>
+      <p:sp>
+        <p:nvSpPr>
+          <p:cNvPr id="2" name="Slide Image Placeholder 1"/>
+          <p:cNvSpPr>
+            <a:spLocks noGrp="1"/>
+          </p:cNvSpPr>
+          <p:nvPr>
+            <p:ph type="sldImg" idx="2"/>
+          </p:nvPr>
+        </p:nvSpPr>
+        <p:spPr/>
+      </p:sp>
+      <p:sp>
+        <p:nvSpPr>
+          <p:cNvPr id="3" name="Notes Placeholder 2"/>
+          <p:cNvSpPr>
+            <a:spLocks noGrp="1"/>
+          </p:cNvSpPr>
+          <p:nvPr>
+            <p:ph type="body" idx="3" sz="quarter"/>
+          </p:nvPr>
+        </p:nvSpPr>
+        <p:spPr/>
+        <p:txBody>
+          <a:bodyPr/>
+          <a:lstStyle/>
+          <a:p>
+            <a:r>
+              <a:t>19. 問い2 — 見えなかったトビラ</a:t>
+            </a:r>
+          </a:p>
+          <a:p/>
+          <a:p>
+            <a:r>
+              <a:t>自分のカードの「見えていなかった ◯」を読み上げてください。</a:t>
+            </a:r>
+          </a:p>
+          <a:p>
+            <a:r>
+              <a:t>チームで数字がちがいます。何がその差をつくったのでしょう。</a:t>
+            </a:r>
+          </a:p>
+          <a:p/>
+          <a:p>
+            <a:r>
+              <a:t>【結果画面の帯グラフ、紫の部分の数字。全員が自分の画面で読める】</a:t>
+            </a:r>
+          </a:p>
+          <a:p>
+            <a:r>
+              <a:t>【めぐまれた家庭にも見えなかった扉（支え合い系）がある。「見えない＝かわいそう」で終わらせない】</a:t>
+            </a:r>
+          </a:p>
+        </p:txBody>
+      </p:sp>
+      <p:sp>
+        <p:nvSpPr>
+          <p:cNvPr id="4" name="Slide Number Placeholder 3"/>
+          <p:cNvSpPr>
+            <a:spLocks noGrp="1"/>
+          </p:cNvSpPr>
+          <p:nvPr>
+            <p:ph type="sldNum" idx="5" sz="quarter"/>
+          </p:nvPr>
+        </p:nvSpPr>
+        <p:spPr/>
+      </p:sp>
+    </p:spTree>
+  </p:cSld>
+  <p:clrMapOvr>
+    <a:masterClrMapping/>
+  </p:clrMapOvr>
+</p:notes>
+</file>
+
+<file path=ppt/notesSlides/notesSlide2.xml><?xml version="1.0" encoding="utf-8"?>
+<p:notes xmlns:a="http://schemas.openxmlformats.org/drawingml/2006/main" xmlns:p="http://schemas.openxmlformats.org/presentationml/2006/main" xmlns:r="http://schemas.openxmlformats.org/officeDocument/2006/relationships">
+  <p:cSld>
+    <p:spTree>
+      <p:nvGrpSpPr>
+        <p:cNvPr id="1" name=""/>
+        <p:cNvGrpSpPr/>
+        <p:nvPr/>
+      </p:nvGrpSpPr>
+      <p:grpSpPr>
+        <a:xfrm>
+          <a:off x="0" y="0"/>
+          <a:ext cx="0" cy="0"/>
+          <a:chOff x="0" y="0"/>
+          <a:chExt cx="0" cy="0"/>
+        </a:xfrm>
+      </p:grpSpPr>
+      <p:sp>
+        <p:nvSpPr>
+          <p:cNvPr id="2" name="Slide Image Placeholder 1"/>
+          <p:cNvSpPr>
+            <a:spLocks noGrp="1"/>
+          </p:cNvSpPr>
+          <p:nvPr>
+            <p:ph type="sldImg" idx="2"/>
+          </p:nvPr>
+        </p:nvSpPr>
+        <p:spPr/>
+      </p:sp>
+      <p:sp>
+        <p:nvSpPr>
+          <p:cNvPr id="3" name="Notes Placeholder 2"/>
+          <p:cNvSpPr>
+            <a:spLocks noGrp="1"/>
+          </p:cNvSpPr>
+          <p:nvPr>
+            <p:ph type="body" idx="3" sz="quarter"/>
+          </p:nvPr>
+        </p:nvSpPr>
+        <p:spPr/>
+        <p:txBody>
+          <a:bodyPr/>
+          <a:lstStyle/>
+          <a:p>
+            <a:r>
+              <a:t>2. 今日の流れ（90分）</a:t>
+            </a:r>
+          </a:p>
+          <a:p/>
+          <a:p>
+            <a:r>
+              <a:t>流れです。まず12分で、このゲームが何を体験するものかを説明します。</a:t>
+            </a:r>
+          </a:p>
+          <a:p>
+            <a:r>
+              <a:t>ルール説明が11分、プレイが25分。そのあと27分かけて全員で振り返ります。</a:t>
+            </a:r>
+          </a:p>
+          <a:p>
+            <a:r>
+              <a:t>最後の15分は、みなさんに「つくる側」として意見をもらう時間です。</a:t>
+            </a:r>
+          </a:p>
+        </p:txBody>
+      </p:sp>
+      <p:sp>
+        <p:nvSpPr>
+          <p:cNvPr id="4" name="Slide Number Placeholder 3"/>
+          <p:cNvSpPr>
+            <a:spLocks noGrp="1"/>
+          </p:cNvSpPr>
+          <p:nvPr>
+            <p:ph type="sldNum" idx="5" sz="quarter"/>
+          </p:nvPr>
+        </p:nvSpPr>
+        <p:spPr/>
+      </p:sp>
+    </p:spTree>
+  </p:cSld>
+  <p:clrMapOvr>
+    <a:masterClrMapping/>
+  </p:clrMapOvr>
+</p:notes>
+</file>
+
+<file path=ppt/notesSlides/notesSlide20.xml><?xml version="1.0" encoding="utf-8"?>
+<p:notes xmlns:a="http://schemas.openxmlformats.org/drawingml/2006/main" xmlns:p="http://schemas.openxmlformats.org/presentationml/2006/main" xmlns:r="http://schemas.openxmlformats.org/officeDocument/2006/relationships">
+  <p:cSld>
+    <p:spTree>
+      <p:nvGrpSpPr>
+        <p:cNvPr id="1" name=""/>
+        <p:cNvGrpSpPr/>
+        <p:nvPr/>
+      </p:nvGrpSpPr>
+      <p:grpSpPr>
+        <a:xfrm>
+          <a:off x="0" y="0"/>
+          <a:ext cx="0" cy="0"/>
+          <a:chOff x="0" y="0"/>
+          <a:chExt cx="0" cy="0"/>
+        </a:xfrm>
+      </p:grpSpPr>
+      <p:sp>
+        <p:nvSpPr>
+          <p:cNvPr id="2" name="Slide Image Placeholder 1"/>
+          <p:cNvSpPr>
+            <a:spLocks noGrp="1"/>
+          </p:cNvSpPr>
+          <p:nvPr>
+            <p:ph type="sldImg" idx="2"/>
+          </p:nvPr>
+        </p:nvSpPr>
+        <p:spPr/>
+      </p:sp>
+      <p:sp>
+        <p:nvSpPr>
+          <p:cNvPr id="3" name="Notes Placeholder 2"/>
+          <p:cNvSpPr>
+            <a:spLocks noGrp="1"/>
+          </p:cNvSpPr>
+          <p:nvPr>
+            <p:ph type="body" idx="3" sz="quarter"/>
+          </p:nvPr>
+        </p:nvSpPr>
+        <p:spPr/>
+        <p:txBody>
+          <a:bodyPr/>
+          <a:lstStyle/>
+          <a:p>
+            <a:r>
+              <a:t>20. 問い3 — 遺児の子に見えていたもの</a:t>
+            </a:r>
+          </a:p>
+          <a:p/>
+          <a:p>
+            <a:r>
+              <a:t>ウガンダの遺児の家庭だった人のネタバラシを、全員が自分の画面で開いてください。</a:t>
+            </a:r>
+          </a:p>
+          <a:p>
+            <a:r>
+              <a:t>その人には、何が「見えて」いましたか。それは、なぜでしょう。</a:t>
+            </a:r>
+          </a:p>
+          <a:p/>
+          <a:p>
+            <a:r>
+              <a:t>【答えの芯：支援と出会えた遺児には、奨学金・支援の扉がすべて見えていた。「出会い」自体が力になる】</a:t>
+            </a:r>
+          </a:p>
+          <a:p>
+            <a:r>
+              <a:t>【本人に手を挙げてもらう必要はない。 全員が自分の端末で開く。当事者の負担を増やさないこと】</a:t>
+            </a:r>
+          </a:p>
+        </p:txBody>
+      </p:sp>
+      <p:sp>
+        <p:nvSpPr>
+          <p:cNvPr id="4" name="Slide Number Placeholder 3"/>
+          <p:cNvSpPr>
+            <a:spLocks noGrp="1"/>
+          </p:cNvSpPr>
+          <p:nvPr>
+            <p:ph type="sldNum" idx="5" sz="quarter"/>
+          </p:nvPr>
+        </p:nvSpPr>
+        <p:spPr/>
+      </p:sp>
+    </p:spTree>
+  </p:cSld>
+  <p:clrMapOvr>
+    <a:masterClrMapping/>
+  </p:clrMapOvr>
+</p:notes>
+</file>
+
+<file path=ppt/notesSlides/notesSlide21.xml><?xml version="1.0" encoding="utf-8"?>
+<p:notes xmlns:a="http://schemas.openxmlformats.org/drawingml/2006/main" xmlns:p="http://schemas.openxmlformats.org/presentationml/2006/main" xmlns:r="http://schemas.openxmlformats.org/officeDocument/2006/relationships">
+  <p:cSld>
+    <p:spTree>
+      <p:nvGrpSpPr>
+        <p:cNvPr id="1" name=""/>
+        <p:cNvGrpSpPr/>
+        <p:nvPr/>
+      </p:nvGrpSpPr>
+      <p:grpSpPr>
+        <a:xfrm>
+          <a:off x="0" y="0"/>
+          <a:ext cx="0" cy="0"/>
+          <a:chOff x="0" y="0"/>
+          <a:chExt cx="0" cy="0"/>
+        </a:xfrm>
+      </p:grpSpPr>
+      <p:sp>
+        <p:nvSpPr>
+          <p:cNvPr id="2" name="Slide Image Placeholder 1"/>
+          <p:cNvSpPr>
+            <a:spLocks noGrp="1"/>
+          </p:cNvSpPr>
+          <p:nvPr>
+            <p:ph type="sldImg" idx="2"/>
+          </p:nvPr>
+        </p:nvSpPr>
+        <p:spPr/>
+      </p:sp>
+      <p:sp>
+        <p:nvSpPr>
+          <p:cNvPr id="3" name="Notes Placeholder 2"/>
+          <p:cNvSpPr>
+            <a:spLocks noGrp="1"/>
+          </p:cNvSpPr>
+          <p:nvPr>
+            <p:ph type="body" idx="3" sz="quarter"/>
+          </p:nvPr>
+        </p:nvSpPr>
+        <p:spPr/>
+        <p:txBody>
+          <a:bodyPr/>
+          <a:lstStyle/>
+          <a:p>
+            <a:r>
+              <a:t>21. 問い4 — 今日持ってきたもの</a:t>
+            </a:r>
+          </a:p>
+          <a:p/>
+          <a:p>
+            <a:r>
+              <a:t>今日あなたが持ってきたもの——スマホ、無料の教科書、給食。</a:t>
+            </a:r>
+          </a:p>
+          <a:p>
+            <a:r>
+              <a:t>それは、どの家庭カードの世界のものだったでしょうか。</a:t>
+            </a:r>
+          </a:p>
+          <a:p/>
+          <a:p>
+            <a:r>
+              <a:t>【導入の「3つの世界の朝」に戻る問い。自分の日常がどのカードの上にあるか】</a:t>
+            </a:r>
+          </a:p>
+          <a:p>
+            <a:r>
+              <a:t>【時間が押していたら、ここを削る】</a:t>
+            </a:r>
+          </a:p>
+        </p:txBody>
+      </p:sp>
+      <p:sp>
+        <p:nvSpPr>
+          <p:cNvPr id="4" name="Slide Number Placeholder 3"/>
+          <p:cNvSpPr>
+            <a:spLocks noGrp="1"/>
+          </p:cNvSpPr>
+          <p:nvPr>
+            <p:ph type="sldNum" idx="5" sz="quarter"/>
+          </p:nvPr>
+        </p:nvSpPr>
+        <p:spPr/>
+      </p:sp>
+    </p:spTree>
+  </p:cSld>
+  <p:clrMapOvr>
+    <a:masterClrMapping/>
+  </p:clrMapOvr>
+</p:notes>
+</file>
+
+<file path=ppt/notesSlides/notesSlide22.xml><?xml version="1.0" encoding="utf-8"?>
+<p:notes xmlns:a="http://schemas.openxmlformats.org/drawingml/2006/main" xmlns:p="http://schemas.openxmlformats.org/presentationml/2006/main" xmlns:r="http://schemas.openxmlformats.org/officeDocument/2006/relationships">
+  <p:cSld>
+    <p:spTree>
+      <p:nvGrpSpPr>
+        <p:cNvPr id="1" name=""/>
+        <p:cNvGrpSpPr/>
+        <p:nvPr/>
+      </p:nvGrpSpPr>
+      <p:grpSpPr>
+        <a:xfrm>
+          <a:off x="0" y="0"/>
+          <a:ext cx="0" cy="0"/>
+          <a:chOff x="0" y="0"/>
+          <a:chExt cx="0" cy="0"/>
+        </a:xfrm>
+      </p:grpSpPr>
+      <p:sp>
+        <p:nvSpPr>
+          <p:cNvPr id="2" name="Slide Image Placeholder 1"/>
+          <p:cNvSpPr>
+            <a:spLocks noGrp="1"/>
+          </p:cNvSpPr>
+          <p:nvPr>
+            <p:ph type="sldImg" idx="2"/>
+          </p:nvPr>
+        </p:nvSpPr>
+        <p:spPr/>
+      </p:sp>
+      <p:sp>
+        <p:nvSpPr>
+          <p:cNvPr id="3" name="Notes Placeholder 2"/>
+          <p:cNvSpPr>
+            <a:spLocks noGrp="1"/>
+          </p:cNvSpPr>
+          <p:nvPr>
+            <p:ph type="body" idx="3" sz="quarter"/>
+          </p:nvPr>
+        </p:nvSpPr>
+        <p:spPr/>
+        <p:txBody>
+          <a:bodyPr/>
+          <a:lstStyle/>
+          <a:p>
+            <a:r>
+              <a:t>22. 問い5 — わたせるカギ</a:t>
+            </a:r>
+          </a:p>
+          <a:p/>
+          <a:p>
+            <a:r>
+              <a:t>最後です。日本にいる私たちが、世界の遺児にわたせる「カギ」って、何だと思いますか。</a:t>
+            </a:r>
+          </a:p>
+          <a:p/>
+          <a:p>
+            <a:r>
+              <a:t>【ここは答えを用意しない。次の2枚が、そのまま答えの一部になる】</a:t>
+            </a:r>
+          </a:p>
+        </p:txBody>
+      </p:sp>
+      <p:sp>
+        <p:nvSpPr>
+          <p:cNvPr id="4" name="Slide Number Placeholder 3"/>
+          <p:cNvSpPr>
+            <a:spLocks noGrp="1"/>
+          </p:cNvSpPr>
+          <p:nvPr>
+            <p:ph type="sldNum" idx="5" sz="quarter"/>
+          </p:nvPr>
+        </p:nvSpPr>
+        <p:spPr/>
+      </p:sp>
+    </p:spTree>
+  </p:cSld>
+  <p:clrMapOvr>
+    <a:masterClrMapping/>
+  </p:clrMapOvr>
+</p:notes>
+</file>
+
+<file path=ppt/notesSlides/notesSlide23.xml><?xml version="1.0" encoding="utf-8"?>
+<p:notes xmlns:a="http://schemas.openxmlformats.org/drawingml/2006/main" xmlns:p="http://schemas.openxmlformats.org/presentationml/2006/main" xmlns:r="http://schemas.openxmlformats.org/officeDocument/2006/relationships">
+  <p:cSld>
+    <p:spTree>
+      <p:nvGrpSpPr>
+        <p:cNvPr id="1" name=""/>
+        <p:cNvGrpSpPr/>
+        <p:nvPr/>
+      </p:nvGrpSpPr>
+      <p:grpSpPr>
+        <a:xfrm>
+          <a:off x="0" y="0"/>
+          <a:ext cx="0" cy="0"/>
+          <a:chOff x="0" y="0"/>
+          <a:chExt cx="0" cy="0"/>
+        </a:xfrm>
+      </p:grpSpPr>
+      <p:sp>
+        <p:nvSpPr>
+          <p:cNvPr id="2" name="Slide Image Placeholder 1"/>
+          <p:cNvSpPr>
+            <a:spLocks noGrp="1"/>
+          </p:cNvSpPr>
+          <p:nvPr>
+            <p:ph type="sldImg" idx="2"/>
+          </p:nvPr>
+        </p:nvSpPr>
+        <p:spPr/>
+      </p:sp>
+      <p:sp>
+        <p:nvSpPr>
+          <p:cNvPr id="3" name="Notes Placeholder 2"/>
+          <p:cNvSpPr>
+            <a:spLocks noGrp="1"/>
+          </p:cNvSpPr>
+          <p:nvPr>
+            <p:ph type="body" idx="3" sz="quarter"/>
+          </p:nvPr>
+        </p:nvSpPr>
+        <p:spPr/>
+        <p:txBody>
+          <a:bodyPr/>
+          <a:lstStyle/>
+          <a:p>
+            <a:r>
+              <a:t>23. ゲームから現実へ</a:t>
+            </a:r>
+          </a:p>
+          <a:p/>
+          <a:p>
+            <a:r>
+              <a:t>ゲームで起きていたことを並べます。</a:t>
+            </a:r>
+          </a:p>
+          <a:p>
+            <a:r>
+              <a:t>生まれの差——初期資金と基本給が違った。</a:t>
+            </a:r>
+          </a:p>
+          <a:p>
+            <a:r>
+              <a:t>それが見える世界の差になった——知っている支援、出会える情報が違った。</a:t>
+            </a:r>
+          </a:p>
+          <a:p>
+            <a:r>
+              <a:t>そして実る場の差——同じ★を持っていても、かせぎが違った。</a:t>
+            </a:r>
+          </a:p>
+          <a:p/>
+          <a:p>
+            <a:r>
+              <a:t>学べば報われる、は、場が用意されている人の話です。</a:t>
+            </a:r>
+          </a:p>
+          <a:p/>
+          <a:p>
+            <a:r>
+              <a:t>この差は、次の世代の「生まれの差」になっていきます。</a:t>
+            </a:r>
+          </a:p>
+          <a:p>
+            <a:r>
+              <a:t>ゲームで見た「？？？」も「カギ不足」も、いまの世界に実在します。</a:t>
+            </a:r>
+          </a:p>
+          <a:p/>
+          <a:p>
+            <a:r>
+              <a:t>【太字の一文が、旧問い2の中身。問いにせず、ここで言い切る】</a:t>
+            </a:r>
+          </a:p>
+        </p:txBody>
+      </p:sp>
+      <p:sp>
+        <p:nvSpPr>
+          <p:cNvPr id="4" name="Slide Number Placeholder 3"/>
+          <p:cNvSpPr>
+            <a:spLocks noGrp="1"/>
+          </p:cNvSpPr>
+          <p:nvPr>
+            <p:ph type="sldNum" idx="5" sz="quarter"/>
+          </p:nvPr>
+        </p:nvSpPr>
+        <p:spPr/>
+      </p:sp>
+    </p:spTree>
+  </p:cSld>
+  <p:clrMapOvr>
+    <a:masterClrMapping/>
+  </p:clrMapOvr>
+</p:notes>
+</file>
+
+<file path=ppt/notesSlides/notesSlide24.xml><?xml version="1.0" encoding="utf-8"?>
+<p:notes xmlns:a="http://schemas.openxmlformats.org/drawingml/2006/main" xmlns:p="http://schemas.openxmlformats.org/presentationml/2006/main" xmlns:r="http://schemas.openxmlformats.org/officeDocument/2006/relationships">
+  <p:cSld>
+    <p:spTree>
+      <p:nvGrpSpPr>
+        <p:cNvPr id="1" name=""/>
+        <p:cNvGrpSpPr/>
+        <p:nvPr/>
+      </p:nvGrpSpPr>
+      <p:grpSpPr>
+        <a:xfrm>
+          <a:off x="0" y="0"/>
+          <a:ext cx="0" cy="0"/>
+          <a:chOff x="0" y="0"/>
+          <a:chExt cx="0" cy="0"/>
+        </a:xfrm>
+      </p:grpSpPr>
+      <p:sp>
+        <p:nvSpPr>
+          <p:cNvPr id="2" name="Slide Image Placeholder 1"/>
+          <p:cNvSpPr>
+            <a:spLocks noGrp="1"/>
+          </p:cNvSpPr>
+          <p:nvPr>
+            <p:ph type="sldImg" idx="2"/>
+          </p:nvPr>
+        </p:nvSpPr>
+        <p:spPr/>
+      </p:sp>
+      <p:sp>
+        <p:nvSpPr>
+          <p:cNvPr id="3" name="Notes Placeholder 2"/>
+          <p:cNvSpPr>
+            <a:spLocks noGrp="1"/>
+          </p:cNvSpPr>
+          <p:nvPr>
+            <p:ph type="body" idx="3" sz="quarter"/>
+          </p:nvPr>
+        </p:nvSpPr>
+        <p:spPr/>
+        <p:txBody>
+          <a:bodyPr/>
+          <a:lstStyle/>
+          <a:p>
+            <a:r>
+              <a:t>24. だから、「支援」がある</a:t>
+            </a:r>
+          </a:p>
+          <a:p/>
+          <a:p>
+            <a:r>
+              <a:t>この連鎖は、本人の努力だけでは断ち切れません。だから世界には、遺児を支える仕組みと人がいます。</a:t>
+            </a:r>
+          </a:p>
+          <a:p/>
+          <a:p>
+            <a:r>
+              <a:t>あしなが育英会は「あしながウガンダ」で、現地の遺児の教育を実際に支えています。</a:t>
+            </a:r>
+          </a:p>
+          <a:p>
+            <a:r>
+              <a:t>ゲームに出てきた「支援団体」のモデルは、これです。</a:t>
+            </a:r>
+          </a:p>
+          <a:p/>
+          <a:p>
+            <a:r>
+              <a:t>そしてAAI。アフリカの遺児を海外の大学へ送り出す奨学金です。</a:t>
+            </a:r>
+          </a:p>
+          <a:p>
+            <a:r>
+              <a:t>カギはお金ではなく、まなびと——「志」。祖国に貢献するリーダーを育てる「約束」の仕組みです。</a:t>
+            </a:r>
+          </a:p>
+          <a:p/>
+          <a:p>
+            <a:r>
+              <a:t>ゲームでAAIを選んだ人は、お金を1円も払っていません。</a:t>
+            </a:r>
+          </a:p>
+          <a:p>
+            <a:r>
+              <a:t>かわりに「志」の約束がついていました。25歳のいま、その人がどこで何をしていたか、読んでみてください。</a:t>
+            </a:r>
+          </a:p>
+          <a:p/>
+          <a:p>
+            <a:r>
+              <a:t>そして、その入り口に立っているのが——いま街頭に立っている、みなさんです。</a:t>
+            </a:r>
+          </a:p>
+          <a:p/>
+          <a:p>
+            <a:r>
+              <a:t>【ここで初めてAAIの「志の約束」を明かす。事前に言わないこと】</a:t>
+            </a:r>
+          </a:p>
+          <a:p>
+            <a:r>
+              <a:t>【AAIを選んだ人がいれば「25歳のいま」を読み上げてもらう。いなくても成立する】</a:t>
+            </a:r>
+          </a:p>
+        </p:txBody>
+      </p:sp>
+      <p:sp>
+        <p:nvSpPr>
+          <p:cNvPr id="4" name="Slide Number Placeholder 3"/>
+          <p:cNvSpPr>
+            <a:spLocks noGrp="1"/>
+          </p:cNvSpPr>
+          <p:nvPr>
+            <p:ph type="sldNum" idx="5" sz="quarter"/>
+          </p:nvPr>
+        </p:nvSpPr>
+        <p:spPr/>
+      </p:sp>
+    </p:spTree>
+  </p:cSld>
+  <p:clrMapOvr>
+    <a:masterClrMapping/>
+  </p:clrMapOvr>
+</p:notes>
+</file>
+
+<file path=ppt/notesSlides/notesSlide25.xml><?xml version="1.0" encoding="utf-8"?>
+<p:notes xmlns:a="http://schemas.openxmlformats.org/drawingml/2006/main" xmlns:p="http://schemas.openxmlformats.org/presentationml/2006/main" xmlns:r="http://schemas.openxmlformats.org/officeDocument/2006/relationships">
+  <p:cSld>
+    <p:spTree>
+      <p:nvGrpSpPr>
+        <p:cNvPr id="1" name=""/>
+        <p:cNvGrpSpPr/>
+        <p:nvPr/>
+      </p:nvGrpSpPr>
+      <p:grpSpPr>
+        <a:xfrm>
+          <a:off x="0" y="0"/>
+          <a:ext cx="0" cy="0"/>
+          <a:chOff x="0" y="0"/>
+          <a:chExt cx="0" cy="0"/>
+        </a:xfrm>
+      </p:grpSpPr>
+      <p:sp>
+        <p:nvSpPr>
+          <p:cNvPr id="2" name="Slide Image Placeholder 1"/>
+          <p:cNvSpPr>
+            <a:spLocks noGrp="1"/>
+          </p:cNvSpPr>
+          <p:nvPr>
+            <p:ph type="sldImg" idx="2"/>
+          </p:nvPr>
+        </p:nvSpPr>
+        <p:spPr/>
+      </p:sp>
+      <p:sp>
+        <p:nvSpPr>
+          <p:cNvPr id="3" name="Notes Placeholder 2"/>
+          <p:cNvSpPr>
+            <a:spLocks noGrp="1"/>
+          </p:cNvSpPr>
+          <p:nvPr>
+            <p:ph type="body" idx="3" sz="quarter"/>
+          </p:nvPr>
+        </p:nvSpPr>
+        <p:spPr/>
+        <p:txBody>
+          <a:bodyPr/>
+          <a:lstStyle/>
+          <a:p>
+            <a:r>
+              <a:t>25. ここからは、検証です</a:t>
+            </a:r>
+          </a:p>
+          <a:p/>
+          <a:p>
+            <a:r>
+              <a:t>……で、ここからが本題です。</a:t>
+            </a:r>
+          </a:p>
+          <a:p>
+            <a:r>
+              <a:t>このゲーム、まだ完成していません。今日はみなさんにテストプレイをしてもらいました。</a:t>
+            </a:r>
+          </a:p>
+          <a:p>
+            <a:r>
+              <a:t>今度は「届ける側」として、いまの75分を振り返ってください。</a:t>
+            </a:r>
+          </a:p>
+        </p:txBody>
+      </p:sp>
+      <p:sp>
+        <p:nvSpPr>
+          <p:cNvPr id="4" name="Slide Number Placeholder 3"/>
+          <p:cNvSpPr>
+            <a:spLocks noGrp="1"/>
+          </p:cNvSpPr>
+          <p:nvPr>
+            <p:ph type="sldNum" idx="5" sz="quarter"/>
+          </p:nvPr>
+        </p:nvSpPr>
+        <p:spPr/>
+      </p:sp>
+    </p:spTree>
+  </p:cSld>
+  <p:clrMapOvr>
+    <a:masterClrMapping/>
+  </p:clrMapOvr>
+</p:notes>
+</file>
+
+<file path=ppt/notesSlides/notesSlide26.xml><?xml version="1.0" encoding="utf-8"?>
+<p:notes xmlns:a="http://schemas.openxmlformats.org/drawingml/2006/main" xmlns:p="http://schemas.openxmlformats.org/presentationml/2006/main" xmlns:r="http://schemas.openxmlformats.org/officeDocument/2006/relationships">
+  <p:cSld>
+    <p:spTree>
+      <p:nvGrpSpPr>
+        <p:cNvPr id="1" name=""/>
+        <p:cNvGrpSpPr/>
+        <p:nvPr/>
+      </p:nvGrpSpPr>
+      <p:grpSpPr>
+        <a:xfrm>
+          <a:off x="0" y="0"/>
+          <a:ext cx="0" cy="0"/>
+          <a:chOff x="0" y="0"/>
+          <a:chExt cx="0" cy="0"/>
+        </a:xfrm>
+      </p:grpSpPr>
+      <p:sp>
+        <p:nvSpPr>
+          <p:cNvPr id="2" name="Slide Image Placeholder 1"/>
+          <p:cNvSpPr>
+            <a:spLocks noGrp="1"/>
+          </p:cNvSpPr>
+          <p:nvPr>
+            <p:ph type="sldImg" idx="2"/>
+          </p:nvPr>
+        </p:nvSpPr>
+        <p:spPr/>
+      </p:sp>
+      <p:sp>
+        <p:nvSpPr>
+          <p:cNvPr id="3" name="Notes Placeholder 2"/>
+          <p:cNvSpPr>
+            <a:spLocks noGrp="1"/>
+          </p:cNvSpPr>
+          <p:nvPr>
+            <p:ph type="body" idx="3" sz="quarter"/>
+          </p:nvPr>
+        </p:nvSpPr>
+        <p:spPr/>
+        <p:txBody>
+          <a:bodyPr/>
+          <a:lstStyle/>
+          <a:p>
+            <a:r>
+              <a:t>26. 気になるところを、全部出してください</a:t>
+            </a:r>
+          </a:p>
+          <a:p/>
+          <a:p>
+            <a:r>
+              <a:t>4つの角度で聞かせてください。</a:t>
+            </a:r>
+          </a:p>
+          <a:p>
+            <a:r>
+              <a:t>時間——25分で終わりましたか。長すぎた、短すぎたのはどこですか。</a:t>
+            </a:r>
+          </a:p>
+          <a:p>
+            <a:r>
+              <a:t>つまずき——ルールで分からなかったこと、操作で迷ったところ。</a:t>
+            </a:r>
+          </a:p>
+          <a:p>
+            <a:r>
+              <a:t>表現——「この言い方は違う」「強すぎる／弱すぎる」と感じたところ。</a:t>
+            </a:r>
+          </a:p>
+          <a:p>
+            <a:r>
+              <a:t>届け方——これを高校生に届けるとしたら、何を削り、何を足しますか。</a:t>
+            </a:r>
+          </a:p>
+          <a:p/>
+          <a:p>
+            <a:r>
+              <a:t>それともうひとつ。今日は家庭カードを最初に6枚とも見せました。</a:t>
+            </a:r>
+          </a:p>
+          <a:p>
+            <a:r>
+              <a:t>伏せたまま遊ぶと、結果発表の驚きは大きくなります。どちらがいいと思いますか。</a:t>
+            </a:r>
+          </a:p>
+          <a:p/>
+          <a:p>
+            <a:r>
+              <a:t>【チームで2分話してから全体で拾うと出やすい】</a:t>
+            </a:r>
+          </a:p>
+          <a:p>
+            <a:r>
+              <a:t>【時間の実測は必ず記録する。「25分に収まるか」は未検証の最重要項目】</a:t>
+            </a:r>
+          </a:p>
+          <a:p>
+            <a:r>
+              <a:t>【メモを取る係を決めておくこと。出た意見は README の「まだ決まっていないこと」に反映する】</a:t>
+            </a:r>
+          </a:p>
+        </p:txBody>
+      </p:sp>
+      <p:sp>
+        <p:nvSpPr>
+          <p:cNvPr id="4" name="Slide Number Placeholder 3"/>
+          <p:cNvSpPr>
+            <a:spLocks noGrp="1"/>
+          </p:cNvSpPr>
+          <p:nvPr>
+            <p:ph type="sldNum" idx="5" sz="quarter"/>
+          </p:nvPr>
+        </p:nvSpPr>
+        <p:spPr/>
+      </p:sp>
+    </p:spTree>
+  </p:cSld>
+  <p:clrMapOvr>
+    <a:masterClrMapping/>
+  </p:clrMapOvr>
+</p:notes>
+</file>
+
+<file path=ppt/notesSlides/notesSlide27.xml><?xml version="1.0" encoding="utf-8"?>
+<p:notes xmlns:a="http://schemas.openxmlformats.org/drawingml/2006/main" xmlns:p="http://schemas.openxmlformats.org/presentationml/2006/main" xmlns:r="http://schemas.openxmlformats.org/officeDocument/2006/relationships">
+  <p:cSld>
+    <p:spTree>
+      <p:nvGrpSpPr>
+        <p:cNvPr id="1" name=""/>
+        <p:cNvGrpSpPr/>
+        <p:nvPr/>
+      </p:nvGrpSpPr>
+      <p:grpSpPr>
+        <a:xfrm>
+          <a:off x="0" y="0"/>
+          <a:ext cx="0" cy="0"/>
+          <a:chOff x="0" y="0"/>
+          <a:chExt cx="0" cy="0"/>
+        </a:xfrm>
+      </p:grpSpPr>
+      <p:sp>
+        <p:nvSpPr>
+          <p:cNvPr id="2" name="Slide Image Placeholder 1"/>
+          <p:cNvSpPr>
+            <a:spLocks noGrp="1"/>
+          </p:cNvSpPr>
+          <p:nvPr>
+            <p:ph type="sldImg" idx="2"/>
+          </p:nvPr>
+        </p:nvSpPr>
+        <p:spPr/>
+      </p:sp>
+      <p:sp>
+        <p:nvSpPr>
+          <p:cNvPr id="3" name="Notes Placeholder 2"/>
+          <p:cNvSpPr>
+            <a:spLocks noGrp="1"/>
+          </p:cNvSpPr>
+          <p:nvPr>
+            <p:ph type="body" idx="3" sz="quarter"/>
+          </p:nvPr>
+        </p:nvSpPr>
+        <p:spPr/>
+        <p:txBody>
+          <a:bodyPr/>
+          <a:lstStyle/>
+          <a:p>
+            <a:r>
+              <a:t>27. 感想を聞かせてください</a:t>
+            </a:r>
+          </a:p>
+          <a:p/>
+          <a:p>
+            <a:r>
+              <a:t>最後に、感想を聞かせてください。うまく言葉にならなくてもかまいません。</a:t>
+            </a:r>
+          </a:p>
+          <a:p/>
+          <a:p>
+            <a:r>
+              <a:t>今日いちばん心に残った場面。自分のカードを見たときのこと、他の人のカードを知ったときのこと。</a:t>
+            </a:r>
+          </a:p>
+          <a:p>
+            <a:r>
+              <a:t>街頭に立つときの言葉が、ひとつでも変わったなら——それを聞かせてください。</a:t>
+            </a:r>
+          </a:p>
+          <a:p/>
+          <a:p>
+            <a:r>
+              <a:t>【ここは問いを立てず、ざっくばらんに。手が挙がらなければ、スタッフが一人目を引き受ける】</a:t>
+            </a:r>
+          </a:p>
+        </p:txBody>
+      </p:sp>
+      <p:sp>
+        <p:nvSpPr>
+          <p:cNvPr id="4" name="Slide Number Placeholder 3"/>
+          <p:cNvSpPr>
+            <a:spLocks noGrp="1"/>
+          </p:cNvSpPr>
+          <p:nvPr>
+            <p:ph type="sldNum" idx="5" sz="quarter"/>
+          </p:nvPr>
+        </p:nvSpPr>
+        <p:spPr/>
+      </p:sp>
+    </p:spTree>
+  </p:cSld>
+  <p:clrMapOvr>
+    <a:masterClrMapping/>
+  </p:clrMapOvr>
+</p:notes>
+</file>
+
+<file path=ppt/notesSlides/notesSlide28.xml><?xml version="1.0" encoding="utf-8"?>
+<p:notes xmlns:a="http://schemas.openxmlformats.org/drawingml/2006/main" xmlns:p="http://schemas.openxmlformats.org/presentationml/2006/main" xmlns:r="http://schemas.openxmlformats.org/officeDocument/2006/relationships">
+  <p:cSld>
+    <p:spTree>
+      <p:nvGrpSpPr>
+        <p:cNvPr id="1" name=""/>
+        <p:cNvGrpSpPr/>
+        <p:nvPr/>
+      </p:nvGrpSpPr>
+      <p:grpSpPr>
+        <a:xfrm>
+          <a:off x="0" y="0"/>
+          <a:ext cx="0" cy="0"/>
+          <a:chOff x="0" y="0"/>
+          <a:chExt cx="0" cy="0"/>
+        </a:xfrm>
+      </p:grpSpPr>
+      <p:sp>
+        <p:nvSpPr>
+          <p:cNvPr id="2" name="Slide Image Placeholder 1"/>
+          <p:cNvSpPr>
+            <a:spLocks noGrp="1"/>
+          </p:cNvSpPr>
+          <p:nvPr>
+            <p:ph type="sldImg" idx="2"/>
+          </p:nvPr>
+        </p:nvSpPr>
+        <p:spPr/>
+      </p:sp>
+      <p:sp>
+        <p:nvSpPr>
+          <p:cNvPr id="3" name="Notes Placeholder 2"/>
+          <p:cNvSpPr>
+            <a:spLocks noGrp="1"/>
+          </p:cNvSpPr>
+          <p:nvPr>
+            <p:ph type="body" idx="3" sz="quarter"/>
+          </p:nvPr>
+        </p:nvSpPr>
+        <p:spPr/>
+        <p:txBody>
+          <a:bodyPr/>
+          <a:lstStyle/>
+          <a:p>
+            <a:r>
+              <a:t>28. ありがとうございました</a:t>
+            </a:r>
+          </a:p>
+          <a:p/>
+          <a:p>
+            <a:r>
+              <a:t>今日はありがとうございました。</a:t>
+            </a:r>
+          </a:p>
+          <a:p>
+            <a:r>
+              <a:t>あなたの前にも、世界のどこかの子の前にも、まだ見ぬトビラがたくさんあります。</a:t>
+            </a:r>
+          </a:p>
+          <a:p/>
+          <a:p>
+            <a:r>
+              <a:t>## 会のあとにやること</a:t>
+            </a:r>
+          </a:p>
+          <a:p/>
+          <a:p>
+            <a:r>
+              <a:t>- [ ] 実測時間を README の「まだ決まっていないこと」に書く</a:t>
+            </a:r>
+          </a:p>
+          <a:p>
+            <a:r>
+              <a:t>- [ ] 出た意見を分類（バグ／文言／バランス／進行）して、直すものを決める</a:t>
+            </a:r>
+          </a:p>
+          <a:p>
+            <a:r>
+              <a:t>- [ ] 家庭カードを先に全部見せる構成でよかったか、学生の反応を記録する</a:t>
+            </a:r>
+          </a:p>
+          <a:p>
+            <a:r>
+              <a:t>- [ ] 問いを5つに減らして27分で足りたかを記録する</a:t>
+            </a:r>
+          </a:p>
+          <a:p>
+            <a:r>
+              <a:t>- [ ] ゲームの見た目を変えたら、slides/*.png を撮りなおす（手順は SLIDES_BRIEF.md）</a:t>
+            </a:r>
+          </a:p>
+        </p:txBody>
+      </p:sp>
+      <p:sp>
+        <p:nvSpPr>
+          <p:cNvPr id="4" name="Slide Number Placeholder 3"/>
+          <p:cNvSpPr>
+            <a:spLocks noGrp="1"/>
+          </p:cNvSpPr>
+          <p:nvPr>
+            <p:ph type="sldNum" idx="5" sz="quarter"/>
+          </p:nvPr>
+        </p:nvSpPr>
+        <p:spPr/>
+      </p:sp>
+    </p:spTree>
+  </p:cSld>
+  <p:clrMapOvr>
+    <a:masterClrMapping/>
+  </p:clrMapOvr>
+</p:notes>
+</file>
+
+<file path=ppt/notesSlides/notesSlide3.xml><?xml version="1.0" encoding="utf-8"?>
+<p:notes xmlns:a="http://schemas.openxmlformats.org/drawingml/2006/main" xmlns:p="http://schemas.openxmlformats.org/presentationml/2006/main" xmlns:r="http://schemas.openxmlformats.org/officeDocument/2006/relationships">
+  <p:cSld>
+    <p:spTree>
+      <p:nvGrpSpPr>
+        <p:cNvPr id="1" name=""/>
+        <p:cNvGrpSpPr/>
+        <p:nvPr/>
+      </p:nvGrpSpPr>
+      <p:grpSpPr>
+        <a:xfrm>
+          <a:off x="0" y="0"/>
+          <a:ext cx="0" cy="0"/>
+          <a:chOff x="0" y="0"/>
+          <a:chExt cx="0" cy="0"/>
+        </a:xfrm>
+      </p:grpSpPr>
+      <p:sp>
+        <p:nvSpPr>
+          <p:cNvPr id="2" name="Slide Image Placeholder 1"/>
+          <p:cNvSpPr>
+            <a:spLocks noGrp="1"/>
+          </p:cNvSpPr>
+          <p:nvPr>
+            <p:ph type="sldImg" idx="2"/>
+          </p:nvPr>
+        </p:nvSpPr>
+        <p:spPr/>
+      </p:sp>
+      <p:sp>
+        <p:nvSpPr>
+          <p:cNvPr id="3" name="Notes Placeholder 2"/>
+          <p:cNvSpPr>
+            <a:spLocks noGrp="1"/>
+          </p:cNvSpPr>
+          <p:nvPr>
+            <p:ph type="body" idx="3" sz="quarter"/>
+          </p:nvPr>
+        </p:nvSpPr>
+        <p:spPr/>
+        <p:txBody>
+          <a:bodyPr/>
+          <a:lstStyle/>
+          <a:p>
+            <a:r>
+              <a:t>3. 3つの世界の「朝」</a:t>
+            </a:r>
+          </a:p>
+          <a:p/>
+          <a:p>
+            <a:r>
+              <a:t>まず、3つの世界の、朝の風景から見てください。</a:t>
+            </a:r>
+          </a:p>
+          <a:p/>
+          <a:p>
+            <a:r>
+              <a:t>欧米。スクールバスで10分。朝食はシリアルとオレンジジュース。</a:t>
+            </a:r>
+          </a:p>
+          <a:p>
+            <a:r>
+              <a:t>日本。7時に起きて電車で20分。コンビニに寄る余裕もある。</a:t>
+            </a:r>
+          </a:p>
+          <a:p>
+            <a:r>
+              <a:t>ウガンダ。5時起き。水くみに1時間、畑を手伝ってから、5km歩いて学校へ。</a:t>
+            </a:r>
+          </a:p>
+          <a:p/>
+          <a:p>
+            <a:r>
+              <a:t>同じ「学校に行く」でも、そこに至るまでが違う。</a:t>
+            </a:r>
+          </a:p>
+          <a:p>
+            <a:r>
+              <a:t>そしてこの差が、そのままゲームの数字になっています。</a:t>
+            </a:r>
+          </a:p>
+          <a:p/>
+          <a:p>
+            <a:r>
+              <a:t>【ここが掴み。数字（初期資金・基本給）はまだ言わない——スライド5で見せる】</a:t>
+            </a:r>
+          </a:p>
+        </p:txBody>
+      </p:sp>
+      <p:sp>
+        <p:nvSpPr>
+          <p:cNvPr id="4" name="Slide Number Placeholder 3"/>
+          <p:cNvSpPr>
+            <a:spLocks noGrp="1"/>
+          </p:cNvSpPr>
+          <p:nvPr>
+            <p:ph type="sldNum" idx="5" sz="quarter"/>
+          </p:nvPr>
+        </p:nvSpPr>
+        <p:spPr/>
+      </p:sp>
+    </p:spTree>
+  </p:cSld>
+  <p:clrMapOvr>
+    <a:masterClrMapping/>
+  </p:clrMapOvr>
+</p:notes>
+</file>
+
+<file path=ppt/notesSlides/notesSlide4.xml><?xml version="1.0" encoding="utf-8"?>
+<p:notes xmlns:a="http://schemas.openxmlformats.org/drawingml/2006/main" xmlns:p="http://schemas.openxmlformats.org/presentationml/2006/main" xmlns:r="http://schemas.openxmlformats.org/officeDocument/2006/relationships">
+  <p:cSld>
+    <p:spTree>
+      <p:nvGrpSpPr>
+        <p:cNvPr id="1" name=""/>
+        <p:cNvGrpSpPr/>
+        <p:nvPr/>
+      </p:nvGrpSpPr>
+      <p:grpSpPr>
+        <a:xfrm>
+          <a:off x="0" y="0"/>
+          <a:ext cx="0" cy="0"/>
+          <a:chOff x="0" y="0"/>
+          <a:chExt cx="0" cy="0"/>
+        </a:xfrm>
+      </p:grpSpPr>
+      <p:sp>
+        <p:nvSpPr>
+          <p:cNvPr id="2" name="Slide Image Placeholder 1"/>
+          <p:cNvSpPr>
+            <a:spLocks noGrp="1"/>
+          </p:cNvSpPr>
+          <p:nvPr>
+            <p:ph type="sldImg" idx="2"/>
+          </p:nvPr>
+        </p:nvSpPr>
+        <p:spPr/>
+      </p:sp>
+      <p:sp>
+        <p:nvSpPr>
+          <p:cNvPr id="3" name="Notes Placeholder 2"/>
+          <p:cNvSpPr>
+            <a:spLocks noGrp="1"/>
+          </p:cNvSpPr>
+          <p:nvPr>
+            <p:ph type="body" idx="3" sz="quarter"/>
+          </p:nvPr>
+        </p:nvSpPr>
+        <p:spPr/>
+        <p:txBody>
+          <a:bodyPr/>
+          <a:lstStyle/>
+          <a:p>
+            <a:r>
+              <a:t>4. このゲームで起きること</a:t>
+            </a:r>
+          </a:p>
+          <a:p/>
+          <a:p>
+            <a:r>
+              <a:t>このゲームで起きるのは、これだけです。</a:t>
+            </a:r>
+          </a:p>
+          <a:p/>
+          <a:p>
+            <a:r>
+              <a:t>同じ盤面、同じサイコロ、同じルール。違うのは、生まれた場所だけ。</a:t>
+            </a:r>
+          </a:p>
+          <a:p/>
+          <a:p>
+            <a:r>
+              <a:t>説明ではなく、自分の手番でそれが起きます。</a:t>
+            </a:r>
+          </a:p>
+          <a:p>
+            <a:r>
+              <a:t>その差が結果にどう出るかを、25分で一度通しておく。</a:t>
+            </a:r>
+          </a:p>
+          <a:p/>
+          <a:p>
+            <a:r>
+              <a:t>【学生募金の学生が相手なので、ここは正面から言ってよい。</a:t>
+            </a:r>
+          </a:p>
+          <a:p>
+            <a:r>
+              <a:t>　ただし「努力すれば報われるが、どこでも同じではない」という結論は言わないこと——</a:t>
+            </a:r>
+          </a:p>
+          <a:p>
+            <a:r>
+              <a:t>　振り返りの問い1がそれを聞く問いなので、ここで答えを配ると確認作業になる】</a:t>
+            </a:r>
+          </a:p>
+        </p:txBody>
+      </p:sp>
+      <p:sp>
+        <p:nvSpPr>
+          <p:cNvPr id="4" name="Slide Number Placeholder 3"/>
+          <p:cNvSpPr>
+            <a:spLocks noGrp="1"/>
+          </p:cNvSpPr>
+          <p:nvPr>
+            <p:ph type="sldNum" idx="5" sz="quarter"/>
+          </p:nvPr>
+        </p:nvSpPr>
+        <p:spPr/>
+      </p:sp>
+    </p:spTree>
+  </p:cSld>
+  <p:clrMapOvr>
+    <a:masterClrMapping/>
+  </p:clrMapOvr>
+</p:notes>
+</file>
+
+<file path=ppt/notesSlides/notesSlide5.xml><?xml version="1.0" encoding="utf-8"?>
+<p:notes xmlns:a="http://schemas.openxmlformats.org/drawingml/2006/main" xmlns:p="http://schemas.openxmlformats.org/presentationml/2006/main" xmlns:r="http://schemas.openxmlformats.org/officeDocument/2006/relationships">
+  <p:cSld>
+    <p:spTree>
+      <p:nvGrpSpPr>
+        <p:cNvPr id="1" name=""/>
+        <p:cNvGrpSpPr/>
+        <p:nvPr/>
+      </p:nvGrpSpPr>
+      <p:grpSpPr>
+        <a:xfrm>
+          <a:off x="0" y="0"/>
+          <a:ext cx="0" cy="0"/>
+          <a:chOff x="0" y="0"/>
+          <a:chExt cx="0" cy="0"/>
+        </a:xfrm>
+      </p:grpSpPr>
+      <p:sp>
+        <p:nvSpPr>
+          <p:cNvPr id="2" name="Slide Image Placeholder 1"/>
+          <p:cNvSpPr>
+            <a:spLocks noGrp="1"/>
+          </p:cNvSpPr>
+          <p:nvPr>
+            <p:ph type="sldImg" idx="2"/>
+          </p:nvPr>
+        </p:nvSpPr>
+        <p:spPr/>
+      </p:sp>
+      <p:sp>
+        <p:nvSpPr>
+          <p:cNvPr id="3" name="Notes Placeholder 2"/>
+          <p:cNvSpPr>
+            <a:spLocks noGrp="1"/>
+          </p:cNvSpPr>
+          <p:nvPr>
+            <p:ph type="body" idx="3" sz="quarter"/>
+          </p:nvPr>
+        </p:nvSpPr>
+        <p:spPr/>
+        <p:txBody>
+          <a:bodyPr/>
+          <a:lstStyle/>
+          <a:p>
+            <a:r>
+              <a:t>5. 6つの家庭カード</a:t>
+            </a:r>
+          </a:p>
+          <a:p/>
+          <a:p>
+            <a:r>
+              <a:t>ゲームが始まると、自分の画面にだけカードが1枚配られます。この6種類のどれかです。</a:t>
+            </a:r>
+          </a:p>
+          <a:p>
+            <a:r>
+              <a:t>ふつうは自分の1枚しか見られませんが、今日は先に6枚とも開けて見ていきます。</a:t>
+            </a:r>
+          </a:p>
+          <a:p/>
+          <a:p>
+            <a:r>
+              <a:t>カードに出るのは、物語と、いまの持ちものと、とくいだけ。</a:t>
+            </a:r>
+          </a:p>
+          <a:p>
+            <a:r>
+              <a:t>下に書いた基本給と、★1つがいくらになるかは、画面のどこにも出ません。</a:t>
+            </a:r>
+          </a:p>
+          <a:p>
+            <a:r>
+              <a:t>表に出ないまま、19年間ずっと効き続けます。</a:t>
+            </a:r>
+          </a:p>
+          <a:p/>
+          <a:p>
+            <a:r>
+              <a:t>見てほしいのは下の2枚です。おかねも基本給もまったく同じ。</a:t>
+            </a:r>
+          </a:p>
+          <a:p>
+            <a:r>
+              <a:t>違うのは、支援を知っているかどうかだけ。</a:t>
+            </a:r>
+          </a:p>
+          <a:p/>
+          <a:p>
+            <a:r>
+              <a:t>【1枚ずつ読み上げない。下段の遺児2枚だけ指さして対比させる】</a:t>
+            </a:r>
+          </a:p>
+          <a:p>
+            <a:r>
+              <a:t>【⚠️ カードから「基本給」「仕送り」の表示が外れた（2026-09-14 のゲーム更新 e02a3d7）。</a:t>
+            </a:r>
+          </a:p>
+          <a:p>
+            <a:r>
+              <a:t>　数字を出すのはこのスライドと、スライド13だけ。 キャプションを必ず読み上げること】</a:t>
+            </a:r>
+          </a:p>
+        </p:txBody>
+      </p:sp>
+      <p:sp>
+        <p:nvSpPr>
+          <p:cNvPr id="4" name="Slide Number Placeholder 3"/>
+          <p:cNvSpPr>
+            <a:spLocks noGrp="1"/>
+          </p:cNvSpPr>
+          <p:nvPr>
+            <p:ph type="sldNum" idx="5" sz="quarter"/>
+          </p:nvPr>
+        </p:nvSpPr>
+        <p:spPr/>
+      </p:sp>
+    </p:spTree>
+  </p:cSld>
+  <p:clrMapOvr>
+    <a:masterClrMapping/>
+  </p:clrMapOvr>
+</p:notes>
+</file>
+
+<file path=ppt/notesSlides/notesSlide6.xml><?xml version="1.0" encoding="utf-8"?>
+<p:notes xmlns:a="http://schemas.openxmlformats.org/drawingml/2006/main" xmlns:p="http://schemas.openxmlformats.org/presentationml/2006/main" xmlns:r="http://schemas.openxmlformats.org/officeDocument/2006/relationships">
+  <p:cSld>
+    <p:spTree>
+      <p:nvGrpSpPr>
+        <p:cNvPr id="1" name=""/>
+        <p:cNvGrpSpPr/>
+        <p:nvPr/>
+      </p:nvGrpSpPr>
+      <p:grpSpPr>
+        <a:xfrm>
+          <a:off x="0" y="0"/>
+          <a:ext cx="0" cy="0"/>
+          <a:chOff x="0" y="0"/>
+          <a:chExt cx="0" cy="0"/>
+        </a:xfrm>
+      </p:grpSpPr>
+      <p:sp>
+        <p:nvSpPr>
+          <p:cNvPr id="2" name="Slide Image Placeholder 1"/>
+          <p:cNvSpPr>
+            <a:spLocks noGrp="1"/>
+          </p:cNvSpPr>
+          <p:nvPr>
+            <p:ph type="sldImg" idx="2"/>
+          </p:nvPr>
+        </p:nvSpPr>
+        <p:spPr/>
+      </p:sp>
+      <p:sp>
+        <p:nvSpPr>
+          <p:cNvPr id="3" name="Notes Placeholder 2"/>
+          <p:cNvSpPr>
+            <a:spLocks noGrp="1"/>
+          </p:cNvSpPr>
+          <p:nvPr>
+            <p:ph type="body" idx="3" sz="quarter"/>
+          </p:nvPr>
+        </p:nvSpPr>
+        <p:spPr/>
+        <p:txBody>
+          <a:bodyPr/>
+          <a:lstStyle/>
+          <a:p>
+            <a:r>
+              <a:t>6. 今日いちばん見てほしいこと</a:t>
+            </a:r>
+          </a:p>
+          <a:p/>
+          <a:p>
+            <a:r>
+              <a:t>だから、今日いちばん見てほしいのはこれです。</a:t>
+            </a:r>
+          </a:p>
+          <a:p/>
+          <a:p>
+            <a:r>
+              <a:t>カギが足りずに開けられないのと、扉があることすら知らないのは、まったく違う。</a:t>
+            </a:r>
+          </a:p>
+          <a:p/>
+          <a:p>
+            <a:r>
+              <a:t>どのチームにも、ウガンダの遺児の家庭が必ず1人入ります。</a:t>
+            </a:r>
+          </a:p>
+          <a:p>
+            <a:r>
+              <a:t>その人に何が見えていて、何が見えていなかったか——ゲームが終わったら、全員で答え合わせをします。</a:t>
+            </a:r>
+          </a:p>
+        </p:txBody>
+      </p:sp>
+      <p:sp>
+        <p:nvSpPr>
+          <p:cNvPr id="4" name="Slide Number Placeholder 3"/>
+          <p:cNvSpPr>
+            <a:spLocks noGrp="1"/>
+          </p:cNvSpPr>
+          <p:nvPr>
+            <p:ph type="sldNum" idx="5" sz="quarter"/>
+          </p:nvPr>
+        </p:nvSpPr>
+        <p:spPr/>
+      </p:sp>
+    </p:spTree>
+  </p:cSld>
+  <p:clrMapOvr>
+    <a:masterClrMapping/>
+  </p:clrMapOvr>
+</p:notes>
+</file>
+
+<file path=ppt/notesSlides/notesSlide7.xml><?xml version="1.0" encoding="utf-8"?>
+<p:notes xmlns:a="http://schemas.openxmlformats.org/drawingml/2006/main" xmlns:p="http://schemas.openxmlformats.org/presentationml/2006/main" xmlns:r="http://schemas.openxmlformats.org/officeDocument/2006/relationships">
+  <p:cSld>
+    <p:spTree>
+      <p:nvGrpSpPr>
+        <p:cNvPr id="1" name=""/>
+        <p:cNvGrpSpPr/>
+        <p:nvPr/>
+      </p:nvGrpSpPr>
+      <p:grpSpPr>
+        <a:xfrm>
+          <a:off x="0" y="0"/>
+          <a:ext cx="0" cy="0"/>
+          <a:chOff x="0" y="0"/>
+          <a:chExt cx="0" cy="0"/>
+        </a:xfrm>
+      </p:grpSpPr>
+      <p:sp>
+        <p:nvSpPr>
+          <p:cNvPr id="2" name="Slide Image Placeholder 1"/>
+          <p:cNvSpPr>
+            <a:spLocks noGrp="1"/>
+          </p:cNvSpPr>
+          <p:nvPr>
+            <p:ph type="sldImg" idx="2"/>
+          </p:nvPr>
+        </p:nvSpPr>
+        <p:spPr/>
+      </p:sp>
+      <p:sp>
+        <p:nvSpPr>
+          <p:cNvPr id="3" name="Notes Placeholder 2"/>
+          <p:cNvSpPr>
+            <a:spLocks noGrp="1"/>
+          </p:cNvSpPr>
+          <p:nvPr>
+            <p:ph type="body" idx="3" sz="quarter"/>
+          </p:nvPr>
+        </p:nvSpPr>
+        <p:spPr/>
+        <p:txBody>
+          <a:bodyPr/>
+          <a:lstStyle/>
+          <a:p>
+            <a:r>
+              <a:t>7. まず、ゲームに入る</a:t>
+            </a:r>
+          </a:p>
+          <a:p/>
+          <a:p>
+            <a:r>
+              <a:t>チームに分かれてください。3〜4人で1チーム。近くの人と組んで構いません。</a:t>
+            </a:r>
+          </a:p>
+          <a:p>
+            <a:r>
+              <a:t>チームの中で進行役を1人決めてください。ルームを作成する係です。</a:t>
+            </a:r>
+          </a:p>
+          <a:p/>
+          <a:p>
+            <a:r>
+              <a:t>進行役だけ、名前を入れて「ルームをつくる」。すると6文字のあいことばが出ます。</a:t>
+            </a:r>
+          </a:p>
+          <a:p>
+            <a:r>
+              <a:t>それをチームに口で伝えて、ほかの人は名前とあいことばを入れて「ルームに参加」。</a:t>
+            </a:r>
+          </a:p>
+          <a:p/>
+          <a:p>
+            <a:r>
+              <a:t>進行役の画面にチーム全員がそろったら、まだ「ゲーム開始」は押さないでください。</a:t>
+            </a:r>
+          </a:p>
+          <a:p>
+            <a:r>
+              <a:t>ルールを説明してから、一斉に始めます。</a:t>
+            </a:r>
+          </a:p>
+          <a:p/>
+          <a:p>
+            <a:r>
+              <a:t>ひとつだけ。進行役の画面に⚠️のついたチェックボックスがあります。今日は触らないでください。</a:t>
+            </a:r>
+          </a:p>
+          <a:p/>
+          <a:p>
+            <a:r>
+              <a:t>【「まだ押さない」は強めに。押されるとカードが配られて説明を聞かなくなる】</a:t>
+            </a:r>
+          </a:p>
+          <a:p>
+            <a:r>
+              <a:t>【チェックボックス＝死別・干ばつイベント。この会では必ずOFF】</a:t>
+            </a:r>
+          </a:p>
+        </p:txBody>
+      </p:sp>
+      <p:sp>
+        <p:nvSpPr>
+          <p:cNvPr id="4" name="Slide Number Placeholder 3"/>
+          <p:cNvSpPr>
+            <a:spLocks noGrp="1"/>
+          </p:cNvSpPr>
+          <p:nvPr>
+            <p:ph type="sldNum" idx="5" sz="quarter"/>
+          </p:nvPr>
+        </p:nvSpPr>
+        <p:spPr/>
+      </p:sp>
+    </p:spTree>
+  </p:cSld>
+  <p:clrMapOvr>
+    <a:masterClrMapping/>
+  </p:clrMapOvr>
+</p:notes>
+</file>
+
+<file path=ppt/notesSlides/notesSlide8.xml><?xml version="1.0" encoding="utf-8"?>
+<p:notes xmlns:a="http://schemas.openxmlformats.org/drawingml/2006/main" xmlns:p="http://schemas.openxmlformats.org/presentationml/2006/main" xmlns:r="http://schemas.openxmlformats.org/officeDocument/2006/relationships">
+  <p:cSld>
+    <p:spTree>
+      <p:nvGrpSpPr>
+        <p:cNvPr id="1" name=""/>
+        <p:cNvGrpSpPr/>
+        <p:nvPr/>
+      </p:nvGrpSpPr>
+      <p:grpSpPr>
+        <a:xfrm>
+          <a:off x="0" y="0"/>
+          <a:ext cx="0" cy="0"/>
+          <a:chOff x="0" y="0"/>
+          <a:chExt cx="0" cy="0"/>
+        </a:xfrm>
+      </p:grpSpPr>
+      <p:sp>
+        <p:nvSpPr>
+          <p:cNvPr id="2" name="Slide Image Placeholder 1"/>
+          <p:cNvSpPr>
+            <a:spLocks noGrp="1"/>
+          </p:cNvSpPr>
+          <p:nvPr>
+            <p:ph type="sldImg" idx="2"/>
+          </p:nvPr>
+        </p:nvSpPr>
+        <p:spPr/>
+      </p:sp>
+      <p:sp>
+        <p:nvSpPr>
+          <p:cNvPr id="3" name="Notes Placeholder 2"/>
+          <p:cNvSpPr>
+            <a:spLocks noGrp="1"/>
+          </p:cNvSpPr>
+          <p:nvPr>
+            <p:ph type="body" idx="3" sz="quarter"/>
+          </p:nvPr>
+        </p:nvSpPr>
+        <p:spPr/>
+        <p:txBody>
+          <a:bodyPr/>
+          <a:lstStyle/>
+          <a:p>
+            <a:r>
+              <a:t>8. URL と、2つの約束</a:t>
+            </a:r>
+          </a:p>
+          <a:p/>
+          <a:p>
+            <a:r>
+              <a:t>このURL、またはQRコードに、全員アクセスしてください。</a:t>
+            </a:r>
+          </a:p>
+          <a:p/>
+          <a:p>
+            <a:r>
+              <a:t>遊ぶ前に2つだけ。家庭カードは自分の画面にしか出ません。人に見せない、隣をのぞかない。</a:t>
+            </a:r>
+          </a:p>
+          <a:p>
+            <a:r>
+              <a:t>さっき6枚とも見せましたが、誰にどれが配られたかは、最後まで秘密です。</a:t>
+            </a:r>
+          </a:p>
+          <a:p>
+            <a:r>
+              <a:t>それから、接続が切れても同じページを開き直せば戻れます。ただし開始後の途中参加はできません。</a:t>
+            </a:r>
+          </a:p>
+          <a:p/>
+          <a:p>
+            <a:r>
+              <a:t>【いちばん時間が溶けるところ。3分は見ておく。スタッフは各テーブルを回る】</a:t>
+            </a:r>
+          </a:p>
+        </p:txBody>
+      </p:sp>
+      <p:sp>
+        <p:nvSpPr>
+          <p:cNvPr id="4" name="Slide Number Placeholder 3"/>
+          <p:cNvSpPr>
+            <a:spLocks noGrp="1"/>
+          </p:cNvSpPr>
+          <p:nvPr>
+            <p:ph type="sldNum" idx="5" sz="quarter"/>
+          </p:nvPr>
+        </p:nvSpPr>
+        <p:spPr/>
+      </p:sp>
+    </p:spTree>
+  </p:cSld>
+  <p:clrMapOvr>
+    <a:masterClrMapping/>
+  </p:clrMapOvr>
+</p:notes>
+</file>
+
+<file path=ppt/notesSlides/notesSlide9.xml><?xml version="1.0" encoding="utf-8"?>
+<p:notes xmlns:a="http://schemas.openxmlformats.org/drawingml/2006/main" xmlns:p="http://schemas.openxmlformats.org/presentationml/2006/main" xmlns:r="http://schemas.openxmlformats.org/officeDocument/2006/relationships">
+  <p:cSld>
+    <p:spTree>
+      <p:nvGrpSpPr>
+        <p:cNvPr id="1" name=""/>
+        <p:cNvGrpSpPr/>
+        <p:nvPr/>
+      </p:nvGrpSpPr>
+      <p:grpSpPr>
+        <a:xfrm>
+          <a:off x="0" y="0"/>
+          <a:ext cx="0" cy="0"/>
+          <a:chOff x="0" y="0"/>
+          <a:chExt cx="0" cy="0"/>
+        </a:xfrm>
+      </p:grpSpPr>
+      <p:sp>
+        <p:nvSpPr>
+          <p:cNvPr id="2" name="Slide Image Placeholder 1"/>
+          <p:cNvSpPr>
+            <a:spLocks noGrp="1"/>
+          </p:cNvSpPr>
+          <p:nvPr>
+            <p:ph type="sldImg" idx="2"/>
+          </p:nvPr>
+        </p:nvSpPr>
+        <p:spPr/>
+      </p:sp>
+      <p:sp>
+        <p:nvSpPr>
+          <p:cNvPr id="3" name="Notes Placeholder 2"/>
+          <p:cNvSpPr>
+            <a:spLocks noGrp="1"/>
+          </p:cNvSpPr>
+          <p:nvPr>
+            <p:ph type="body" idx="3" sz="quarter"/>
+          </p:nvPr>
+        </p:nvSpPr>
+        <p:spPr/>
+        <p:txBody>
+          <a:bodyPr/>
+          <a:lstStyle/>
+          <a:p>
+            <a:r>
+              <a:t>9. 盤面</a:t>
+            </a:r>
+          </a:p>
+          <a:p/>
+          <a:p>
+            <a:r>
+              <a:t>盤面は24マス。6歳から25歳までの19年間です。</a:t>
+            </a:r>
+          </a:p>
+          <a:p/>
+          <a:p>
+            <a:r>
+              <a:t>15歳まではサイコロを使いません。「一歩すすむ」で1マスずつ。人生の土台をつくる期間です。</a:t>
+            </a:r>
+          </a:p>
+          <a:p>
+            <a:r>
+              <a:t>15歳の「進学のトビラ」からサイコロが始まります。</a:t>
+            </a:r>
+          </a:p>
+        </p:txBody>
+      </p:sp>
+      <p:sp>
+        <p:nvSpPr>
+          <p:cNvPr id="4" name="Slide Number Placeholder 3"/>
+          <p:cNvSpPr>
+            <a:spLocks noGrp="1"/>
+          </p:cNvSpPr>
+          <p:nvPr>
+            <p:ph type="sldNum" idx="5" sz="quarter"/>
+          </p:nvPr>
+        </p:nvSpPr>
+        <p:spPr/>
+      </p:sp>
+    </p:spTree>
+  </p:cSld>
+  <p:clrMapOvr>
+    <a:masterClrMapping/>
+  </p:clrMapOvr>
+</p:notes>
 </file>
 
 <file path=ppt/slideLayouts/slideLayout1.xml><?xml version="1.0" encoding="utf-8"?>
@@ -3568,7 +6919,7 @@
           <p:nvPr/>
         </p:nvPicPr>
         <p:blipFill>
-          <a:blip r:embed="rId2"/>
+          <a:blip r:embed="rId3"/>
           <a:stretch>
             <a:fillRect/>
           </a:stretch>
@@ -3592,7 +6943,7 @@
           <p:nvPr/>
         </p:nvPicPr>
         <p:blipFill>
-          <a:blip r:embed="rId3"/>
+          <a:blip r:embed="rId4"/>
           <a:stretch>
             <a:fillRect/>
           </a:stretch>
@@ -3616,7 +6967,7 @@
           <p:nvPr/>
         </p:nvPicPr>
         <p:blipFill>
-          <a:blip r:embed="rId4"/>
+          <a:blip r:embed="rId5"/>
           <a:stretch>
             <a:fillRect/>
           </a:stretch>
@@ -4622,7 +7973,7 @@
           <p:nvPr/>
         </p:nvPicPr>
         <p:blipFill>
-          <a:blip r:embed="rId2"/>
+          <a:blip r:embed="rId3"/>
           <a:stretch>
             <a:fillRect/>
           </a:stretch>
@@ -4646,7 +7997,7 @@
           <p:nvPr/>
         </p:nvPicPr>
         <p:blipFill>
-          <a:blip r:embed="rId3"/>
+          <a:blip r:embed="rId4"/>
           <a:stretch>
             <a:fillRect/>
           </a:stretch>
@@ -4670,7 +8021,7 @@
           <p:nvPr/>
         </p:nvPicPr>
         <p:blipFill>
-          <a:blip r:embed="rId4"/>
+          <a:blip r:embed="rId5"/>
           <a:stretch>
             <a:fillRect/>
           </a:stretch>
@@ -4694,7 +8045,7 @@
           <p:nvPr/>
         </p:nvPicPr>
         <p:blipFill>
-          <a:blip r:embed="rId5"/>
+          <a:blip r:embed="rId6"/>
           <a:stretch>
             <a:fillRect/>
           </a:stretch>
@@ -4718,7 +8069,7 @@
           <p:nvPr/>
         </p:nvPicPr>
         <p:blipFill>
-          <a:blip r:embed="rId6"/>
+          <a:blip r:embed="rId7"/>
           <a:stretch>
             <a:fillRect/>
           </a:stretch>
@@ -5734,7 +9085,7 @@
           <p:nvPr/>
         </p:nvPicPr>
         <p:blipFill>
-          <a:blip r:embed="rId2"/>
+          <a:blip r:embed="rId3"/>
           <a:stretch>
             <a:fillRect/>
           </a:stretch>
@@ -5758,7 +9109,7 @@
           <p:nvPr/>
         </p:nvPicPr>
         <p:blipFill>
-          <a:blip r:embed="rId3"/>
+          <a:blip r:embed="rId4"/>
           <a:stretch>
             <a:fillRect/>
           </a:stretch>
@@ -5782,7 +9133,7 @@
           <p:nvPr/>
         </p:nvPicPr>
         <p:blipFill>
-          <a:blip r:embed="rId4"/>
+          <a:blip r:embed="rId5"/>
           <a:stretch>
             <a:fillRect/>
           </a:stretch>
@@ -5806,7 +9157,7 @@
           <p:nvPr/>
         </p:nvPicPr>
         <p:blipFill>
-          <a:blip r:embed="rId5"/>
+          <a:blip r:embed="rId6"/>
           <a:stretch>
             <a:fillRect/>
           </a:stretch>
@@ -5830,7 +9181,7 @@
           <p:nvPr/>
         </p:nvPicPr>
         <p:blipFill>
-          <a:blip r:embed="rId6"/>
+          <a:blip r:embed="rId7"/>
           <a:stretch>
             <a:fillRect/>
           </a:stretch>
@@ -5854,7 +9205,7 @@
           <p:nvPr/>
         </p:nvPicPr>
         <p:blipFill>
-          <a:blip r:embed="rId7"/>
+          <a:blip r:embed="rId8"/>
           <a:stretch>
             <a:fillRect/>
           </a:stretch>
@@ -5878,7 +9229,7 @@
           <p:nvPr/>
         </p:nvPicPr>
         <p:blipFill>
-          <a:blip r:embed="rId8"/>
+          <a:blip r:embed="rId9"/>
           <a:stretch>
             <a:fillRect/>
           </a:stretch>
@@ -6104,7 +9455,7 @@
           <p:nvPr/>
         </p:nvPicPr>
         <p:blipFill>
-          <a:blip r:embed="rId2"/>
+          <a:blip r:embed="rId3"/>
           <a:stretch>
             <a:fillRect/>
           </a:stretch>
@@ -6128,7 +9479,7 @@
           <p:nvPr/>
         </p:nvPicPr>
         <p:blipFill>
-          <a:blip r:embed="rId3"/>
+          <a:blip r:embed="rId4"/>
           <a:stretch>
             <a:fillRect/>
           </a:stretch>
@@ -6562,7 +9913,7 @@
           <p:nvPr/>
         </p:nvPicPr>
         <p:blipFill>
-          <a:blip r:embed="rId4"/>
+          <a:blip r:embed="rId5"/>
           <a:stretch>
             <a:fillRect/>
           </a:stretch>
@@ -6586,7 +9937,7 @@
           <p:nvPr/>
         </p:nvPicPr>
         <p:blipFill>
-          <a:blip r:embed="rId5"/>
+          <a:blip r:embed="rId6"/>
           <a:stretch>
             <a:fillRect/>
           </a:stretch>
@@ -6610,7 +9961,7 @@
           <p:nvPr/>
         </p:nvPicPr>
         <p:blipFill>
-          <a:blip r:embed="rId6"/>
+          <a:blip r:embed="rId7"/>
           <a:stretch>
             <a:fillRect/>
           </a:stretch>
@@ -6634,7 +9985,7 @@
           <p:nvPr/>
         </p:nvPicPr>
         <p:blipFill>
-          <a:blip r:embed="rId7"/>
+          <a:blip r:embed="rId8"/>
           <a:stretch>
             <a:fillRect/>
           </a:stretch>
@@ -6772,7 +10123,7 @@
           <p:nvPr/>
         </p:nvPicPr>
         <p:blipFill>
-          <a:blip r:embed="rId2"/>
+          <a:blip r:embed="rId3"/>
           <a:stretch>
             <a:fillRect/>
           </a:stretch>
@@ -6993,7 +10344,7 @@
           <p:nvPr/>
         </p:nvPicPr>
         <p:blipFill>
-          <a:blip r:embed="rId3"/>
+          <a:blip r:embed="rId4"/>
           <a:stretch>
             <a:fillRect/>
           </a:stretch>
@@ -7571,7 +10922,7 @@
           <p:nvPr/>
         </p:nvPicPr>
         <p:blipFill>
-          <a:blip r:embed="rId2"/>
+          <a:blip r:embed="rId3"/>
           <a:stretch>
             <a:fillRect/>
           </a:stretch>
@@ -8448,7 +11799,7 @@
           <p:nvPr/>
         </p:nvPicPr>
         <p:blipFill>
-          <a:blip r:embed="rId2"/>
+          <a:blip r:embed="rId3"/>
           <a:stretch>
             <a:fillRect/>
           </a:stretch>
@@ -8472,7 +11823,7 @@
           <p:nvPr/>
         </p:nvPicPr>
         <p:blipFill>
-          <a:blip r:embed="rId3"/>
+          <a:blip r:embed="rId4"/>
           <a:stretch>
             <a:fillRect/>
           </a:stretch>
@@ -8496,7 +11847,7 @@
           <p:nvPr/>
         </p:nvPicPr>
         <p:blipFill>
-          <a:blip r:embed="rId4"/>
+          <a:blip r:embed="rId5"/>
           <a:stretch>
             <a:fillRect/>
           </a:stretch>
@@ -8520,7 +11871,7 @@
           <p:nvPr/>
         </p:nvPicPr>
         <p:blipFill>
-          <a:blip r:embed="rId5"/>
+          <a:blip r:embed="rId6"/>
           <a:stretch>
             <a:fillRect/>
           </a:stretch>
@@ -8746,7 +12097,7 @@
           <p:nvPr/>
         </p:nvPicPr>
         <p:blipFill>
-          <a:blip r:embed="rId2"/>
+          <a:blip r:embed="rId3"/>
           <a:stretch>
             <a:fillRect/>
           </a:stretch>
@@ -9057,7 +12408,7 @@
           <p:nvPr/>
         </p:nvPicPr>
         <p:blipFill>
-          <a:blip r:embed="rId3"/>
+          <a:blip r:embed="rId4"/>
           <a:stretch>
             <a:fillRect/>
           </a:stretch>
@@ -9081,7 +12432,7 @@
           <p:nvPr/>
         </p:nvPicPr>
         <p:blipFill>
-          <a:blip r:embed="rId4"/>
+          <a:blip r:embed="rId5"/>
           <a:stretch>
             <a:fillRect/>
           </a:stretch>
@@ -9105,7 +12456,7 @@
           <p:nvPr/>
         </p:nvPicPr>
         <p:blipFill>
-          <a:blip r:embed="rId5"/>
+          <a:blip r:embed="rId6"/>
           <a:stretch>
             <a:fillRect/>
           </a:stretch>
@@ -9129,7 +12480,7 @@
           <p:nvPr/>
         </p:nvPicPr>
         <p:blipFill>
-          <a:blip r:embed="rId6"/>
+          <a:blip r:embed="rId7"/>
           <a:stretch>
             <a:fillRect/>
           </a:stretch>
@@ -9355,7 +12706,7 @@
           <p:nvPr/>
         </p:nvPicPr>
         <p:blipFill>
-          <a:blip r:embed="rId2"/>
+          <a:blip r:embed="rId3"/>
           <a:stretch>
             <a:fillRect/>
           </a:stretch>
@@ -9648,7 +12999,7 @@
           <p:nvPr/>
         </p:nvPicPr>
         <p:blipFill>
-          <a:blip r:embed="rId3"/>
+          <a:blip r:embed="rId4"/>
           <a:stretch>
             <a:fillRect/>
           </a:stretch>
@@ -9672,7 +13023,7 @@
           <p:nvPr/>
         </p:nvPicPr>
         <p:blipFill>
-          <a:blip r:embed="rId4"/>
+          <a:blip r:embed="rId5"/>
           <a:stretch>
             <a:fillRect/>
           </a:stretch>
@@ -9696,7 +13047,7 @@
           <p:nvPr/>
         </p:nvPicPr>
         <p:blipFill>
-          <a:blip r:embed="rId5"/>
+          <a:blip r:embed="rId6"/>
           <a:stretch>
             <a:fillRect/>
           </a:stretch>
@@ -9720,7 +13071,7 @@
           <p:nvPr/>
         </p:nvPicPr>
         <p:blipFill>
-          <a:blip r:embed="rId6"/>
+          <a:blip r:embed="rId7"/>
           <a:stretch>
             <a:fillRect/>
           </a:stretch>
@@ -9744,7 +13095,7 @@
           <p:nvPr/>
         </p:nvPicPr>
         <p:blipFill>
-          <a:blip r:embed="rId7"/>
+          <a:blip r:embed="rId8"/>
           <a:stretch>
             <a:fillRect/>
           </a:stretch>
@@ -10041,7 +13392,7 @@
           <p:nvPr/>
         </p:nvPicPr>
         <p:blipFill>
-          <a:blip r:embed="rId2"/>
+          <a:blip r:embed="rId3"/>
           <a:stretch>
             <a:fillRect/>
           </a:stretch>
@@ -10338,7 +13689,7 @@
           <p:nvPr/>
         </p:nvPicPr>
         <p:blipFill>
-          <a:blip r:embed="rId2"/>
+          <a:blip r:embed="rId3"/>
           <a:stretch>
             <a:fillRect/>
           </a:stretch>
@@ -11229,7 +14580,7 @@
           <p:nvPr/>
         </p:nvPicPr>
         <p:blipFill>
-          <a:blip r:embed="rId2"/>
+          <a:blip r:embed="rId3"/>
           <a:stretch>
             <a:fillRect/>
           </a:stretch>
@@ -11253,7 +14604,7 @@
           <p:nvPr/>
         </p:nvPicPr>
         <p:blipFill>
-          <a:blip r:embed="rId3"/>
+          <a:blip r:embed="rId4"/>
           <a:stretch>
             <a:fillRect/>
           </a:stretch>
@@ -11277,7 +14628,7 @@
           <p:nvPr/>
         </p:nvPicPr>
         <p:blipFill>
-          <a:blip r:embed="rId4"/>
+          <a:blip r:embed="rId5"/>
           <a:stretch>
             <a:fillRect/>
           </a:stretch>
@@ -11301,7 +14652,7 @@
           <p:nvPr/>
         </p:nvPicPr>
         <p:blipFill>
-          <a:blip r:embed="rId5"/>
+          <a:blip r:embed="rId6"/>
           <a:stretch>
             <a:fillRect/>
           </a:stretch>
@@ -11325,7 +14676,7 @@
           <p:nvPr/>
         </p:nvPicPr>
         <p:blipFill>
-          <a:blip r:embed="rId6"/>
+          <a:blip r:embed="rId7"/>
           <a:stretch>
             <a:fillRect/>
           </a:stretch>
@@ -11349,7 +14700,7 @@
           <p:nvPr/>
         </p:nvPicPr>
         <p:blipFill>
-          <a:blip r:embed="rId7"/>
+          <a:blip r:embed="rId8"/>
           <a:stretch>
             <a:fillRect/>
           </a:stretch>
@@ -11373,7 +14724,7 @@
           <p:nvPr/>
         </p:nvPicPr>
         <p:blipFill>
-          <a:blip r:embed="rId8"/>
+          <a:blip r:embed="rId9"/>
           <a:stretch>
             <a:fillRect/>
           </a:stretch>
@@ -11659,7 +15010,7 @@
           <p:nvPr/>
         </p:nvPicPr>
         <p:blipFill>
-          <a:blip r:embed="rId2"/>
+          <a:blip r:embed="rId3"/>
           <a:stretch>
             <a:fillRect/>
           </a:stretch>
@@ -11934,7 +15285,7 @@
           <p:nvPr/>
         </p:nvPicPr>
         <p:blipFill>
-          <a:blip r:embed="rId2"/>
+          <a:blip r:embed="rId3"/>
           <a:stretch>
             <a:fillRect/>
           </a:stretch>
@@ -12209,7 +15560,7 @@
           <p:nvPr/>
         </p:nvPicPr>
         <p:blipFill>
-          <a:blip r:embed="rId2"/>
+          <a:blip r:embed="rId3"/>
           <a:stretch>
             <a:fillRect/>
           </a:stretch>
@@ -13050,7 +16401,7 @@
           <p:nvPr/>
         </p:nvPicPr>
         <p:blipFill>
-          <a:blip r:embed="rId2"/>
+          <a:blip r:embed="rId3"/>
           <a:stretch>
             <a:fillRect/>
           </a:stretch>
@@ -13986,7 +17337,7 @@
           <p:nvPr/>
         </p:nvPicPr>
         <p:blipFill>
-          <a:blip r:embed="rId2"/>
+          <a:blip r:embed="rId3"/>
           <a:stretch>
             <a:fillRect/>
           </a:stretch>
@@ -14327,7 +17678,7 @@
           <p:nvPr/>
         </p:nvPicPr>
         <p:blipFill>
-          <a:blip r:embed="rId2"/>
+          <a:blip r:embed="rId3"/>
           <a:stretch>
             <a:fillRect/>
           </a:stretch>
@@ -15136,7 +18487,7 @@
           <p:nvPr/>
         </p:nvPicPr>
         <p:blipFill>
-          <a:blip r:embed="rId2"/>
+          <a:blip r:embed="rId3"/>
           <a:stretch>
             <a:fillRect/>
           </a:stretch>
@@ -15160,7 +18511,7 @@
           <p:nvPr/>
         </p:nvPicPr>
         <p:blipFill>
-          <a:blip r:embed="rId3"/>
+          <a:blip r:embed="rId4"/>
           <a:stretch>
             <a:fillRect/>
           </a:stretch>
@@ -15184,7 +18535,7 @@
           <p:nvPr/>
         </p:nvPicPr>
         <p:blipFill>
-          <a:blip r:embed="rId4"/>
+          <a:blip r:embed="rId5"/>
           <a:stretch>
             <a:fillRect/>
           </a:stretch>
@@ -15208,7 +18559,7 @@
           <p:nvPr/>
         </p:nvPicPr>
         <p:blipFill>
-          <a:blip r:embed="rId5"/>
+          <a:blip r:embed="rId6"/>
           <a:stretch>
             <a:fillRect/>
           </a:stretch>
@@ -15232,7 +18583,7 @@
           <p:nvPr/>
         </p:nvPicPr>
         <p:blipFill>
-          <a:blip r:embed="rId6"/>
+          <a:blip r:embed="rId7"/>
           <a:stretch>
             <a:fillRect/>
           </a:stretch>
@@ -15558,7 +18909,7 @@
           <p:nvPr/>
         </p:nvPicPr>
         <p:blipFill>
-          <a:blip r:embed="rId2"/>
+          <a:blip r:embed="rId3"/>
           <a:stretch>
             <a:fillRect/>
           </a:stretch>
@@ -16659,7 +20010,7 @@
           <p:nvPr/>
         </p:nvPicPr>
         <p:blipFill>
-          <a:blip r:embed="rId2"/>
+          <a:blip r:embed="rId3"/>
           <a:stretch>
             <a:fillRect/>
           </a:stretch>
@@ -16683,7 +20034,7 @@
           <p:nvPr/>
         </p:nvPicPr>
         <p:blipFill>
-          <a:blip r:embed="rId3"/>
+          <a:blip r:embed="rId4"/>
           <a:stretch>
             <a:fillRect/>
           </a:stretch>
@@ -16707,7 +20058,7 @@
           <p:nvPr/>
         </p:nvPicPr>
         <p:blipFill>
-          <a:blip r:embed="rId4"/>
+          <a:blip r:embed="rId5"/>
           <a:stretch>
             <a:fillRect/>
           </a:stretch>
@@ -16731,7 +20082,7 @@
           <p:nvPr/>
         </p:nvPicPr>
         <p:blipFill>
-          <a:blip r:embed="rId5"/>
+          <a:blip r:embed="rId6"/>
           <a:stretch>
             <a:fillRect/>
           </a:stretch>
@@ -17116,7 +20467,7 @@
           <p:nvPr/>
         </p:nvPicPr>
         <p:blipFill>
-          <a:blip r:embed="rId2"/>
+          <a:blip r:embed="rId3"/>
           <a:stretch>
             <a:fillRect/>
           </a:stretch>
@@ -17298,7 +20649,7 @@
           <p:nvPr/>
         </p:nvPicPr>
         <p:blipFill>
-          <a:blip r:embed="rId2"/>
+          <a:blip r:embed="rId3"/>
           <a:stretch>
             <a:fillRect/>
           </a:stretch>
@@ -17322,7 +20673,7 @@
           <p:nvPr/>
         </p:nvPicPr>
         <p:blipFill>
-          <a:blip r:embed="rId3"/>
+          <a:blip r:embed="rId4"/>
           <a:stretch>
             <a:fillRect/>
           </a:stretch>
@@ -17346,7 +20697,7 @@
           <p:nvPr/>
         </p:nvPicPr>
         <p:blipFill>
-          <a:blip r:embed="rId4"/>
+          <a:blip r:embed="rId5"/>
           <a:stretch>
             <a:fillRect/>
           </a:stretch>
@@ -17370,7 +20721,7 @@
           <p:nvPr/>
         </p:nvPicPr>
         <p:blipFill>
-          <a:blip r:embed="rId5"/>
+          <a:blip r:embed="rId6"/>
           <a:stretch>
             <a:fillRect/>
           </a:stretch>
@@ -17394,7 +20745,7 @@
           <p:nvPr/>
         </p:nvPicPr>
         <p:blipFill>
-          <a:blip r:embed="rId6"/>
+          <a:blip r:embed="rId7"/>
           <a:stretch>
             <a:fillRect/>
           </a:stretch>
@@ -17418,7 +20769,7 @@
           <p:nvPr/>
         </p:nvPicPr>
         <p:blipFill>
-          <a:blip r:embed="rId7"/>
+          <a:blip r:embed="rId8"/>
           <a:stretch>
             <a:fillRect/>
           </a:stretch>
@@ -17942,7 +21293,7 @@
           <p:nvPr/>
         </p:nvPicPr>
         <p:blipFill>
-          <a:blip r:embed="rId8"/>
+          <a:blip r:embed="rId9"/>
           <a:stretch>
             <a:fillRect/>
           </a:stretch>
@@ -18308,7 +21659,7 @@
           <p:nvPr/>
         </p:nvPicPr>
         <p:blipFill>
-          <a:blip r:embed="rId2"/>
+          <a:blip r:embed="rId3"/>
           <a:stretch>
             <a:fillRect/>
           </a:stretch>
@@ -18534,7 +21885,7 @@
           <p:nvPr/>
         </p:nvPicPr>
         <p:blipFill>
-          <a:blip r:embed="rId2"/>
+          <a:blip r:embed="rId3"/>
           <a:stretch>
             <a:fillRect/>
           </a:stretch>
@@ -18845,7 +22196,7 @@
           <p:nvPr/>
         </p:nvPicPr>
         <p:blipFill>
-          <a:blip r:embed="rId3"/>
+          <a:blip r:embed="rId4"/>
           <a:stretch>
             <a:fillRect/>
           </a:stretch>
@@ -18869,7 +22220,7 @@
           <p:nvPr/>
         </p:nvPicPr>
         <p:blipFill>
-          <a:blip r:embed="rId4"/>
+          <a:blip r:embed="rId5"/>
           <a:stretch>
             <a:fillRect/>
           </a:stretch>
@@ -18893,7 +22244,7 @@
           <p:nvPr/>
         </p:nvPicPr>
         <p:blipFill>
-          <a:blip r:embed="rId5"/>
+          <a:blip r:embed="rId6"/>
           <a:stretch>
             <a:fillRect/>
           </a:stretch>
@@ -18917,7 +22268,7 @@
           <p:nvPr/>
         </p:nvPicPr>
         <p:blipFill>
-          <a:blip r:embed="rId6"/>
+          <a:blip r:embed="rId7"/>
           <a:stretch>
             <a:fillRect/>
           </a:stretch>
@@ -19556,7 +22907,7 @@
           <p:nvPr/>
         </p:nvPicPr>
         <p:blipFill>
-          <a:blip r:embed="rId2"/>
+          <a:blip r:embed="rId3"/>
           <a:stretch>
             <a:fillRect/>
           </a:stretch>
@@ -19580,7 +22931,7 @@
           <p:nvPr/>
         </p:nvPicPr>
         <p:blipFill>
-          <a:blip r:embed="rId3"/>
+          <a:blip r:embed="rId4"/>
           <a:stretch>
             <a:fillRect/>
           </a:stretch>
@@ -19604,7 +22955,7 @@
           <p:nvPr/>
         </p:nvPicPr>
         <p:blipFill>
-          <a:blip r:embed="rId4"/>
+          <a:blip r:embed="rId5"/>
           <a:stretch>
             <a:fillRect/>
           </a:stretch>
@@ -19742,7 +23093,7 @@
           <p:nvPr/>
         </p:nvPicPr>
         <p:blipFill>
-          <a:blip r:embed="rId2"/>
+          <a:blip r:embed="rId3"/>
           <a:stretch>
             <a:fillRect/>
           </a:stretch>
@@ -19888,7 +23239,7 @@
           <p:nvPr/>
         </p:nvPicPr>
         <p:blipFill>
-          <a:blip r:embed="rId3"/>
+          <a:blip r:embed="rId4"/>
           <a:stretch>
             <a:fillRect/>
           </a:stretch>
@@ -20229,4 +23580,324 @@
   </a:objectDefaults>
   <a:extraClrSchemeLst/>
 </a:theme>
+</file>
+
+<file path=ppt/theme/theme2.xml><?xml version="1.0" encoding="utf-8"?>
+<a:theme xmlns:a="http://schemas.openxmlformats.org/drawingml/2006/main" name="Office Theme">
+  <a:themeElements>
+    <a:clrScheme name="Office">
+      <a:dk1>
+        <a:sysClr val="windowText" lastClr="000000"/>
+      </a:dk1>
+      <a:lt1>
+        <a:sysClr val="window" lastClr="FFFFFF"/>
+      </a:lt1>
+      <a:dk2>
+        <a:srgbClr val="1F497D"/>
+      </a:dk2>
+      <a:lt2>
+        <a:srgbClr val="EEECE1"/>
+      </a:lt2>
+      <a:accent1>
+        <a:srgbClr val="4F81BD"/>
+      </a:accent1>
+      <a:accent2>
+        <a:srgbClr val="C0504D"/>
+      </a:accent2>
+      <a:accent3>
+        <a:srgbClr val="9BBB59"/>
+      </a:accent3>
+      <a:accent4>
+        <a:srgbClr val="8064A2"/>
+      </a:accent4>
+      <a:accent5>
+        <a:srgbClr val="4BACC6"/>
+      </a:accent5>
+      <a:accent6>
+        <a:srgbClr val="F79646"/>
+      </a:accent6>
+      <a:hlink>
+        <a:srgbClr val="0000FF"/>
+      </a:hlink>
+      <a:folHlink>
+        <a:srgbClr val="800080"/>
+      </a:folHlink>
+    </a:clrScheme>
+    <a:fontScheme name="Office">
+      <a:majorFont>
+        <a:latin typeface="Calibri"/>
+        <a:ea typeface=""/>
+        <a:cs typeface=""/>
+        <a:font script="Jpan" typeface="ＭＳ Ｐゴシック"/>
+        <a:font script="Hang" typeface="맑은 고딕"/>
+        <a:font script="Hans" typeface="宋体"/>
+        <a:font script="Hant" typeface="新細明體"/>
+        <a:font script="Arab" typeface="Times New Roman"/>
+        <a:font script="Hebr" typeface="Times New Roman"/>
+        <a:font script="Thai" typeface="Angsana New"/>
+        <a:font script="Ethi" typeface="Nyala"/>
+        <a:font script="Beng" typeface="Vrinda"/>
+        <a:font script="Gujr" typeface="Shruti"/>
+        <a:font script="Khmr" typeface="MoolBoran"/>
+        <a:font script="Knda" typeface="Tunga"/>
+        <a:font script="Guru" typeface="Raavi"/>
+        <a:font script="Cans" typeface="Euphemia"/>
+        <a:font script="Cher" typeface="Plantagenet Cherokee"/>
+        <a:font script="Yiii" typeface="Microsoft Yi Baiti"/>
+        <a:font script="Tibt" typeface="Microsoft Himalaya"/>
+        <a:font script="Thaa" typeface="MV Boli"/>
+        <a:font script="Deva" typeface="Mangal"/>
+        <a:font script="Telu" typeface="Gautami"/>
+        <a:font script="Taml" typeface="Latha"/>
+        <a:font script="Syrc" typeface="Estrangelo Edessa"/>
+        <a:font script="Orya" typeface="Kalinga"/>
+        <a:font script="Mlym" typeface="Kartika"/>
+        <a:font script="Laoo" typeface="DokChampa"/>
+        <a:font script="Sinh" typeface="Iskoola Pota"/>
+        <a:font script="Mong" typeface="Mongolian Baiti"/>
+        <a:font script="Viet" typeface="Times New Roman"/>
+        <a:font script="Uigh" typeface="Microsoft Uighur"/>
+        <a:font script="Geor" typeface="Sylfaen"/>
+      </a:majorFont>
+      <a:minorFont>
+        <a:latin typeface="Calibri"/>
+        <a:ea typeface=""/>
+        <a:cs typeface=""/>
+        <a:font script="Jpan" typeface="ＭＳ Ｐゴシック"/>
+        <a:font script="Hang" typeface="맑은 고딕"/>
+        <a:font script="Hans" typeface="宋体"/>
+        <a:font script="Hant" typeface="新細明體"/>
+        <a:font script="Arab" typeface="Arial"/>
+        <a:font script="Hebr" typeface="Arial"/>
+        <a:font script="Thai" typeface="Cordia New"/>
+        <a:font script="Ethi" typeface="Nyala"/>
+        <a:font script="Beng" typeface="Vrinda"/>
+        <a:font script="Gujr" typeface="Shruti"/>
+        <a:font script="Khmr" typeface="DaunPenh"/>
+        <a:font script="Knda" typeface="Tunga"/>
+        <a:font script="Guru" typeface="Raavi"/>
+        <a:font script="Cans" typeface="Euphemia"/>
+        <a:font script="Cher" typeface="Plantagenet Cherokee"/>
+        <a:font script="Yiii" typeface="Microsoft Yi Baiti"/>
+        <a:font script="Tibt" typeface="Microsoft Himalaya"/>
+        <a:font script="Thaa" typeface="MV Boli"/>
+        <a:font script="Deva" typeface="Mangal"/>
+        <a:font script="Telu" typeface="Gautami"/>
+        <a:font script="Taml" typeface="Latha"/>
+        <a:font script="Syrc" typeface="Estrangelo Edessa"/>
+        <a:font script="Orya" typeface="Kalinga"/>
+        <a:font script="Mlym" typeface="Kartika"/>
+        <a:font script="Laoo" typeface="DokChampa"/>
+        <a:font script="Sinh" typeface="Iskoola Pota"/>
+        <a:font script="Mong" typeface="Mongolian Baiti"/>
+        <a:font script="Viet" typeface="Arial"/>
+        <a:font script="Uigh" typeface="Microsoft Uighur"/>
+        <a:font script="Geor" typeface="Sylfaen"/>
+      </a:minorFont>
+    </a:fontScheme>
+    <a:fmtScheme name="Office">
+      <a:fillStyleLst>
+        <a:solidFill>
+          <a:schemeClr val="phClr"/>
+        </a:solidFill>
+        <a:gradFill rotWithShape="1">
+          <a:gsLst>
+            <a:gs pos="0">
+              <a:schemeClr val="phClr">
+                <a:tint val="50000"/>
+                <a:satMod val="300000"/>
+              </a:schemeClr>
+            </a:gs>
+            <a:gs pos="35000">
+              <a:schemeClr val="phClr">
+                <a:tint val="37000"/>
+                <a:satMod val="300000"/>
+              </a:schemeClr>
+            </a:gs>
+            <a:gs pos="100000">
+              <a:schemeClr val="phClr">
+                <a:tint val="15000"/>
+                <a:satMod val="350000"/>
+              </a:schemeClr>
+            </a:gs>
+          </a:gsLst>
+          <a:lin ang="16200000" scaled="1"/>
+        </a:gradFill>
+        <a:gradFill rotWithShape="1">
+          <a:gsLst>
+            <a:gs pos="0">
+              <a:schemeClr val="phClr">
+                <a:tint val="100000"/>
+                <a:shade val="100000"/>
+                <a:satMod val="130000"/>
+              </a:schemeClr>
+            </a:gs>
+            <a:gs pos="100000">
+              <a:schemeClr val="phClr">
+                <a:tint val="50000"/>
+                <a:shade val="100000"/>
+                <a:satMod val="350000"/>
+              </a:schemeClr>
+            </a:gs>
+          </a:gsLst>
+          <a:lin ang="16200000" scaled="0"/>
+        </a:gradFill>
+      </a:fillStyleLst>
+      <a:lnStyleLst>
+        <a:ln w="9525" cap="flat" cmpd="sng" algn="ctr">
+          <a:solidFill>
+            <a:schemeClr val="phClr">
+              <a:shade val="95000"/>
+              <a:satMod val="105000"/>
+            </a:schemeClr>
+          </a:solidFill>
+          <a:prstDash val="solid"/>
+        </a:ln>
+        <a:ln w="25400" cap="flat" cmpd="sng" algn="ctr">
+          <a:solidFill>
+            <a:schemeClr val="phClr"/>
+          </a:solidFill>
+          <a:prstDash val="solid"/>
+        </a:ln>
+        <a:ln w="38100" cap="flat" cmpd="sng" algn="ctr">
+          <a:solidFill>
+            <a:schemeClr val="phClr"/>
+          </a:solidFill>
+          <a:prstDash val="solid"/>
+        </a:ln>
+      </a:lnStyleLst>
+      <a:effectStyleLst>
+        <a:effectStyle>
+          <a:effectLst>
+            <a:outerShdw blurRad="40000" dist="20000" dir="5400000" rotWithShape="0">
+              <a:srgbClr val="000000">
+                <a:alpha val="38000"/>
+              </a:srgbClr>
+            </a:outerShdw>
+          </a:effectLst>
+        </a:effectStyle>
+        <a:effectStyle>
+          <a:effectLst>
+            <a:outerShdw blurRad="40000" dist="23000" dir="5400000" rotWithShape="0">
+              <a:srgbClr val="000000">
+                <a:alpha val="35000"/>
+              </a:srgbClr>
+            </a:outerShdw>
+          </a:effectLst>
+        </a:effectStyle>
+        <a:effectStyle>
+          <a:effectLst>
+            <a:outerShdw blurRad="40000" dist="23000" dir="5400000" rotWithShape="0">
+              <a:srgbClr val="000000">
+                <a:alpha val="35000"/>
+              </a:srgbClr>
+            </a:outerShdw>
+          </a:effectLst>
+          <a:scene3d>
+            <a:camera prst="orthographicFront">
+              <a:rot lat="0" lon="0" rev="0"/>
+            </a:camera>
+            <a:lightRig rig="threePt" dir="t">
+              <a:rot lat="0" lon="0" rev="1200000"/>
+            </a:lightRig>
+          </a:scene3d>
+          <a:sp3d>
+            <a:bevelT w="63500" h="25400"/>
+          </a:sp3d>
+        </a:effectStyle>
+      </a:effectStyleLst>
+      <a:bgFillStyleLst>
+        <a:solidFill>
+          <a:schemeClr val="phClr"/>
+        </a:solidFill>
+        <a:gradFill rotWithShape="1">
+          <a:gsLst>
+            <a:gs pos="0">
+              <a:schemeClr val="phClr">
+                <a:tint val="40000"/>
+                <a:satMod val="350000"/>
+              </a:schemeClr>
+            </a:gs>
+            <a:gs pos="40000">
+              <a:schemeClr val="phClr">
+                <a:tint val="45000"/>
+                <a:shade val="99000"/>
+                <a:satMod val="350000"/>
+              </a:schemeClr>
+            </a:gs>
+            <a:gs pos="100000">
+              <a:schemeClr val="phClr">
+                <a:shade val="20000"/>
+                <a:satMod val="255000"/>
+              </a:schemeClr>
+            </a:gs>
+          </a:gsLst>
+          <a:path path="circle">
+            <a:fillToRect l="50000" t="-80000" r="50000" b="180000"/>
+          </a:path>
+        </a:gradFill>
+        <a:gradFill rotWithShape="1">
+          <a:gsLst>
+            <a:gs pos="0">
+              <a:schemeClr val="phClr">
+                <a:tint val="80000"/>
+                <a:satMod val="300000"/>
+              </a:schemeClr>
+            </a:gs>
+            <a:gs pos="100000">
+              <a:schemeClr val="phClr">
+                <a:shade val="30000"/>
+                <a:satMod val="200000"/>
+              </a:schemeClr>
+            </a:gs>
+          </a:gsLst>
+          <a:path path="circle">
+            <a:fillToRect l="50000" t="50000" r="50000" b="50000"/>
+          </a:path>
+        </a:gradFill>
+      </a:bgFillStyleLst>
+    </a:fmtScheme>
+  </a:themeElements>
+  <a:objectDefaults>
+    <a:spDef>
+      <a:spPr/>
+      <a:bodyPr/>
+      <a:lstStyle/>
+      <a:style>
+        <a:lnRef idx="1">
+          <a:schemeClr val="accent1"/>
+        </a:lnRef>
+        <a:fillRef idx="3">
+          <a:schemeClr val="accent1"/>
+        </a:fillRef>
+        <a:effectRef idx="2">
+          <a:schemeClr val="accent1"/>
+        </a:effectRef>
+        <a:fontRef idx="minor">
+          <a:schemeClr val="lt1"/>
+        </a:fontRef>
+      </a:style>
+    </a:spDef>
+    <a:lnDef>
+      <a:spPr/>
+      <a:bodyPr/>
+      <a:lstStyle/>
+      <a:style>
+        <a:lnRef idx="2">
+          <a:schemeClr val="accent1"/>
+        </a:lnRef>
+        <a:fillRef idx="0">
+          <a:schemeClr val="accent1"/>
+        </a:fillRef>
+        <a:effectRef idx="1">
+          <a:schemeClr val="accent1"/>
+        </a:effectRef>
+        <a:fontRef idx="minor">
+          <a:schemeClr val="tx1"/>
+        </a:fontRef>
+      </a:style>
+    </a:lnDef>
+  </a:objectDefaults>
+  <a:extraClrSchemeLst/>
+</a:theme>
 </file>
--- a/slides.pptx
+++ b/slides.pptx
@@ -7936,8 +7936,7 @@
                 <a:ea typeface="Zen Maru Gothic"/>
                 <a:cs typeface="Zen Maru Gothic"/>
               </a:rPr>
-              <a:t>
-    順位を決めるのは、ゴール時点の</a:t>
+              <a:t>順位を決めるのは、ゴール時点の</a:t>
             </a:r>
             <a:r>
               <a:rPr sz="1761" b="1">
@@ -10215,8 +10214,7 @@
                 <a:ea typeface="Zen Maru Gothic"/>
                 <a:cs typeface="Zen Maru Gothic"/>
               </a:rPr>
-              <a:t>
-      日本・欧米で育つと、</a:t>
+              <a:t>日本・欧米で育つと、</a:t>
             </a:r>
             <a:r>
               <a:rPr sz="1640" b="1">
@@ -10256,8 +10254,7 @@
                 <a:ea typeface="Zen Maru Gothic"/>
                 <a:cs typeface="Zen Maru Gothic"/>
               </a:rPr>
-              <a:t>
-      ウガンダで育つと、</a:t>
+              <a:t>ウガンダで育つと、</a:t>
             </a:r>
             <a:r>
               <a:rPr sz="1640" b="1">
@@ -12922,8 +12919,7 @@
                 <a:ea typeface="Zen Maru Gothic"/>
                 <a:cs typeface="Zen Maru Gothic"/>
               </a:rPr>
-              <a:t>
-      紫の行が、ゲーム中「？？？」だったもの。</a:t>
+              <a:t>紫の行が、ゲーム中「？？？」だったもの。</a:t>
             </a:r>
             <a:r>
               <a:rPr sz="1761" b="1">
@@ -20347,8 +20343,7 @@
                 <a:ea typeface="Zen Maru Gothic"/>
                 <a:cs typeface="Zen Maru Gothic"/>
               </a:rPr>
-              <a:t>
-    説明ではなく、</a:t>
+              <a:t>説明ではなく、</a:t>
             </a:r>
             <a:r>
               <a:rPr sz="1883" b="1">
@@ -20388,8 +20383,7 @@
                 <a:ea typeface="Zen Maru Gothic"/>
                 <a:cs typeface="Zen Maru Gothic"/>
               </a:rPr>
-              <a:t>
-    その差が結果にどう出るかを、</a:t>
+              <a:t>その差が結果にどう出るかを、</a:t>
             </a:r>
             <a:r>
               <a:rPr sz="1883" b="1">
@@ -20411,8 +20405,7 @@
                 <a:ea typeface="Zen Maru Gothic"/>
                 <a:cs typeface="Zen Maru Gothic"/>
               </a:rPr>
-              <a:t>。
-  </a:t>
+              <a:t>。</a:t>
             </a:r>
           </a:p>
         </p:txBody>
